--- a/docs/presentaciones/evolucion-native-ai/evolucion-native-ai-v2.pptx
+++ b/docs/presentaciones/evolucion-native-ai/evolucion-native-ai-v2.pptx
@@ -3213,11 +3213,14 @@
         </p:spPr>
         <p:txBody>
           <a:bodyPr wrap="square" lIns="0" rIns="0" tIns="0" bIns="0" anchor="t">
-            <a:spAutoFit/>
+            <a:normAutofit/>
           </a:bodyPr>
           <a:lstStyle/>
           <a:p>
             <a:pPr algn="l">
+              <a:lnSpc>
+                <a:spcPct val="100000"/>
+              </a:lnSpc>
               <a:spcAft>
                 <a:spcPts val="108"/>
               </a:spcAft>
@@ -3243,7 +3246,7 @@
         <p:spPr>
           <a:xfrm>
             <a:off x="640080" y="1097280"/>
-            <a:ext cx="8138160" cy="1417320"/>
+            <a:ext cx="8138160" cy="960120"/>
           </a:xfrm>
           <a:prstGeom prst="rect">
             <a:avLst/>
@@ -3252,11 +3255,14 @@
         </p:spPr>
         <p:txBody>
           <a:bodyPr wrap="square" lIns="0" rIns="0" tIns="0" bIns="0" anchor="t">
-            <a:spAutoFit/>
+            <a:normAutofit/>
           </a:bodyPr>
           <a:lstStyle/>
           <a:p>
             <a:pPr algn="l">
+              <a:lnSpc>
+                <a:spcPct val="100000"/>
+              </a:lnSpc>
               <a:spcAft>
                 <a:spcPts val="408"/>
               </a:spcAft>
@@ -3268,7 +3274,7 @@
               </a:defRPr>
             </a:pPr>
             <a:r>
-              <a:t>Native AI ya no es solo un método para construir</a:t>
+              <a:t>De la especificación a la entrega</a:t>
             </a:r>
           </a:p>
         </p:txBody>
@@ -3281,8 +3287,8 @@
         </p:nvSpPr>
         <p:spPr>
           <a:xfrm>
-            <a:off x="640080" y="2651760"/>
-            <a:ext cx="8046720" cy="749808"/>
+            <a:off x="640080" y="2487168"/>
+            <a:ext cx="8046720" cy="841248"/>
           </a:xfrm>
           <a:prstGeom prst="rect">
             <a:avLst/>
@@ -3291,11 +3297,14 @@
         </p:spPr>
         <p:txBody>
           <a:bodyPr wrap="square" lIns="0" rIns="0" tIns="0" bIns="0" anchor="t">
-            <a:spAutoFit/>
+            <a:normAutofit/>
           </a:bodyPr>
           <a:lstStyle/>
           <a:p>
             <a:pPr algn="l">
+              <a:lnSpc>
+                <a:spcPct val="100000"/>
+              </a:lnSpc>
               <a:spcAft>
                 <a:spcPts val="179"/>
               </a:spcAft>
@@ -3307,7 +3316,7 @@
               </a:defRPr>
             </a:pPr>
             <a:r>
-              <a:t>Es un sistema operativo de entrega: conecta lo que pide el cliente, lo que construye el equipo y la evidencia con la que se decide.</a:t>
+              <a:t>La evolución de Native AI: conecta lo que pide el cliente, lo que construye el equipo y la evidencia con la que se decide.</a:t>
             </a:r>
           </a:p>
         </p:txBody>
@@ -3420,11 +3429,14 @@
         </p:spPr>
         <p:txBody>
           <a:bodyPr wrap="square" lIns="0" rIns="0" tIns="0" bIns="0" anchor="ctr">
-            <a:spAutoFit/>
+            <a:normAutofit/>
           </a:bodyPr>
           <a:lstStyle/>
           <a:p>
             <a:pPr algn="ctr">
+              <a:lnSpc>
+                <a:spcPct val="100000"/>
+              </a:lnSpc>
               <a:spcAft>
                 <a:spcPts val="131"/>
               </a:spcAft>
@@ -3459,11 +3471,14 @@
         </p:spPr>
         <p:txBody>
           <a:bodyPr wrap="square" lIns="0" rIns="0" tIns="0" bIns="0" anchor="ctr">
-            <a:spAutoFit/>
+            <a:normAutofit/>
           </a:bodyPr>
           <a:lstStyle/>
           <a:p>
             <a:pPr algn="l">
+              <a:lnSpc>
+                <a:spcPct val="100000"/>
+              </a:lnSpc>
               <a:spcAft>
                 <a:spcPts val="131"/>
               </a:spcAft>
@@ -3586,11 +3601,14 @@
         </p:spPr>
         <p:txBody>
           <a:bodyPr wrap="square" lIns="0" rIns="0" tIns="0" bIns="0" anchor="ctr">
-            <a:spAutoFit/>
+            <a:normAutofit/>
           </a:bodyPr>
           <a:lstStyle/>
           <a:p>
             <a:pPr algn="ctr">
+              <a:lnSpc>
+                <a:spcPct val="100000"/>
+              </a:lnSpc>
               <a:spcAft>
                 <a:spcPts val="131"/>
               </a:spcAft>
@@ -3625,11 +3643,14 @@
         </p:spPr>
         <p:txBody>
           <a:bodyPr wrap="square" lIns="0" rIns="0" tIns="0" bIns="0" anchor="ctr">
-            <a:spAutoFit/>
+            <a:normAutofit/>
           </a:bodyPr>
           <a:lstStyle/>
           <a:p>
             <a:pPr algn="l">
+              <a:lnSpc>
+                <a:spcPct val="100000"/>
+              </a:lnSpc>
               <a:spcAft>
                 <a:spcPts val="131"/>
               </a:spcAft>
@@ -3752,11 +3773,14 @@
         </p:spPr>
         <p:txBody>
           <a:bodyPr wrap="square" lIns="0" rIns="0" tIns="0" bIns="0" anchor="ctr">
-            <a:spAutoFit/>
+            <a:normAutofit/>
           </a:bodyPr>
           <a:lstStyle/>
           <a:p>
             <a:pPr algn="ctr">
+              <a:lnSpc>
+                <a:spcPct val="100000"/>
+              </a:lnSpc>
               <a:spcAft>
                 <a:spcPts val="131"/>
               </a:spcAft>
@@ -3791,11 +3815,14 @@
         </p:spPr>
         <p:txBody>
           <a:bodyPr wrap="square" lIns="0" rIns="0" tIns="0" bIns="0" anchor="ctr">
-            <a:spAutoFit/>
+            <a:normAutofit/>
           </a:bodyPr>
           <a:lstStyle/>
           <a:p>
             <a:pPr algn="l">
+              <a:lnSpc>
+                <a:spcPct val="100000"/>
+              </a:lnSpc>
               <a:spcAft>
                 <a:spcPts val="131"/>
               </a:spcAft>
@@ -3875,11 +3902,14 @@
         </p:spPr>
         <p:txBody>
           <a:bodyPr wrap="square" lIns="0" rIns="0" tIns="0" bIns="0" anchor="ctr">
-            <a:spAutoFit/>
+            <a:normAutofit/>
           </a:bodyPr>
           <a:lstStyle/>
           <a:p>
             <a:pPr algn="ctr">
+              <a:lnSpc>
+                <a:spcPct val="100000"/>
+              </a:lnSpc>
               <a:spcAft>
                 <a:spcPts val="98"/>
               </a:spcAft>
@@ -3914,11 +3944,14 @@
         </p:spPr>
         <p:txBody>
           <a:bodyPr wrap="square" lIns="0" rIns="0" tIns="0" bIns="0" anchor="t">
-            <a:spAutoFit/>
+            <a:normAutofit/>
           </a:bodyPr>
           <a:lstStyle/>
           <a:p>
             <a:pPr algn="l">
+              <a:lnSpc>
+                <a:spcPct val="100000"/>
+              </a:lnSpc>
               <a:spcAft>
                 <a:spcPts val="126"/>
               </a:spcAft>
@@ -3953,11 +3986,14 @@
         </p:spPr>
         <p:txBody>
           <a:bodyPr wrap="square" lIns="0" rIns="0" tIns="0" bIns="0" anchor="t">
-            <a:spAutoFit/>
+            <a:normAutofit/>
           </a:bodyPr>
           <a:lstStyle/>
           <a:p>
             <a:pPr algn="l">
+              <a:lnSpc>
+                <a:spcPct val="100000"/>
+              </a:lnSpc>
               <a:spcAft>
                 <a:spcPts val="81"/>
               </a:spcAft>
@@ -3992,11 +4028,14 @@
         </p:spPr>
         <p:txBody>
           <a:bodyPr wrap="square" lIns="0" rIns="0" tIns="0" bIns="0" anchor="t">
-            <a:spAutoFit/>
+            <a:normAutofit/>
           </a:bodyPr>
           <a:lstStyle/>
           <a:p>
             <a:pPr algn="r">
+              <a:lnSpc>
+                <a:spcPct val="100000"/>
+              </a:lnSpc>
               <a:spcAft>
                 <a:spcPts val="86"/>
               </a:spcAft>
@@ -4094,11 +4133,14 @@
         </p:spPr>
         <p:txBody>
           <a:bodyPr wrap="square" lIns="0" rIns="0" tIns="0" bIns="0" anchor="t">
-            <a:spAutoFit/>
+            <a:normAutofit/>
           </a:bodyPr>
           <a:lstStyle/>
           <a:p>
             <a:pPr algn="l">
+              <a:lnSpc>
+                <a:spcPct val="100000"/>
+              </a:lnSpc>
               <a:spcAft>
                 <a:spcPts val="108"/>
               </a:spcAft>
@@ -4133,11 +4175,14 @@
         </p:spPr>
         <p:txBody>
           <a:bodyPr wrap="square" lIns="0" rIns="0" tIns="0" bIns="0" anchor="t">
-            <a:spAutoFit/>
+            <a:normAutofit/>
           </a:bodyPr>
           <a:lstStyle/>
           <a:p>
             <a:pPr algn="l">
+              <a:lnSpc>
+                <a:spcPct val="100000"/>
+              </a:lnSpc>
               <a:spcAft>
                 <a:spcPts val="300"/>
               </a:spcAft>
@@ -4172,11 +4217,14 @@
         </p:spPr>
         <p:txBody>
           <a:bodyPr wrap="square" lIns="0" rIns="0" tIns="0" bIns="0" anchor="t">
-            <a:spAutoFit/>
+            <a:normAutofit/>
           </a:bodyPr>
           <a:lstStyle/>
           <a:p>
             <a:pPr algn="l">
+              <a:lnSpc>
+                <a:spcPct val="100000"/>
+              </a:lnSpc>
               <a:spcAft>
                 <a:spcPts val="126"/>
               </a:spcAft>
@@ -4299,11 +4347,14 @@
         </p:spPr>
         <p:txBody>
           <a:bodyPr wrap="square" lIns="0" rIns="0" tIns="0" bIns="0" anchor="t">
-            <a:spAutoFit/>
+            <a:normAutofit/>
           </a:bodyPr>
           <a:lstStyle/>
           <a:p>
             <a:pPr algn="l">
+              <a:lnSpc>
+                <a:spcPct val="100000"/>
+              </a:lnSpc>
               <a:spcAft>
                 <a:spcPts val="96"/>
               </a:spcAft>
@@ -4338,11 +4389,14 @@
         </p:spPr>
         <p:txBody>
           <a:bodyPr wrap="square" lIns="0" rIns="0" tIns="0" bIns="0" anchor="t">
-            <a:spAutoFit/>
+            <a:normAutofit/>
           </a:bodyPr>
           <a:lstStyle/>
           <a:p>
             <a:pPr algn="l">
+              <a:lnSpc>
+                <a:spcPct val="100000"/>
+              </a:lnSpc>
               <a:spcAft>
                 <a:spcPts val="204"/>
               </a:spcAft>
@@ -4422,11 +4476,14 @@
         </p:spPr>
         <p:txBody>
           <a:bodyPr wrap="square" lIns="0" rIns="0" tIns="0" bIns="0" anchor="t">
-            <a:spAutoFit/>
+            <a:normAutofit/>
           </a:bodyPr>
           <a:lstStyle/>
           <a:p>
             <a:pPr algn="l">
+              <a:lnSpc>
+                <a:spcPct val="100000"/>
+              </a:lnSpc>
               <a:spcAft>
                 <a:spcPts val="96"/>
               </a:spcAft>
@@ -4461,11 +4518,14 @@
         </p:spPr>
         <p:txBody>
           <a:bodyPr wrap="square" lIns="0" rIns="0" tIns="0" bIns="0" anchor="t">
-            <a:spAutoFit/>
+            <a:normAutofit/>
           </a:bodyPr>
           <a:lstStyle/>
           <a:p>
             <a:pPr algn="l">
+              <a:lnSpc>
+                <a:spcPct val="100000"/>
+              </a:lnSpc>
               <a:spcAft>
                 <a:spcPts val="204"/>
               </a:spcAft>
@@ -4500,11 +4560,14 @@
         </p:spPr>
         <p:txBody>
           <a:bodyPr wrap="square" lIns="0" rIns="0" tIns="0" bIns="0" anchor="t">
-            <a:spAutoFit/>
+            <a:normAutofit/>
           </a:bodyPr>
           <a:lstStyle/>
           <a:p>
             <a:pPr algn="l">
+              <a:lnSpc>
+                <a:spcPct val="100000"/>
+              </a:lnSpc>
               <a:spcAft>
                 <a:spcPts val="122"/>
               </a:spcAft>
@@ -4584,11 +4647,14 @@
         </p:spPr>
         <p:txBody>
           <a:bodyPr wrap="square" lIns="0" rIns="0" tIns="0" bIns="0" anchor="t">
-            <a:spAutoFit/>
+            <a:normAutofit/>
           </a:bodyPr>
           <a:lstStyle/>
           <a:p>
             <a:pPr algn="l">
+              <a:lnSpc>
+                <a:spcPct val="100000"/>
+              </a:lnSpc>
               <a:spcAft>
                 <a:spcPts val="96"/>
               </a:spcAft>
@@ -4623,11 +4689,14 @@
         </p:spPr>
         <p:txBody>
           <a:bodyPr wrap="square" lIns="0" rIns="0" tIns="0" bIns="0" anchor="t">
-            <a:spAutoFit/>
+            <a:normAutofit/>
           </a:bodyPr>
           <a:lstStyle/>
           <a:p>
             <a:pPr algn="l">
+              <a:lnSpc>
+                <a:spcPct val="100000"/>
+              </a:lnSpc>
               <a:spcAft>
                 <a:spcPts val="204"/>
               </a:spcAft>
@@ -4662,11 +4731,14 @@
         </p:spPr>
         <p:txBody>
           <a:bodyPr wrap="square" lIns="0" rIns="0" tIns="0" bIns="0" anchor="t">
-            <a:spAutoFit/>
+            <a:normAutofit/>
           </a:bodyPr>
           <a:lstStyle/>
           <a:p>
             <a:pPr algn="l">
+              <a:lnSpc>
+                <a:spcPct val="100000"/>
+              </a:lnSpc>
               <a:spcAft>
                 <a:spcPts val="122"/>
               </a:spcAft>
@@ -4746,11 +4818,14 @@
         </p:spPr>
         <p:txBody>
           <a:bodyPr wrap="square" lIns="0" rIns="0" tIns="0" bIns="0" anchor="t">
-            <a:spAutoFit/>
+            <a:normAutofit/>
           </a:bodyPr>
           <a:lstStyle/>
           <a:p>
             <a:pPr algn="l">
+              <a:lnSpc>
+                <a:spcPct val="100000"/>
+              </a:lnSpc>
               <a:spcAft>
                 <a:spcPts val="96"/>
               </a:spcAft>
@@ -4785,11 +4860,14 @@
         </p:spPr>
         <p:txBody>
           <a:bodyPr wrap="square" lIns="0" rIns="0" tIns="0" bIns="0" anchor="t">
-            <a:spAutoFit/>
+            <a:normAutofit/>
           </a:bodyPr>
           <a:lstStyle/>
           <a:p>
             <a:pPr algn="l">
+              <a:lnSpc>
+                <a:spcPct val="100000"/>
+              </a:lnSpc>
               <a:spcAft>
                 <a:spcPts val="204"/>
               </a:spcAft>
@@ -4824,11 +4902,14 @@
         </p:spPr>
         <p:txBody>
           <a:bodyPr wrap="square" lIns="0" rIns="0" tIns="0" bIns="0" anchor="t">
-            <a:spAutoFit/>
+            <a:normAutofit/>
           </a:bodyPr>
           <a:lstStyle/>
           <a:p>
             <a:pPr algn="l">
+              <a:lnSpc>
+                <a:spcPct val="100000"/>
+              </a:lnSpc>
               <a:spcAft>
                 <a:spcPts val="122"/>
               </a:spcAft>
@@ -4863,11 +4944,14 @@
         </p:spPr>
         <p:txBody>
           <a:bodyPr wrap="square" lIns="0" rIns="0" tIns="0" bIns="0" anchor="t">
-            <a:spAutoFit/>
+            <a:normAutofit/>
           </a:bodyPr>
           <a:lstStyle/>
           <a:p>
             <a:pPr algn="l">
+              <a:lnSpc>
+                <a:spcPct val="100000"/>
+              </a:lnSpc>
               <a:spcAft>
                 <a:spcPts val="210"/>
               </a:spcAft>
@@ -4902,11 +4986,14 @@
         </p:spPr>
         <p:txBody>
           <a:bodyPr wrap="square" lIns="0" rIns="0" tIns="0" bIns="0" anchor="t">
-            <a:spAutoFit/>
+            <a:normAutofit/>
           </a:bodyPr>
           <a:lstStyle/>
           <a:p>
             <a:pPr algn="l">
+              <a:lnSpc>
+                <a:spcPct val="100000"/>
+              </a:lnSpc>
               <a:spcAft>
                 <a:spcPts val="129"/>
               </a:spcAft>
@@ -4941,11 +5028,14 @@
         </p:spPr>
         <p:txBody>
           <a:bodyPr wrap="square" lIns="0" rIns="0" tIns="0" bIns="0" anchor="t">
-            <a:spAutoFit/>
+            <a:normAutofit/>
           </a:bodyPr>
           <a:lstStyle/>
           <a:p>
             <a:pPr algn="l">
+              <a:lnSpc>
+                <a:spcPct val="100000"/>
+              </a:lnSpc>
               <a:spcAft>
                 <a:spcPts val="81"/>
               </a:spcAft>
@@ -4980,11 +5070,14 @@
         </p:spPr>
         <p:txBody>
           <a:bodyPr wrap="square" lIns="0" rIns="0" tIns="0" bIns="0" anchor="t">
-            <a:spAutoFit/>
+            <a:normAutofit/>
           </a:bodyPr>
           <a:lstStyle/>
           <a:p>
             <a:pPr algn="r">
+              <a:lnSpc>
+                <a:spcPct val="100000"/>
+              </a:lnSpc>
               <a:spcAft>
                 <a:spcPts val="86"/>
               </a:spcAft>
@@ -5082,11 +5175,14 @@
         </p:spPr>
         <p:txBody>
           <a:bodyPr wrap="square" lIns="0" rIns="0" tIns="0" bIns="0" anchor="t">
-            <a:spAutoFit/>
+            <a:normAutofit/>
           </a:bodyPr>
           <a:lstStyle/>
           <a:p>
             <a:pPr algn="l">
+              <a:lnSpc>
+                <a:spcPct val="100000"/>
+              </a:lnSpc>
               <a:spcAft>
                 <a:spcPts val="108"/>
               </a:spcAft>
@@ -5121,11 +5217,14 @@
         </p:spPr>
         <p:txBody>
           <a:bodyPr wrap="square" lIns="0" rIns="0" tIns="0" bIns="0" anchor="t">
-            <a:spAutoFit/>
+            <a:normAutofit/>
           </a:bodyPr>
           <a:lstStyle/>
           <a:p>
             <a:pPr algn="l">
+              <a:lnSpc>
+                <a:spcPct val="100000"/>
+              </a:lnSpc>
               <a:spcAft>
                 <a:spcPts val="300"/>
               </a:spcAft>
@@ -5160,11 +5259,14 @@
         </p:spPr>
         <p:txBody>
           <a:bodyPr wrap="square" lIns="0" rIns="0" tIns="0" bIns="0" anchor="t">
-            <a:spAutoFit/>
+            <a:normAutofit/>
           </a:bodyPr>
           <a:lstStyle/>
           <a:p>
             <a:pPr algn="l">
+              <a:lnSpc>
+                <a:spcPct val="100000"/>
+              </a:lnSpc>
               <a:spcAft>
                 <a:spcPts val="126"/>
               </a:spcAft>
@@ -5332,11 +5434,14 @@
         </p:spPr>
         <p:txBody>
           <a:bodyPr wrap="square" lIns="0" rIns="0" tIns="0" bIns="0" anchor="t">
-            <a:spAutoFit/>
+            <a:normAutofit/>
           </a:bodyPr>
           <a:lstStyle/>
           <a:p>
             <a:pPr algn="l">
+              <a:lnSpc>
+                <a:spcPct val="100000"/>
+              </a:lnSpc>
               <a:spcAft>
                 <a:spcPts val="102"/>
               </a:spcAft>
@@ -5371,11 +5476,14 @@
         </p:spPr>
         <p:txBody>
           <a:bodyPr wrap="square" lIns="0" rIns="0" tIns="0" bIns="0" anchor="t">
-            <a:spAutoFit/>
+            <a:normAutofit/>
           </a:bodyPr>
           <a:lstStyle/>
           <a:p>
             <a:pPr algn="l">
+              <a:lnSpc>
+                <a:spcPct val="100000"/>
+              </a:lnSpc>
               <a:spcAft>
                 <a:spcPts val="179"/>
               </a:spcAft>
@@ -5410,11 +5518,14 @@
         </p:spPr>
         <p:txBody>
           <a:bodyPr wrap="square" lIns="0" rIns="0" tIns="0" bIns="0" anchor="t">
-            <a:spAutoFit/>
+            <a:normAutofit/>
           </a:bodyPr>
           <a:lstStyle/>
           <a:p>
             <a:pPr algn="l">
+              <a:lnSpc>
+                <a:spcPct val="100000"/>
+              </a:lnSpc>
               <a:spcAft>
                 <a:spcPts val="110"/>
               </a:spcAft>
@@ -5539,11 +5650,14 @@
         </p:spPr>
         <p:txBody>
           <a:bodyPr wrap="square" lIns="0" rIns="0" tIns="0" bIns="0" anchor="t">
-            <a:spAutoFit/>
+            <a:normAutofit/>
           </a:bodyPr>
           <a:lstStyle/>
           <a:p>
             <a:pPr algn="l">
+              <a:lnSpc>
+                <a:spcPct val="100000"/>
+              </a:lnSpc>
               <a:spcAft>
                 <a:spcPts val="102"/>
               </a:spcAft>
@@ -5578,11 +5692,14 @@
         </p:spPr>
         <p:txBody>
           <a:bodyPr wrap="square" lIns="0" rIns="0" tIns="0" bIns="0" anchor="t">
-            <a:spAutoFit/>
+            <a:normAutofit/>
           </a:bodyPr>
           <a:lstStyle/>
           <a:p>
             <a:pPr algn="l">
+              <a:lnSpc>
+                <a:spcPct val="100000"/>
+              </a:lnSpc>
               <a:spcAft>
                 <a:spcPts val="179"/>
               </a:spcAft>
@@ -5617,11 +5734,14 @@
         </p:spPr>
         <p:txBody>
           <a:bodyPr wrap="square" lIns="0" rIns="0" tIns="0" bIns="0" anchor="t">
-            <a:spAutoFit/>
+            <a:normAutofit/>
           </a:bodyPr>
           <a:lstStyle/>
           <a:p>
             <a:pPr algn="l">
+              <a:lnSpc>
+                <a:spcPct val="100000"/>
+              </a:lnSpc>
               <a:spcAft>
                 <a:spcPts val="110"/>
               </a:spcAft>
@@ -5746,11 +5866,14 @@
         </p:spPr>
         <p:txBody>
           <a:bodyPr wrap="square" lIns="0" rIns="0" tIns="0" bIns="0" anchor="t">
-            <a:spAutoFit/>
+            <a:normAutofit/>
           </a:bodyPr>
           <a:lstStyle/>
           <a:p>
             <a:pPr algn="l">
+              <a:lnSpc>
+                <a:spcPct val="100000"/>
+              </a:lnSpc>
               <a:spcAft>
                 <a:spcPts val="102"/>
               </a:spcAft>
@@ -5785,11 +5908,14 @@
         </p:spPr>
         <p:txBody>
           <a:bodyPr wrap="square" lIns="0" rIns="0" tIns="0" bIns="0" anchor="t">
-            <a:spAutoFit/>
+            <a:normAutofit/>
           </a:bodyPr>
           <a:lstStyle/>
           <a:p>
             <a:pPr algn="l">
+              <a:lnSpc>
+                <a:spcPct val="100000"/>
+              </a:lnSpc>
               <a:spcAft>
                 <a:spcPts val="179"/>
               </a:spcAft>
@@ -5824,11 +5950,14 @@
         </p:spPr>
         <p:txBody>
           <a:bodyPr wrap="square" lIns="0" rIns="0" tIns="0" bIns="0" anchor="t">
-            <a:spAutoFit/>
+            <a:normAutofit/>
           </a:bodyPr>
           <a:lstStyle/>
           <a:p>
             <a:pPr algn="l">
+              <a:lnSpc>
+                <a:spcPct val="100000"/>
+              </a:lnSpc>
               <a:spcAft>
                 <a:spcPts val="110"/>
               </a:spcAft>
@@ -5908,11 +6037,14 @@
         </p:spPr>
         <p:txBody>
           <a:bodyPr wrap="square" lIns="0" rIns="0" tIns="0" bIns="0" anchor="t">
-            <a:spAutoFit/>
+            <a:normAutofit/>
           </a:bodyPr>
           <a:lstStyle/>
           <a:p>
             <a:pPr algn="l">
+              <a:lnSpc>
+                <a:spcPct val="100000"/>
+              </a:lnSpc>
               <a:spcAft>
                 <a:spcPts val="102"/>
               </a:spcAft>
@@ -5947,11 +6079,14 @@
         </p:spPr>
         <p:txBody>
           <a:bodyPr wrap="square" lIns="0" rIns="0" tIns="0" bIns="0" anchor="ctr">
-            <a:spAutoFit/>
+            <a:normAutofit/>
           </a:bodyPr>
           <a:lstStyle/>
           <a:p>
             <a:pPr algn="l">
+              <a:lnSpc>
+                <a:spcPct val="100000"/>
+              </a:lnSpc>
               <a:spcAft>
                 <a:spcPts val="156"/>
               </a:spcAft>
@@ -5986,11 +6121,14 @@
         </p:spPr>
         <p:txBody>
           <a:bodyPr wrap="square" lIns="0" rIns="0" tIns="0" bIns="0" anchor="t">
-            <a:spAutoFit/>
+            <a:normAutofit/>
           </a:bodyPr>
           <a:lstStyle/>
           <a:p>
             <a:pPr algn="l">
+              <a:lnSpc>
+                <a:spcPct val="100000"/>
+              </a:lnSpc>
               <a:spcAft>
                 <a:spcPts val="81"/>
               </a:spcAft>
@@ -6025,11 +6163,14 @@
         </p:spPr>
         <p:txBody>
           <a:bodyPr wrap="square" lIns="0" rIns="0" tIns="0" bIns="0" anchor="t">
-            <a:spAutoFit/>
+            <a:normAutofit/>
           </a:bodyPr>
           <a:lstStyle/>
           <a:p>
             <a:pPr algn="r">
+              <a:lnSpc>
+                <a:spcPct val="100000"/>
+              </a:lnSpc>
               <a:spcAft>
                 <a:spcPts val="86"/>
               </a:spcAft>
@@ -6127,11 +6268,14 @@
         </p:spPr>
         <p:txBody>
           <a:bodyPr wrap="square" lIns="0" rIns="0" tIns="0" bIns="0" anchor="t">
-            <a:spAutoFit/>
+            <a:normAutofit/>
           </a:bodyPr>
           <a:lstStyle/>
           <a:p>
             <a:pPr algn="l">
+              <a:lnSpc>
+                <a:spcPct val="100000"/>
+              </a:lnSpc>
               <a:spcAft>
                 <a:spcPts val="120"/>
               </a:spcAft>
@@ -6166,11 +6310,14 @@
         </p:spPr>
         <p:txBody>
           <a:bodyPr wrap="square" lIns="0" rIns="0" tIns="0" bIns="0" anchor="t">
-            <a:spAutoFit/>
+            <a:normAutofit/>
           </a:bodyPr>
           <a:lstStyle/>
           <a:p>
             <a:pPr algn="l">
+              <a:lnSpc>
+                <a:spcPct val="100000"/>
+              </a:lnSpc>
               <a:spcAft>
                 <a:spcPts val="408"/>
               </a:spcAft>
@@ -6205,11 +6352,14 @@
         </p:spPr>
         <p:txBody>
           <a:bodyPr wrap="square" lIns="0" rIns="0" tIns="0" bIns="0" anchor="t">
-            <a:spAutoFit/>
+            <a:normAutofit/>
           </a:bodyPr>
           <a:lstStyle/>
           <a:p>
             <a:pPr algn="l">
+              <a:lnSpc>
+                <a:spcPct val="100000"/>
+              </a:lnSpc>
               <a:spcAft>
                 <a:spcPts val="179"/>
               </a:spcAft>
@@ -6289,11 +6439,14 @@
         </p:spPr>
         <p:txBody>
           <a:bodyPr wrap="square" lIns="0" rIns="0" tIns="0" bIns="0" anchor="ctr">
-            <a:spAutoFit/>
+            <a:normAutofit/>
           </a:bodyPr>
           <a:lstStyle/>
           <a:p>
             <a:pPr algn="ctr">
+              <a:lnSpc>
+                <a:spcPct val="100000"/>
+              </a:lnSpc>
               <a:spcAft>
                 <a:spcPts val="96"/>
               </a:spcAft>
@@ -6373,11 +6526,14 @@
         </p:spPr>
         <p:txBody>
           <a:bodyPr wrap="square" lIns="0" rIns="0" tIns="0" bIns="0" anchor="ctr">
-            <a:spAutoFit/>
+            <a:normAutofit/>
           </a:bodyPr>
           <a:lstStyle/>
           <a:p>
             <a:pPr algn="ctr">
+              <a:lnSpc>
+                <a:spcPct val="100000"/>
+              </a:lnSpc>
               <a:spcAft>
                 <a:spcPts val="96"/>
               </a:spcAft>
@@ -6457,11 +6613,14 @@
         </p:spPr>
         <p:txBody>
           <a:bodyPr wrap="square" lIns="0" rIns="0" tIns="0" bIns="0" anchor="ctr">
-            <a:spAutoFit/>
+            <a:normAutofit/>
           </a:bodyPr>
           <a:lstStyle/>
           <a:p>
             <a:pPr algn="ctr">
+              <a:lnSpc>
+                <a:spcPct val="100000"/>
+              </a:lnSpc>
               <a:spcAft>
                 <a:spcPts val="96"/>
               </a:spcAft>
@@ -6541,11 +6700,14 @@
         </p:spPr>
         <p:txBody>
           <a:bodyPr wrap="square" lIns="0" rIns="0" tIns="0" bIns="0" anchor="ctr">
-            <a:spAutoFit/>
+            <a:normAutofit/>
           </a:bodyPr>
           <a:lstStyle/>
           <a:p>
             <a:pPr algn="ctr">
+              <a:lnSpc>
+                <a:spcPct val="100000"/>
+              </a:lnSpc>
               <a:spcAft>
                 <a:spcPts val="96"/>
               </a:spcAft>
@@ -6625,11 +6787,14 @@
         </p:spPr>
         <p:txBody>
           <a:bodyPr wrap="square" lIns="0" rIns="0" tIns="0" bIns="0" anchor="ctr">
-            <a:spAutoFit/>
+            <a:normAutofit/>
           </a:bodyPr>
           <a:lstStyle/>
           <a:p>
             <a:pPr algn="ctr">
+              <a:lnSpc>
+                <a:spcPct val="100000"/>
+              </a:lnSpc>
               <a:spcAft>
                 <a:spcPts val="96"/>
               </a:spcAft>
@@ -6664,11 +6829,14 @@
         </p:spPr>
         <p:txBody>
           <a:bodyPr wrap="square" lIns="0" rIns="0" tIns="0" bIns="0" anchor="t">
-            <a:spAutoFit/>
+            <a:normAutofit/>
           </a:bodyPr>
           <a:lstStyle/>
           <a:p>
             <a:pPr algn="l">
+              <a:lnSpc>
+                <a:spcPct val="100000"/>
+              </a:lnSpc>
               <a:spcAft>
                 <a:spcPts val="81"/>
               </a:spcAft>
@@ -6703,11 +6871,14 @@
         </p:spPr>
         <p:txBody>
           <a:bodyPr wrap="square" lIns="0" rIns="0" tIns="0" bIns="0" anchor="t">
-            <a:spAutoFit/>
+            <a:normAutofit/>
           </a:bodyPr>
           <a:lstStyle/>
           <a:p>
             <a:pPr algn="r">
+              <a:lnSpc>
+                <a:spcPct val="100000"/>
+              </a:lnSpc>
               <a:spcAft>
                 <a:spcPts val="86"/>
               </a:spcAft>
@@ -6805,11 +6976,14 @@
         </p:spPr>
         <p:txBody>
           <a:bodyPr wrap="square" lIns="0" rIns="0" tIns="0" bIns="0" anchor="t">
-            <a:spAutoFit/>
+            <a:normAutofit/>
           </a:bodyPr>
           <a:lstStyle/>
           <a:p>
             <a:pPr algn="l">
+              <a:lnSpc>
+                <a:spcPct val="100000"/>
+              </a:lnSpc>
               <a:spcAft>
                 <a:spcPts val="108"/>
               </a:spcAft>
@@ -6844,11 +7018,14 @@
         </p:spPr>
         <p:txBody>
           <a:bodyPr wrap="square" lIns="0" rIns="0" tIns="0" bIns="0" anchor="t">
-            <a:spAutoFit/>
+            <a:normAutofit/>
           </a:bodyPr>
           <a:lstStyle/>
           <a:p>
             <a:pPr algn="l">
+              <a:lnSpc>
+                <a:spcPct val="100000"/>
+              </a:lnSpc>
               <a:spcAft>
                 <a:spcPts val="300"/>
               </a:spcAft>
@@ -6883,11 +7060,14 @@
         </p:spPr>
         <p:txBody>
           <a:bodyPr wrap="square" lIns="0" rIns="0" tIns="0" bIns="0" anchor="t">
-            <a:spAutoFit/>
+            <a:normAutofit/>
           </a:bodyPr>
           <a:lstStyle/>
           <a:p>
             <a:pPr algn="l">
+              <a:lnSpc>
+                <a:spcPct val="100000"/>
+              </a:lnSpc>
               <a:spcAft>
                 <a:spcPts val="126"/>
               </a:spcAft>
@@ -7010,11 +7190,14 @@
         </p:spPr>
         <p:txBody>
           <a:bodyPr wrap="square" lIns="0" rIns="0" tIns="0" bIns="0" anchor="t">
-            <a:spAutoFit/>
+            <a:normAutofit/>
           </a:bodyPr>
           <a:lstStyle/>
           <a:p>
             <a:pPr algn="ctr">
+              <a:lnSpc>
+                <a:spcPct val="100000"/>
+              </a:lnSpc>
               <a:spcAft>
                 <a:spcPts val="99"/>
               </a:spcAft>
@@ -7094,11 +7277,14 @@
         </p:spPr>
         <p:txBody>
           <a:bodyPr wrap="square" lIns="0" rIns="0" tIns="0" bIns="0" anchor="t">
-            <a:spAutoFit/>
+            <a:normAutofit/>
           </a:bodyPr>
           <a:lstStyle/>
           <a:p>
             <a:pPr algn="ctr">
+              <a:lnSpc>
+                <a:spcPct val="100000"/>
+              </a:lnSpc>
               <a:spcAft>
                 <a:spcPts val="99"/>
               </a:spcAft>
@@ -7178,11 +7364,14 @@
         </p:spPr>
         <p:txBody>
           <a:bodyPr wrap="square" lIns="0" rIns="0" tIns="0" bIns="0" anchor="t">
-            <a:spAutoFit/>
+            <a:normAutofit/>
           </a:bodyPr>
           <a:lstStyle/>
           <a:p>
             <a:pPr algn="ctr">
+              <a:lnSpc>
+                <a:spcPct val="100000"/>
+              </a:lnSpc>
               <a:spcAft>
                 <a:spcPts val="99"/>
               </a:spcAft>
@@ -7262,11 +7451,14 @@
         </p:spPr>
         <p:txBody>
           <a:bodyPr wrap="square" lIns="0" rIns="0" tIns="0" bIns="0" anchor="t">
-            <a:spAutoFit/>
+            <a:normAutofit/>
           </a:bodyPr>
           <a:lstStyle/>
           <a:p>
             <a:pPr algn="l">
+              <a:lnSpc>
+                <a:spcPct val="100000"/>
+              </a:lnSpc>
               <a:spcAft>
                 <a:spcPts val="100"/>
               </a:spcAft>
@@ -7346,11 +7538,14 @@
         </p:spPr>
         <p:txBody>
           <a:bodyPr wrap="square" lIns="0" rIns="0" tIns="0" bIns="0" anchor="t">
-            <a:spAutoFit/>
+            <a:normAutofit/>
           </a:bodyPr>
           <a:lstStyle/>
           <a:p>
             <a:pPr algn="ctr">
+              <a:lnSpc>
+                <a:spcPct val="100000"/>
+              </a:lnSpc>
               <a:spcAft>
                 <a:spcPts val="100"/>
               </a:spcAft>
@@ -7430,11 +7625,14 @@
         </p:spPr>
         <p:txBody>
           <a:bodyPr wrap="square" lIns="0" rIns="0" tIns="0" bIns="0" anchor="t">
-            <a:spAutoFit/>
+            <a:normAutofit/>
           </a:bodyPr>
           <a:lstStyle/>
           <a:p>
             <a:pPr algn="ctr">
+              <a:lnSpc>
+                <a:spcPct val="100000"/>
+              </a:lnSpc>
               <a:spcAft>
                 <a:spcPts val="100"/>
               </a:spcAft>
@@ -7514,11 +7712,14 @@
         </p:spPr>
         <p:txBody>
           <a:bodyPr wrap="square" lIns="0" rIns="0" tIns="0" bIns="0" anchor="t">
-            <a:spAutoFit/>
+            <a:normAutofit/>
           </a:bodyPr>
           <a:lstStyle/>
           <a:p>
             <a:pPr algn="l">
+              <a:lnSpc>
+                <a:spcPct val="100000"/>
+              </a:lnSpc>
               <a:spcAft>
                 <a:spcPts val="100"/>
               </a:spcAft>
@@ -7598,11 +7799,14 @@
         </p:spPr>
         <p:txBody>
           <a:bodyPr wrap="square" lIns="0" rIns="0" tIns="0" bIns="0" anchor="t">
-            <a:spAutoFit/>
+            <a:normAutofit/>
           </a:bodyPr>
           <a:lstStyle/>
           <a:p>
             <a:pPr algn="ctr">
+              <a:lnSpc>
+                <a:spcPct val="100000"/>
+              </a:lnSpc>
               <a:spcAft>
                 <a:spcPts val="100"/>
               </a:spcAft>
@@ -7682,11 +7886,14 @@
         </p:spPr>
         <p:txBody>
           <a:bodyPr wrap="square" lIns="0" rIns="0" tIns="0" bIns="0" anchor="t">
-            <a:spAutoFit/>
+            <a:normAutofit/>
           </a:bodyPr>
           <a:lstStyle/>
           <a:p>
             <a:pPr algn="ctr">
+              <a:lnSpc>
+                <a:spcPct val="100000"/>
+              </a:lnSpc>
               <a:spcAft>
                 <a:spcPts val="100"/>
               </a:spcAft>
@@ -7766,11 +7973,14 @@
         </p:spPr>
         <p:txBody>
           <a:bodyPr wrap="square" lIns="0" rIns="0" tIns="0" bIns="0" anchor="t">
-            <a:spAutoFit/>
+            <a:normAutofit/>
           </a:bodyPr>
           <a:lstStyle/>
           <a:p>
             <a:pPr algn="l">
+              <a:lnSpc>
+                <a:spcPct val="100000"/>
+              </a:lnSpc>
               <a:spcAft>
                 <a:spcPts val="100"/>
               </a:spcAft>
@@ -7850,11 +8060,14 @@
         </p:spPr>
         <p:txBody>
           <a:bodyPr wrap="square" lIns="0" rIns="0" tIns="0" bIns="0" anchor="t">
-            <a:spAutoFit/>
+            <a:normAutofit/>
           </a:bodyPr>
           <a:lstStyle/>
           <a:p>
             <a:pPr algn="ctr">
+              <a:lnSpc>
+                <a:spcPct val="100000"/>
+              </a:lnSpc>
               <a:spcAft>
                 <a:spcPts val="100"/>
               </a:spcAft>
@@ -7934,11 +8147,14 @@
         </p:spPr>
         <p:txBody>
           <a:bodyPr wrap="square" lIns="0" rIns="0" tIns="0" bIns="0" anchor="t">
-            <a:spAutoFit/>
+            <a:normAutofit/>
           </a:bodyPr>
           <a:lstStyle/>
           <a:p>
             <a:pPr algn="ctr">
+              <a:lnSpc>
+                <a:spcPct val="100000"/>
+              </a:lnSpc>
               <a:spcAft>
                 <a:spcPts val="100"/>
               </a:spcAft>
@@ -8018,11 +8234,14 @@
         </p:spPr>
         <p:txBody>
           <a:bodyPr wrap="square" lIns="0" rIns="0" tIns="0" bIns="0" anchor="t">
-            <a:spAutoFit/>
+            <a:normAutofit/>
           </a:bodyPr>
           <a:lstStyle/>
           <a:p>
             <a:pPr algn="l">
+              <a:lnSpc>
+                <a:spcPct val="100000"/>
+              </a:lnSpc>
               <a:spcAft>
                 <a:spcPts val="100"/>
               </a:spcAft>
@@ -8102,11 +8321,14 @@
         </p:spPr>
         <p:txBody>
           <a:bodyPr wrap="square" lIns="0" rIns="0" tIns="0" bIns="0" anchor="t">
-            <a:spAutoFit/>
+            <a:normAutofit/>
           </a:bodyPr>
           <a:lstStyle/>
           <a:p>
             <a:pPr algn="ctr">
+              <a:lnSpc>
+                <a:spcPct val="100000"/>
+              </a:lnSpc>
               <a:spcAft>
                 <a:spcPts val="100"/>
               </a:spcAft>
@@ -8186,11 +8408,14 @@
         </p:spPr>
         <p:txBody>
           <a:bodyPr wrap="square" lIns="0" rIns="0" tIns="0" bIns="0" anchor="t">
-            <a:spAutoFit/>
+            <a:normAutofit/>
           </a:bodyPr>
           <a:lstStyle/>
           <a:p>
             <a:pPr algn="ctr">
+              <a:lnSpc>
+                <a:spcPct val="100000"/>
+              </a:lnSpc>
               <a:spcAft>
                 <a:spcPts val="100"/>
               </a:spcAft>
@@ -8270,11 +8495,14 @@
         </p:spPr>
         <p:txBody>
           <a:bodyPr wrap="square" lIns="0" rIns="0" tIns="0" bIns="0" anchor="t">
-            <a:spAutoFit/>
+            <a:normAutofit/>
           </a:bodyPr>
           <a:lstStyle/>
           <a:p>
             <a:pPr algn="l">
+              <a:lnSpc>
+                <a:spcPct val="100000"/>
+              </a:lnSpc>
               <a:spcAft>
                 <a:spcPts val="100"/>
               </a:spcAft>
@@ -8354,11 +8582,14 @@
         </p:spPr>
         <p:txBody>
           <a:bodyPr wrap="square" lIns="0" rIns="0" tIns="0" bIns="0" anchor="t">
-            <a:spAutoFit/>
+            <a:normAutofit/>
           </a:bodyPr>
           <a:lstStyle/>
           <a:p>
             <a:pPr algn="ctr">
+              <a:lnSpc>
+                <a:spcPct val="100000"/>
+              </a:lnSpc>
               <a:spcAft>
                 <a:spcPts val="100"/>
               </a:spcAft>
@@ -8438,11 +8669,14 @@
         </p:spPr>
         <p:txBody>
           <a:bodyPr wrap="square" lIns="0" rIns="0" tIns="0" bIns="0" anchor="t">
-            <a:spAutoFit/>
+            <a:normAutofit/>
           </a:bodyPr>
           <a:lstStyle/>
           <a:p>
             <a:pPr algn="ctr">
+              <a:lnSpc>
+                <a:spcPct val="100000"/>
+              </a:lnSpc>
               <a:spcAft>
                 <a:spcPts val="100"/>
               </a:spcAft>
@@ -8522,11 +8756,14 @@
         </p:spPr>
         <p:txBody>
           <a:bodyPr wrap="square" lIns="0" rIns="0" tIns="0" bIns="0" anchor="t">
-            <a:spAutoFit/>
+            <a:normAutofit/>
           </a:bodyPr>
           <a:lstStyle/>
           <a:p>
             <a:pPr algn="l">
+              <a:lnSpc>
+                <a:spcPct val="100000"/>
+              </a:lnSpc>
               <a:spcAft>
                 <a:spcPts val="100"/>
               </a:spcAft>
@@ -8606,11 +8843,14 @@
         </p:spPr>
         <p:txBody>
           <a:bodyPr wrap="square" lIns="0" rIns="0" tIns="0" bIns="0" anchor="t">
-            <a:spAutoFit/>
+            <a:normAutofit/>
           </a:bodyPr>
           <a:lstStyle/>
           <a:p>
             <a:pPr algn="ctr">
+              <a:lnSpc>
+                <a:spcPct val="100000"/>
+              </a:lnSpc>
               <a:spcAft>
                 <a:spcPts val="100"/>
               </a:spcAft>
@@ -8690,11 +8930,14 @@
         </p:spPr>
         <p:txBody>
           <a:bodyPr wrap="square" lIns="0" rIns="0" tIns="0" bIns="0" anchor="t">
-            <a:spAutoFit/>
+            <a:normAutofit/>
           </a:bodyPr>
           <a:lstStyle/>
           <a:p>
             <a:pPr algn="ctr">
+              <a:lnSpc>
+                <a:spcPct val="100000"/>
+              </a:lnSpc>
               <a:spcAft>
                 <a:spcPts val="100"/>
               </a:spcAft>
@@ -8774,11 +9017,14 @@
         </p:spPr>
         <p:txBody>
           <a:bodyPr wrap="square" lIns="0" rIns="0" tIns="0" bIns="0" anchor="t">
-            <a:spAutoFit/>
+            <a:normAutofit/>
           </a:bodyPr>
           <a:lstStyle/>
           <a:p>
             <a:pPr algn="l">
+              <a:lnSpc>
+                <a:spcPct val="100000"/>
+              </a:lnSpc>
               <a:spcAft>
                 <a:spcPts val="100"/>
               </a:spcAft>
@@ -8858,11 +9104,14 @@
         </p:spPr>
         <p:txBody>
           <a:bodyPr wrap="square" lIns="0" rIns="0" tIns="0" bIns="0" anchor="t">
-            <a:spAutoFit/>
+            <a:normAutofit/>
           </a:bodyPr>
           <a:lstStyle/>
           <a:p>
             <a:pPr algn="ctr">
+              <a:lnSpc>
+                <a:spcPct val="100000"/>
+              </a:lnSpc>
               <a:spcAft>
                 <a:spcPts val="100"/>
               </a:spcAft>
@@ -8942,11 +9191,14 @@
         </p:spPr>
         <p:txBody>
           <a:bodyPr wrap="square" lIns="0" rIns="0" tIns="0" bIns="0" anchor="t">
-            <a:spAutoFit/>
+            <a:normAutofit/>
           </a:bodyPr>
           <a:lstStyle/>
           <a:p>
             <a:pPr algn="ctr">
+              <a:lnSpc>
+                <a:spcPct val="100000"/>
+              </a:lnSpc>
               <a:spcAft>
                 <a:spcPts val="100"/>
               </a:spcAft>
@@ -9026,11 +9278,14 @@
         </p:spPr>
         <p:txBody>
           <a:bodyPr wrap="square" lIns="0" rIns="0" tIns="0" bIns="0" anchor="t">
-            <a:spAutoFit/>
+            <a:normAutofit/>
           </a:bodyPr>
           <a:lstStyle/>
           <a:p>
             <a:pPr algn="l">
+              <a:lnSpc>
+                <a:spcPct val="100000"/>
+              </a:lnSpc>
               <a:spcAft>
                 <a:spcPts val="100"/>
               </a:spcAft>
@@ -9110,11 +9365,14 @@
         </p:spPr>
         <p:txBody>
           <a:bodyPr wrap="square" lIns="0" rIns="0" tIns="0" bIns="0" anchor="t">
-            <a:spAutoFit/>
+            <a:normAutofit/>
           </a:bodyPr>
           <a:lstStyle/>
           <a:p>
             <a:pPr algn="ctr">
+              <a:lnSpc>
+                <a:spcPct val="100000"/>
+              </a:lnSpc>
               <a:spcAft>
                 <a:spcPts val="100"/>
               </a:spcAft>
@@ -9194,11 +9452,14 @@
         </p:spPr>
         <p:txBody>
           <a:bodyPr wrap="square" lIns="0" rIns="0" tIns="0" bIns="0" anchor="t">
-            <a:spAutoFit/>
+            <a:normAutofit/>
           </a:bodyPr>
           <a:lstStyle/>
           <a:p>
             <a:pPr algn="ctr">
+              <a:lnSpc>
+                <a:spcPct val="100000"/>
+              </a:lnSpc>
               <a:spcAft>
                 <a:spcPts val="100"/>
               </a:spcAft>
@@ -9278,11 +9539,14 @@
         </p:spPr>
         <p:txBody>
           <a:bodyPr wrap="square" lIns="0" rIns="0" tIns="0" bIns="0" anchor="t">
-            <a:spAutoFit/>
+            <a:normAutofit/>
           </a:bodyPr>
           <a:lstStyle/>
           <a:p>
             <a:pPr algn="ctr">
+              <a:lnSpc>
+                <a:spcPct val="100000"/>
+              </a:lnSpc>
               <a:spcAft>
                 <a:spcPts val="96"/>
               </a:spcAft>
@@ -9317,11 +9581,14 @@
         </p:spPr>
         <p:txBody>
           <a:bodyPr wrap="square" lIns="0" rIns="0" tIns="0" bIns="0" anchor="t">
-            <a:spAutoFit/>
+            <a:normAutofit/>
           </a:bodyPr>
           <a:lstStyle/>
           <a:p>
             <a:pPr algn="l">
+              <a:lnSpc>
+                <a:spcPct val="100000"/>
+              </a:lnSpc>
               <a:spcAft>
                 <a:spcPts val="81"/>
               </a:spcAft>
@@ -9356,11 +9623,14 @@
         </p:spPr>
         <p:txBody>
           <a:bodyPr wrap="square" lIns="0" rIns="0" tIns="0" bIns="0" anchor="t">
-            <a:spAutoFit/>
+            <a:normAutofit/>
           </a:bodyPr>
           <a:lstStyle/>
           <a:p>
             <a:pPr algn="r">
+              <a:lnSpc>
+                <a:spcPct val="100000"/>
+              </a:lnSpc>
               <a:spcAft>
                 <a:spcPts val="86"/>
               </a:spcAft>
@@ -9458,11 +9728,14 @@
         </p:spPr>
         <p:txBody>
           <a:bodyPr wrap="square" lIns="0" rIns="0" tIns="0" bIns="0" anchor="t">
-            <a:spAutoFit/>
+            <a:normAutofit/>
           </a:bodyPr>
           <a:lstStyle/>
           <a:p>
             <a:pPr algn="l">
+              <a:lnSpc>
+                <a:spcPct val="100000"/>
+              </a:lnSpc>
               <a:spcAft>
                 <a:spcPts val="108"/>
               </a:spcAft>
@@ -9497,11 +9770,14 @@
         </p:spPr>
         <p:txBody>
           <a:bodyPr wrap="square" lIns="0" rIns="0" tIns="0" bIns="0" anchor="t">
-            <a:spAutoFit/>
+            <a:normAutofit/>
           </a:bodyPr>
           <a:lstStyle/>
           <a:p>
             <a:pPr algn="l">
+              <a:lnSpc>
+                <a:spcPct val="100000"/>
+              </a:lnSpc>
               <a:spcAft>
                 <a:spcPts val="300"/>
               </a:spcAft>
@@ -9536,11 +9812,14 @@
         </p:spPr>
         <p:txBody>
           <a:bodyPr wrap="square" lIns="0" rIns="0" tIns="0" bIns="0" anchor="t">
-            <a:spAutoFit/>
+            <a:normAutofit/>
           </a:bodyPr>
           <a:lstStyle/>
           <a:p>
             <a:pPr algn="l">
+              <a:lnSpc>
+                <a:spcPct val="100000"/>
+              </a:lnSpc>
               <a:spcAft>
                 <a:spcPts val="126"/>
               </a:spcAft>
@@ -9708,11 +9987,14 @@
         </p:spPr>
         <p:txBody>
           <a:bodyPr wrap="square" lIns="0" rIns="0" tIns="0" bIns="0" anchor="t">
-            <a:spAutoFit/>
+            <a:normAutofit/>
           </a:bodyPr>
           <a:lstStyle/>
           <a:p>
             <a:pPr algn="l">
+              <a:lnSpc>
+                <a:spcPct val="100000"/>
+              </a:lnSpc>
               <a:spcAft>
                 <a:spcPts val="144"/>
               </a:spcAft>
@@ -9747,11 +10029,14 @@
         </p:spPr>
         <p:txBody>
           <a:bodyPr wrap="square" lIns="0" rIns="0" tIns="0" bIns="0" anchor="t">
-            <a:spAutoFit/>
+            <a:normAutofit/>
           </a:bodyPr>
           <a:lstStyle/>
           <a:p>
             <a:pPr algn="l">
+              <a:lnSpc>
+                <a:spcPct val="100000"/>
+              </a:lnSpc>
               <a:spcAft>
                 <a:spcPts val="96"/>
               </a:spcAft>
@@ -9831,11 +10116,14 @@
         </p:spPr>
         <p:txBody>
           <a:bodyPr wrap="square" lIns="0" rIns="0" tIns="0" bIns="0" anchor="t">
-            <a:spAutoFit/>
+            <a:normAutofit/>
           </a:bodyPr>
           <a:lstStyle/>
           <a:p>
             <a:pPr algn="l">
+              <a:lnSpc>
+                <a:spcPct val="100000"/>
+              </a:lnSpc>
               <a:spcAft>
                 <a:spcPts val="102"/>
               </a:spcAft>
@@ -9915,11 +10203,14 @@
         </p:spPr>
         <p:txBody>
           <a:bodyPr wrap="square" lIns="0" rIns="0" tIns="0" bIns="0" anchor="t">
-            <a:spAutoFit/>
+            <a:normAutofit/>
           </a:bodyPr>
           <a:lstStyle/>
           <a:p>
             <a:pPr algn="l">
+              <a:lnSpc>
+                <a:spcPct val="100000"/>
+              </a:lnSpc>
               <a:spcAft>
                 <a:spcPts val="102"/>
               </a:spcAft>
@@ -9999,11 +10290,14 @@
         </p:spPr>
         <p:txBody>
           <a:bodyPr wrap="square" lIns="0" rIns="0" tIns="0" bIns="0" anchor="t">
-            <a:spAutoFit/>
+            <a:normAutofit/>
           </a:bodyPr>
           <a:lstStyle/>
           <a:p>
             <a:pPr algn="l">
+              <a:lnSpc>
+                <a:spcPct val="100000"/>
+              </a:lnSpc>
               <a:spcAft>
                 <a:spcPts val="102"/>
               </a:spcAft>
@@ -10083,11 +10377,14 @@
         </p:spPr>
         <p:txBody>
           <a:bodyPr wrap="square" lIns="0" rIns="0" tIns="0" bIns="0" anchor="t">
-            <a:spAutoFit/>
+            <a:normAutofit/>
           </a:bodyPr>
           <a:lstStyle/>
           <a:p>
             <a:pPr algn="l">
+              <a:lnSpc>
+                <a:spcPct val="100000"/>
+              </a:lnSpc>
               <a:spcAft>
                 <a:spcPts val="102"/>
               </a:spcAft>
@@ -10167,11 +10464,14 @@
         </p:spPr>
         <p:txBody>
           <a:bodyPr wrap="square" lIns="0" rIns="0" tIns="0" bIns="0" anchor="t">
-            <a:spAutoFit/>
+            <a:normAutofit/>
           </a:bodyPr>
           <a:lstStyle/>
           <a:p>
             <a:pPr algn="l">
+              <a:lnSpc>
+                <a:spcPct val="100000"/>
+              </a:lnSpc>
               <a:spcAft>
                 <a:spcPts val="102"/>
               </a:spcAft>
@@ -10251,11 +10551,14 @@
         </p:spPr>
         <p:txBody>
           <a:bodyPr wrap="square" lIns="0" rIns="0" tIns="0" bIns="0" anchor="t">
-            <a:spAutoFit/>
+            <a:normAutofit/>
           </a:bodyPr>
           <a:lstStyle/>
           <a:p>
             <a:pPr algn="l">
+              <a:lnSpc>
+                <a:spcPct val="100000"/>
+              </a:lnSpc>
               <a:spcAft>
                 <a:spcPts val="102"/>
               </a:spcAft>
@@ -10335,11 +10638,14 @@
         </p:spPr>
         <p:txBody>
           <a:bodyPr wrap="square" lIns="0" rIns="0" tIns="0" bIns="0" anchor="t">
-            <a:spAutoFit/>
+            <a:normAutofit/>
           </a:bodyPr>
           <a:lstStyle/>
           <a:p>
             <a:pPr algn="l">
+              <a:lnSpc>
+                <a:spcPct val="100000"/>
+              </a:lnSpc>
               <a:spcAft>
                 <a:spcPts val="102"/>
               </a:spcAft>
@@ -10419,11 +10725,14 @@
         </p:spPr>
         <p:txBody>
           <a:bodyPr wrap="square" lIns="0" rIns="0" tIns="0" bIns="0" anchor="t">
-            <a:spAutoFit/>
+            <a:normAutofit/>
           </a:bodyPr>
           <a:lstStyle/>
           <a:p>
             <a:pPr algn="l">
+              <a:lnSpc>
+                <a:spcPct val="100000"/>
+              </a:lnSpc>
               <a:spcAft>
                 <a:spcPts val="102"/>
               </a:spcAft>
@@ -10503,11 +10812,14 @@
         </p:spPr>
         <p:txBody>
           <a:bodyPr wrap="square" lIns="0" rIns="0" tIns="0" bIns="0" anchor="t">
-            <a:spAutoFit/>
+            <a:normAutofit/>
           </a:bodyPr>
           <a:lstStyle/>
           <a:p>
             <a:pPr algn="l">
+              <a:lnSpc>
+                <a:spcPct val="100000"/>
+              </a:lnSpc>
               <a:spcAft>
                 <a:spcPts val="102"/>
               </a:spcAft>
@@ -10632,11 +10944,14 @@
         </p:spPr>
         <p:txBody>
           <a:bodyPr wrap="square" lIns="0" rIns="0" tIns="0" bIns="0" anchor="t">
-            <a:spAutoFit/>
+            <a:normAutofit/>
           </a:bodyPr>
           <a:lstStyle/>
           <a:p>
             <a:pPr algn="l">
+              <a:lnSpc>
+                <a:spcPct val="100000"/>
+              </a:lnSpc>
               <a:spcAft>
                 <a:spcPts val="144"/>
               </a:spcAft>
@@ -10671,11 +10986,14 @@
         </p:spPr>
         <p:txBody>
           <a:bodyPr wrap="square" lIns="0" rIns="0" tIns="0" bIns="0" anchor="t">
-            <a:spAutoFit/>
+            <a:normAutofit/>
           </a:bodyPr>
           <a:lstStyle/>
           <a:p>
             <a:pPr algn="l">
+              <a:lnSpc>
+                <a:spcPct val="100000"/>
+              </a:lnSpc>
               <a:spcAft>
                 <a:spcPts val="96"/>
               </a:spcAft>
@@ -10755,11 +11073,14 @@
         </p:spPr>
         <p:txBody>
           <a:bodyPr wrap="square" lIns="0" rIns="0" tIns="0" bIns="0" anchor="t">
-            <a:spAutoFit/>
+            <a:normAutofit/>
           </a:bodyPr>
           <a:lstStyle/>
           <a:p>
             <a:pPr algn="l">
+              <a:lnSpc>
+                <a:spcPct val="100000"/>
+              </a:lnSpc>
               <a:spcAft>
                 <a:spcPts val="102"/>
               </a:spcAft>
@@ -10839,11 +11160,14 @@
         </p:spPr>
         <p:txBody>
           <a:bodyPr wrap="square" lIns="0" rIns="0" tIns="0" bIns="0" anchor="t">
-            <a:spAutoFit/>
+            <a:normAutofit/>
           </a:bodyPr>
           <a:lstStyle/>
           <a:p>
             <a:pPr algn="l">
+              <a:lnSpc>
+                <a:spcPct val="100000"/>
+              </a:lnSpc>
               <a:spcAft>
                 <a:spcPts val="102"/>
               </a:spcAft>
@@ -10923,11 +11247,14 @@
         </p:spPr>
         <p:txBody>
           <a:bodyPr wrap="square" lIns="0" rIns="0" tIns="0" bIns="0" anchor="t">
-            <a:spAutoFit/>
+            <a:normAutofit/>
           </a:bodyPr>
           <a:lstStyle/>
           <a:p>
             <a:pPr algn="l">
+              <a:lnSpc>
+                <a:spcPct val="100000"/>
+              </a:lnSpc>
               <a:spcAft>
                 <a:spcPts val="102"/>
               </a:spcAft>
@@ -11007,11 +11334,14 @@
         </p:spPr>
         <p:txBody>
           <a:bodyPr wrap="square" lIns="0" rIns="0" tIns="0" bIns="0" anchor="t">
-            <a:spAutoFit/>
+            <a:normAutofit/>
           </a:bodyPr>
           <a:lstStyle/>
           <a:p>
             <a:pPr algn="l">
+              <a:lnSpc>
+                <a:spcPct val="100000"/>
+              </a:lnSpc>
               <a:spcAft>
                 <a:spcPts val="102"/>
               </a:spcAft>
@@ -11091,11 +11421,14 @@
         </p:spPr>
         <p:txBody>
           <a:bodyPr wrap="square" lIns="0" rIns="0" tIns="0" bIns="0" anchor="t">
-            <a:spAutoFit/>
+            <a:normAutofit/>
           </a:bodyPr>
           <a:lstStyle/>
           <a:p>
             <a:pPr algn="l">
+              <a:lnSpc>
+                <a:spcPct val="100000"/>
+              </a:lnSpc>
               <a:spcAft>
                 <a:spcPts val="102"/>
               </a:spcAft>
@@ -11220,11 +11553,14 @@
         </p:spPr>
         <p:txBody>
           <a:bodyPr wrap="square" lIns="0" rIns="0" tIns="0" bIns="0" anchor="t">
-            <a:spAutoFit/>
+            <a:normAutofit/>
           </a:bodyPr>
           <a:lstStyle/>
           <a:p>
             <a:pPr algn="l">
+              <a:lnSpc>
+                <a:spcPct val="100000"/>
+              </a:lnSpc>
               <a:spcAft>
                 <a:spcPts val="144"/>
               </a:spcAft>
@@ -11259,11 +11595,14 @@
         </p:spPr>
         <p:txBody>
           <a:bodyPr wrap="square" lIns="0" rIns="0" tIns="0" bIns="0" anchor="t">
-            <a:spAutoFit/>
+            <a:normAutofit/>
           </a:bodyPr>
           <a:lstStyle/>
           <a:p>
             <a:pPr algn="l">
+              <a:lnSpc>
+                <a:spcPct val="100000"/>
+              </a:lnSpc>
               <a:spcAft>
                 <a:spcPts val="96"/>
               </a:spcAft>
@@ -11343,11 +11682,14 @@
         </p:spPr>
         <p:txBody>
           <a:bodyPr wrap="square" lIns="0" rIns="0" tIns="0" bIns="0" anchor="t">
-            <a:spAutoFit/>
+            <a:normAutofit/>
           </a:bodyPr>
           <a:lstStyle/>
           <a:p>
             <a:pPr algn="l">
+              <a:lnSpc>
+                <a:spcPct val="100000"/>
+              </a:lnSpc>
               <a:spcAft>
                 <a:spcPts val="102"/>
               </a:spcAft>
@@ -11427,11 +11769,14 @@
         </p:spPr>
         <p:txBody>
           <a:bodyPr wrap="square" lIns="0" rIns="0" tIns="0" bIns="0" anchor="t">
-            <a:spAutoFit/>
+            <a:normAutofit/>
           </a:bodyPr>
           <a:lstStyle/>
           <a:p>
             <a:pPr algn="l">
+              <a:lnSpc>
+                <a:spcPct val="100000"/>
+              </a:lnSpc>
               <a:spcAft>
                 <a:spcPts val="102"/>
               </a:spcAft>
@@ -11511,11 +11856,14 @@
         </p:spPr>
         <p:txBody>
           <a:bodyPr wrap="square" lIns="0" rIns="0" tIns="0" bIns="0" anchor="t">
-            <a:spAutoFit/>
+            <a:normAutofit/>
           </a:bodyPr>
           <a:lstStyle/>
           <a:p>
             <a:pPr algn="l">
+              <a:lnSpc>
+                <a:spcPct val="100000"/>
+              </a:lnSpc>
               <a:spcAft>
                 <a:spcPts val="102"/>
               </a:spcAft>
@@ -11595,11 +11943,14 @@
         </p:spPr>
         <p:txBody>
           <a:bodyPr wrap="square" lIns="0" rIns="0" tIns="0" bIns="0" anchor="t">
-            <a:spAutoFit/>
+            <a:normAutofit/>
           </a:bodyPr>
           <a:lstStyle/>
           <a:p>
             <a:pPr algn="l">
+              <a:lnSpc>
+                <a:spcPct val="100000"/>
+              </a:lnSpc>
               <a:spcAft>
                 <a:spcPts val="102"/>
               </a:spcAft>
@@ -11679,11 +12030,14 @@
         </p:spPr>
         <p:txBody>
           <a:bodyPr wrap="square" lIns="0" rIns="0" tIns="0" bIns="0" anchor="t">
-            <a:spAutoFit/>
+            <a:normAutofit/>
           </a:bodyPr>
           <a:lstStyle/>
           <a:p>
             <a:pPr algn="l">
+              <a:lnSpc>
+                <a:spcPct val="100000"/>
+              </a:lnSpc>
               <a:spcAft>
                 <a:spcPts val="102"/>
               </a:spcAft>
@@ -11763,11 +12117,14 @@
         </p:spPr>
         <p:txBody>
           <a:bodyPr wrap="square" lIns="0" rIns="0" tIns="0" bIns="0" anchor="t">
-            <a:spAutoFit/>
+            <a:normAutofit/>
           </a:bodyPr>
           <a:lstStyle/>
           <a:p>
             <a:pPr algn="l">
+              <a:lnSpc>
+                <a:spcPct val="100000"/>
+              </a:lnSpc>
               <a:spcAft>
                 <a:spcPts val="102"/>
               </a:spcAft>
@@ -11847,11 +12204,14 @@
         </p:spPr>
         <p:txBody>
           <a:bodyPr wrap="square" lIns="0" rIns="0" tIns="0" bIns="0" anchor="t">
-            <a:spAutoFit/>
+            <a:normAutofit/>
           </a:bodyPr>
           <a:lstStyle/>
           <a:p>
             <a:pPr algn="l">
+              <a:lnSpc>
+                <a:spcPct val="100000"/>
+              </a:lnSpc>
               <a:spcAft>
                 <a:spcPts val="102"/>
               </a:spcAft>
@@ -11886,11 +12246,14 @@
         </p:spPr>
         <p:txBody>
           <a:bodyPr wrap="square" lIns="0" rIns="0" tIns="0" bIns="0" anchor="t">
-            <a:spAutoFit/>
+            <a:normAutofit/>
           </a:bodyPr>
           <a:lstStyle/>
           <a:p>
             <a:pPr algn="l">
+              <a:lnSpc>
+                <a:spcPct val="100000"/>
+              </a:lnSpc>
               <a:spcAft>
                 <a:spcPts val="81"/>
               </a:spcAft>
@@ -11925,11 +12288,14 @@
         </p:spPr>
         <p:txBody>
           <a:bodyPr wrap="square" lIns="0" rIns="0" tIns="0" bIns="0" anchor="t">
-            <a:spAutoFit/>
+            <a:normAutofit/>
           </a:bodyPr>
           <a:lstStyle/>
           <a:p>
             <a:pPr algn="r">
+              <a:lnSpc>
+                <a:spcPct val="100000"/>
+              </a:lnSpc>
               <a:spcAft>
                 <a:spcPts val="86"/>
               </a:spcAft>
@@ -12027,11 +12393,14 @@
         </p:spPr>
         <p:txBody>
           <a:bodyPr wrap="square" lIns="0" rIns="0" tIns="0" bIns="0" anchor="t">
-            <a:spAutoFit/>
+            <a:normAutofit/>
           </a:bodyPr>
           <a:lstStyle/>
           <a:p>
             <a:pPr algn="l">
+              <a:lnSpc>
+                <a:spcPct val="100000"/>
+              </a:lnSpc>
               <a:spcAft>
                 <a:spcPts val="108"/>
               </a:spcAft>
@@ -12066,11 +12435,14 @@
         </p:spPr>
         <p:txBody>
           <a:bodyPr wrap="square" lIns="0" rIns="0" tIns="0" bIns="0" anchor="t">
-            <a:spAutoFit/>
+            <a:normAutofit/>
           </a:bodyPr>
           <a:lstStyle/>
           <a:p>
             <a:pPr algn="l">
+              <a:lnSpc>
+                <a:spcPct val="100000"/>
+              </a:lnSpc>
               <a:spcAft>
                 <a:spcPts val="300"/>
               </a:spcAft>
@@ -12105,11 +12477,14 @@
         </p:spPr>
         <p:txBody>
           <a:bodyPr wrap="square" lIns="0" rIns="0" tIns="0" bIns="0" anchor="t">
-            <a:spAutoFit/>
+            <a:normAutofit/>
           </a:bodyPr>
           <a:lstStyle/>
           <a:p>
             <a:pPr algn="l">
+              <a:lnSpc>
+                <a:spcPct val="100000"/>
+              </a:lnSpc>
               <a:spcAft>
                 <a:spcPts val="126"/>
               </a:spcAft>
@@ -12232,11 +12607,14 @@
         </p:spPr>
         <p:txBody>
           <a:bodyPr wrap="square" lIns="0" rIns="0" tIns="0" bIns="0" anchor="t">
-            <a:spAutoFit/>
+            <a:normAutofit/>
           </a:bodyPr>
           <a:lstStyle/>
           <a:p>
             <a:pPr algn="l">
+              <a:lnSpc>
+                <a:spcPct val="100000"/>
+              </a:lnSpc>
               <a:spcAft>
                 <a:spcPts val="179"/>
               </a:spcAft>
@@ -12316,11 +12694,14 @@
         </p:spPr>
         <p:txBody>
           <a:bodyPr wrap="square" lIns="0" rIns="0" tIns="0" bIns="0" anchor="ctr">
-            <a:spAutoFit/>
+            <a:normAutofit/>
           </a:bodyPr>
           <a:lstStyle/>
           <a:p>
             <a:pPr algn="ctr">
+              <a:lnSpc>
+                <a:spcPct val="100000"/>
+              </a:lnSpc>
               <a:spcAft>
                 <a:spcPts val="86"/>
               </a:spcAft>
@@ -12355,11 +12736,14 @@
         </p:spPr>
         <p:txBody>
           <a:bodyPr wrap="square" lIns="0" rIns="0" tIns="0" bIns="0" anchor="t">
-            <a:spAutoFit/>
+            <a:normAutofit/>
           </a:bodyPr>
           <a:lstStyle/>
           <a:p>
             <a:pPr algn="l">
+              <a:lnSpc>
+                <a:spcPct val="100000"/>
+              </a:lnSpc>
               <a:spcAft>
                 <a:spcPts val="110"/>
               </a:spcAft>
@@ -12439,11 +12823,14 @@
         </p:spPr>
         <p:txBody>
           <a:bodyPr wrap="square" lIns="0" rIns="0" tIns="0" bIns="0" anchor="ctr">
-            <a:spAutoFit/>
+            <a:normAutofit/>
           </a:bodyPr>
           <a:lstStyle/>
           <a:p>
             <a:pPr algn="ctr">
+              <a:lnSpc>
+                <a:spcPct val="100000"/>
+              </a:lnSpc>
               <a:spcAft>
                 <a:spcPts val="86"/>
               </a:spcAft>
@@ -12478,11 +12865,14 @@
         </p:spPr>
         <p:txBody>
           <a:bodyPr wrap="square" lIns="0" rIns="0" tIns="0" bIns="0" anchor="t">
-            <a:spAutoFit/>
+            <a:normAutofit/>
           </a:bodyPr>
           <a:lstStyle/>
           <a:p>
             <a:pPr algn="l">
+              <a:lnSpc>
+                <a:spcPct val="100000"/>
+              </a:lnSpc>
               <a:spcAft>
                 <a:spcPts val="110"/>
               </a:spcAft>
@@ -12562,11 +12952,14 @@
         </p:spPr>
         <p:txBody>
           <a:bodyPr wrap="square" lIns="0" rIns="0" tIns="0" bIns="0" anchor="ctr">
-            <a:spAutoFit/>
+            <a:normAutofit/>
           </a:bodyPr>
           <a:lstStyle/>
           <a:p>
             <a:pPr algn="ctr">
+              <a:lnSpc>
+                <a:spcPct val="100000"/>
+              </a:lnSpc>
               <a:spcAft>
                 <a:spcPts val="86"/>
               </a:spcAft>
@@ -12601,11 +12994,14 @@
         </p:spPr>
         <p:txBody>
           <a:bodyPr wrap="square" lIns="0" rIns="0" tIns="0" bIns="0" anchor="t">
-            <a:spAutoFit/>
+            <a:normAutofit/>
           </a:bodyPr>
           <a:lstStyle/>
           <a:p>
             <a:pPr algn="l">
+              <a:lnSpc>
+                <a:spcPct val="100000"/>
+              </a:lnSpc>
               <a:spcAft>
                 <a:spcPts val="110"/>
               </a:spcAft>
@@ -12685,11 +13081,14 @@
         </p:spPr>
         <p:txBody>
           <a:bodyPr wrap="square" lIns="0" rIns="0" tIns="0" bIns="0" anchor="ctr">
-            <a:spAutoFit/>
+            <a:normAutofit/>
           </a:bodyPr>
           <a:lstStyle/>
           <a:p>
             <a:pPr algn="ctr">
+              <a:lnSpc>
+                <a:spcPct val="100000"/>
+              </a:lnSpc>
               <a:spcAft>
                 <a:spcPts val="86"/>
               </a:spcAft>
@@ -12724,11 +13123,14 @@
         </p:spPr>
         <p:txBody>
           <a:bodyPr wrap="square" lIns="0" rIns="0" tIns="0" bIns="0" anchor="t">
-            <a:spAutoFit/>
+            <a:normAutofit/>
           </a:bodyPr>
           <a:lstStyle/>
           <a:p>
             <a:pPr algn="l">
+              <a:lnSpc>
+                <a:spcPct val="100000"/>
+              </a:lnSpc>
               <a:spcAft>
                 <a:spcPts val="110"/>
               </a:spcAft>
@@ -12808,11 +13210,14 @@
         </p:spPr>
         <p:txBody>
           <a:bodyPr wrap="square" lIns="0" rIns="0" tIns="0" bIns="0" anchor="ctr">
-            <a:spAutoFit/>
+            <a:normAutofit/>
           </a:bodyPr>
           <a:lstStyle/>
           <a:p>
             <a:pPr algn="ctr">
+              <a:lnSpc>
+                <a:spcPct val="100000"/>
+              </a:lnSpc>
               <a:spcAft>
                 <a:spcPts val="86"/>
               </a:spcAft>
@@ -12847,11 +13252,14 @@
         </p:spPr>
         <p:txBody>
           <a:bodyPr wrap="square" lIns="0" rIns="0" tIns="0" bIns="0" anchor="t">
-            <a:spAutoFit/>
+            <a:normAutofit/>
           </a:bodyPr>
           <a:lstStyle/>
           <a:p>
             <a:pPr algn="l">
+              <a:lnSpc>
+                <a:spcPct val="100000"/>
+              </a:lnSpc>
               <a:spcAft>
                 <a:spcPts val="110"/>
               </a:spcAft>
@@ -12886,11 +13294,14 @@
         </p:spPr>
         <p:txBody>
           <a:bodyPr wrap="square" lIns="0" rIns="0" tIns="0" bIns="0" anchor="t">
-            <a:spAutoFit/>
+            <a:normAutofit/>
           </a:bodyPr>
           <a:lstStyle/>
           <a:p>
             <a:pPr algn="l">
+              <a:lnSpc>
+                <a:spcPct val="100000"/>
+              </a:lnSpc>
               <a:spcAft>
                 <a:spcPts val="102"/>
               </a:spcAft>
@@ -13015,11 +13426,14 @@
         </p:spPr>
         <p:txBody>
           <a:bodyPr wrap="square" lIns="0" rIns="0" tIns="0" bIns="0" anchor="t">
-            <a:spAutoFit/>
+            <a:normAutofit/>
           </a:bodyPr>
           <a:lstStyle/>
           <a:p>
             <a:pPr algn="l">
+              <a:lnSpc>
+                <a:spcPct val="100000"/>
+              </a:lnSpc>
               <a:spcAft>
                 <a:spcPts val="102"/>
               </a:spcAft>
@@ -13054,11 +13468,14 @@
         </p:spPr>
         <p:txBody>
           <a:bodyPr wrap="square" lIns="0" rIns="0" tIns="0" bIns="0" anchor="t">
-            <a:spAutoFit/>
+            <a:normAutofit/>
           </a:bodyPr>
           <a:lstStyle/>
           <a:p>
             <a:pPr algn="l">
+              <a:lnSpc>
+                <a:spcPct val="100000"/>
+              </a:lnSpc>
               <a:spcAft>
                 <a:spcPts val="179"/>
               </a:spcAft>
@@ -13093,11 +13510,14 @@
         </p:spPr>
         <p:txBody>
           <a:bodyPr wrap="square" lIns="0" rIns="0" tIns="0" bIns="0" anchor="t">
-            <a:spAutoFit/>
+            <a:normAutofit/>
           </a:bodyPr>
           <a:lstStyle/>
           <a:p>
             <a:pPr algn="l">
+              <a:lnSpc>
+                <a:spcPct val="100000"/>
+              </a:lnSpc>
               <a:spcAft>
                 <a:spcPts val="110"/>
               </a:spcAft>
@@ -13222,11 +13642,14 @@
         </p:spPr>
         <p:txBody>
           <a:bodyPr wrap="square" lIns="0" rIns="0" tIns="0" bIns="0" anchor="t">
-            <a:spAutoFit/>
+            <a:normAutofit/>
           </a:bodyPr>
           <a:lstStyle/>
           <a:p>
             <a:pPr algn="l">
+              <a:lnSpc>
+                <a:spcPct val="100000"/>
+              </a:lnSpc>
               <a:spcAft>
                 <a:spcPts val="102"/>
               </a:spcAft>
@@ -13261,11 +13684,14 @@
         </p:spPr>
         <p:txBody>
           <a:bodyPr wrap="square" lIns="0" rIns="0" tIns="0" bIns="0" anchor="t">
-            <a:spAutoFit/>
+            <a:normAutofit/>
           </a:bodyPr>
           <a:lstStyle/>
           <a:p>
             <a:pPr algn="l">
+              <a:lnSpc>
+                <a:spcPct val="100000"/>
+              </a:lnSpc>
               <a:spcAft>
                 <a:spcPts val="179"/>
               </a:spcAft>
@@ -13300,11 +13726,14 @@
         </p:spPr>
         <p:txBody>
           <a:bodyPr wrap="square" lIns="0" rIns="0" tIns="0" bIns="0" anchor="t">
-            <a:spAutoFit/>
+            <a:normAutofit/>
           </a:bodyPr>
           <a:lstStyle/>
           <a:p>
             <a:pPr algn="l">
+              <a:lnSpc>
+                <a:spcPct val="100000"/>
+              </a:lnSpc>
               <a:spcAft>
                 <a:spcPts val="110"/>
               </a:spcAft>
@@ -13384,11 +13813,14 @@
         </p:spPr>
         <p:txBody>
           <a:bodyPr wrap="square" lIns="0" rIns="0" tIns="0" bIns="0" anchor="t">
-            <a:spAutoFit/>
+            <a:normAutofit/>
           </a:bodyPr>
           <a:lstStyle/>
           <a:p>
             <a:pPr algn="l">
+              <a:lnSpc>
+                <a:spcPct val="100000"/>
+              </a:lnSpc>
               <a:spcAft>
                 <a:spcPts val="108"/>
               </a:spcAft>
@@ -13423,11 +13855,14 @@
         </p:spPr>
         <p:txBody>
           <a:bodyPr wrap="square" lIns="0" rIns="0" tIns="0" bIns="0" anchor="t">
-            <a:spAutoFit/>
+            <a:normAutofit/>
           </a:bodyPr>
           <a:lstStyle/>
           <a:p>
             <a:pPr algn="l">
+              <a:lnSpc>
+                <a:spcPct val="100000"/>
+              </a:lnSpc>
               <a:spcAft>
                 <a:spcPts val="131"/>
               </a:spcAft>
@@ -13462,11 +13897,14 @@
         </p:spPr>
         <p:txBody>
           <a:bodyPr wrap="square" lIns="0" rIns="0" tIns="0" bIns="0" anchor="t">
-            <a:spAutoFit/>
+            <a:normAutofit/>
           </a:bodyPr>
           <a:lstStyle/>
           <a:p>
             <a:pPr algn="l">
+              <a:lnSpc>
+                <a:spcPct val="100000"/>
+              </a:lnSpc>
               <a:spcAft>
                 <a:spcPts val="81"/>
               </a:spcAft>
@@ -13501,11 +13939,14 @@
         </p:spPr>
         <p:txBody>
           <a:bodyPr wrap="square" lIns="0" rIns="0" tIns="0" bIns="0" anchor="t">
-            <a:spAutoFit/>
+            <a:normAutofit/>
           </a:bodyPr>
           <a:lstStyle/>
           <a:p>
             <a:pPr algn="r">
+              <a:lnSpc>
+                <a:spcPct val="100000"/>
+              </a:lnSpc>
               <a:spcAft>
                 <a:spcPts val="86"/>
               </a:spcAft>
@@ -13603,11 +14044,14 @@
         </p:spPr>
         <p:txBody>
           <a:bodyPr wrap="square" lIns="0" rIns="0" tIns="0" bIns="0" anchor="t">
-            <a:spAutoFit/>
+            <a:normAutofit/>
           </a:bodyPr>
           <a:lstStyle/>
           <a:p>
             <a:pPr algn="l">
+              <a:lnSpc>
+                <a:spcPct val="100000"/>
+              </a:lnSpc>
               <a:spcAft>
                 <a:spcPts val="108"/>
               </a:spcAft>
@@ -13642,11 +14086,14 @@
         </p:spPr>
         <p:txBody>
           <a:bodyPr wrap="square" lIns="0" rIns="0" tIns="0" bIns="0" anchor="t">
-            <a:spAutoFit/>
+            <a:normAutofit/>
           </a:bodyPr>
           <a:lstStyle/>
           <a:p>
             <a:pPr algn="l">
+              <a:lnSpc>
+                <a:spcPct val="100000"/>
+              </a:lnSpc>
               <a:spcAft>
                 <a:spcPts val="300"/>
               </a:spcAft>
@@ -13681,11 +14128,14 @@
         </p:spPr>
         <p:txBody>
           <a:bodyPr wrap="square" lIns="0" rIns="0" tIns="0" bIns="0" anchor="t">
-            <a:spAutoFit/>
+            <a:normAutofit/>
           </a:bodyPr>
           <a:lstStyle/>
           <a:p>
             <a:pPr algn="l">
+              <a:lnSpc>
+                <a:spcPct val="100000"/>
+              </a:lnSpc>
               <a:spcAft>
                 <a:spcPts val="126"/>
               </a:spcAft>
@@ -13853,11 +14303,14 @@
         </p:spPr>
         <p:txBody>
           <a:bodyPr wrap="square" lIns="0" rIns="0" tIns="0" bIns="0" anchor="ctr">
-            <a:spAutoFit/>
+            <a:normAutofit/>
           </a:bodyPr>
           <a:lstStyle/>
           <a:p>
             <a:pPr algn="ctr">
+              <a:lnSpc>
+                <a:spcPct val="100000"/>
+              </a:lnSpc>
               <a:spcAft>
                 <a:spcPts val="96"/>
               </a:spcAft>
@@ -13892,11 +14345,14 @@
         </p:spPr>
         <p:txBody>
           <a:bodyPr wrap="square" lIns="0" rIns="0" tIns="0" bIns="0" anchor="t">
-            <a:spAutoFit/>
+            <a:normAutofit/>
           </a:bodyPr>
           <a:lstStyle/>
           <a:p>
             <a:pPr algn="l">
+              <a:lnSpc>
+                <a:spcPct val="100000"/>
+              </a:lnSpc>
               <a:spcAft>
                 <a:spcPts val="112"/>
               </a:spcAft>
@@ -13931,11 +14387,14 @@
         </p:spPr>
         <p:txBody>
           <a:bodyPr wrap="square" lIns="0" rIns="0" tIns="0" bIns="0" anchor="ctr">
-            <a:spAutoFit/>
+            <a:normAutofit/>
           </a:bodyPr>
           <a:lstStyle/>
           <a:p>
             <a:pPr algn="l">
+              <a:lnSpc>
+                <a:spcPct val="100000"/>
+              </a:lnSpc>
               <a:spcAft>
                 <a:spcPts val="92"/>
               </a:spcAft>
@@ -14060,11 +14519,14 @@
         </p:spPr>
         <p:txBody>
           <a:bodyPr wrap="square" lIns="0" rIns="0" tIns="0" bIns="0" anchor="ctr">
-            <a:spAutoFit/>
+            <a:normAutofit/>
           </a:bodyPr>
           <a:lstStyle/>
           <a:p>
             <a:pPr algn="ctr">
+              <a:lnSpc>
+                <a:spcPct val="100000"/>
+              </a:lnSpc>
               <a:spcAft>
                 <a:spcPts val="96"/>
               </a:spcAft>
@@ -14099,11 +14561,14 @@
         </p:spPr>
         <p:txBody>
           <a:bodyPr wrap="square" lIns="0" rIns="0" tIns="0" bIns="0" anchor="t">
-            <a:spAutoFit/>
+            <a:normAutofit/>
           </a:bodyPr>
           <a:lstStyle/>
           <a:p>
             <a:pPr algn="l">
+              <a:lnSpc>
+                <a:spcPct val="100000"/>
+              </a:lnSpc>
               <a:spcAft>
                 <a:spcPts val="112"/>
               </a:spcAft>
@@ -14138,11 +14603,14 @@
         </p:spPr>
         <p:txBody>
           <a:bodyPr wrap="square" lIns="0" rIns="0" tIns="0" bIns="0" anchor="ctr">
-            <a:spAutoFit/>
+            <a:normAutofit/>
           </a:bodyPr>
           <a:lstStyle/>
           <a:p>
             <a:pPr algn="l">
+              <a:lnSpc>
+                <a:spcPct val="100000"/>
+              </a:lnSpc>
               <a:spcAft>
                 <a:spcPts val="92"/>
               </a:spcAft>
@@ -14267,11 +14735,14 @@
         </p:spPr>
         <p:txBody>
           <a:bodyPr wrap="square" lIns="0" rIns="0" tIns="0" bIns="0" anchor="ctr">
-            <a:spAutoFit/>
+            <a:normAutofit/>
           </a:bodyPr>
           <a:lstStyle/>
           <a:p>
             <a:pPr algn="ctr">
+              <a:lnSpc>
+                <a:spcPct val="100000"/>
+              </a:lnSpc>
               <a:spcAft>
                 <a:spcPts val="96"/>
               </a:spcAft>
@@ -14306,11 +14777,14 @@
         </p:spPr>
         <p:txBody>
           <a:bodyPr wrap="square" lIns="0" rIns="0" tIns="0" bIns="0" anchor="t">
-            <a:spAutoFit/>
+            <a:normAutofit/>
           </a:bodyPr>
           <a:lstStyle/>
           <a:p>
             <a:pPr algn="l">
+              <a:lnSpc>
+                <a:spcPct val="100000"/>
+              </a:lnSpc>
               <a:spcAft>
                 <a:spcPts val="112"/>
               </a:spcAft>
@@ -14345,11 +14819,14 @@
         </p:spPr>
         <p:txBody>
           <a:bodyPr wrap="square" lIns="0" rIns="0" tIns="0" bIns="0" anchor="ctr">
-            <a:spAutoFit/>
+            <a:normAutofit/>
           </a:bodyPr>
           <a:lstStyle/>
           <a:p>
             <a:pPr algn="l">
+              <a:lnSpc>
+                <a:spcPct val="100000"/>
+              </a:lnSpc>
               <a:spcAft>
                 <a:spcPts val="92"/>
               </a:spcAft>
@@ -14474,11 +14951,14 @@
         </p:spPr>
         <p:txBody>
           <a:bodyPr wrap="square" lIns="0" rIns="0" tIns="0" bIns="0" anchor="ctr">
-            <a:spAutoFit/>
+            <a:normAutofit/>
           </a:bodyPr>
           <a:lstStyle/>
           <a:p>
             <a:pPr algn="ctr">
+              <a:lnSpc>
+                <a:spcPct val="100000"/>
+              </a:lnSpc>
               <a:spcAft>
                 <a:spcPts val="96"/>
               </a:spcAft>
@@ -14513,11 +14993,14 @@
         </p:spPr>
         <p:txBody>
           <a:bodyPr wrap="square" lIns="0" rIns="0" tIns="0" bIns="0" anchor="t">
-            <a:spAutoFit/>
+            <a:normAutofit/>
           </a:bodyPr>
           <a:lstStyle/>
           <a:p>
             <a:pPr algn="l">
+              <a:lnSpc>
+                <a:spcPct val="100000"/>
+              </a:lnSpc>
               <a:spcAft>
                 <a:spcPts val="112"/>
               </a:spcAft>
@@ -14552,11 +15035,14 @@
         </p:spPr>
         <p:txBody>
           <a:bodyPr wrap="square" lIns="0" rIns="0" tIns="0" bIns="0" anchor="ctr">
-            <a:spAutoFit/>
+            <a:normAutofit/>
           </a:bodyPr>
           <a:lstStyle/>
           <a:p>
             <a:pPr algn="l">
+              <a:lnSpc>
+                <a:spcPct val="100000"/>
+              </a:lnSpc>
               <a:spcAft>
                 <a:spcPts val="92"/>
               </a:spcAft>
@@ -14681,11 +15167,14 @@
         </p:spPr>
         <p:txBody>
           <a:bodyPr wrap="square" lIns="0" rIns="0" tIns="0" bIns="0" anchor="ctr">
-            <a:spAutoFit/>
+            <a:normAutofit/>
           </a:bodyPr>
           <a:lstStyle/>
           <a:p>
             <a:pPr algn="ctr">
+              <a:lnSpc>
+                <a:spcPct val="100000"/>
+              </a:lnSpc>
               <a:spcAft>
                 <a:spcPts val="96"/>
               </a:spcAft>
@@ -14720,11 +15209,14 @@
         </p:spPr>
         <p:txBody>
           <a:bodyPr wrap="square" lIns="0" rIns="0" tIns="0" bIns="0" anchor="t">
-            <a:spAutoFit/>
+            <a:normAutofit/>
           </a:bodyPr>
           <a:lstStyle/>
           <a:p>
             <a:pPr algn="l">
+              <a:lnSpc>
+                <a:spcPct val="100000"/>
+              </a:lnSpc>
               <a:spcAft>
                 <a:spcPts val="112"/>
               </a:spcAft>
@@ -14759,11 +15251,14 @@
         </p:spPr>
         <p:txBody>
           <a:bodyPr wrap="square" lIns="0" rIns="0" tIns="0" bIns="0" anchor="ctr">
-            <a:spAutoFit/>
+            <a:normAutofit/>
           </a:bodyPr>
           <a:lstStyle/>
           <a:p>
             <a:pPr algn="l">
+              <a:lnSpc>
+                <a:spcPct val="100000"/>
+              </a:lnSpc>
               <a:spcAft>
                 <a:spcPts val="92"/>
               </a:spcAft>
@@ -14888,11 +15383,14 @@
         </p:spPr>
         <p:txBody>
           <a:bodyPr wrap="square" lIns="0" rIns="0" tIns="0" bIns="0" anchor="ctr">
-            <a:spAutoFit/>
+            <a:normAutofit/>
           </a:bodyPr>
           <a:lstStyle/>
           <a:p>
             <a:pPr algn="ctr">
+              <a:lnSpc>
+                <a:spcPct val="100000"/>
+              </a:lnSpc>
               <a:spcAft>
                 <a:spcPts val="96"/>
               </a:spcAft>
@@ -14927,11 +15425,14 @@
         </p:spPr>
         <p:txBody>
           <a:bodyPr wrap="square" lIns="0" rIns="0" tIns="0" bIns="0" anchor="t">
-            <a:spAutoFit/>
+            <a:normAutofit/>
           </a:bodyPr>
           <a:lstStyle/>
           <a:p>
             <a:pPr algn="l">
+              <a:lnSpc>
+                <a:spcPct val="100000"/>
+              </a:lnSpc>
               <a:spcAft>
                 <a:spcPts val="112"/>
               </a:spcAft>
@@ -14966,11 +15467,14 @@
         </p:spPr>
         <p:txBody>
           <a:bodyPr wrap="square" lIns="0" rIns="0" tIns="0" bIns="0" anchor="ctr">
-            <a:spAutoFit/>
+            <a:normAutofit/>
           </a:bodyPr>
           <a:lstStyle/>
           <a:p>
             <a:pPr algn="l">
+              <a:lnSpc>
+                <a:spcPct val="100000"/>
+              </a:lnSpc>
               <a:spcAft>
                 <a:spcPts val="92"/>
               </a:spcAft>
@@ -15095,11 +15599,14 @@
         </p:spPr>
         <p:txBody>
           <a:bodyPr wrap="square" lIns="0" rIns="0" tIns="0" bIns="0" anchor="ctr">
-            <a:spAutoFit/>
+            <a:normAutofit/>
           </a:bodyPr>
           <a:lstStyle/>
           <a:p>
             <a:pPr algn="ctr">
+              <a:lnSpc>
+                <a:spcPct val="100000"/>
+              </a:lnSpc>
               <a:spcAft>
                 <a:spcPts val="96"/>
               </a:spcAft>
@@ -15134,11 +15641,14 @@
         </p:spPr>
         <p:txBody>
           <a:bodyPr wrap="square" lIns="0" rIns="0" tIns="0" bIns="0" anchor="t">
-            <a:spAutoFit/>
+            <a:normAutofit/>
           </a:bodyPr>
           <a:lstStyle/>
           <a:p>
             <a:pPr algn="l">
+              <a:lnSpc>
+                <a:spcPct val="100000"/>
+              </a:lnSpc>
               <a:spcAft>
                 <a:spcPts val="112"/>
               </a:spcAft>
@@ -15173,11 +15683,14 @@
         </p:spPr>
         <p:txBody>
           <a:bodyPr wrap="square" lIns="0" rIns="0" tIns="0" bIns="0" anchor="ctr">
-            <a:spAutoFit/>
+            <a:normAutofit/>
           </a:bodyPr>
           <a:lstStyle/>
           <a:p>
             <a:pPr algn="l">
+              <a:lnSpc>
+                <a:spcPct val="100000"/>
+              </a:lnSpc>
               <a:spcAft>
                 <a:spcPts val="92"/>
               </a:spcAft>
@@ -15302,11 +15815,14 @@
         </p:spPr>
         <p:txBody>
           <a:bodyPr wrap="square" lIns="0" rIns="0" tIns="0" bIns="0" anchor="ctr">
-            <a:spAutoFit/>
+            <a:normAutofit/>
           </a:bodyPr>
           <a:lstStyle/>
           <a:p>
             <a:pPr algn="ctr">
+              <a:lnSpc>
+                <a:spcPct val="100000"/>
+              </a:lnSpc>
               <a:spcAft>
                 <a:spcPts val="96"/>
               </a:spcAft>
@@ -15341,11 +15857,14 @@
         </p:spPr>
         <p:txBody>
           <a:bodyPr wrap="square" lIns="0" rIns="0" tIns="0" bIns="0" anchor="t">
-            <a:spAutoFit/>
+            <a:normAutofit/>
           </a:bodyPr>
           <a:lstStyle/>
           <a:p>
             <a:pPr algn="l">
+              <a:lnSpc>
+                <a:spcPct val="100000"/>
+              </a:lnSpc>
               <a:spcAft>
                 <a:spcPts val="112"/>
               </a:spcAft>
@@ -15380,11 +15899,14 @@
         </p:spPr>
         <p:txBody>
           <a:bodyPr wrap="square" lIns="0" rIns="0" tIns="0" bIns="0" anchor="ctr">
-            <a:spAutoFit/>
+            <a:normAutofit/>
           </a:bodyPr>
           <a:lstStyle/>
           <a:p>
             <a:pPr algn="l">
+              <a:lnSpc>
+                <a:spcPct val="100000"/>
+              </a:lnSpc>
               <a:spcAft>
                 <a:spcPts val="92"/>
               </a:spcAft>
@@ -15509,11 +16031,14 @@
         </p:spPr>
         <p:txBody>
           <a:bodyPr wrap="square" lIns="0" rIns="0" tIns="0" bIns="0" anchor="ctr">
-            <a:spAutoFit/>
+            <a:normAutofit/>
           </a:bodyPr>
           <a:lstStyle/>
           <a:p>
             <a:pPr algn="ctr">
+              <a:lnSpc>
+                <a:spcPct val="100000"/>
+              </a:lnSpc>
               <a:spcAft>
                 <a:spcPts val="96"/>
               </a:spcAft>
@@ -15548,11 +16073,14 @@
         </p:spPr>
         <p:txBody>
           <a:bodyPr wrap="square" lIns="0" rIns="0" tIns="0" bIns="0" anchor="t">
-            <a:spAutoFit/>
+            <a:normAutofit/>
           </a:bodyPr>
           <a:lstStyle/>
           <a:p>
             <a:pPr algn="l">
+              <a:lnSpc>
+                <a:spcPct val="100000"/>
+              </a:lnSpc>
               <a:spcAft>
                 <a:spcPts val="112"/>
               </a:spcAft>
@@ -15587,11 +16115,14 @@
         </p:spPr>
         <p:txBody>
           <a:bodyPr wrap="square" lIns="0" rIns="0" tIns="0" bIns="0" anchor="ctr">
-            <a:spAutoFit/>
+            <a:normAutofit/>
           </a:bodyPr>
           <a:lstStyle/>
           <a:p>
             <a:pPr algn="l">
+              <a:lnSpc>
+                <a:spcPct val="100000"/>
+              </a:lnSpc>
               <a:spcAft>
                 <a:spcPts val="92"/>
               </a:spcAft>
@@ -15716,11 +16247,14 @@
         </p:spPr>
         <p:txBody>
           <a:bodyPr wrap="square" lIns="0" rIns="0" tIns="0" bIns="0" anchor="ctr">
-            <a:spAutoFit/>
+            <a:normAutofit/>
           </a:bodyPr>
           <a:lstStyle/>
           <a:p>
             <a:pPr algn="ctr">
+              <a:lnSpc>
+                <a:spcPct val="100000"/>
+              </a:lnSpc>
               <a:spcAft>
                 <a:spcPts val="96"/>
               </a:spcAft>
@@ -15755,11 +16289,14 @@
         </p:spPr>
         <p:txBody>
           <a:bodyPr wrap="square" lIns="0" rIns="0" tIns="0" bIns="0" anchor="t">
-            <a:spAutoFit/>
+            <a:normAutofit/>
           </a:bodyPr>
           <a:lstStyle/>
           <a:p>
             <a:pPr algn="l">
+              <a:lnSpc>
+                <a:spcPct val="100000"/>
+              </a:lnSpc>
               <a:spcAft>
                 <a:spcPts val="112"/>
               </a:spcAft>
@@ -15794,11 +16331,14 @@
         </p:spPr>
         <p:txBody>
           <a:bodyPr wrap="square" lIns="0" rIns="0" tIns="0" bIns="0" anchor="ctr">
-            <a:spAutoFit/>
+            <a:normAutofit/>
           </a:bodyPr>
           <a:lstStyle/>
           <a:p>
             <a:pPr algn="l">
+              <a:lnSpc>
+                <a:spcPct val="100000"/>
+              </a:lnSpc>
               <a:spcAft>
                 <a:spcPts val="92"/>
               </a:spcAft>
@@ -15833,11 +16373,14 @@
         </p:spPr>
         <p:txBody>
           <a:bodyPr wrap="square" lIns="0" rIns="0" tIns="0" bIns="0" anchor="t">
-            <a:spAutoFit/>
+            <a:normAutofit/>
           </a:bodyPr>
           <a:lstStyle/>
           <a:p>
             <a:pPr algn="l">
+              <a:lnSpc>
+                <a:spcPct val="100000"/>
+              </a:lnSpc>
               <a:spcAft>
                 <a:spcPts val="81"/>
               </a:spcAft>
@@ -15872,11 +16415,14 @@
         </p:spPr>
         <p:txBody>
           <a:bodyPr wrap="square" lIns="0" rIns="0" tIns="0" bIns="0" anchor="t">
-            <a:spAutoFit/>
+            <a:normAutofit/>
           </a:bodyPr>
           <a:lstStyle/>
           <a:p>
             <a:pPr algn="r">
+              <a:lnSpc>
+                <a:spcPct val="100000"/>
+              </a:lnSpc>
               <a:spcAft>
                 <a:spcPts val="86"/>
               </a:spcAft>
@@ -15974,11 +16520,14 @@
         </p:spPr>
         <p:txBody>
           <a:bodyPr wrap="square" lIns="0" rIns="0" tIns="0" bIns="0" anchor="t">
-            <a:spAutoFit/>
+            <a:normAutofit/>
           </a:bodyPr>
           <a:lstStyle/>
           <a:p>
             <a:pPr algn="l">
+              <a:lnSpc>
+                <a:spcPct val="100000"/>
+              </a:lnSpc>
               <a:spcAft>
                 <a:spcPts val="108"/>
               </a:spcAft>
@@ -16013,11 +16562,14 @@
         </p:spPr>
         <p:txBody>
           <a:bodyPr wrap="square" lIns="0" rIns="0" tIns="0" bIns="0" anchor="t">
-            <a:spAutoFit/>
+            <a:normAutofit/>
           </a:bodyPr>
           <a:lstStyle/>
           <a:p>
             <a:pPr algn="l">
+              <a:lnSpc>
+                <a:spcPct val="100000"/>
+              </a:lnSpc>
               <a:spcAft>
                 <a:spcPts val="300"/>
               </a:spcAft>
@@ -16052,11 +16604,14 @@
         </p:spPr>
         <p:txBody>
           <a:bodyPr wrap="square" lIns="0" rIns="0" tIns="0" bIns="0" anchor="t">
-            <a:spAutoFit/>
+            <a:normAutofit/>
           </a:bodyPr>
           <a:lstStyle/>
           <a:p>
             <a:pPr algn="l">
+              <a:lnSpc>
+                <a:spcPct val="100000"/>
+              </a:lnSpc>
               <a:spcAft>
                 <a:spcPts val="126"/>
               </a:spcAft>
@@ -16179,11 +16734,14 @@
         </p:spPr>
         <p:txBody>
           <a:bodyPr wrap="square" lIns="0" rIns="0" tIns="0" bIns="0" anchor="ctr">
-            <a:spAutoFit/>
+            <a:normAutofit/>
           </a:bodyPr>
           <a:lstStyle/>
           <a:p>
             <a:pPr algn="ctr">
+              <a:lnSpc>
+                <a:spcPct val="100000"/>
+              </a:lnSpc>
               <a:spcAft>
                 <a:spcPts val="96"/>
               </a:spcAft>
@@ -16218,11 +16776,14 @@
         </p:spPr>
         <p:txBody>
           <a:bodyPr wrap="square" lIns="0" rIns="0" tIns="0" bIns="0" anchor="ctr">
-            <a:spAutoFit/>
+            <a:normAutofit/>
           </a:bodyPr>
           <a:lstStyle/>
           <a:p>
             <a:pPr algn="l">
+              <a:lnSpc>
+                <a:spcPct val="100000"/>
+              </a:lnSpc>
               <a:spcAft>
                 <a:spcPts val="126"/>
               </a:spcAft>
@@ -16302,11 +16863,14 @@
         </p:spPr>
         <p:txBody>
           <a:bodyPr wrap="square" lIns="0" rIns="0" tIns="0" bIns="0" anchor="ctr">
-            <a:spAutoFit/>
+            <a:normAutofit/>
           </a:bodyPr>
           <a:lstStyle/>
           <a:p>
             <a:pPr algn="ctr">
+              <a:lnSpc>
+                <a:spcPct val="100000"/>
+              </a:lnSpc>
               <a:spcAft>
                 <a:spcPts val="96"/>
               </a:spcAft>
@@ -16341,11 +16905,14 @@
         </p:spPr>
         <p:txBody>
           <a:bodyPr wrap="square" lIns="0" rIns="0" tIns="0" bIns="0" anchor="ctr">
-            <a:spAutoFit/>
+            <a:normAutofit/>
           </a:bodyPr>
           <a:lstStyle/>
           <a:p>
             <a:pPr algn="l">
+              <a:lnSpc>
+                <a:spcPct val="100000"/>
+              </a:lnSpc>
               <a:spcAft>
                 <a:spcPts val="126"/>
               </a:spcAft>
@@ -16425,11 +16992,14 @@
         </p:spPr>
         <p:txBody>
           <a:bodyPr wrap="square" lIns="0" rIns="0" tIns="0" bIns="0" anchor="ctr">
-            <a:spAutoFit/>
+            <a:normAutofit/>
           </a:bodyPr>
           <a:lstStyle/>
           <a:p>
             <a:pPr algn="ctr">
+              <a:lnSpc>
+                <a:spcPct val="100000"/>
+              </a:lnSpc>
               <a:spcAft>
                 <a:spcPts val="96"/>
               </a:spcAft>
@@ -16464,11 +17034,14 @@
         </p:spPr>
         <p:txBody>
           <a:bodyPr wrap="square" lIns="0" rIns="0" tIns="0" bIns="0" anchor="ctr">
-            <a:spAutoFit/>
+            <a:normAutofit/>
           </a:bodyPr>
           <a:lstStyle/>
           <a:p>
             <a:pPr algn="l">
+              <a:lnSpc>
+                <a:spcPct val="100000"/>
+              </a:lnSpc>
               <a:spcAft>
                 <a:spcPts val="126"/>
               </a:spcAft>
@@ -16548,11 +17121,14 @@
         </p:spPr>
         <p:txBody>
           <a:bodyPr wrap="square" lIns="0" rIns="0" tIns="0" bIns="0" anchor="ctr">
-            <a:spAutoFit/>
+            <a:normAutofit/>
           </a:bodyPr>
           <a:lstStyle/>
           <a:p>
             <a:pPr algn="ctr">
+              <a:lnSpc>
+                <a:spcPct val="100000"/>
+              </a:lnSpc>
               <a:spcAft>
                 <a:spcPts val="96"/>
               </a:spcAft>
@@ -16587,11 +17163,14 @@
         </p:spPr>
         <p:txBody>
           <a:bodyPr wrap="square" lIns="0" rIns="0" tIns="0" bIns="0" anchor="ctr">
-            <a:spAutoFit/>
+            <a:normAutofit/>
           </a:bodyPr>
           <a:lstStyle/>
           <a:p>
             <a:pPr algn="l">
+              <a:lnSpc>
+                <a:spcPct val="100000"/>
+              </a:lnSpc>
               <a:spcAft>
                 <a:spcPts val="126"/>
               </a:spcAft>
@@ -16671,11 +17250,14 @@
         </p:spPr>
         <p:txBody>
           <a:bodyPr wrap="square" lIns="0" rIns="0" tIns="0" bIns="0" anchor="ctr">
-            <a:spAutoFit/>
+            <a:normAutofit/>
           </a:bodyPr>
           <a:lstStyle/>
           <a:p>
             <a:pPr algn="ctr">
+              <a:lnSpc>
+                <a:spcPct val="100000"/>
+              </a:lnSpc>
               <a:spcAft>
                 <a:spcPts val="96"/>
               </a:spcAft>
@@ -16710,11 +17292,14 @@
         </p:spPr>
         <p:txBody>
           <a:bodyPr wrap="square" lIns="0" rIns="0" tIns="0" bIns="0" anchor="ctr">
-            <a:spAutoFit/>
+            <a:normAutofit/>
           </a:bodyPr>
           <a:lstStyle/>
           <a:p>
             <a:pPr algn="l">
+              <a:lnSpc>
+                <a:spcPct val="100000"/>
+              </a:lnSpc>
               <a:spcAft>
                 <a:spcPts val="126"/>
               </a:spcAft>
@@ -16794,11 +17379,14 @@
         </p:spPr>
         <p:txBody>
           <a:bodyPr wrap="square" lIns="0" rIns="0" tIns="0" bIns="0" anchor="ctr">
-            <a:spAutoFit/>
+            <a:normAutofit/>
           </a:bodyPr>
           <a:lstStyle/>
           <a:p>
             <a:pPr algn="ctr">
+              <a:lnSpc>
+                <a:spcPct val="100000"/>
+              </a:lnSpc>
               <a:spcAft>
                 <a:spcPts val="96"/>
               </a:spcAft>
@@ -16833,11 +17421,14 @@
         </p:spPr>
         <p:txBody>
           <a:bodyPr wrap="square" lIns="0" rIns="0" tIns="0" bIns="0" anchor="ctr">
-            <a:spAutoFit/>
+            <a:normAutofit/>
           </a:bodyPr>
           <a:lstStyle/>
           <a:p>
             <a:pPr algn="l">
+              <a:lnSpc>
+                <a:spcPct val="100000"/>
+              </a:lnSpc>
               <a:spcAft>
                 <a:spcPts val="126"/>
               </a:spcAft>
@@ -16917,11 +17508,14 @@
         </p:spPr>
         <p:txBody>
           <a:bodyPr wrap="square" lIns="0" rIns="0" tIns="0" bIns="0" anchor="ctr">
-            <a:spAutoFit/>
+            <a:normAutofit/>
           </a:bodyPr>
           <a:lstStyle/>
           <a:p>
             <a:pPr algn="ctr">
+              <a:lnSpc>
+                <a:spcPct val="100000"/>
+              </a:lnSpc>
               <a:spcAft>
                 <a:spcPts val="96"/>
               </a:spcAft>
@@ -16956,11 +17550,14 @@
         </p:spPr>
         <p:txBody>
           <a:bodyPr wrap="square" lIns="0" rIns="0" tIns="0" bIns="0" anchor="ctr">
-            <a:spAutoFit/>
+            <a:normAutofit/>
           </a:bodyPr>
           <a:lstStyle/>
           <a:p>
             <a:pPr algn="l">
+              <a:lnSpc>
+                <a:spcPct val="100000"/>
+              </a:lnSpc>
               <a:spcAft>
                 <a:spcPts val="126"/>
               </a:spcAft>
@@ -17040,11 +17637,14 @@
         </p:spPr>
         <p:txBody>
           <a:bodyPr wrap="square" lIns="0" rIns="0" tIns="0" bIns="0" anchor="ctr">
-            <a:spAutoFit/>
+            <a:normAutofit/>
           </a:bodyPr>
           <a:lstStyle/>
           <a:p>
             <a:pPr algn="ctr">
+              <a:lnSpc>
+                <a:spcPct val="100000"/>
+              </a:lnSpc>
               <a:spcAft>
                 <a:spcPts val="96"/>
               </a:spcAft>
@@ -17079,11 +17679,14 @@
         </p:spPr>
         <p:txBody>
           <a:bodyPr wrap="square" lIns="0" rIns="0" tIns="0" bIns="0" anchor="ctr">
-            <a:spAutoFit/>
+            <a:normAutofit/>
           </a:bodyPr>
           <a:lstStyle/>
           <a:p>
             <a:pPr algn="l">
+              <a:lnSpc>
+                <a:spcPct val="100000"/>
+              </a:lnSpc>
               <a:spcAft>
                 <a:spcPts val="126"/>
               </a:spcAft>
@@ -17163,11 +17766,14 @@
         </p:spPr>
         <p:txBody>
           <a:bodyPr wrap="square" lIns="0" rIns="0" tIns="0" bIns="0" anchor="ctr">
-            <a:spAutoFit/>
+            <a:normAutofit/>
           </a:bodyPr>
           <a:lstStyle/>
           <a:p>
             <a:pPr algn="ctr">
+              <a:lnSpc>
+                <a:spcPct val="100000"/>
+              </a:lnSpc>
               <a:spcAft>
                 <a:spcPts val="128"/>
               </a:spcAft>
@@ -17202,11 +17808,14 @@
         </p:spPr>
         <p:txBody>
           <a:bodyPr wrap="square" lIns="0" rIns="0" tIns="0" bIns="0" anchor="t">
-            <a:spAutoFit/>
+            <a:normAutofit/>
           </a:bodyPr>
           <a:lstStyle/>
           <a:p>
             <a:pPr algn="l">
+              <a:lnSpc>
+                <a:spcPct val="100000"/>
+              </a:lnSpc>
               <a:spcAft>
                 <a:spcPts val="81"/>
               </a:spcAft>
@@ -17241,11 +17850,14 @@
         </p:spPr>
         <p:txBody>
           <a:bodyPr wrap="square" lIns="0" rIns="0" tIns="0" bIns="0" anchor="t">
-            <a:spAutoFit/>
+            <a:normAutofit/>
           </a:bodyPr>
           <a:lstStyle/>
           <a:p>
             <a:pPr algn="r">
+              <a:lnSpc>
+                <a:spcPct val="100000"/>
+              </a:lnSpc>
               <a:spcAft>
                 <a:spcPts val="86"/>
               </a:spcAft>
@@ -17343,11 +17955,14 @@
         </p:spPr>
         <p:txBody>
           <a:bodyPr wrap="square" lIns="0" rIns="0" tIns="0" bIns="0" anchor="t">
-            <a:spAutoFit/>
+            <a:normAutofit/>
           </a:bodyPr>
           <a:lstStyle/>
           <a:p>
             <a:pPr algn="l">
+              <a:lnSpc>
+                <a:spcPct val="100000"/>
+              </a:lnSpc>
               <a:spcAft>
                 <a:spcPts val="108"/>
               </a:spcAft>
@@ -17382,11 +17997,14 @@
         </p:spPr>
         <p:txBody>
           <a:bodyPr wrap="square" lIns="0" rIns="0" tIns="0" bIns="0" anchor="t">
-            <a:spAutoFit/>
+            <a:normAutofit/>
           </a:bodyPr>
           <a:lstStyle/>
           <a:p>
             <a:pPr algn="l">
+              <a:lnSpc>
+                <a:spcPct val="100000"/>
+              </a:lnSpc>
               <a:spcAft>
                 <a:spcPts val="300"/>
               </a:spcAft>
@@ -17421,11 +18039,14 @@
         </p:spPr>
         <p:txBody>
           <a:bodyPr wrap="square" lIns="0" rIns="0" tIns="0" bIns="0" anchor="t">
-            <a:spAutoFit/>
+            <a:normAutofit/>
           </a:bodyPr>
           <a:lstStyle/>
           <a:p>
             <a:pPr algn="l">
+              <a:lnSpc>
+                <a:spcPct val="100000"/>
+              </a:lnSpc>
               <a:spcAft>
                 <a:spcPts val="126"/>
               </a:spcAft>
@@ -17593,11 +18214,14 @@
         </p:spPr>
         <p:txBody>
           <a:bodyPr wrap="square" lIns="0" rIns="0" tIns="0" bIns="0" anchor="t">
-            <a:spAutoFit/>
+            <a:normAutofit/>
           </a:bodyPr>
           <a:lstStyle/>
           <a:p>
             <a:pPr algn="l">
+              <a:lnSpc>
+                <a:spcPct val="100000"/>
+              </a:lnSpc>
               <a:spcAft>
                 <a:spcPts val="102"/>
               </a:spcAft>
@@ -17632,11 +18256,14 @@
         </p:spPr>
         <p:txBody>
           <a:bodyPr wrap="square" lIns="0" rIns="0" tIns="0" bIns="0" anchor="t">
-            <a:spAutoFit/>
+            <a:normAutofit/>
           </a:bodyPr>
           <a:lstStyle/>
           <a:p>
             <a:pPr algn="l">
+              <a:lnSpc>
+                <a:spcPct val="100000"/>
+              </a:lnSpc>
               <a:spcAft>
                 <a:spcPts val="179"/>
               </a:spcAft>
@@ -17671,11 +18298,14 @@
         </p:spPr>
         <p:txBody>
           <a:bodyPr wrap="square" lIns="0" rIns="0" tIns="0" bIns="0" anchor="t">
-            <a:spAutoFit/>
+            <a:normAutofit/>
           </a:bodyPr>
           <a:lstStyle/>
           <a:p>
             <a:pPr algn="l">
+              <a:lnSpc>
+                <a:spcPct val="100000"/>
+              </a:lnSpc>
               <a:spcAft>
                 <a:spcPts val="110"/>
               </a:spcAft>
@@ -17800,11 +18430,14 @@
         </p:spPr>
         <p:txBody>
           <a:bodyPr wrap="square" lIns="0" rIns="0" tIns="0" bIns="0" anchor="t">
-            <a:spAutoFit/>
+            <a:normAutofit/>
           </a:bodyPr>
           <a:lstStyle/>
           <a:p>
             <a:pPr algn="l">
+              <a:lnSpc>
+                <a:spcPct val="100000"/>
+              </a:lnSpc>
               <a:spcAft>
                 <a:spcPts val="102"/>
               </a:spcAft>
@@ -17839,11 +18472,14 @@
         </p:spPr>
         <p:txBody>
           <a:bodyPr wrap="square" lIns="0" rIns="0" tIns="0" bIns="0" anchor="t">
-            <a:spAutoFit/>
+            <a:normAutofit/>
           </a:bodyPr>
           <a:lstStyle/>
           <a:p>
             <a:pPr algn="l">
+              <a:lnSpc>
+                <a:spcPct val="100000"/>
+              </a:lnSpc>
               <a:spcAft>
                 <a:spcPts val="179"/>
               </a:spcAft>
@@ -17878,11 +18514,14 @@
         </p:spPr>
         <p:txBody>
           <a:bodyPr wrap="square" lIns="0" rIns="0" tIns="0" bIns="0" anchor="t">
-            <a:spAutoFit/>
+            <a:normAutofit/>
           </a:bodyPr>
           <a:lstStyle/>
           <a:p>
             <a:pPr algn="l">
+              <a:lnSpc>
+                <a:spcPct val="100000"/>
+              </a:lnSpc>
               <a:spcAft>
                 <a:spcPts val="110"/>
               </a:spcAft>
@@ -18007,11 +18646,14 @@
         </p:spPr>
         <p:txBody>
           <a:bodyPr wrap="square" lIns="0" rIns="0" tIns="0" bIns="0" anchor="t">
-            <a:spAutoFit/>
+            <a:normAutofit/>
           </a:bodyPr>
           <a:lstStyle/>
           <a:p>
             <a:pPr algn="l">
+              <a:lnSpc>
+                <a:spcPct val="100000"/>
+              </a:lnSpc>
               <a:spcAft>
                 <a:spcPts val="102"/>
               </a:spcAft>
@@ -18046,11 +18688,14 @@
         </p:spPr>
         <p:txBody>
           <a:bodyPr wrap="square" lIns="0" rIns="0" tIns="0" bIns="0" anchor="t">
-            <a:spAutoFit/>
+            <a:normAutofit/>
           </a:bodyPr>
           <a:lstStyle/>
           <a:p>
             <a:pPr algn="l">
+              <a:lnSpc>
+                <a:spcPct val="100000"/>
+              </a:lnSpc>
               <a:spcAft>
                 <a:spcPts val="179"/>
               </a:spcAft>
@@ -18085,11 +18730,14 @@
         </p:spPr>
         <p:txBody>
           <a:bodyPr wrap="square" lIns="0" rIns="0" tIns="0" bIns="0" anchor="t">
-            <a:spAutoFit/>
+            <a:normAutofit/>
           </a:bodyPr>
           <a:lstStyle/>
           <a:p>
             <a:pPr algn="l">
+              <a:lnSpc>
+                <a:spcPct val="100000"/>
+              </a:lnSpc>
               <a:spcAft>
                 <a:spcPts val="110"/>
               </a:spcAft>
@@ -18169,11 +18817,14 @@
         </p:spPr>
         <p:txBody>
           <a:bodyPr wrap="square" lIns="0" rIns="0" tIns="0" bIns="0" anchor="t">
-            <a:spAutoFit/>
+            <a:normAutofit/>
           </a:bodyPr>
           <a:lstStyle/>
           <a:p>
             <a:pPr algn="l">
+              <a:lnSpc>
+                <a:spcPct val="100000"/>
+              </a:lnSpc>
               <a:spcAft>
                 <a:spcPts val="102"/>
               </a:spcAft>
@@ -18208,11 +18859,14 @@
         </p:spPr>
         <p:txBody>
           <a:bodyPr wrap="square" lIns="0" rIns="0" tIns="0" bIns="0" anchor="ctr">
-            <a:spAutoFit/>
+            <a:normAutofit/>
           </a:bodyPr>
           <a:lstStyle/>
           <a:p>
             <a:pPr algn="l">
+              <a:lnSpc>
+                <a:spcPct val="100000"/>
+              </a:lnSpc>
               <a:spcAft>
                 <a:spcPts val="121"/>
               </a:spcAft>
@@ -18247,11 +18901,14 @@
         </p:spPr>
         <p:txBody>
           <a:bodyPr wrap="square" lIns="0" rIns="0" tIns="0" bIns="0" anchor="t">
-            <a:spAutoFit/>
+            <a:normAutofit/>
           </a:bodyPr>
           <a:lstStyle/>
           <a:p>
             <a:pPr algn="ctr">
+              <a:lnSpc>
+                <a:spcPct val="100000"/>
+              </a:lnSpc>
               <a:spcAft>
                 <a:spcPts val="105"/>
               </a:spcAft>
@@ -18331,11 +18988,14 @@
         </p:spPr>
         <p:txBody>
           <a:bodyPr wrap="square" lIns="0" rIns="0" tIns="0" bIns="0" anchor="t">
-            <a:spAutoFit/>
+            <a:normAutofit/>
           </a:bodyPr>
           <a:lstStyle/>
           <a:p>
             <a:pPr algn="ctr">
+              <a:lnSpc>
+                <a:spcPct val="100000"/>
+              </a:lnSpc>
               <a:spcAft>
                 <a:spcPts val="104"/>
               </a:spcAft>
@@ -18370,11 +19030,14 @@
         </p:spPr>
         <p:txBody>
           <a:bodyPr wrap="square" lIns="0" rIns="0" tIns="0" bIns="0" anchor="t">
-            <a:spAutoFit/>
+            <a:normAutofit/>
           </a:bodyPr>
           <a:lstStyle/>
           <a:p>
             <a:pPr algn="l">
+              <a:lnSpc>
+                <a:spcPct val="100000"/>
+              </a:lnSpc>
               <a:spcAft>
                 <a:spcPts val="81"/>
               </a:spcAft>
@@ -18409,11 +19072,14 @@
         </p:spPr>
         <p:txBody>
           <a:bodyPr wrap="square" lIns="0" rIns="0" tIns="0" bIns="0" anchor="t">
-            <a:spAutoFit/>
+            <a:normAutofit/>
           </a:bodyPr>
           <a:lstStyle/>
           <a:p>
             <a:pPr algn="r">
+              <a:lnSpc>
+                <a:spcPct val="100000"/>
+              </a:lnSpc>
               <a:spcAft>
                 <a:spcPts val="86"/>
               </a:spcAft>
@@ -18511,11 +19177,14 @@
         </p:spPr>
         <p:txBody>
           <a:bodyPr wrap="square" lIns="0" rIns="0" tIns="0" bIns="0" anchor="t">
-            <a:spAutoFit/>
+            <a:normAutofit/>
           </a:bodyPr>
           <a:lstStyle/>
           <a:p>
             <a:pPr algn="l">
+              <a:lnSpc>
+                <a:spcPct val="100000"/>
+              </a:lnSpc>
               <a:spcAft>
                 <a:spcPts val="108"/>
               </a:spcAft>
@@ -18550,11 +19219,14 @@
         </p:spPr>
         <p:txBody>
           <a:bodyPr wrap="square" lIns="0" rIns="0" tIns="0" bIns="0" anchor="t">
-            <a:spAutoFit/>
+            <a:normAutofit/>
           </a:bodyPr>
           <a:lstStyle/>
           <a:p>
             <a:pPr algn="l">
+              <a:lnSpc>
+                <a:spcPct val="100000"/>
+              </a:lnSpc>
               <a:spcAft>
                 <a:spcPts val="300"/>
               </a:spcAft>
@@ -18589,11 +19261,14 @@
         </p:spPr>
         <p:txBody>
           <a:bodyPr wrap="square" lIns="0" rIns="0" tIns="0" bIns="0" anchor="t">
-            <a:spAutoFit/>
+            <a:normAutofit/>
           </a:bodyPr>
           <a:lstStyle/>
           <a:p>
             <a:pPr algn="l">
+              <a:lnSpc>
+                <a:spcPct val="100000"/>
+              </a:lnSpc>
               <a:spcAft>
                 <a:spcPts val="126"/>
               </a:spcAft>
@@ -18716,11 +19391,14 @@
         </p:spPr>
         <p:txBody>
           <a:bodyPr wrap="square" lIns="0" rIns="0" tIns="0" bIns="0" anchor="t">
-            <a:spAutoFit/>
+            <a:normAutofit/>
           </a:bodyPr>
           <a:lstStyle/>
           <a:p>
             <a:pPr algn="l">
+              <a:lnSpc>
+                <a:spcPct val="100000"/>
+              </a:lnSpc>
               <a:spcAft>
                 <a:spcPts val="108"/>
               </a:spcAft>
@@ -18755,11 +19433,14 @@
         </p:spPr>
         <p:txBody>
           <a:bodyPr wrap="square" lIns="0" rIns="0" tIns="0" bIns="0" anchor="t">
-            <a:spAutoFit/>
+            <a:normAutofit/>
           </a:bodyPr>
           <a:lstStyle/>
           <a:p>
             <a:pPr algn="l">
+              <a:lnSpc>
+                <a:spcPct val="100000"/>
+              </a:lnSpc>
               <a:spcAft>
                 <a:spcPts val="276"/>
               </a:spcAft>
@@ -18794,11 +19475,14 @@
         </p:spPr>
         <p:txBody>
           <a:bodyPr wrap="square" lIns="0" rIns="0" tIns="0" bIns="0" anchor="t">
-            <a:spAutoFit/>
+            <a:normAutofit/>
           </a:bodyPr>
           <a:lstStyle/>
           <a:p>
             <a:pPr algn="l">
+              <a:lnSpc>
+                <a:spcPct val="100000"/>
+              </a:lnSpc>
               <a:spcAft>
                 <a:spcPts val="131"/>
               </a:spcAft>
@@ -18876,11 +19560,14 @@
         </p:spPr>
         <p:txBody>
           <a:bodyPr wrap="square" lIns="0" rIns="0" tIns="0" bIns="0" anchor="t">
-            <a:spAutoFit/>
+            <a:normAutofit/>
           </a:bodyPr>
           <a:lstStyle/>
           <a:p>
             <a:pPr algn="ctr">
+              <a:lnSpc>
+                <a:spcPct val="100000"/>
+              </a:lnSpc>
               <a:spcAft>
                 <a:spcPts val="96"/>
               </a:spcAft>
@@ -18897,6 +19584,9 @@
           </a:p>
           <a:p>
             <a:pPr algn="ctr">
+              <a:lnSpc>
+                <a:spcPct val="100000"/>
+              </a:lnSpc>
               <a:spcAft>
                 <a:spcPts val="96"/>
               </a:spcAft>
@@ -18976,11 +19666,14 @@
         </p:spPr>
         <p:txBody>
           <a:bodyPr wrap="square" lIns="0" rIns="0" tIns="0" bIns="0" anchor="t">
-            <a:spAutoFit/>
+            <a:normAutofit/>
           </a:bodyPr>
           <a:lstStyle/>
           <a:p>
             <a:pPr algn="l">
+              <a:lnSpc>
+                <a:spcPct val="100000"/>
+              </a:lnSpc>
               <a:spcAft>
                 <a:spcPts val="108"/>
               </a:spcAft>
@@ -19015,11 +19708,14 @@
         </p:spPr>
         <p:txBody>
           <a:bodyPr wrap="square" lIns="0" rIns="0" tIns="0" bIns="0" anchor="t">
-            <a:spAutoFit/>
+            <a:normAutofit/>
           </a:bodyPr>
           <a:lstStyle/>
           <a:p>
             <a:pPr algn="l">
+              <a:lnSpc>
+                <a:spcPct val="100000"/>
+              </a:lnSpc>
               <a:spcAft>
                 <a:spcPts val="300"/>
               </a:spcAft>
@@ -19099,11 +19795,14 @@
         </p:spPr>
         <p:txBody>
           <a:bodyPr wrap="square" lIns="0" rIns="0" tIns="0" bIns="0" anchor="ctr">
-            <a:spAutoFit/>
+            <a:normAutofit/>
           </a:bodyPr>
           <a:lstStyle/>
           <a:p>
             <a:pPr algn="ctr">
+              <a:lnSpc>
+                <a:spcPct val="100000"/>
+              </a:lnSpc>
               <a:spcAft>
                 <a:spcPts val="89"/>
               </a:spcAft>
@@ -19226,11 +19925,14 @@
         </p:spPr>
         <p:txBody>
           <a:bodyPr wrap="square" lIns="0" rIns="0" tIns="0" bIns="0" anchor="ctr">
-            <a:spAutoFit/>
+            <a:normAutofit/>
           </a:bodyPr>
           <a:lstStyle/>
           <a:p>
             <a:pPr algn="ctr">
+              <a:lnSpc>
+                <a:spcPct val="100000"/>
+              </a:lnSpc>
               <a:spcAft>
                 <a:spcPts val="89"/>
               </a:spcAft>
@@ -19353,11 +20055,14 @@
         </p:spPr>
         <p:txBody>
           <a:bodyPr wrap="square" lIns="0" rIns="0" tIns="0" bIns="0" anchor="ctr">
-            <a:spAutoFit/>
+            <a:normAutofit/>
           </a:bodyPr>
           <a:lstStyle/>
           <a:p>
             <a:pPr algn="ctr">
+              <a:lnSpc>
+                <a:spcPct val="100000"/>
+              </a:lnSpc>
               <a:spcAft>
                 <a:spcPts val="89"/>
               </a:spcAft>
@@ -19480,11 +20185,14 @@
         </p:spPr>
         <p:txBody>
           <a:bodyPr wrap="square" lIns="0" rIns="0" tIns="0" bIns="0" anchor="ctr">
-            <a:spAutoFit/>
+            <a:normAutofit/>
           </a:bodyPr>
           <a:lstStyle/>
           <a:p>
             <a:pPr algn="ctr">
+              <a:lnSpc>
+                <a:spcPct val="100000"/>
+              </a:lnSpc>
               <a:spcAft>
                 <a:spcPts val="89"/>
               </a:spcAft>
@@ -19519,11 +20227,14 @@
         </p:spPr>
         <p:txBody>
           <a:bodyPr wrap="square" lIns="0" rIns="0" tIns="0" bIns="0" anchor="t">
-            <a:spAutoFit/>
+            <a:normAutofit/>
           </a:bodyPr>
           <a:lstStyle/>
           <a:p>
             <a:pPr algn="l">
+              <a:lnSpc>
+                <a:spcPct val="100000"/>
+              </a:lnSpc>
               <a:spcAft>
                 <a:spcPts val="131"/>
               </a:spcAft>
@@ -19603,11 +20314,14 @@
         </p:spPr>
         <p:txBody>
           <a:bodyPr wrap="square" lIns="0" rIns="0" tIns="0" bIns="0" anchor="t">
-            <a:spAutoFit/>
+            <a:normAutofit/>
           </a:bodyPr>
           <a:lstStyle/>
           <a:p>
             <a:pPr algn="ctr">
+              <a:lnSpc>
+                <a:spcPct val="100000"/>
+              </a:lnSpc>
               <a:spcAft>
                 <a:spcPts val="126"/>
               </a:spcAft>
@@ -19642,11 +20356,14 @@
         </p:spPr>
         <p:txBody>
           <a:bodyPr wrap="square" lIns="0" rIns="0" tIns="0" bIns="0" anchor="t">
-            <a:spAutoFit/>
+            <a:normAutofit/>
           </a:bodyPr>
           <a:lstStyle/>
           <a:p>
             <a:pPr algn="l">
+              <a:lnSpc>
+                <a:spcPct val="100000"/>
+              </a:lnSpc>
               <a:spcAft>
                 <a:spcPts val="81"/>
               </a:spcAft>
@@ -19681,11 +20398,14 @@
         </p:spPr>
         <p:txBody>
           <a:bodyPr wrap="square" lIns="0" rIns="0" tIns="0" bIns="0" anchor="t">
-            <a:spAutoFit/>
+            <a:normAutofit/>
           </a:bodyPr>
           <a:lstStyle/>
           <a:p>
             <a:pPr algn="r">
+              <a:lnSpc>
+                <a:spcPct val="100000"/>
+              </a:lnSpc>
               <a:spcAft>
                 <a:spcPts val="86"/>
               </a:spcAft>
@@ -19783,11 +20503,14 @@
         </p:spPr>
         <p:txBody>
           <a:bodyPr wrap="square" lIns="0" rIns="0" tIns="0" bIns="0" anchor="t">
-            <a:spAutoFit/>
+            <a:normAutofit/>
           </a:bodyPr>
           <a:lstStyle/>
           <a:p>
             <a:pPr algn="l">
+              <a:lnSpc>
+                <a:spcPct val="100000"/>
+              </a:lnSpc>
               <a:spcAft>
                 <a:spcPts val="108"/>
               </a:spcAft>
@@ -19822,11 +20545,14 @@
         </p:spPr>
         <p:txBody>
           <a:bodyPr wrap="square" lIns="0" rIns="0" tIns="0" bIns="0" anchor="t">
-            <a:spAutoFit/>
+            <a:normAutofit/>
           </a:bodyPr>
           <a:lstStyle/>
           <a:p>
             <a:pPr algn="l">
+              <a:lnSpc>
+                <a:spcPct val="100000"/>
+              </a:lnSpc>
               <a:spcAft>
                 <a:spcPts val="300"/>
               </a:spcAft>
@@ -19861,11 +20587,14 @@
         </p:spPr>
         <p:txBody>
           <a:bodyPr wrap="square" lIns="0" rIns="0" tIns="0" bIns="0" anchor="t">
-            <a:spAutoFit/>
+            <a:normAutofit/>
           </a:bodyPr>
           <a:lstStyle/>
           <a:p>
             <a:pPr algn="l">
+              <a:lnSpc>
+                <a:spcPct val="100000"/>
+              </a:lnSpc>
               <a:spcAft>
                 <a:spcPts val="126"/>
               </a:spcAft>
@@ -19988,11 +20717,14 @@
         </p:spPr>
         <p:txBody>
           <a:bodyPr wrap="square" lIns="0" rIns="0" tIns="0" bIns="0" anchor="t">
-            <a:spAutoFit/>
+            <a:normAutofit/>
           </a:bodyPr>
           <a:lstStyle/>
           <a:p>
             <a:pPr algn="ctr">
+              <a:lnSpc>
+                <a:spcPct val="100000"/>
+              </a:lnSpc>
               <a:spcAft>
                 <a:spcPts val="96"/>
               </a:spcAft>
@@ -20027,11 +20759,14 @@
         </p:spPr>
         <p:txBody>
           <a:bodyPr wrap="square" lIns="0" rIns="0" tIns="0" bIns="0" anchor="ctr">
-            <a:spAutoFit/>
+            <a:normAutofit/>
           </a:bodyPr>
           <a:lstStyle/>
           <a:p>
             <a:pPr algn="ctr">
+              <a:lnSpc>
+                <a:spcPct val="100000"/>
+              </a:lnSpc>
               <a:spcAft>
                 <a:spcPts val="227"/>
               </a:spcAft>
@@ -20109,11 +20844,14 @@
         </p:spPr>
         <p:txBody>
           <a:bodyPr wrap="square" lIns="0" rIns="0" tIns="0" bIns="0" anchor="ctr">
-            <a:spAutoFit/>
+            <a:normAutofit/>
           </a:bodyPr>
           <a:lstStyle/>
           <a:p>
             <a:pPr algn="ctr">
+              <a:lnSpc>
+                <a:spcPct val="100000"/>
+              </a:lnSpc>
               <a:spcAft>
                 <a:spcPts val="276"/>
               </a:spcAft>
@@ -20148,11 +20886,14 @@
         </p:spPr>
         <p:txBody>
           <a:bodyPr wrap="square" lIns="0" rIns="0" tIns="0" bIns="0" anchor="t">
-            <a:spAutoFit/>
+            <a:normAutofit/>
           </a:bodyPr>
           <a:lstStyle/>
           <a:p>
             <a:pPr algn="ctr">
+              <a:lnSpc>
+                <a:spcPct val="100000"/>
+              </a:lnSpc>
               <a:spcAft>
                 <a:spcPts val="96"/>
               </a:spcAft>
@@ -20232,11 +20973,14 @@
         </p:spPr>
         <p:txBody>
           <a:bodyPr wrap="square" lIns="0" rIns="0" tIns="0" bIns="0" anchor="t">
-            <a:spAutoFit/>
+            <a:normAutofit/>
           </a:bodyPr>
           <a:lstStyle/>
           <a:p>
             <a:pPr algn="ctr">
+              <a:lnSpc>
+                <a:spcPct val="100000"/>
+              </a:lnSpc>
               <a:spcAft>
                 <a:spcPts val="96"/>
               </a:spcAft>
@@ -20271,11 +21015,14 @@
         </p:spPr>
         <p:txBody>
           <a:bodyPr wrap="square" lIns="0" rIns="0" tIns="0" bIns="0" anchor="ctr">
-            <a:spAutoFit/>
+            <a:normAutofit/>
           </a:bodyPr>
           <a:lstStyle/>
           <a:p>
             <a:pPr algn="ctr">
+              <a:lnSpc>
+                <a:spcPct val="100000"/>
+              </a:lnSpc>
               <a:spcAft>
                 <a:spcPts val="227"/>
               </a:spcAft>
@@ -20353,11 +21100,14 @@
         </p:spPr>
         <p:txBody>
           <a:bodyPr wrap="square" lIns="0" rIns="0" tIns="0" bIns="0" anchor="ctr">
-            <a:spAutoFit/>
+            <a:normAutofit/>
           </a:bodyPr>
           <a:lstStyle/>
           <a:p>
             <a:pPr algn="ctr">
+              <a:lnSpc>
+                <a:spcPct val="100000"/>
+              </a:lnSpc>
               <a:spcAft>
                 <a:spcPts val="276"/>
               </a:spcAft>
@@ -20392,11 +21142,14 @@
         </p:spPr>
         <p:txBody>
           <a:bodyPr wrap="square" lIns="0" rIns="0" tIns="0" bIns="0" anchor="t">
-            <a:spAutoFit/>
+            <a:normAutofit/>
           </a:bodyPr>
           <a:lstStyle/>
           <a:p>
             <a:pPr algn="ctr">
+              <a:lnSpc>
+                <a:spcPct val="100000"/>
+              </a:lnSpc>
               <a:spcAft>
                 <a:spcPts val="96"/>
               </a:spcAft>
@@ -20476,11 +21229,14 @@
         </p:spPr>
         <p:txBody>
           <a:bodyPr wrap="square" lIns="0" rIns="0" tIns="0" bIns="0" anchor="t">
-            <a:spAutoFit/>
+            <a:normAutofit/>
           </a:bodyPr>
           <a:lstStyle/>
           <a:p>
             <a:pPr algn="ctr">
+              <a:lnSpc>
+                <a:spcPct val="100000"/>
+              </a:lnSpc>
               <a:spcAft>
                 <a:spcPts val="96"/>
               </a:spcAft>
@@ -20515,11 +21271,14 @@
         </p:spPr>
         <p:txBody>
           <a:bodyPr wrap="square" lIns="0" rIns="0" tIns="0" bIns="0" anchor="ctr">
-            <a:spAutoFit/>
+            <a:normAutofit/>
           </a:bodyPr>
           <a:lstStyle/>
           <a:p>
             <a:pPr algn="ctr">
+              <a:lnSpc>
+                <a:spcPct val="100000"/>
+              </a:lnSpc>
               <a:spcAft>
                 <a:spcPts val="227"/>
               </a:spcAft>
@@ -20597,11 +21356,14 @@
         </p:spPr>
         <p:txBody>
           <a:bodyPr wrap="square" lIns="0" rIns="0" tIns="0" bIns="0" anchor="ctr">
-            <a:spAutoFit/>
+            <a:normAutofit/>
           </a:bodyPr>
           <a:lstStyle/>
           <a:p>
             <a:pPr algn="ctr">
+              <a:lnSpc>
+                <a:spcPct val="100000"/>
+              </a:lnSpc>
               <a:spcAft>
                 <a:spcPts val="276"/>
               </a:spcAft>
@@ -20636,11 +21398,14 @@
         </p:spPr>
         <p:txBody>
           <a:bodyPr wrap="square" lIns="0" rIns="0" tIns="0" bIns="0" anchor="t">
-            <a:spAutoFit/>
+            <a:normAutofit/>
           </a:bodyPr>
           <a:lstStyle/>
           <a:p>
             <a:pPr algn="ctr">
+              <a:lnSpc>
+                <a:spcPct val="100000"/>
+              </a:lnSpc>
               <a:spcAft>
                 <a:spcPts val="96"/>
               </a:spcAft>
@@ -20720,11 +21485,14 @@
         </p:spPr>
         <p:txBody>
           <a:bodyPr wrap="square" lIns="0" rIns="0" tIns="0" bIns="0" anchor="t">
-            <a:spAutoFit/>
+            <a:normAutofit/>
           </a:bodyPr>
           <a:lstStyle/>
           <a:p>
             <a:pPr algn="ctr">
+              <a:lnSpc>
+                <a:spcPct val="100000"/>
+              </a:lnSpc>
               <a:spcAft>
                 <a:spcPts val="96"/>
               </a:spcAft>
@@ -20759,11 +21527,14 @@
         </p:spPr>
         <p:txBody>
           <a:bodyPr wrap="square" lIns="0" rIns="0" tIns="0" bIns="0" anchor="ctr">
-            <a:spAutoFit/>
+            <a:normAutofit/>
           </a:bodyPr>
           <a:lstStyle/>
           <a:p>
             <a:pPr algn="ctr">
+              <a:lnSpc>
+                <a:spcPct val="100000"/>
+              </a:lnSpc>
               <a:spcAft>
                 <a:spcPts val="227"/>
               </a:spcAft>
@@ -20841,11 +21612,14 @@
         </p:spPr>
         <p:txBody>
           <a:bodyPr wrap="square" lIns="0" rIns="0" tIns="0" bIns="0" anchor="ctr">
-            <a:spAutoFit/>
+            <a:normAutofit/>
           </a:bodyPr>
           <a:lstStyle/>
           <a:p>
             <a:pPr algn="ctr">
+              <a:lnSpc>
+                <a:spcPct val="100000"/>
+              </a:lnSpc>
               <a:spcAft>
                 <a:spcPts val="276"/>
               </a:spcAft>
@@ -20880,11 +21654,14 @@
         </p:spPr>
         <p:txBody>
           <a:bodyPr wrap="square" lIns="0" rIns="0" tIns="0" bIns="0" anchor="t">
-            <a:spAutoFit/>
+            <a:normAutofit/>
           </a:bodyPr>
           <a:lstStyle/>
           <a:p>
             <a:pPr algn="ctr">
+              <a:lnSpc>
+                <a:spcPct val="100000"/>
+              </a:lnSpc>
               <a:spcAft>
                 <a:spcPts val="96"/>
               </a:spcAft>
@@ -20964,11 +21741,14 @@
         </p:spPr>
         <p:txBody>
           <a:bodyPr wrap="square" lIns="0" rIns="0" tIns="0" bIns="0" anchor="t">
-            <a:spAutoFit/>
+            <a:normAutofit/>
           </a:bodyPr>
           <a:lstStyle/>
           <a:p>
             <a:pPr algn="ctr">
+              <a:lnSpc>
+                <a:spcPct val="100000"/>
+              </a:lnSpc>
               <a:spcAft>
                 <a:spcPts val="96"/>
               </a:spcAft>
@@ -21003,11 +21783,14 @@
         </p:spPr>
         <p:txBody>
           <a:bodyPr wrap="square" lIns="0" rIns="0" tIns="0" bIns="0" anchor="ctr">
-            <a:spAutoFit/>
+            <a:normAutofit/>
           </a:bodyPr>
           <a:lstStyle/>
           <a:p>
             <a:pPr algn="ctr">
+              <a:lnSpc>
+                <a:spcPct val="100000"/>
+              </a:lnSpc>
               <a:spcAft>
                 <a:spcPts val="227"/>
               </a:spcAft>
@@ -21085,11 +21868,14 @@
         </p:spPr>
         <p:txBody>
           <a:bodyPr wrap="square" lIns="0" rIns="0" tIns="0" bIns="0" anchor="ctr">
-            <a:spAutoFit/>
+            <a:normAutofit/>
           </a:bodyPr>
           <a:lstStyle/>
           <a:p>
             <a:pPr algn="ctr">
+              <a:lnSpc>
+                <a:spcPct val="100000"/>
+              </a:lnSpc>
               <a:spcAft>
                 <a:spcPts val="276"/>
               </a:spcAft>
@@ -21124,11 +21910,14 @@
         </p:spPr>
         <p:txBody>
           <a:bodyPr wrap="square" lIns="0" rIns="0" tIns="0" bIns="0" anchor="t">
-            <a:spAutoFit/>
+            <a:normAutofit/>
           </a:bodyPr>
           <a:lstStyle/>
           <a:p>
             <a:pPr algn="ctr">
+              <a:lnSpc>
+                <a:spcPct val="100000"/>
+              </a:lnSpc>
               <a:spcAft>
                 <a:spcPts val="96"/>
               </a:spcAft>
@@ -21163,11 +21952,14 @@
         </p:spPr>
         <p:txBody>
           <a:bodyPr wrap="square" lIns="0" rIns="0" tIns="0" bIns="0" anchor="t">
-            <a:spAutoFit/>
+            <a:normAutofit/>
           </a:bodyPr>
           <a:lstStyle/>
           <a:p>
             <a:pPr algn="l">
+              <a:lnSpc>
+                <a:spcPct val="100000"/>
+              </a:lnSpc>
               <a:spcAft>
                 <a:spcPts val="108"/>
               </a:spcAft>
@@ -21292,11 +22084,14 @@
         </p:spPr>
         <p:txBody>
           <a:bodyPr wrap="square" lIns="0" rIns="0" tIns="0" bIns="0" anchor="ctr">
-            <a:spAutoFit/>
+            <a:normAutofit/>
           </a:bodyPr>
           <a:lstStyle/>
           <a:p>
             <a:pPr algn="ctr">
+              <a:lnSpc>
+                <a:spcPct val="100000"/>
+              </a:lnSpc>
               <a:spcAft>
                 <a:spcPts val="108"/>
               </a:spcAft>
@@ -21331,11 +22126,14 @@
         </p:spPr>
         <p:txBody>
           <a:bodyPr wrap="square" lIns="0" rIns="0" tIns="0" bIns="0" anchor="t">
-            <a:spAutoFit/>
+            <a:normAutofit/>
           </a:bodyPr>
           <a:lstStyle/>
           <a:p>
             <a:pPr algn="l">
+              <a:lnSpc>
+                <a:spcPct val="100000"/>
+              </a:lnSpc>
               <a:spcAft>
                 <a:spcPts val="144"/>
               </a:spcAft>
@@ -21370,11 +22168,14 @@
         </p:spPr>
         <p:txBody>
           <a:bodyPr wrap="square" lIns="0" rIns="0" tIns="0" bIns="0" anchor="t">
-            <a:spAutoFit/>
+            <a:normAutofit/>
           </a:bodyPr>
           <a:lstStyle/>
           <a:p>
             <a:pPr algn="l">
+              <a:lnSpc>
+                <a:spcPct val="100000"/>
+              </a:lnSpc>
               <a:spcAft>
                 <a:spcPts val="105"/>
               </a:spcAft>
@@ -21499,11 +22300,14 @@
         </p:spPr>
         <p:txBody>
           <a:bodyPr wrap="square" lIns="0" rIns="0" tIns="0" bIns="0" anchor="ctr">
-            <a:spAutoFit/>
+            <a:normAutofit/>
           </a:bodyPr>
           <a:lstStyle/>
           <a:p>
             <a:pPr algn="ctr">
+              <a:lnSpc>
+                <a:spcPct val="100000"/>
+              </a:lnSpc>
               <a:spcAft>
                 <a:spcPts val="108"/>
               </a:spcAft>
@@ -21538,11 +22342,14 @@
         </p:spPr>
         <p:txBody>
           <a:bodyPr wrap="square" lIns="0" rIns="0" tIns="0" bIns="0" anchor="t">
-            <a:spAutoFit/>
+            <a:normAutofit/>
           </a:bodyPr>
           <a:lstStyle/>
           <a:p>
             <a:pPr algn="l">
+              <a:lnSpc>
+                <a:spcPct val="100000"/>
+              </a:lnSpc>
               <a:spcAft>
                 <a:spcPts val="144"/>
               </a:spcAft>
@@ -21577,11 +22384,14 @@
         </p:spPr>
         <p:txBody>
           <a:bodyPr wrap="square" lIns="0" rIns="0" tIns="0" bIns="0" anchor="t">
-            <a:spAutoFit/>
+            <a:normAutofit/>
           </a:bodyPr>
           <a:lstStyle/>
           <a:p>
             <a:pPr algn="l">
+              <a:lnSpc>
+                <a:spcPct val="100000"/>
+              </a:lnSpc>
               <a:spcAft>
                 <a:spcPts val="105"/>
               </a:spcAft>
@@ -21706,11 +22516,14 @@
         </p:spPr>
         <p:txBody>
           <a:bodyPr wrap="square" lIns="0" rIns="0" tIns="0" bIns="0" anchor="ctr">
-            <a:spAutoFit/>
+            <a:normAutofit/>
           </a:bodyPr>
           <a:lstStyle/>
           <a:p>
             <a:pPr algn="ctr">
+              <a:lnSpc>
+                <a:spcPct val="100000"/>
+              </a:lnSpc>
               <a:spcAft>
                 <a:spcPts val="108"/>
               </a:spcAft>
@@ -21745,11 +22558,14 @@
         </p:spPr>
         <p:txBody>
           <a:bodyPr wrap="square" lIns="0" rIns="0" tIns="0" bIns="0" anchor="t">
-            <a:spAutoFit/>
+            <a:normAutofit/>
           </a:bodyPr>
           <a:lstStyle/>
           <a:p>
             <a:pPr algn="l">
+              <a:lnSpc>
+                <a:spcPct val="100000"/>
+              </a:lnSpc>
               <a:spcAft>
                 <a:spcPts val="144"/>
               </a:spcAft>
@@ -21784,11 +22600,14 @@
         </p:spPr>
         <p:txBody>
           <a:bodyPr wrap="square" lIns="0" rIns="0" tIns="0" bIns="0" anchor="t">
-            <a:spAutoFit/>
+            <a:normAutofit/>
           </a:bodyPr>
           <a:lstStyle/>
           <a:p>
             <a:pPr algn="l">
+              <a:lnSpc>
+                <a:spcPct val="100000"/>
+              </a:lnSpc>
               <a:spcAft>
                 <a:spcPts val="105"/>
               </a:spcAft>
@@ -21823,11 +22642,14 @@
         </p:spPr>
         <p:txBody>
           <a:bodyPr wrap="square" lIns="0" rIns="0" tIns="0" bIns="0" anchor="t">
-            <a:spAutoFit/>
+            <a:normAutofit/>
           </a:bodyPr>
           <a:lstStyle/>
           <a:p>
             <a:pPr algn="l">
+              <a:lnSpc>
+                <a:spcPct val="100000"/>
+              </a:lnSpc>
               <a:spcAft>
                 <a:spcPts val="81"/>
               </a:spcAft>
@@ -21862,11 +22684,14 @@
         </p:spPr>
         <p:txBody>
           <a:bodyPr wrap="square" lIns="0" rIns="0" tIns="0" bIns="0" anchor="t">
-            <a:spAutoFit/>
+            <a:normAutofit/>
           </a:bodyPr>
           <a:lstStyle/>
           <a:p>
             <a:pPr algn="r">
+              <a:lnSpc>
+                <a:spcPct val="100000"/>
+              </a:lnSpc>
               <a:spcAft>
                 <a:spcPts val="86"/>
               </a:spcAft>
@@ -21964,11 +22789,14 @@
         </p:spPr>
         <p:txBody>
           <a:bodyPr wrap="square" lIns="0" rIns="0" tIns="0" bIns="0" anchor="t">
-            <a:spAutoFit/>
+            <a:normAutofit/>
           </a:bodyPr>
           <a:lstStyle/>
           <a:p>
             <a:pPr algn="l">
+              <a:lnSpc>
+                <a:spcPct val="100000"/>
+              </a:lnSpc>
               <a:spcAft>
                 <a:spcPts val="108"/>
               </a:spcAft>
@@ -22003,11 +22831,14 @@
         </p:spPr>
         <p:txBody>
           <a:bodyPr wrap="square" lIns="0" rIns="0" tIns="0" bIns="0" anchor="t">
-            <a:spAutoFit/>
+            <a:normAutofit/>
           </a:bodyPr>
           <a:lstStyle/>
           <a:p>
             <a:pPr algn="l">
+              <a:lnSpc>
+                <a:spcPct val="100000"/>
+              </a:lnSpc>
               <a:spcAft>
                 <a:spcPts val="300"/>
               </a:spcAft>
@@ -22042,11 +22873,14 @@
         </p:spPr>
         <p:txBody>
           <a:bodyPr wrap="square" lIns="0" rIns="0" tIns="0" bIns="0" anchor="t">
-            <a:spAutoFit/>
+            <a:normAutofit/>
           </a:bodyPr>
           <a:lstStyle/>
           <a:p>
             <a:pPr algn="l">
+              <a:lnSpc>
+                <a:spcPct val="100000"/>
+              </a:lnSpc>
               <a:spcAft>
                 <a:spcPts val="126"/>
               </a:spcAft>
@@ -22124,11 +22958,14 @@
         </p:spPr>
         <p:txBody>
           <a:bodyPr wrap="square" lIns="0" rIns="0" tIns="0" bIns="0" anchor="t">
-            <a:spAutoFit/>
+            <a:normAutofit/>
           </a:bodyPr>
           <a:lstStyle/>
           <a:p>
             <a:pPr algn="ctr">
+              <a:lnSpc>
+                <a:spcPct val="100000"/>
+              </a:lnSpc>
               <a:spcAft>
                 <a:spcPts val="96"/>
               </a:spcAft>
@@ -22163,11 +23000,14 @@
         </p:spPr>
         <p:txBody>
           <a:bodyPr wrap="square" lIns="0" rIns="0" tIns="0" bIns="0" anchor="t">
-            <a:spAutoFit/>
+            <a:normAutofit/>
           </a:bodyPr>
           <a:lstStyle/>
           <a:p>
             <a:pPr algn="ctr">
+              <a:lnSpc>
+                <a:spcPct val="100000"/>
+              </a:lnSpc>
               <a:spcAft>
                 <a:spcPts val="96"/>
               </a:spcAft>
@@ -22202,11 +23042,14 @@
         </p:spPr>
         <p:txBody>
           <a:bodyPr wrap="square" lIns="0" rIns="0" tIns="0" bIns="0" anchor="t">
-            <a:spAutoFit/>
+            <a:normAutofit/>
           </a:bodyPr>
           <a:lstStyle/>
           <a:p>
             <a:pPr algn="ctr">
+              <a:lnSpc>
+                <a:spcPct val="100000"/>
+              </a:lnSpc>
               <a:spcAft>
                 <a:spcPts val="96"/>
               </a:spcAft>
@@ -22241,11 +23084,14 @@
         </p:spPr>
         <p:txBody>
           <a:bodyPr wrap="square" lIns="0" rIns="0" tIns="0" bIns="0" anchor="t">
-            <a:spAutoFit/>
+            <a:normAutofit/>
           </a:bodyPr>
           <a:lstStyle/>
           <a:p>
             <a:pPr algn="ctr">
+              <a:lnSpc>
+                <a:spcPct val="100000"/>
+              </a:lnSpc>
               <a:spcAft>
                 <a:spcPts val="96"/>
               </a:spcAft>
@@ -22280,11 +23126,14 @@
         </p:spPr>
         <p:txBody>
           <a:bodyPr wrap="square" lIns="0" rIns="0" tIns="0" bIns="0" anchor="t">
-            <a:spAutoFit/>
+            <a:normAutofit/>
           </a:bodyPr>
           <a:lstStyle/>
           <a:p>
             <a:pPr algn="ctr">
+              <a:lnSpc>
+                <a:spcPct val="100000"/>
+              </a:lnSpc>
               <a:spcAft>
                 <a:spcPts val="96"/>
               </a:spcAft>
@@ -22319,11 +23168,14 @@
         </p:spPr>
         <p:txBody>
           <a:bodyPr wrap="square" lIns="0" rIns="0" tIns="0" bIns="0" anchor="t">
-            <a:spAutoFit/>
+            <a:normAutofit/>
           </a:bodyPr>
           <a:lstStyle/>
           <a:p>
             <a:pPr algn="ctr">
+              <a:lnSpc>
+                <a:spcPct val="100000"/>
+              </a:lnSpc>
               <a:spcAft>
                 <a:spcPts val="96"/>
               </a:spcAft>
@@ -22358,11 +23210,14 @@
         </p:spPr>
         <p:txBody>
           <a:bodyPr wrap="square" lIns="0" rIns="0" tIns="0" bIns="0" anchor="t">
-            <a:spAutoFit/>
+            <a:normAutofit/>
           </a:bodyPr>
           <a:lstStyle/>
           <a:p>
             <a:pPr algn="ctr">
+              <a:lnSpc>
+                <a:spcPct val="100000"/>
+              </a:lnSpc>
               <a:spcAft>
                 <a:spcPts val="96"/>
               </a:spcAft>
@@ -22397,11 +23252,14 @@
         </p:spPr>
         <p:txBody>
           <a:bodyPr wrap="square" lIns="0" rIns="0" tIns="0" bIns="0" anchor="t">
-            <a:spAutoFit/>
+            <a:normAutofit/>
           </a:bodyPr>
           <a:lstStyle/>
           <a:p>
             <a:pPr algn="ctr">
+              <a:lnSpc>
+                <a:spcPct val="100000"/>
+              </a:lnSpc>
               <a:spcAft>
                 <a:spcPts val="96"/>
               </a:spcAft>
@@ -22436,11 +23294,14 @@
         </p:spPr>
         <p:txBody>
           <a:bodyPr wrap="square" lIns="0" rIns="0" tIns="0" bIns="0" anchor="t">
-            <a:spAutoFit/>
+            <a:normAutofit/>
           </a:bodyPr>
           <a:lstStyle/>
           <a:p>
             <a:pPr algn="l">
+              <a:lnSpc>
+                <a:spcPct val="100000"/>
+              </a:lnSpc>
               <a:spcAft>
                 <a:spcPts val="144"/>
               </a:spcAft>
@@ -22475,11 +23336,14 @@
         </p:spPr>
         <p:txBody>
           <a:bodyPr wrap="square" lIns="0" rIns="0" tIns="0" bIns="0" anchor="t">
-            <a:spAutoFit/>
+            <a:normAutofit/>
           </a:bodyPr>
           <a:lstStyle/>
           <a:p>
             <a:pPr algn="l">
+              <a:lnSpc>
+                <a:spcPct val="100000"/>
+              </a:lnSpc>
               <a:spcAft>
                 <a:spcPts val="96"/>
               </a:spcAft>
@@ -22559,11 +23423,14 @@
         </p:spPr>
         <p:txBody>
           <a:bodyPr wrap="square" lIns="0" rIns="0" tIns="0" bIns="0" anchor="ctr">
-            <a:spAutoFit/>
+            <a:normAutofit/>
           </a:bodyPr>
           <a:lstStyle/>
           <a:p>
             <a:pPr algn="ctr">
+              <a:lnSpc>
+                <a:spcPct val="100000"/>
+              </a:lnSpc>
               <a:spcAft>
                 <a:spcPts val="102"/>
               </a:spcAft>
@@ -22643,11 +23510,14 @@
         </p:spPr>
         <p:txBody>
           <a:bodyPr wrap="square" lIns="0" rIns="0" tIns="0" bIns="0" anchor="ctr">
-            <a:spAutoFit/>
+            <a:normAutofit/>
           </a:bodyPr>
           <a:lstStyle/>
           <a:p>
             <a:pPr algn="ctr">
+              <a:lnSpc>
+                <a:spcPct val="100000"/>
+              </a:lnSpc>
               <a:spcAft>
                 <a:spcPts val="102"/>
               </a:spcAft>
@@ -22727,11 +23597,14 @@
         </p:spPr>
         <p:txBody>
           <a:bodyPr wrap="square" lIns="0" rIns="0" tIns="0" bIns="0" anchor="ctr">
-            <a:spAutoFit/>
+            <a:normAutofit/>
           </a:bodyPr>
           <a:lstStyle/>
           <a:p>
             <a:pPr algn="ctr">
+              <a:lnSpc>
+                <a:spcPct val="100000"/>
+              </a:lnSpc>
               <a:spcAft>
                 <a:spcPts val="102"/>
               </a:spcAft>
@@ -22811,11 +23684,14 @@
         </p:spPr>
         <p:txBody>
           <a:bodyPr wrap="square" lIns="0" rIns="0" tIns="0" bIns="0" anchor="ctr">
-            <a:spAutoFit/>
+            <a:normAutofit/>
           </a:bodyPr>
           <a:lstStyle/>
           <a:p>
             <a:pPr algn="ctr">
+              <a:lnSpc>
+                <a:spcPct val="100000"/>
+              </a:lnSpc>
               <a:spcAft>
                 <a:spcPts val="102"/>
               </a:spcAft>
@@ -22895,11 +23771,14 @@
         </p:spPr>
         <p:txBody>
           <a:bodyPr wrap="square" lIns="0" rIns="0" tIns="0" bIns="0" anchor="ctr">
-            <a:spAutoFit/>
+            <a:normAutofit/>
           </a:bodyPr>
           <a:lstStyle/>
           <a:p>
             <a:pPr algn="ctr">
+              <a:lnSpc>
+                <a:spcPct val="100000"/>
+              </a:lnSpc>
               <a:spcAft>
                 <a:spcPts val="102"/>
               </a:spcAft>
@@ -22979,11 +23858,14 @@
         </p:spPr>
         <p:txBody>
           <a:bodyPr wrap="square" lIns="0" rIns="0" tIns="0" bIns="0" anchor="ctr">
-            <a:spAutoFit/>
+            <a:normAutofit/>
           </a:bodyPr>
           <a:lstStyle/>
           <a:p>
             <a:pPr algn="ctr">
+              <a:lnSpc>
+                <a:spcPct val="100000"/>
+              </a:lnSpc>
               <a:spcAft>
                 <a:spcPts val="102"/>
               </a:spcAft>
@@ -23063,11 +23945,14 @@
         </p:spPr>
         <p:txBody>
           <a:bodyPr wrap="square" lIns="0" rIns="0" tIns="0" bIns="0" anchor="ctr">
-            <a:spAutoFit/>
+            <a:normAutofit/>
           </a:bodyPr>
           <a:lstStyle/>
           <a:p>
             <a:pPr algn="ctr">
+              <a:lnSpc>
+                <a:spcPct val="100000"/>
+              </a:lnSpc>
               <a:spcAft>
                 <a:spcPts val="102"/>
               </a:spcAft>
@@ -23147,11 +24032,14 @@
         </p:spPr>
         <p:txBody>
           <a:bodyPr wrap="square" lIns="0" rIns="0" tIns="0" bIns="0" anchor="t">
-            <a:spAutoFit/>
+            <a:normAutofit/>
           </a:bodyPr>
           <a:lstStyle/>
           <a:p>
             <a:pPr algn="l">
+              <a:lnSpc>
+                <a:spcPct val="100000"/>
+              </a:lnSpc>
               <a:spcAft>
                 <a:spcPts val="144"/>
               </a:spcAft>
@@ -23186,11 +24074,14 @@
         </p:spPr>
         <p:txBody>
           <a:bodyPr wrap="square" lIns="0" rIns="0" tIns="0" bIns="0" anchor="t">
-            <a:spAutoFit/>
+            <a:normAutofit/>
           </a:bodyPr>
           <a:lstStyle/>
           <a:p>
             <a:pPr algn="l">
+              <a:lnSpc>
+                <a:spcPct val="100000"/>
+              </a:lnSpc>
               <a:spcAft>
                 <a:spcPts val="96"/>
               </a:spcAft>
@@ -23405,11 +24296,14 @@
         </p:spPr>
         <p:txBody>
           <a:bodyPr wrap="square" lIns="0" rIns="0" tIns="0" bIns="0" anchor="ctr">
-            <a:spAutoFit/>
+            <a:normAutofit/>
           </a:bodyPr>
           <a:lstStyle/>
           <a:p>
             <a:pPr algn="ctr">
+              <a:lnSpc>
+                <a:spcPct val="100000"/>
+              </a:lnSpc>
               <a:spcAft>
                 <a:spcPts val="102"/>
               </a:spcAft>
@@ -23489,11 +24383,14 @@
         </p:spPr>
         <p:txBody>
           <a:bodyPr wrap="square" lIns="0" rIns="0" tIns="0" bIns="0" anchor="ctr">
-            <a:spAutoFit/>
+            <a:normAutofit/>
           </a:bodyPr>
           <a:lstStyle/>
           <a:p>
             <a:pPr algn="ctr">
+              <a:lnSpc>
+                <a:spcPct val="100000"/>
+              </a:lnSpc>
               <a:spcAft>
                 <a:spcPts val="102"/>
               </a:spcAft>
@@ -23573,11 +24470,14 @@
         </p:spPr>
         <p:txBody>
           <a:bodyPr wrap="square" lIns="0" rIns="0" tIns="0" bIns="0" anchor="ctr">
-            <a:spAutoFit/>
+            <a:normAutofit/>
           </a:bodyPr>
           <a:lstStyle/>
           <a:p>
             <a:pPr algn="ctr">
+              <a:lnSpc>
+                <a:spcPct val="100000"/>
+              </a:lnSpc>
               <a:spcAft>
                 <a:spcPts val="102"/>
               </a:spcAft>
@@ -23702,11 +24602,14 @@
         </p:spPr>
         <p:txBody>
           <a:bodyPr wrap="square" lIns="0" rIns="0" tIns="0" bIns="0" anchor="t">
-            <a:spAutoFit/>
+            <a:normAutofit/>
           </a:bodyPr>
           <a:lstStyle/>
           <a:p>
             <a:pPr algn="l">
+              <a:lnSpc>
+                <a:spcPct val="100000"/>
+              </a:lnSpc>
               <a:spcAft>
                 <a:spcPts val="144"/>
               </a:spcAft>
@@ -23741,11 +24644,14 @@
         </p:spPr>
         <p:txBody>
           <a:bodyPr wrap="square" lIns="0" rIns="0" tIns="0" bIns="0" anchor="t">
-            <a:spAutoFit/>
+            <a:normAutofit/>
           </a:bodyPr>
           <a:lstStyle/>
           <a:p>
             <a:pPr algn="l">
+              <a:lnSpc>
+                <a:spcPct val="100000"/>
+              </a:lnSpc>
               <a:spcAft>
                 <a:spcPts val="96"/>
               </a:spcAft>
@@ -23825,11 +24731,14 @@
         </p:spPr>
         <p:txBody>
           <a:bodyPr wrap="square" lIns="0" rIns="0" tIns="0" bIns="0" anchor="ctr">
-            <a:spAutoFit/>
+            <a:normAutofit/>
           </a:bodyPr>
           <a:lstStyle/>
           <a:p>
             <a:pPr algn="ctr">
+              <a:lnSpc>
+                <a:spcPct val="100000"/>
+              </a:lnSpc>
               <a:spcAft>
                 <a:spcPts val="102"/>
               </a:spcAft>
@@ -23909,11 +24818,14 @@
         </p:spPr>
         <p:txBody>
           <a:bodyPr wrap="square" lIns="0" rIns="0" tIns="0" bIns="0" anchor="ctr">
-            <a:spAutoFit/>
+            <a:normAutofit/>
           </a:bodyPr>
           <a:lstStyle/>
           <a:p>
             <a:pPr algn="ctr">
+              <a:lnSpc>
+                <a:spcPct val="100000"/>
+              </a:lnSpc>
               <a:spcAft>
                 <a:spcPts val="102"/>
               </a:spcAft>
@@ -23993,11 +24905,14 @@
         </p:spPr>
         <p:txBody>
           <a:bodyPr wrap="square" lIns="0" rIns="0" tIns="0" bIns="0" anchor="ctr">
-            <a:spAutoFit/>
+            <a:normAutofit/>
           </a:bodyPr>
           <a:lstStyle/>
           <a:p>
             <a:pPr algn="ctr">
+              <a:lnSpc>
+                <a:spcPct val="100000"/>
+              </a:lnSpc>
               <a:spcAft>
                 <a:spcPts val="102"/>
               </a:spcAft>
@@ -24077,11 +24992,14 @@
         </p:spPr>
         <p:txBody>
           <a:bodyPr wrap="square" lIns="0" rIns="0" tIns="0" bIns="0" anchor="ctr">
-            <a:spAutoFit/>
+            <a:normAutofit/>
           </a:bodyPr>
           <a:lstStyle/>
           <a:p>
             <a:pPr algn="ctr">
+              <a:lnSpc>
+                <a:spcPct val="100000"/>
+              </a:lnSpc>
               <a:spcAft>
                 <a:spcPts val="102"/>
               </a:spcAft>
@@ -24161,11 +25079,14 @@
         </p:spPr>
         <p:txBody>
           <a:bodyPr wrap="square" lIns="0" rIns="0" tIns="0" bIns="0" anchor="ctr">
-            <a:spAutoFit/>
+            <a:normAutofit/>
           </a:bodyPr>
           <a:lstStyle/>
           <a:p>
             <a:pPr algn="ctr">
+              <a:lnSpc>
+                <a:spcPct val="100000"/>
+              </a:lnSpc>
               <a:spcAft>
                 <a:spcPts val="102"/>
               </a:spcAft>
@@ -24245,11 +25166,14 @@
         </p:spPr>
         <p:txBody>
           <a:bodyPr wrap="square" lIns="0" rIns="0" tIns="0" bIns="0" anchor="ctr">
-            <a:spAutoFit/>
+            <a:normAutofit/>
           </a:bodyPr>
           <a:lstStyle/>
           <a:p>
             <a:pPr algn="ctr">
+              <a:lnSpc>
+                <a:spcPct val="100000"/>
+              </a:lnSpc>
               <a:spcAft>
                 <a:spcPts val="102"/>
               </a:spcAft>
@@ -24329,11 +25253,14 @@
         </p:spPr>
         <p:txBody>
           <a:bodyPr wrap="square" lIns="0" rIns="0" tIns="0" bIns="0" anchor="ctr">
-            <a:spAutoFit/>
+            <a:normAutofit/>
           </a:bodyPr>
           <a:lstStyle/>
           <a:p>
             <a:pPr algn="ctr">
+              <a:lnSpc>
+                <a:spcPct val="100000"/>
+              </a:lnSpc>
               <a:spcAft>
                 <a:spcPts val="102"/>
               </a:spcAft>
@@ -24413,11 +25340,14 @@
         </p:spPr>
         <p:txBody>
           <a:bodyPr wrap="square" lIns="0" rIns="0" tIns="0" bIns="0" anchor="ctr">
-            <a:spAutoFit/>
+            <a:normAutofit/>
           </a:bodyPr>
           <a:lstStyle/>
           <a:p>
             <a:pPr algn="ctr">
+              <a:lnSpc>
+                <a:spcPct val="100000"/>
+              </a:lnSpc>
               <a:spcAft>
                 <a:spcPts val="102"/>
               </a:spcAft>
@@ -24497,11 +25427,14 @@
         </p:spPr>
         <p:txBody>
           <a:bodyPr wrap="square" lIns="0" rIns="0" tIns="0" bIns="0" anchor="ctr">
-            <a:spAutoFit/>
+            <a:normAutofit/>
           </a:bodyPr>
           <a:lstStyle/>
           <a:p>
             <a:pPr algn="l">
+              <a:lnSpc>
+                <a:spcPct val="100000"/>
+              </a:lnSpc>
               <a:spcAft>
                 <a:spcPts val="144"/>
               </a:spcAft>
@@ -24536,11 +25469,14 @@
         </p:spPr>
         <p:txBody>
           <a:bodyPr wrap="square" lIns="0" rIns="0" tIns="0" bIns="0" anchor="ctr">
-            <a:spAutoFit/>
+            <a:normAutofit/>
           </a:bodyPr>
           <a:lstStyle/>
           <a:p>
             <a:pPr algn="l">
+              <a:lnSpc>
+                <a:spcPct val="100000"/>
+              </a:lnSpc>
               <a:spcAft>
                 <a:spcPts val="131"/>
               </a:spcAft>
@@ -24575,11 +25511,14 @@
         </p:spPr>
         <p:txBody>
           <a:bodyPr wrap="square" lIns="0" rIns="0" tIns="0" bIns="0" anchor="t">
-            <a:spAutoFit/>
+            <a:normAutofit/>
           </a:bodyPr>
           <a:lstStyle/>
           <a:p>
             <a:pPr algn="l">
+              <a:lnSpc>
+                <a:spcPct val="100000"/>
+              </a:lnSpc>
               <a:spcAft>
                 <a:spcPts val="81"/>
               </a:spcAft>
@@ -24614,11 +25553,14 @@
         </p:spPr>
         <p:txBody>
           <a:bodyPr wrap="square" lIns="0" rIns="0" tIns="0" bIns="0" anchor="t">
-            <a:spAutoFit/>
+            <a:normAutofit/>
           </a:bodyPr>
           <a:lstStyle/>
           <a:p>
             <a:pPr algn="r">
+              <a:lnSpc>
+                <a:spcPct val="100000"/>
+              </a:lnSpc>
               <a:spcAft>
                 <a:spcPts val="86"/>
               </a:spcAft>
@@ -24716,11 +25658,14 @@
         </p:spPr>
         <p:txBody>
           <a:bodyPr wrap="square" lIns="0" rIns="0" tIns="0" bIns="0" anchor="t">
-            <a:spAutoFit/>
+            <a:normAutofit/>
           </a:bodyPr>
           <a:lstStyle/>
           <a:p>
             <a:pPr algn="l">
+              <a:lnSpc>
+                <a:spcPct val="100000"/>
+              </a:lnSpc>
               <a:spcAft>
                 <a:spcPts val="108"/>
               </a:spcAft>
@@ -24755,11 +25700,14 @@
         </p:spPr>
         <p:txBody>
           <a:bodyPr wrap="square" lIns="0" rIns="0" tIns="0" bIns="0" anchor="t">
-            <a:spAutoFit/>
+            <a:normAutofit/>
           </a:bodyPr>
           <a:lstStyle/>
           <a:p>
             <a:pPr algn="l">
+              <a:lnSpc>
+                <a:spcPct val="100000"/>
+              </a:lnSpc>
               <a:spcAft>
                 <a:spcPts val="300"/>
               </a:spcAft>
@@ -24794,11 +25742,14 @@
         </p:spPr>
         <p:txBody>
           <a:bodyPr wrap="square" lIns="0" rIns="0" tIns="0" bIns="0" anchor="t">
-            <a:spAutoFit/>
+            <a:normAutofit/>
           </a:bodyPr>
           <a:lstStyle/>
           <a:p>
             <a:pPr algn="l">
+              <a:lnSpc>
+                <a:spcPct val="100000"/>
+              </a:lnSpc>
               <a:spcAft>
                 <a:spcPts val="126"/>
               </a:spcAft>
@@ -24921,11 +25872,14 @@
         </p:spPr>
         <p:txBody>
           <a:bodyPr wrap="square" lIns="0" rIns="0" tIns="0" bIns="0" anchor="t">
-            <a:spAutoFit/>
+            <a:normAutofit/>
           </a:bodyPr>
           <a:lstStyle/>
           <a:p>
             <a:pPr algn="l">
+              <a:lnSpc>
+                <a:spcPct val="100000"/>
+              </a:lnSpc>
               <a:spcAft>
                 <a:spcPts val="108"/>
               </a:spcAft>
@@ -24960,11 +25914,14 @@
         </p:spPr>
         <p:txBody>
           <a:bodyPr wrap="square" lIns="0" rIns="0" tIns="0" bIns="0" anchor="ctr">
-            <a:spAutoFit/>
+            <a:normAutofit/>
           </a:bodyPr>
           <a:lstStyle/>
           <a:p>
             <a:pPr algn="l">
+              <a:lnSpc>
+                <a:spcPct val="100000"/>
+              </a:lnSpc>
               <a:spcAft>
                 <a:spcPts val="122"/>
               </a:spcAft>
@@ -25044,11 +26001,14 @@
         </p:spPr>
         <p:txBody>
           <a:bodyPr wrap="square" lIns="0" rIns="0" tIns="0" bIns="0" anchor="t">
-            <a:spAutoFit/>
+            <a:normAutofit/>
           </a:bodyPr>
           <a:lstStyle/>
           <a:p>
             <a:pPr algn="l">
+              <a:lnSpc>
+                <a:spcPct val="100000"/>
+              </a:lnSpc>
               <a:spcAft>
                 <a:spcPts val="108"/>
               </a:spcAft>
@@ -25083,11 +26043,14 @@
         </p:spPr>
         <p:txBody>
           <a:bodyPr wrap="square" lIns="0" rIns="0" tIns="0" bIns="0" anchor="ctr">
-            <a:spAutoFit/>
+            <a:normAutofit/>
           </a:bodyPr>
           <a:lstStyle/>
           <a:p>
             <a:pPr algn="l">
+              <a:lnSpc>
+                <a:spcPct val="100000"/>
+              </a:lnSpc>
               <a:spcAft>
                 <a:spcPts val="122"/>
               </a:spcAft>
@@ -25167,11 +26130,14 @@
         </p:spPr>
         <p:txBody>
           <a:bodyPr wrap="square" lIns="0" rIns="0" tIns="0" bIns="0" anchor="t">
-            <a:spAutoFit/>
+            <a:normAutofit/>
           </a:bodyPr>
           <a:lstStyle/>
           <a:p>
             <a:pPr algn="l">
+              <a:lnSpc>
+                <a:spcPct val="100000"/>
+              </a:lnSpc>
               <a:spcAft>
                 <a:spcPts val="108"/>
               </a:spcAft>
@@ -25206,11 +26172,14 @@
         </p:spPr>
         <p:txBody>
           <a:bodyPr wrap="square" lIns="0" rIns="0" tIns="0" bIns="0" anchor="ctr">
-            <a:spAutoFit/>
+            <a:normAutofit/>
           </a:bodyPr>
           <a:lstStyle/>
           <a:p>
             <a:pPr algn="l">
+              <a:lnSpc>
+                <a:spcPct val="100000"/>
+              </a:lnSpc>
               <a:spcAft>
                 <a:spcPts val="122"/>
               </a:spcAft>
@@ -25290,11 +26259,14 @@
         </p:spPr>
         <p:txBody>
           <a:bodyPr wrap="square" lIns="0" rIns="0" tIns="0" bIns="0" anchor="ctr">
-            <a:spAutoFit/>
+            <a:normAutofit/>
           </a:bodyPr>
           <a:lstStyle/>
           <a:p>
             <a:pPr algn="ctr">
+              <a:lnSpc>
+                <a:spcPct val="100000"/>
+              </a:lnSpc>
               <a:spcAft>
                 <a:spcPts val="89"/>
               </a:spcAft>
@@ -25374,11 +26346,14 @@
         </p:spPr>
         <p:txBody>
           <a:bodyPr wrap="square" lIns="0" rIns="0" tIns="0" bIns="0" anchor="ctr">
-            <a:spAutoFit/>
+            <a:normAutofit/>
           </a:bodyPr>
           <a:lstStyle/>
           <a:p>
             <a:pPr algn="ctr">
+              <a:lnSpc>
+                <a:spcPct val="100000"/>
+              </a:lnSpc>
               <a:spcAft>
                 <a:spcPts val="89"/>
               </a:spcAft>
@@ -25458,11 +26433,14 @@
         </p:spPr>
         <p:txBody>
           <a:bodyPr wrap="square" lIns="0" rIns="0" tIns="0" bIns="0" anchor="ctr">
-            <a:spAutoFit/>
+            <a:normAutofit/>
           </a:bodyPr>
           <a:lstStyle/>
           <a:p>
             <a:pPr algn="ctr">
+              <a:lnSpc>
+                <a:spcPct val="100000"/>
+              </a:lnSpc>
               <a:spcAft>
                 <a:spcPts val="89"/>
               </a:spcAft>
@@ -25497,11 +26475,14 @@
         </p:spPr>
         <p:txBody>
           <a:bodyPr wrap="square" lIns="0" rIns="0" tIns="0" bIns="0" anchor="t">
-            <a:spAutoFit/>
+            <a:normAutofit/>
           </a:bodyPr>
           <a:lstStyle/>
           <a:p>
             <a:pPr algn="ctr">
+              <a:lnSpc>
+                <a:spcPct val="100000"/>
+              </a:lnSpc>
               <a:spcAft>
                 <a:spcPts val="131"/>
               </a:spcAft>
@@ -25536,11 +26517,14 @@
         </p:spPr>
         <p:txBody>
           <a:bodyPr wrap="square" lIns="0" rIns="0" tIns="0" bIns="0" anchor="t">
-            <a:spAutoFit/>
+            <a:normAutofit/>
           </a:bodyPr>
           <a:lstStyle/>
           <a:p>
             <a:pPr algn="l">
+              <a:lnSpc>
+                <a:spcPct val="100000"/>
+              </a:lnSpc>
               <a:spcAft>
                 <a:spcPts val="81"/>
               </a:spcAft>
@@ -25575,11 +26559,14 @@
         </p:spPr>
         <p:txBody>
           <a:bodyPr wrap="square" lIns="0" rIns="0" tIns="0" bIns="0" anchor="t">
-            <a:spAutoFit/>
+            <a:normAutofit/>
           </a:bodyPr>
           <a:lstStyle/>
           <a:p>
             <a:pPr algn="r">
+              <a:lnSpc>
+                <a:spcPct val="100000"/>
+              </a:lnSpc>
               <a:spcAft>
                 <a:spcPts val="86"/>
               </a:spcAft>
@@ -25677,11 +26664,14 @@
         </p:spPr>
         <p:txBody>
           <a:bodyPr wrap="square" lIns="0" rIns="0" tIns="0" bIns="0" anchor="t">
-            <a:spAutoFit/>
+            <a:normAutofit/>
           </a:bodyPr>
           <a:lstStyle/>
           <a:p>
             <a:pPr algn="l">
+              <a:lnSpc>
+                <a:spcPct val="100000"/>
+              </a:lnSpc>
               <a:spcAft>
                 <a:spcPts val="108"/>
               </a:spcAft>
@@ -25716,11 +26706,14 @@
         </p:spPr>
         <p:txBody>
           <a:bodyPr wrap="square" lIns="0" rIns="0" tIns="0" bIns="0" anchor="t">
-            <a:spAutoFit/>
+            <a:normAutofit/>
           </a:bodyPr>
           <a:lstStyle/>
           <a:p>
             <a:pPr algn="l">
+              <a:lnSpc>
+                <a:spcPct val="100000"/>
+              </a:lnSpc>
               <a:spcAft>
                 <a:spcPts val="300"/>
               </a:spcAft>
@@ -25755,11 +26748,14 @@
         </p:spPr>
         <p:txBody>
           <a:bodyPr wrap="square" lIns="0" rIns="0" tIns="0" bIns="0" anchor="t">
-            <a:spAutoFit/>
+            <a:normAutofit/>
           </a:bodyPr>
           <a:lstStyle/>
           <a:p>
             <a:pPr algn="l">
+              <a:lnSpc>
+                <a:spcPct val="100000"/>
+              </a:lnSpc>
               <a:spcAft>
                 <a:spcPts val="126"/>
               </a:spcAft>
@@ -25882,11 +26878,14 @@
         </p:spPr>
         <p:txBody>
           <a:bodyPr wrap="square" lIns="0" rIns="0" tIns="0" bIns="0" anchor="t">
-            <a:spAutoFit/>
+            <a:normAutofit/>
           </a:bodyPr>
           <a:lstStyle/>
           <a:p>
             <a:pPr algn="ctr">
+              <a:lnSpc>
+                <a:spcPct val="100000"/>
+              </a:lnSpc>
               <a:spcAft>
                 <a:spcPts val="108"/>
               </a:spcAft>
@@ -25921,11 +26920,14 @@
         </p:spPr>
         <p:txBody>
           <a:bodyPr wrap="square" lIns="0" rIns="0" tIns="0" bIns="0" anchor="ctr">
-            <a:spAutoFit/>
+            <a:normAutofit/>
           </a:bodyPr>
           <a:lstStyle/>
           <a:p>
             <a:pPr algn="ctr">
+              <a:lnSpc>
+                <a:spcPct val="100000"/>
+              </a:lnSpc>
               <a:spcAft>
                 <a:spcPts val="216"/>
               </a:spcAft>
@@ -25960,11 +26962,14 @@
         </p:spPr>
         <p:txBody>
           <a:bodyPr wrap="square" lIns="0" rIns="0" tIns="0" bIns="0" anchor="t">
-            <a:spAutoFit/>
+            <a:normAutofit/>
           </a:bodyPr>
           <a:lstStyle/>
           <a:p>
             <a:pPr algn="ctr">
+              <a:lnSpc>
+                <a:spcPct val="100000"/>
+              </a:lnSpc>
               <a:spcAft>
                 <a:spcPts val="108"/>
               </a:spcAft>
@@ -26089,11 +27094,14 @@
         </p:spPr>
         <p:txBody>
           <a:bodyPr wrap="square" lIns="0" rIns="0" tIns="0" bIns="0" anchor="t">
-            <a:spAutoFit/>
+            <a:normAutofit/>
           </a:bodyPr>
           <a:lstStyle/>
           <a:p>
             <a:pPr algn="l">
+              <a:lnSpc>
+                <a:spcPct val="100000"/>
+              </a:lnSpc>
               <a:spcAft>
                 <a:spcPts val="108"/>
               </a:spcAft>
@@ -26128,11 +27136,14 @@
         </p:spPr>
         <p:txBody>
           <a:bodyPr wrap="square" lIns="0" rIns="0" tIns="0" bIns="0" anchor="t">
-            <a:spAutoFit/>
+            <a:normAutofit/>
           </a:bodyPr>
           <a:lstStyle/>
           <a:p>
             <a:pPr algn="l">
+              <a:lnSpc>
+                <a:spcPct val="100000"/>
+              </a:lnSpc>
               <a:spcAft>
                 <a:spcPts val="150"/>
               </a:spcAft>
@@ -26167,11 +27178,14 @@
         </p:spPr>
         <p:txBody>
           <a:bodyPr wrap="square" lIns="0" rIns="0" tIns="0" bIns="0" anchor="t">
-            <a:spAutoFit/>
+            <a:normAutofit/>
           </a:bodyPr>
           <a:lstStyle/>
           <a:p>
             <a:pPr algn="l">
+              <a:lnSpc>
+                <a:spcPct val="100000"/>
+              </a:lnSpc>
               <a:spcAft>
                 <a:spcPts val="97"/>
               </a:spcAft>
@@ -26296,11 +27310,14 @@
         </p:spPr>
         <p:txBody>
           <a:bodyPr wrap="square" lIns="0" rIns="0" tIns="0" bIns="0" anchor="t">
-            <a:spAutoFit/>
+            <a:normAutofit/>
           </a:bodyPr>
           <a:lstStyle/>
           <a:p>
             <a:pPr algn="l">
+              <a:lnSpc>
+                <a:spcPct val="100000"/>
+              </a:lnSpc>
               <a:spcAft>
                 <a:spcPts val="108"/>
               </a:spcAft>
@@ -26335,11 +27352,14 @@
         </p:spPr>
         <p:txBody>
           <a:bodyPr wrap="square" lIns="0" rIns="0" tIns="0" bIns="0" anchor="t">
-            <a:spAutoFit/>
+            <a:normAutofit/>
           </a:bodyPr>
           <a:lstStyle/>
           <a:p>
             <a:pPr algn="l">
+              <a:lnSpc>
+                <a:spcPct val="100000"/>
+              </a:lnSpc>
               <a:spcAft>
                 <a:spcPts val="150"/>
               </a:spcAft>
@@ -26374,11 +27394,14 @@
         </p:spPr>
         <p:txBody>
           <a:bodyPr wrap="square" lIns="0" rIns="0" tIns="0" bIns="0" anchor="t">
-            <a:spAutoFit/>
+            <a:normAutofit/>
           </a:bodyPr>
           <a:lstStyle/>
           <a:p>
             <a:pPr algn="l">
+              <a:lnSpc>
+                <a:spcPct val="100000"/>
+              </a:lnSpc>
               <a:spcAft>
                 <a:spcPts val="97"/>
               </a:spcAft>
@@ -26503,11 +27526,14 @@
         </p:spPr>
         <p:txBody>
           <a:bodyPr wrap="square" lIns="0" rIns="0" tIns="0" bIns="0" anchor="t">
-            <a:spAutoFit/>
+            <a:normAutofit/>
           </a:bodyPr>
           <a:lstStyle/>
           <a:p>
             <a:pPr algn="l">
+              <a:lnSpc>
+                <a:spcPct val="100000"/>
+              </a:lnSpc>
               <a:spcAft>
                 <a:spcPts val="108"/>
               </a:spcAft>
@@ -26542,11 +27568,14 @@
         </p:spPr>
         <p:txBody>
           <a:bodyPr wrap="square" lIns="0" rIns="0" tIns="0" bIns="0" anchor="t">
-            <a:spAutoFit/>
+            <a:normAutofit/>
           </a:bodyPr>
           <a:lstStyle/>
           <a:p>
             <a:pPr algn="l">
+              <a:lnSpc>
+                <a:spcPct val="100000"/>
+              </a:lnSpc>
               <a:spcAft>
                 <a:spcPts val="150"/>
               </a:spcAft>
@@ -26581,11 +27610,14 @@
         </p:spPr>
         <p:txBody>
           <a:bodyPr wrap="square" lIns="0" rIns="0" tIns="0" bIns="0" anchor="t">
-            <a:spAutoFit/>
+            <a:normAutofit/>
           </a:bodyPr>
           <a:lstStyle/>
           <a:p>
             <a:pPr algn="l">
+              <a:lnSpc>
+                <a:spcPct val="100000"/>
+              </a:lnSpc>
               <a:spcAft>
                 <a:spcPts val="97"/>
               </a:spcAft>
@@ -26710,11 +27742,14 @@
         </p:spPr>
         <p:txBody>
           <a:bodyPr wrap="square" lIns="0" rIns="0" tIns="0" bIns="0" anchor="t">
-            <a:spAutoFit/>
+            <a:normAutofit/>
           </a:bodyPr>
           <a:lstStyle/>
           <a:p>
             <a:pPr algn="l">
+              <a:lnSpc>
+                <a:spcPct val="100000"/>
+              </a:lnSpc>
               <a:spcAft>
                 <a:spcPts val="108"/>
               </a:spcAft>
@@ -26749,11 +27784,14 @@
         </p:spPr>
         <p:txBody>
           <a:bodyPr wrap="square" lIns="0" rIns="0" tIns="0" bIns="0" anchor="t">
-            <a:spAutoFit/>
+            <a:normAutofit/>
           </a:bodyPr>
           <a:lstStyle/>
           <a:p>
             <a:pPr algn="l">
+              <a:lnSpc>
+                <a:spcPct val="100000"/>
+              </a:lnSpc>
               <a:spcAft>
                 <a:spcPts val="150"/>
               </a:spcAft>
@@ -26788,11 +27826,14 @@
         </p:spPr>
         <p:txBody>
           <a:bodyPr wrap="square" lIns="0" rIns="0" tIns="0" bIns="0" anchor="t">
-            <a:spAutoFit/>
+            <a:normAutofit/>
           </a:bodyPr>
           <a:lstStyle/>
           <a:p>
             <a:pPr algn="l">
+              <a:lnSpc>
+                <a:spcPct val="100000"/>
+              </a:lnSpc>
               <a:spcAft>
                 <a:spcPts val="97"/>
               </a:spcAft>
@@ -26917,11 +27958,14 @@
         </p:spPr>
         <p:txBody>
           <a:bodyPr wrap="square" lIns="0" rIns="0" tIns="0" bIns="0" anchor="t">
-            <a:spAutoFit/>
+            <a:normAutofit/>
           </a:bodyPr>
           <a:lstStyle/>
           <a:p>
             <a:pPr algn="l">
+              <a:lnSpc>
+                <a:spcPct val="100000"/>
+              </a:lnSpc>
               <a:spcAft>
                 <a:spcPts val="108"/>
               </a:spcAft>
@@ -26956,11 +28000,14 @@
         </p:spPr>
         <p:txBody>
           <a:bodyPr wrap="square" lIns="0" rIns="0" tIns="0" bIns="0" anchor="t">
-            <a:spAutoFit/>
+            <a:normAutofit/>
           </a:bodyPr>
           <a:lstStyle/>
           <a:p>
             <a:pPr algn="l">
+              <a:lnSpc>
+                <a:spcPct val="100000"/>
+              </a:lnSpc>
               <a:spcAft>
                 <a:spcPts val="150"/>
               </a:spcAft>
@@ -26995,11 +28042,14 @@
         </p:spPr>
         <p:txBody>
           <a:bodyPr wrap="square" lIns="0" rIns="0" tIns="0" bIns="0" anchor="t">
-            <a:spAutoFit/>
+            <a:normAutofit/>
           </a:bodyPr>
           <a:lstStyle/>
           <a:p>
             <a:pPr algn="l">
+              <a:lnSpc>
+                <a:spcPct val="100000"/>
+              </a:lnSpc>
               <a:spcAft>
                 <a:spcPts val="97"/>
               </a:spcAft>
@@ -27124,11 +28174,14 @@
         </p:spPr>
         <p:txBody>
           <a:bodyPr wrap="square" lIns="0" rIns="0" tIns="0" bIns="0" anchor="t">
-            <a:spAutoFit/>
+            <a:normAutofit/>
           </a:bodyPr>
           <a:lstStyle/>
           <a:p>
             <a:pPr algn="l">
+              <a:lnSpc>
+                <a:spcPct val="100000"/>
+              </a:lnSpc>
               <a:spcAft>
                 <a:spcPts val="108"/>
               </a:spcAft>
@@ -27163,11 +28216,14 @@
         </p:spPr>
         <p:txBody>
           <a:bodyPr wrap="square" lIns="0" rIns="0" tIns="0" bIns="0" anchor="t">
-            <a:spAutoFit/>
+            <a:normAutofit/>
           </a:bodyPr>
           <a:lstStyle/>
           <a:p>
             <a:pPr algn="l">
+              <a:lnSpc>
+                <a:spcPct val="100000"/>
+              </a:lnSpc>
               <a:spcAft>
                 <a:spcPts val="150"/>
               </a:spcAft>
@@ -27202,11 +28258,14 @@
         </p:spPr>
         <p:txBody>
           <a:bodyPr wrap="square" lIns="0" rIns="0" tIns="0" bIns="0" anchor="t">
-            <a:spAutoFit/>
+            <a:normAutofit/>
           </a:bodyPr>
           <a:lstStyle/>
           <a:p>
             <a:pPr algn="l">
+              <a:lnSpc>
+                <a:spcPct val="100000"/>
+              </a:lnSpc>
               <a:spcAft>
                 <a:spcPts val="97"/>
               </a:spcAft>
@@ -27413,11 +28472,14 @@
         </p:spPr>
         <p:txBody>
           <a:bodyPr wrap="square" lIns="0" rIns="0" tIns="0" bIns="0" anchor="t">
-            <a:spAutoFit/>
+            <a:normAutofit/>
           </a:bodyPr>
           <a:lstStyle/>
           <a:p>
             <a:pPr algn="l">
+              <a:lnSpc>
+                <a:spcPct val="100000"/>
+              </a:lnSpc>
               <a:spcAft>
                 <a:spcPts val="81"/>
               </a:spcAft>
@@ -27452,11 +28514,14 @@
         </p:spPr>
         <p:txBody>
           <a:bodyPr wrap="square" lIns="0" rIns="0" tIns="0" bIns="0" anchor="t">
-            <a:spAutoFit/>
+            <a:normAutofit/>
           </a:bodyPr>
           <a:lstStyle/>
           <a:p>
             <a:pPr algn="r">
+              <a:lnSpc>
+                <a:spcPct val="100000"/>
+              </a:lnSpc>
               <a:spcAft>
                 <a:spcPts val="86"/>
               </a:spcAft>
@@ -27554,11 +28619,14 @@
         </p:spPr>
         <p:txBody>
           <a:bodyPr wrap="square" lIns="0" rIns="0" tIns="0" bIns="0" anchor="t">
-            <a:spAutoFit/>
+            <a:normAutofit/>
           </a:bodyPr>
           <a:lstStyle/>
           <a:p>
             <a:pPr algn="l">
+              <a:lnSpc>
+                <a:spcPct val="100000"/>
+              </a:lnSpc>
               <a:spcAft>
                 <a:spcPts val="108"/>
               </a:spcAft>
@@ -27593,11 +28661,14 @@
         </p:spPr>
         <p:txBody>
           <a:bodyPr wrap="square" lIns="0" rIns="0" tIns="0" bIns="0" anchor="t">
-            <a:spAutoFit/>
+            <a:normAutofit/>
           </a:bodyPr>
           <a:lstStyle/>
           <a:p>
             <a:pPr algn="l">
+              <a:lnSpc>
+                <a:spcPct val="100000"/>
+              </a:lnSpc>
               <a:spcAft>
                 <a:spcPts val="300"/>
               </a:spcAft>
@@ -27632,11 +28703,14 @@
         </p:spPr>
         <p:txBody>
           <a:bodyPr wrap="square" lIns="0" rIns="0" tIns="0" bIns="0" anchor="t">
-            <a:spAutoFit/>
+            <a:normAutofit/>
           </a:bodyPr>
           <a:lstStyle/>
           <a:p>
             <a:pPr algn="l">
+              <a:lnSpc>
+                <a:spcPct val="100000"/>
+              </a:lnSpc>
               <a:spcAft>
                 <a:spcPts val="126"/>
               </a:spcAft>
@@ -27804,11 +28878,14 @@
         </p:spPr>
         <p:txBody>
           <a:bodyPr wrap="square" lIns="0" rIns="0" tIns="0" bIns="0" anchor="ctr">
-            <a:spAutoFit/>
+            <a:normAutofit/>
           </a:bodyPr>
           <a:lstStyle/>
           <a:p>
             <a:pPr algn="ctr">
+              <a:lnSpc>
+                <a:spcPct val="100000"/>
+              </a:lnSpc>
               <a:spcAft>
                 <a:spcPts val="96"/>
               </a:spcAft>
@@ -27843,11 +28920,14 @@
         </p:spPr>
         <p:txBody>
           <a:bodyPr wrap="square" lIns="0" rIns="0" tIns="0" bIns="0" anchor="t">
-            <a:spAutoFit/>
+            <a:normAutofit/>
           </a:bodyPr>
           <a:lstStyle/>
           <a:p>
             <a:pPr algn="l">
+              <a:lnSpc>
+                <a:spcPct val="100000"/>
+              </a:lnSpc>
               <a:spcAft>
                 <a:spcPts val="312"/>
               </a:spcAft>
@@ -27882,11 +28962,14 @@
         </p:spPr>
         <p:txBody>
           <a:bodyPr wrap="square" lIns="0" rIns="0" tIns="0" bIns="0" anchor="t">
-            <a:spAutoFit/>
+            <a:normAutofit/>
           </a:bodyPr>
           <a:lstStyle/>
           <a:p>
             <a:pPr algn="l">
+              <a:lnSpc>
+                <a:spcPct val="100000"/>
+              </a:lnSpc>
               <a:spcAft>
                 <a:spcPts val="144"/>
               </a:spcAft>
@@ -27966,11 +29049,14 @@
         </p:spPr>
         <p:txBody>
           <a:bodyPr wrap="square" lIns="0" rIns="0" tIns="0" bIns="0" anchor="ctr">
-            <a:spAutoFit/>
+            <a:normAutofit/>
           </a:bodyPr>
           <a:lstStyle/>
           <a:p>
             <a:pPr algn="ctr">
+              <a:lnSpc>
+                <a:spcPct val="100000"/>
+              </a:lnSpc>
               <a:spcAft>
                 <a:spcPts val="86"/>
               </a:spcAft>
@@ -28050,11 +29136,14 @@
         </p:spPr>
         <p:txBody>
           <a:bodyPr wrap="square" lIns="0" rIns="0" tIns="0" bIns="0" anchor="ctr">
-            <a:spAutoFit/>
+            <a:normAutofit/>
           </a:bodyPr>
           <a:lstStyle/>
           <a:p>
             <a:pPr algn="ctr">
+              <a:lnSpc>
+                <a:spcPct val="100000"/>
+              </a:lnSpc>
               <a:spcAft>
                 <a:spcPts val="86"/>
               </a:spcAft>
@@ -28134,11 +29223,14 @@
         </p:spPr>
         <p:txBody>
           <a:bodyPr wrap="square" lIns="0" rIns="0" tIns="0" bIns="0" anchor="ctr">
-            <a:spAutoFit/>
+            <a:normAutofit/>
           </a:bodyPr>
           <a:lstStyle/>
           <a:p>
             <a:pPr algn="ctr">
+              <a:lnSpc>
+                <a:spcPct val="100000"/>
+              </a:lnSpc>
               <a:spcAft>
                 <a:spcPts val="86"/>
               </a:spcAft>
@@ -28173,11 +29265,14 @@
         </p:spPr>
         <p:txBody>
           <a:bodyPr wrap="square" lIns="0" rIns="0" tIns="0" bIns="0" anchor="t">
-            <a:spAutoFit/>
+            <a:normAutofit/>
           </a:bodyPr>
           <a:lstStyle/>
           <a:p>
             <a:pPr algn="l">
+              <a:lnSpc>
+                <a:spcPct val="100000"/>
+              </a:lnSpc>
               <a:spcAft>
                 <a:spcPts val="110"/>
               </a:spcAft>
@@ -28302,11 +29397,14 @@
         </p:spPr>
         <p:txBody>
           <a:bodyPr wrap="square" lIns="0" rIns="0" tIns="0" bIns="0" anchor="ctr">
-            <a:spAutoFit/>
+            <a:normAutofit/>
           </a:bodyPr>
           <a:lstStyle/>
           <a:p>
             <a:pPr algn="ctr">
+              <a:lnSpc>
+                <a:spcPct val="100000"/>
+              </a:lnSpc>
               <a:spcAft>
                 <a:spcPts val="96"/>
               </a:spcAft>
@@ -28341,11 +29439,14 @@
         </p:spPr>
         <p:txBody>
           <a:bodyPr wrap="square" lIns="0" rIns="0" tIns="0" bIns="0" anchor="t">
-            <a:spAutoFit/>
+            <a:normAutofit/>
           </a:bodyPr>
           <a:lstStyle/>
           <a:p>
             <a:pPr algn="l">
+              <a:lnSpc>
+                <a:spcPct val="100000"/>
+              </a:lnSpc>
               <a:spcAft>
                 <a:spcPts val="312"/>
               </a:spcAft>
@@ -28380,11 +29481,14 @@
         </p:spPr>
         <p:txBody>
           <a:bodyPr wrap="square" lIns="0" rIns="0" tIns="0" bIns="0" anchor="t">
-            <a:spAutoFit/>
+            <a:normAutofit/>
           </a:bodyPr>
           <a:lstStyle/>
           <a:p>
             <a:pPr algn="l">
+              <a:lnSpc>
+                <a:spcPct val="100000"/>
+              </a:lnSpc>
               <a:spcAft>
                 <a:spcPts val="144"/>
               </a:spcAft>
@@ -28464,11 +29568,14 @@
         </p:spPr>
         <p:txBody>
           <a:bodyPr wrap="square" lIns="0" rIns="0" tIns="0" bIns="0" anchor="ctr">
-            <a:spAutoFit/>
+            <a:normAutofit/>
           </a:bodyPr>
           <a:lstStyle/>
           <a:p>
             <a:pPr algn="ctr">
+              <a:lnSpc>
+                <a:spcPct val="100000"/>
+              </a:lnSpc>
               <a:spcAft>
                 <a:spcPts val="86"/>
               </a:spcAft>
@@ -28548,11 +29655,14 @@
         </p:spPr>
         <p:txBody>
           <a:bodyPr wrap="square" lIns="0" rIns="0" tIns="0" bIns="0" anchor="ctr">
-            <a:spAutoFit/>
+            <a:normAutofit/>
           </a:bodyPr>
           <a:lstStyle/>
           <a:p>
             <a:pPr algn="ctr">
+              <a:lnSpc>
+                <a:spcPct val="100000"/>
+              </a:lnSpc>
               <a:spcAft>
                 <a:spcPts val="86"/>
               </a:spcAft>
@@ -28632,11 +29742,14 @@
         </p:spPr>
         <p:txBody>
           <a:bodyPr wrap="square" lIns="0" rIns="0" tIns="0" bIns="0" anchor="ctr">
-            <a:spAutoFit/>
+            <a:normAutofit/>
           </a:bodyPr>
           <a:lstStyle/>
           <a:p>
             <a:pPr algn="ctr">
+              <a:lnSpc>
+                <a:spcPct val="100000"/>
+              </a:lnSpc>
               <a:spcAft>
                 <a:spcPts val="86"/>
               </a:spcAft>
@@ -28671,11 +29784,14 @@
         </p:spPr>
         <p:txBody>
           <a:bodyPr wrap="square" lIns="0" rIns="0" tIns="0" bIns="0" anchor="t">
-            <a:spAutoFit/>
+            <a:normAutofit/>
           </a:bodyPr>
           <a:lstStyle/>
           <a:p>
             <a:pPr algn="l">
+              <a:lnSpc>
+                <a:spcPct val="100000"/>
+              </a:lnSpc>
               <a:spcAft>
                 <a:spcPts val="110"/>
               </a:spcAft>
@@ -28755,11 +29871,14 @@
         </p:spPr>
         <p:txBody>
           <a:bodyPr wrap="square" lIns="0" rIns="0" tIns="0" bIns="0" anchor="ctr">
-            <a:spAutoFit/>
+            <a:normAutofit/>
           </a:bodyPr>
           <a:lstStyle/>
           <a:p>
             <a:pPr algn="ctr">
+              <a:lnSpc>
+                <a:spcPct val="100000"/>
+              </a:lnSpc>
               <a:spcAft>
                 <a:spcPts val="93"/>
               </a:spcAft>
@@ -28839,11 +29958,14 @@
         </p:spPr>
         <p:txBody>
           <a:bodyPr wrap="square" lIns="0" rIns="0" tIns="0" bIns="0" anchor="t">
-            <a:spAutoFit/>
+            <a:normAutofit/>
           </a:bodyPr>
           <a:lstStyle/>
           <a:p>
             <a:pPr algn="ctr">
+              <a:lnSpc>
+                <a:spcPct val="100000"/>
+              </a:lnSpc>
               <a:spcAft>
                 <a:spcPts val="124"/>
               </a:spcAft>
@@ -28878,11 +30000,14 @@
         </p:spPr>
         <p:txBody>
           <a:bodyPr wrap="square" lIns="0" rIns="0" tIns="0" bIns="0" anchor="t">
-            <a:spAutoFit/>
+            <a:normAutofit/>
           </a:bodyPr>
           <a:lstStyle/>
           <a:p>
             <a:pPr algn="l">
+              <a:lnSpc>
+                <a:spcPct val="100000"/>
+              </a:lnSpc>
               <a:spcAft>
                 <a:spcPts val="81"/>
               </a:spcAft>
@@ -28917,11 +30042,14 @@
         </p:spPr>
         <p:txBody>
           <a:bodyPr wrap="square" lIns="0" rIns="0" tIns="0" bIns="0" anchor="t">
-            <a:spAutoFit/>
+            <a:normAutofit/>
           </a:bodyPr>
           <a:lstStyle/>
           <a:p>
             <a:pPr algn="r">
+              <a:lnSpc>
+                <a:spcPct val="100000"/>
+              </a:lnSpc>
               <a:spcAft>
                 <a:spcPts val="86"/>
               </a:spcAft>
@@ -29019,11 +30147,14 @@
         </p:spPr>
         <p:txBody>
           <a:bodyPr wrap="square" lIns="0" rIns="0" tIns="0" bIns="0" anchor="t">
-            <a:spAutoFit/>
+            <a:normAutofit/>
           </a:bodyPr>
           <a:lstStyle/>
           <a:p>
             <a:pPr algn="l">
+              <a:lnSpc>
+                <a:spcPct val="100000"/>
+              </a:lnSpc>
               <a:spcAft>
                 <a:spcPts val="108"/>
               </a:spcAft>
@@ -29058,11 +30189,14 @@
         </p:spPr>
         <p:txBody>
           <a:bodyPr wrap="square" lIns="0" rIns="0" tIns="0" bIns="0" anchor="t">
-            <a:spAutoFit/>
+            <a:normAutofit/>
           </a:bodyPr>
           <a:lstStyle/>
           <a:p>
             <a:pPr algn="l">
+              <a:lnSpc>
+                <a:spcPct val="100000"/>
+              </a:lnSpc>
               <a:spcAft>
                 <a:spcPts val="300"/>
               </a:spcAft>
@@ -29097,11 +30231,14 @@
         </p:spPr>
         <p:txBody>
           <a:bodyPr wrap="square" lIns="0" rIns="0" tIns="0" bIns="0" anchor="t">
-            <a:spAutoFit/>
+            <a:normAutofit/>
           </a:bodyPr>
           <a:lstStyle/>
           <a:p>
             <a:pPr algn="l">
+              <a:lnSpc>
+                <a:spcPct val="100000"/>
+              </a:lnSpc>
               <a:spcAft>
                 <a:spcPts val="126"/>
               </a:spcAft>
@@ -29224,11 +30361,14 @@
         </p:spPr>
         <p:txBody>
           <a:bodyPr wrap="square" lIns="0" rIns="0" tIns="0" bIns="0" anchor="ctr">
-            <a:spAutoFit/>
+            <a:normAutofit/>
           </a:bodyPr>
           <a:lstStyle/>
           <a:p>
             <a:pPr algn="ctr">
+              <a:lnSpc>
+                <a:spcPct val="100000"/>
+              </a:lnSpc>
               <a:spcAft>
                 <a:spcPts val="131"/>
               </a:spcAft>
@@ -29306,11 +30446,14 @@
         </p:spPr>
         <p:txBody>
           <a:bodyPr wrap="square" lIns="0" rIns="0" tIns="0" bIns="0" anchor="t">
-            <a:spAutoFit/>
+            <a:normAutofit/>
           </a:bodyPr>
           <a:lstStyle/>
           <a:p>
             <a:pPr algn="ctr">
+              <a:lnSpc>
+                <a:spcPct val="100000"/>
+              </a:lnSpc>
               <a:spcAft>
                 <a:spcPts val="156"/>
               </a:spcAft>
@@ -29345,11 +30488,14 @@
         </p:spPr>
         <p:txBody>
           <a:bodyPr wrap="square" lIns="0" rIns="0" tIns="0" bIns="0" anchor="t">
-            <a:spAutoFit/>
+            <a:normAutofit/>
           </a:bodyPr>
           <a:lstStyle/>
           <a:p>
             <a:pPr algn="ctr">
+              <a:lnSpc>
+                <a:spcPct val="100000"/>
+              </a:lnSpc>
               <a:spcAft>
                 <a:spcPts val="105"/>
               </a:spcAft>
@@ -29429,11 +30575,14 @@
         </p:spPr>
         <p:txBody>
           <a:bodyPr wrap="square" lIns="0" rIns="0" tIns="0" bIns="0" anchor="ctr">
-            <a:spAutoFit/>
+            <a:normAutofit/>
           </a:bodyPr>
           <a:lstStyle/>
           <a:p>
             <a:pPr algn="ctr">
+              <a:lnSpc>
+                <a:spcPct val="100000"/>
+              </a:lnSpc>
               <a:spcAft>
                 <a:spcPts val="131"/>
               </a:spcAft>
@@ -29511,11 +30660,14 @@
         </p:spPr>
         <p:txBody>
           <a:bodyPr wrap="square" lIns="0" rIns="0" tIns="0" bIns="0" anchor="t">
-            <a:spAutoFit/>
+            <a:normAutofit/>
           </a:bodyPr>
           <a:lstStyle/>
           <a:p>
             <a:pPr algn="ctr">
+              <a:lnSpc>
+                <a:spcPct val="100000"/>
+              </a:lnSpc>
               <a:spcAft>
                 <a:spcPts val="156"/>
               </a:spcAft>
@@ -29550,11 +30702,14 @@
         </p:spPr>
         <p:txBody>
           <a:bodyPr wrap="square" lIns="0" rIns="0" tIns="0" bIns="0" anchor="t">
-            <a:spAutoFit/>
+            <a:normAutofit/>
           </a:bodyPr>
           <a:lstStyle/>
           <a:p>
             <a:pPr algn="ctr">
+              <a:lnSpc>
+                <a:spcPct val="100000"/>
+              </a:lnSpc>
               <a:spcAft>
                 <a:spcPts val="105"/>
               </a:spcAft>
@@ -29634,11 +30789,14 @@
         </p:spPr>
         <p:txBody>
           <a:bodyPr wrap="square" lIns="0" rIns="0" tIns="0" bIns="0" anchor="ctr">
-            <a:spAutoFit/>
+            <a:normAutofit/>
           </a:bodyPr>
           <a:lstStyle/>
           <a:p>
             <a:pPr algn="ctr">
+              <a:lnSpc>
+                <a:spcPct val="100000"/>
+              </a:lnSpc>
               <a:spcAft>
                 <a:spcPts val="131"/>
               </a:spcAft>
@@ -29716,11 +30874,14 @@
         </p:spPr>
         <p:txBody>
           <a:bodyPr wrap="square" lIns="0" rIns="0" tIns="0" bIns="0" anchor="t">
-            <a:spAutoFit/>
+            <a:normAutofit/>
           </a:bodyPr>
           <a:lstStyle/>
           <a:p>
             <a:pPr algn="ctr">
+              <a:lnSpc>
+                <a:spcPct val="100000"/>
+              </a:lnSpc>
               <a:spcAft>
                 <a:spcPts val="156"/>
               </a:spcAft>
@@ -29755,11 +30916,14 @@
         </p:spPr>
         <p:txBody>
           <a:bodyPr wrap="square" lIns="0" rIns="0" tIns="0" bIns="0" anchor="t">
-            <a:spAutoFit/>
+            <a:normAutofit/>
           </a:bodyPr>
           <a:lstStyle/>
           <a:p>
             <a:pPr algn="ctr">
+              <a:lnSpc>
+                <a:spcPct val="100000"/>
+              </a:lnSpc>
               <a:spcAft>
                 <a:spcPts val="105"/>
               </a:spcAft>
@@ -29839,11 +31003,14 @@
         </p:spPr>
         <p:txBody>
           <a:bodyPr wrap="square" lIns="0" rIns="0" tIns="0" bIns="0" anchor="ctr">
-            <a:spAutoFit/>
+            <a:normAutofit/>
           </a:bodyPr>
           <a:lstStyle/>
           <a:p>
             <a:pPr algn="ctr">
+              <a:lnSpc>
+                <a:spcPct val="100000"/>
+              </a:lnSpc>
               <a:spcAft>
                 <a:spcPts val="131"/>
               </a:spcAft>
@@ -29921,11 +31088,14 @@
         </p:spPr>
         <p:txBody>
           <a:bodyPr wrap="square" lIns="0" rIns="0" tIns="0" bIns="0" anchor="t">
-            <a:spAutoFit/>
+            <a:normAutofit/>
           </a:bodyPr>
           <a:lstStyle/>
           <a:p>
             <a:pPr algn="ctr">
+              <a:lnSpc>
+                <a:spcPct val="100000"/>
+              </a:lnSpc>
               <a:spcAft>
                 <a:spcPts val="156"/>
               </a:spcAft>
@@ -29960,11 +31130,14 @@
         </p:spPr>
         <p:txBody>
           <a:bodyPr wrap="square" lIns="0" rIns="0" tIns="0" bIns="0" anchor="t">
-            <a:spAutoFit/>
+            <a:normAutofit/>
           </a:bodyPr>
           <a:lstStyle/>
           <a:p>
             <a:pPr algn="ctr">
+              <a:lnSpc>
+                <a:spcPct val="100000"/>
+              </a:lnSpc>
               <a:spcAft>
                 <a:spcPts val="105"/>
               </a:spcAft>
@@ -30044,11 +31217,14 @@
         </p:spPr>
         <p:txBody>
           <a:bodyPr wrap="square" lIns="0" rIns="0" tIns="0" bIns="0" anchor="ctr">
-            <a:spAutoFit/>
+            <a:normAutofit/>
           </a:bodyPr>
           <a:lstStyle/>
           <a:p>
             <a:pPr algn="ctr">
+              <a:lnSpc>
+                <a:spcPct val="100000"/>
+              </a:lnSpc>
               <a:spcAft>
                 <a:spcPts val="131"/>
               </a:spcAft>
@@ -30126,11 +31302,14 @@
         </p:spPr>
         <p:txBody>
           <a:bodyPr wrap="square" lIns="0" rIns="0" tIns="0" bIns="0" anchor="t">
-            <a:spAutoFit/>
+            <a:normAutofit/>
           </a:bodyPr>
           <a:lstStyle/>
           <a:p>
             <a:pPr algn="ctr">
+              <a:lnSpc>
+                <a:spcPct val="100000"/>
+              </a:lnSpc>
               <a:spcAft>
                 <a:spcPts val="156"/>
               </a:spcAft>
@@ -30165,11 +31344,14 @@
         </p:spPr>
         <p:txBody>
           <a:bodyPr wrap="square" lIns="0" rIns="0" tIns="0" bIns="0" anchor="t">
-            <a:spAutoFit/>
+            <a:normAutofit/>
           </a:bodyPr>
           <a:lstStyle/>
           <a:p>
             <a:pPr algn="ctr">
+              <a:lnSpc>
+                <a:spcPct val="100000"/>
+              </a:lnSpc>
               <a:spcAft>
                 <a:spcPts val="105"/>
               </a:spcAft>
@@ -30249,11 +31431,14 @@
         </p:spPr>
         <p:txBody>
           <a:bodyPr wrap="square" lIns="0" rIns="0" tIns="0" bIns="0" anchor="ctr">
-            <a:spAutoFit/>
+            <a:normAutofit/>
           </a:bodyPr>
           <a:lstStyle/>
           <a:p>
             <a:pPr algn="ctr">
+              <a:lnSpc>
+                <a:spcPct val="100000"/>
+              </a:lnSpc>
               <a:spcAft>
                 <a:spcPts val="131"/>
               </a:spcAft>
@@ -30288,11 +31473,14 @@
         </p:spPr>
         <p:txBody>
           <a:bodyPr wrap="square" lIns="0" rIns="0" tIns="0" bIns="0" anchor="t">
-            <a:spAutoFit/>
+            <a:normAutofit/>
           </a:bodyPr>
           <a:lstStyle/>
           <a:p>
             <a:pPr algn="ctr">
+              <a:lnSpc>
+                <a:spcPct val="100000"/>
+              </a:lnSpc>
               <a:spcAft>
                 <a:spcPts val="156"/>
               </a:spcAft>
@@ -30327,11 +31515,14 @@
         </p:spPr>
         <p:txBody>
           <a:bodyPr wrap="square" lIns="0" rIns="0" tIns="0" bIns="0" anchor="t">
-            <a:spAutoFit/>
+            <a:normAutofit/>
           </a:bodyPr>
           <a:lstStyle/>
           <a:p>
             <a:pPr algn="ctr">
+              <a:lnSpc>
+                <a:spcPct val="100000"/>
+              </a:lnSpc>
               <a:spcAft>
                 <a:spcPts val="105"/>
               </a:spcAft>
@@ -30411,11 +31602,14 @@
         </p:spPr>
         <p:txBody>
           <a:bodyPr wrap="square" lIns="0" rIns="0" tIns="0" bIns="0" anchor="t">
-            <a:spAutoFit/>
+            <a:normAutofit/>
           </a:bodyPr>
           <a:lstStyle/>
           <a:p>
             <a:pPr algn="l">
+              <a:lnSpc>
+                <a:spcPct val="100000"/>
+              </a:lnSpc>
               <a:spcAft>
                 <a:spcPts val="102"/>
               </a:spcAft>
@@ -30450,11 +31644,14 @@
         </p:spPr>
         <p:txBody>
           <a:bodyPr wrap="square" lIns="0" rIns="0" tIns="0" bIns="0" anchor="ctr">
-            <a:spAutoFit/>
+            <a:normAutofit/>
           </a:bodyPr>
           <a:lstStyle/>
           <a:p>
             <a:pPr algn="l">
+              <a:lnSpc>
+                <a:spcPct val="100000"/>
+              </a:lnSpc>
               <a:spcAft>
                 <a:spcPts val="124"/>
               </a:spcAft>
@@ -30534,11 +31731,14 @@
         </p:spPr>
         <p:txBody>
           <a:bodyPr wrap="square" lIns="0" rIns="0" tIns="0" bIns="0" anchor="t">
-            <a:spAutoFit/>
+            <a:normAutofit/>
           </a:bodyPr>
           <a:lstStyle/>
           <a:p>
             <a:pPr algn="l">
+              <a:lnSpc>
+                <a:spcPct val="100000"/>
+              </a:lnSpc>
               <a:spcAft>
                 <a:spcPts val="102"/>
               </a:spcAft>
@@ -30573,11 +31773,14 @@
         </p:spPr>
         <p:txBody>
           <a:bodyPr wrap="square" lIns="0" rIns="0" tIns="0" bIns="0" anchor="ctr">
-            <a:spAutoFit/>
+            <a:normAutofit/>
           </a:bodyPr>
           <a:lstStyle/>
           <a:p>
             <a:pPr algn="l">
+              <a:lnSpc>
+                <a:spcPct val="100000"/>
+              </a:lnSpc>
               <a:spcAft>
                 <a:spcPts val="124"/>
               </a:spcAft>
@@ -30612,11 +31815,14 @@
         </p:spPr>
         <p:txBody>
           <a:bodyPr wrap="square" lIns="0" rIns="0" tIns="0" bIns="0" anchor="t">
-            <a:spAutoFit/>
+            <a:normAutofit/>
           </a:bodyPr>
           <a:lstStyle/>
           <a:p>
             <a:pPr algn="l">
+              <a:lnSpc>
+                <a:spcPct val="100000"/>
+              </a:lnSpc>
               <a:spcAft>
                 <a:spcPts val="81"/>
               </a:spcAft>
@@ -30651,11 +31857,14 @@
         </p:spPr>
         <p:txBody>
           <a:bodyPr wrap="square" lIns="0" rIns="0" tIns="0" bIns="0" anchor="t">
-            <a:spAutoFit/>
+            <a:normAutofit/>
           </a:bodyPr>
           <a:lstStyle/>
           <a:p>
             <a:pPr algn="r">
+              <a:lnSpc>
+                <a:spcPct val="100000"/>
+              </a:lnSpc>
               <a:spcAft>
                 <a:spcPts val="86"/>
               </a:spcAft>
@@ -30753,11 +31962,14 @@
         </p:spPr>
         <p:txBody>
           <a:bodyPr wrap="square" lIns="0" rIns="0" tIns="0" bIns="0" anchor="t">
-            <a:spAutoFit/>
+            <a:normAutofit/>
           </a:bodyPr>
           <a:lstStyle/>
           <a:p>
             <a:pPr algn="l">
+              <a:lnSpc>
+                <a:spcPct val="100000"/>
+              </a:lnSpc>
               <a:spcAft>
                 <a:spcPts val="108"/>
               </a:spcAft>
@@ -30792,11 +32004,14 @@
         </p:spPr>
         <p:txBody>
           <a:bodyPr wrap="square" lIns="0" rIns="0" tIns="0" bIns="0" anchor="t">
-            <a:spAutoFit/>
+            <a:normAutofit/>
           </a:bodyPr>
           <a:lstStyle/>
           <a:p>
             <a:pPr algn="l">
+              <a:lnSpc>
+                <a:spcPct val="100000"/>
+              </a:lnSpc>
               <a:spcAft>
                 <a:spcPts val="300"/>
               </a:spcAft>
@@ -30831,11 +32046,14 @@
         </p:spPr>
         <p:txBody>
           <a:bodyPr wrap="square" lIns="0" rIns="0" tIns="0" bIns="0" anchor="t">
-            <a:spAutoFit/>
+            <a:normAutofit/>
           </a:bodyPr>
           <a:lstStyle/>
           <a:p>
             <a:pPr algn="l">
+              <a:lnSpc>
+                <a:spcPct val="100000"/>
+              </a:lnSpc>
               <a:spcAft>
                 <a:spcPts val="126"/>
               </a:spcAft>
@@ -31003,11 +32221,14 @@
         </p:spPr>
         <p:txBody>
           <a:bodyPr wrap="square" lIns="0" rIns="0" tIns="0" bIns="0" anchor="t">
-            <a:spAutoFit/>
+            <a:normAutofit/>
           </a:bodyPr>
           <a:lstStyle/>
           <a:p>
             <a:pPr algn="l">
+              <a:lnSpc>
+                <a:spcPct val="100000"/>
+              </a:lnSpc>
               <a:spcAft>
                 <a:spcPts val="102"/>
               </a:spcAft>
@@ -31042,11 +32263,14 @@
         </p:spPr>
         <p:txBody>
           <a:bodyPr wrap="square" lIns="0" rIns="0" tIns="0" bIns="0" anchor="t">
-            <a:spAutoFit/>
+            <a:normAutofit/>
           </a:bodyPr>
           <a:lstStyle/>
           <a:p>
             <a:pPr algn="l">
+              <a:lnSpc>
+                <a:spcPct val="100000"/>
+              </a:lnSpc>
               <a:spcAft>
                 <a:spcPts val="179"/>
               </a:spcAft>
@@ -31081,11 +32305,14 @@
         </p:spPr>
         <p:txBody>
           <a:bodyPr wrap="square" lIns="0" rIns="0" tIns="0" bIns="0" anchor="t">
-            <a:spAutoFit/>
+            <a:normAutofit/>
           </a:bodyPr>
           <a:lstStyle/>
           <a:p>
             <a:pPr algn="l">
+              <a:lnSpc>
+                <a:spcPct val="100000"/>
+              </a:lnSpc>
               <a:spcAft>
                 <a:spcPts val="110"/>
               </a:spcAft>
@@ -31210,11 +32437,14 @@
         </p:spPr>
         <p:txBody>
           <a:bodyPr wrap="square" lIns="0" rIns="0" tIns="0" bIns="0" anchor="t">
-            <a:spAutoFit/>
+            <a:normAutofit/>
           </a:bodyPr>
           <a:lstStyle/>
           <a:p>
             <a:pPr algn="l">
+              <a:lnSpc>
+                <a:spcPct val="100000"/>
+              </a:lnSpc>
               <a:spcAft>
                 <a:spcPts val="102"/>
               </a:spcAft>
@@ -31249,11 +32479,14 @@
         </p:spPr>
         <p:txBody>
           <a:bodyPr wrap="square" lIns="0" rIns="0" tIns="0" bIns="0" anchor="t">
-            <a:spAutoFit/>
+            <a:normAutofit/>
           </a:bodyPr>
           <a:lstStyle/>
           <a:p>
             <a:pPr algn="l">
+              <a:lnSpc>
+                <a:spcPct val="100000"/>
+              </a:lnSpc>
               <a:spcAft>
                 <a:spcPts val="179"/>
               </a:spcAft>
@@ -31288,11 +32521,14 @@
         </p:spPr>
         <p:txBody>
           <a:bodyPr wrap="square" lIns="0" rIns="0" tIns="0" bIns="0" anchor="t">
-            <a:spAutoFit/>
+            <a:normAutofit/>
           </a:bodyPr>
           <a:lstStyle/>
           <a:p>
             <a:pPr algn="l">
+              <a:lnSpc>
+                <a:spcPct val="100000"/>
+              </a:lnSpc>
               <a:spcAft>
                 <a:spcPts val="110"/>
               </a:spcAft>
@@ -31417,11 +32653,14 @@
         </p:spPr>
         <p:txBody>
           <a:bodyPr wrap="square" lIns="0" rIns="0" tIns="0" bIns="0" anchor="t">
-            <a:spAutoFit/>
+            <a:normAutofit/>
           </a:bodyPr>
           <a:lstStyle/>
           <a:p>
             <a:pPr algn="l">
+              <a:lnSpc>
+                <a:spcPct val="100000"/>
+              </a:lnSpc>
               <a:spcAft>
                 <a:spcPts val="102"/>
               </a:spcAft>
@@ -31456,11 +32695,14 @@
         </p:spPr>
         <p:txBody>
           <a:bodyPr wrap="square" lIns="0" rIns="0" tIns="0" bIns="0" anchor="t">
-            <a:spAutoFit/>
+            <a:normAutofit/>
           </a:bodyPr>
           <a:lstStyle/>
           <a:p>
             <a:pPr algn="l">
+              <a:lnSpc>
+                <a:spcPct val="100000"/>
+              </a:lnSpc>
               <a:spcAft>
                 <a:spcPts val="179"/>
               </a:spcAft>
@@ -31495,11 +32737,14 @@
         </p:spPr>
         <p:txBody>
           <a:bodyPr wrap="square" lIns="0" rIns="0" tIns="0" bIns="0" anchor="t">
-            <a:spAutoFit/>
+            <a:normAutofit/>
           </a:bodyPr>
           <a:lstStyle/>
           <a:p>
             <a:pPr algn="l">
+              <a:lnSpc>
+                <a:spcPct val="100000"/>
+              </a:lnSpc>
               <a:spcAft>
                 <a:spcPts val="110"/>
               </a:spcAft>
@@ -31624,11 +32869,14 @@
         </p:spPr>
         <p:txBody>
           <a:bodyPr wrap="square" lIns="0" rIns="0" tIns="0" bIns="0" anchor="t">
-            <a:spAutoFit/>
+            <a:normAutofit/>
           </a:bodyPr>
           <a:lstStyle/>
           <a:p>
             <a:pPr algn="l">
+              <a:lnSpc>
+                <a:spcPct val="100000"/>
+              </a:lnSpc>
               <a:spcAft>
                 <a:spcPts val="102"/>
               </a:spcAft>
@@ -31663,11 +32911,14 @@
         </p:spPr>
         <p:txBody>
           <a:bodyPr wrap="square" lIns="0" rIns="0" tIns="0" bIns="0" anchor="t">
-            <a:spAutoFit/>
+            <a:normAutofit/>
           </a:bodyPr>
           <a:lstStyle/>
           <a:p>
             <a:pPr algn="l">
+              <a:lnSpc>
+                <a:spcPct val="100000"/>
+              </a:lnSpc>
               <a:spcAft>
                 <a:spcPts val="179"/>
               </a:spcAft>
@@ -31702,11 +32953,14 @@
         </p:spPr>
         <p:txBody>
           <a:bodyPr wrap="square" lIns="0" rIns="0" tIns="0" bIns="0" anchor="t">
-            <a:spAutoFit/>
+            <a:normAutofit/>
           </a:bodyPr>
           <a:lstStyle/>
           <a:p>
             <a:pPr algn="l">
+              <a:lnSpc>
+                <a:spcPct val="100000"/>
+              </a:lnSpc>
               <a:spcAft>
                 <a:spcPts val="110"/>
               </a:spcAft>
@@ -31831,11 +33085,14 @@
         </p:spPr>
         <p:txBody>
           <a:bodyPr wrap="square" lIns="0" rIns="0" tIns="0" bIns="0" anchor="t">
-            <a:spAutoFit/>
+            <a:normAutofit/>
           </a:bodyPr>
           <a:lstStyle/>
           <a:p>
             <a:pPr algn="l">
+              <a:lnSpc>
+                <a:spcPct val="100000"/>
+              </a:lnSpc>
               <a:spcAft>
                 <a:spcPts val="102"/>
               </a:spcAft>
@@ -31870,11 +33127,14 @@
         </p:spPr>
         <p:txBody>
           <a:bodyPr wrap="square" lIns="0" rIns="0" tIns="0" bIns="0" anchor="t">
-            <a:spAutoFit/>
+            <a:normAutofit/>
           </a:bodyPr>
           <a:lstStyle/>
           <a:p>
             <a:pPr algn="l">
+              <a:lnSpc>
+                <a:spcPct val="100000"/>
+              </a:lnSpc>
               <a:spcAft>
                 <a:spcPts val="179"/>
               </a:spcAft>
@@ -31909,11 +33169,14 @@
         </p:spPr>
         <p:txBody>
           <a:bodyPr wrap="square" lIns="0" rIns="0" tIns="0" bIns="0" anchor="t">
-            <a:spAutoFit/>
+            <a:normAutofit/>
           </a:bodyPr>
           <a:lstStyle/>
           <a:p>
             <a:pPr algn="l">
+              <a:lnSpc>
+                <a:spcPct val="100000"/>
+              </a:lnSpc>
               <a:spcAft>
                 <a:spcPts val="110"/>
               </a:spcAft>
@@ -32038,11 +33301,14 @@
         </p:spPr>
         <p:txBody>
           <a:bodyPr wrap="square" lIns="0" rIns="0" tIns="0" bIns="0" anchor="t">
-            <a:spAutoFit/>
+            <a:normAutofit/>
           </a:bodyPr>
           <a:lstStyle/>
           <a:p>
             <a:pPr algn="l">
+              <a:lnSpc>
+                <a:spcPct val="100000"/>
+              </a:lnSpc>
               <a:spcAft>
                 <a:spcPts val="102"/>
               </a:spcAft>
@@ -32077,11 +33343,14 @@
         </p:spPr>
         <p:txBody>
           <a:bodyPr wrap="square" lIns="0" rIns="0" tIns="0" bIns="0" anchor="t">
-            <a:spAutoFit/>
+            <a:normAutofit/>
           </a:bodyPr>
           <a:lstStyle/>
           <a:p>
             <a:pPr algn="l">
+              <a:lnSpc>
+                <a:spcPct val="100000"/>
+              </a:lnSpc>
               <a:spcAft>
                 <a:spcPts val="179"/>
               </a:spcAft>
@@ -32116,11 +33385,14 @@
         </p:spPr>
         <p:txBody>
           <a:bodyPr wrap="square" lIns="0" rIns="0" tIns="0" bIns="0" anchor="t">
-            <a:spAutoFit/>
+            <a:normAutofit/>
           </a:bodyPr>
           <a:lstStyle/>
           <a:p>
             <a:pPr algn="l">
+              <a:lnSpc>
+                <a:spcPct val="100000"/>
+              </a:lnSpc>
               <a:spcAft>
                 <a:spcPts val="110"/>
               </a:spcAft>
@@ -32200,11 +33472,14 @@
         </p:spPr>
         <p:txBody>
           <a:bodyPr wrap="square" lIns="0" rIns="0" tIns="0" bIns="0" anchor="t">
-            <a:spAutoFit/>
+            <a:normAutofit/>
           </a:bodyPr>
           <a:lstStyle/>
           <a:p>
             <a:pPr algn="ctr">
+              <a:lnSpc>
+                <a:spcPct val="100000"/>
+              </a:lnSpc>
               <a:spcAft>
                 <a:spcPts val="113"/>
               </a:spcAft>
@@ -32239,11 +33514,14 @@
         </p:spPr>
         <p:txBody>
           <a:bodyPr wrap="square" lIns="0" rIns="0" tIns="0" bIns="0" anchor="t">
-            <a:spAutoFit/>
+            <a:normAutofit/>
           </a:bodyPr>
           <a:lstStyle/>
           <a:p>
             <a:pPr algn="l">
+              <a:lnSpc>
+                <a:spcPct val="100000"/>
+              </a:lnSpc>
               <a:spcAft>
                 <a:spcPts val="81"/>
               </a:spcAft>
@@ -32278,11 +33556,14 @@
         </p:spPr>
         <p:txBody>
           <a:bodyPr wrap="square" lIns="0" rIns="0" tIns="0" bIns="0" anchor="t">
-            <a:spAutoFit/>
+            <a:normAutofit/>
           </a:bodyPr>
           <a:lstStyle/>
           <a:p>
             <a:pPr algn="r">
+              <a:lnSpc>
+                <a:spcPct val="100000"/>
+              </a:lnSpc>
               <a:spcAft>
                 <a:spcPts val="86"/>
               </a:spcAft>

--- a/docs/presentaciones/evolucion-native-ai/evolucion-native-ai-v2.pptx
+++ b/docs/presentaciones/evolucion-native-ai/evolucion-native-ai-v2.pptx
@@ -3246,7 +3246,7 @@
         <p:spPr>
           <a:xfrm>
             <a:off x="640080" y="1097280"/>
-            <a:ext cx="8138160" cy="960120"/>
+            <a:ext cx="8138160" cy="1078992"/>
           </a:xfrm>
           <a:prstGeom prst="rect">
             <a:avLst/>
@@ -3264,9 +3264,9 @@
                 <a:spcPct val="100000"/>
               </a:lnSpc>
               <a:spcAft>
-                <a:spcPts val="408"/>
-              </a:spcAft>
-              <a:defRPr sz="3400" b="1">
+                <a:spcPts val="384"/>
+              </a:spcAft>
+              <a:defRPr sz="3200" b="1">
                 <a:solidFill>
                   <a:srgbClr val="FFFFFF"/>
                 </a:solidFill>
@@ -3274,7 +3274,7 @@
               </a:defRPr>
             </a:pPr>
             <a:r>
-              <a:t>De la especificación a la entrega</a:t>
+              <a:t>Evolución de Native AI en un proyecto real</a:t>
             </a:r>
           </a:p>
         </p:txBody>
@@ -3316,7 +3316,7 @@
               </a:defRPr>
             </a:pPr>
             <a:r>
-              <a:t>La evolución de Native AI: conecta lo que pide el cliente, lo que construye el equipo y la evidencia con la que se decide.</a:t>
+              <a:t>Qué cambió al aplicar la metodología original con clientes: más cobertura, más control y evidencia medible.</a:t>
             </a:r>
           </a:p>
         </p:txBody>
@@ -3963,7 +3963,7 @@
               </a:defRPr>
             </a:pPr>
             <a:r>
-              <a:t>Evolución de Native AI · metodología original → marketplace v1.46.1</a:t>
+              <a:t>Metodología original → aprendizaje en cliente → marketplace v1.46.1</a:t>
             </a:r>
           </a:p>
         </p:txBody>

--- a/docs/presentaciones/evolucion-native-ai/evolucion-native-ai-v2.pptx
+++ b/docs/presentaciones/evolucion-native-ai/evolucion-native-ai-v2.pptx
@@ -3976,6 +3976,48 @@
         </p:nvSpPr>
         <p:spPr>
           <a:xfrm>
+            <a:off x="640080" y="6035040"/>
+            <a:ext cx="7132320" cy="274320"/>
+          </a:xfrm>
+          <a:prstGeom prst="rect">
+            <a:avLst/>
+          </a:prstGeom>
+          <a:noFill/>
+        </p:spPr>
+        <p:txBody>
+          <a:bodyPr wrap="square" lIns="0" rIns="0" tIns="0" bIns="0" anchor="t">
+            <a:normAutofit/>
+          </a:bodyPr>
+          <a:lstStyle/>
+          <a:p>
+            <a:pPr algn="l">
+              <a:lnSpc>
+                <a:spcPct val="100000"/>
+              </a:lnSpc>
+              <a:spcAft>
+                <a:spcPts val="102"/>
+              </a:spcAft>
+              <a:defRPr sz="850" b="0">
+                <a:solidFill>
+                  <a:srgbClr val="7292A9"/>
+                </a:solidFill>
+                <a:latin typeface="Arial"/>
+              </a:defRPr>
+            </a:pPr>
+            <a:r>
+              <a:t>Las tres primeras diapositivas son el resumen ejecutivo y se entienden solas. El informe completo está en evolucion-native-ai.html.</a:t>
+            </a:r>
+          </a:p>
+        </p:txBody>
+      </p:sp>
+      <p:sp>
+        <p:nvSpPr>
+          <p:cNvPr id="23" name="TextBox 22"/>
+          <p:cNvSpPr txBox="1"/>
+          <p:nvPr/>
+        </p:nvSpPr>
+        <p:spPr>
+          <a:xfrm>
             <a:off x="502920" y="6528816"/>
             <a:ext cx="8961120" cy="164592"/>
           </a:xfrm>
@@ -4012,7 +4054,7 @@
       </p:sp>
       <p:sp>
         <p:nvSpPr>
-          <p:cNvPr id="23" name="TextBox 22"/>
+          <p:cNvPr id="24" name="TextBox 23"/>
           <p:cNvSpPr txBox="1"/>
           <p:nvPr/>
         </p:nvSpPr>
@@ -19196,7 +19238,7 @@
               </a:defRPr>
             </a:pPr>
             <a:r>
-              <a:t>RESUMEN EJECUTIVO</a:t>
+              <a:t>RESUMEN EJECUTIVO · 1 DE 3</a:t>
             </a:r>
           </a:p>
         </p:txBody>
@@ -19238,7 +19280,7 @@
               </a:defRPr>
             </a:pPr>
             <a:r>
-              <a:t>La evolución cabe en una frase</a:t>
+              <a:t>Ocho cosas que el método hace hoy y antes no podía</a:t>
             </a:r>
           </a:p>
         </p:txBody>
@@ -19280,7 +19322,7 @@
               </a:defRPr>
             </a:pPr>
             <a:r>
-              <a:t>El núcleo no cambió. Cambió la distancia que recorre.</a:t>
+              <a:t>Lo cualitativo: qué cambió en el proceso. Ninguna sustituye al método original; todas lo extienden.</a:t>
             </a:r>
           </a:p>
         </p:txBody>
@@ -19330,14 +19372,183 @@
       </p:sp>
       <p:sp>
         <p:nvSpPr>
-          <p:cNvPr id="7" name="Rounded Rectangle 6"/>
+          <p:cNvPr id="7" name="TextBox 6"/>
+          <p:cNvSpPr txBox="1"/>
+          <p:nvPr/>
+        </p:nvSpPr>
+        <p:spPr>
+          <a:xfrm>
+            <a:off x="603504" y="1828800"/>
+            <a:ext cx="2322576" cy="201168"/>
+          </a:xfrm>
+          <a:prstGeom prst="rect">
+            <a:avLst/>
+          </a:prstGeom>
+          <a:noFill/>
+        </p:spPr>
+        <p:txBody>
+          <a:bodyPr wrap="square" lIns="0" rIns="0" tIns="0" bIns="0" anchor="t">
+            <a:normAutofit/>
+          </a:bodyPr>
+          <a:lstStyle/>
+          <a:p>
+            <a:pPr algn="l">
+              <a:lnSpc>
+                <a:spcPct val="100000"/>
+              </a:lnSpc>
+              <a:spcAft>
+                <a:spcPts val="93"/>
+              </a:spcAft>
+              <a:defRPr sz="780" b="1">
+                <a:solidFill>
+                  <a:srgbClr val="71808E"/>
+                </a:solidFill>
+                <a:latin typeface="Arial"/>
+              </a:defRPr>
+            </a:pPr>
+            <a:r>
+              <a:t>ÁREA</a:t>
+            </a:r>
+          </a:p>
+        </p:txBody>
+      </p:sp>
+      <p:sp>
+        <p:nvSpPr>
+          <p:cNvPr id="8" name="TextBox 7"/>
+          <p:cNvSpPr txBox="1"/>
+          <p:nvPr/>
+        </p:nvSpPr>
+        <p:spPr>
+          <a:xfrm>
+            <a:off x="3017520" y="1828800"/>
+            <a:ext cx="3749039" cy="201168"/>
+          </a:xfrm>
+          <a:prstGeom prst="rect">
+            <a:avLst/>
+          </a:prstGeom>
+          <a:noFill/>
+        </p:spPr>
+        <p:txBody>
+          <a:bodyPr wrap="square" lIns="0" rIns="0" tIns="0" bIns="0" anchor="t">
+            <a:normAutofit/>
+          </a:bodyPr>
+          <a:lstStyle/>
+          <a:p>
+            <a:pPr algn="l">
+              <a:lnSpc>
+                <a:spcPct val="100000"/>
+              </a:lnSpc>
+              <a:spcAft>
+                <a:spcPts val="93"/>
+              </a:spcAft>
+              <a:defRPr sz="780" b="1">
+                <a:solidFill>
+                  <a:srgbClr val="A9B4BE"/>
+                </a:solidFill>
+                <a:latin typeface="Arial"/>
+              </a:defRPr>
+            </a:pPr>
+            <a:r>
+              <a:t>ANTES  ·  NATIVE AI SPECS v1.6</a:t>
+            </a:r>
+          </a:p>
+        </p:txBody>
+      </p:sp>
+      <p:sp>
+        <p:nvSpPr>
+          <p:cNvPr id="9" name="TextBox 8"/>
+          <p:cNvSpPr txBox="1"/>
+          <p:nvPr/>
+        </p:nvSpPr>
+        <p:spPr>
+          <a:xfrm>
+            <a:off x="6858000" y="1828800"/>
+            <a:ext cx="4754880" cy="201168"/>
+          </a:xfrm>
+          <a:prstGeom prst="rect">
+            <a:avLst/>
+          </a:prstGeom>
+          <a:noFill/>
+        </p:spPr>
+        <p:txBody>
+          <a:bodyPr wrap="square" lIns="0" rIns="0" tIns="0" bIns="0" anchor="t">
+            <a:normAutofit/>
+          </a:bodyPr>
+          <a:lstStyle/>
+          <a:p>
+            <a:pPr algn="l">
+              <a:lnSpc>
+                <a:spcPct val="100000"/>
+              </a:lnSpc>
+              <a:spcAft>
+                <a:spcPts val="93"/>
+              </a:spcAft>
+              <a:defRPr sz="780" b="1">
+                <a:solidFill>
+                  <a:srgbClr val="0072BC"/>
+                </a:solidFill>
+                <a:latin typeface="Arial"/>
+              </a:defRPr>
+            </a:pPr>
+            <a:r>
+              <a:t>AHORA  ·  MARKETPLACE</a:t>
+            </a:r>
+          </a:p>
+        </p:txBody>
+      </p:sp>
+      <p:sp>
+        <p:nvSpPr>
+          <p:cNvPr id="10" name="Rectangle 9"/>
           <p:cNvSpPr/>
           <p:nvPr/>
         </p:nvSpPr>
         <p:spPr>
           <a:xfrm>
-            <a:off x="566928" y="1965960"/>
-            <a:ext cx="3127248" cy="3429000"/>
+            <a:off x="603504" y="2103120"/>
+            <a:ext cx="11027664" cy="1828"/>
+          </a:xfrm>
+          <a:prstGeom prst="rect">
+            <a:avLst/>
+          </a:prstGeom>
+          <a:solidFill>
+            <a:srgbClr val="D7DEE3"/>
+          </a:solidFill>
+          <a:ln>
+            <a:noFill/>
+          </a:ln>
+        </p:spPr>
+        <p:style>
+          <a:lnRef idx="1">
+            <a:schemeClr val="accent1"/>
+          </a:lnRef>
+          <a:fillRef idx="3">
+            <a:schemeClr val="accent1"/>
+          </a:fillRef>
+          <a:effectRef idx="2">
+            <a:schemeClr val="accent1"/>
+          </a:effectRef>
+          <a:fontRef idx="minor">
+            <a:schemeClr val="lt1"/>
+          </a:fontRef>
+        </p:style>
+        <p:txBody>
+          <a:bodyPr rtlCol="0" anchor="ctr"/>
+          <a:lstStyle/>
+          <a:p>
+            <a:pPr algn="ctr"/>
+          </a:p>
+        </p:txBody>
+      </p:sp>
+      <p:sp>
+        <p:nvSpPr>
+          <p:cNvPr id="11" name="Rounded Rectangle 10"/>
+          <p:cNvSpPr/>
+          <p:nvPr/>
+        </p:nvSpPr>
+        <p:spPr>
+          <a:xfrm>
+            <a:off x="566928" y="2185416"/>
+            <a:ext cx="11064240" cy="402336"/>
           </a:xfrm>
           <a:prstGeom prst="roundRect">
             <a:avLst/>
@@ -19375,22 +19586,22 @@
       </p:sp>
       <p:sp>
         <p:nvSpPr>
-          <p:cNvPr id="8" name="TextBox 7"/>
-          <p:cNvSpPr txBox="1"/>
-          <p:nvPr/>
-        </p:nvSpPr>
-        <p:spPr>
-          <a:xfrm>
-            <a:off x="822960" y="2240280"/>
-            <a:ext cx="2606040" cy="274320"/>
-          </a:xfrm>
-          <a:prstGeom prst="rect">
-            <a:avLst/>
-          </a:prstGeom>
-          <a:noFill/>
-        </p:spPr>
-        <p:txBody>
-          <a:bodyPr wrap="square" lIns="0" rIns="0" tIns="0" bIns="0" anchor="t">
+          <p:cNvPr id="12" name="TextBox 11"/>
+          <p:cNvSpPr txBox="1"/>
+          <p:nvPr/>
+        </p:nvSpPr>
+        <p:spPr>
+          <a:xfrm>
+            <a:off x="603504" y="2231136"/>
+            <a:ext cx="2322576" cy="292608"/>
+          </a:xfrm>
+          <a:prstGeom prst="rect">
+            <a:avLst/>
+          </a:prstGeom>
+          <a:noFill/>
+        </p:spPr>
+        <p:txBody>
+          <a:bodyPr wrap="square" lIns="0" rIns="0" tIns="0" bIns="0" anchor="ctr">
             <a:normAutofit/>
           </a:bodyPr>
           <a:lstStyle/>
@@ -19404,35 +19615,35 @@
               </a:spcAft>
               <a:defRPr sz="900" b="1">
                 <a:solidFill>
-                  <a:srgbClr val="0072BC"/>
-                </a:solidFill>
-                <a:latin typeface="Arial"/>
-              </a:defRPr>
-            </a:pPr>
-            <a:r>
-              <a:t>PUNTO DE PARTIDA</a:t>
-            </a:r>
-          </a:p>
-        </p:txBody>
-      </p:sp>
-      <p:sp>
-        <p:nvSpPr>
-          <p:cNvPr id="9" name="TextBox 8"/>
-          <p:cNvSpPr txBox="1"/>
-          <p:nvPr/>
-        </p:nvSpPr>
-        <p:spPr>
-          <a:xfrm>
-            <a:off x="822960" y="2679192"/>
-            <a:ext cx="2606040" cy="877824"/>
-          </a:xfrm>
-          <a:prstGeom prst="rect">
-            <a:avLst/>
-          </a:prstGeom>
-          <a:noFill/>
-        </p:spPr>
-        <p:txBody>
-          <a:bodyPr wrap="square" lIns="0" rIns="0" tIns="0" bIns="0" anchor="t">
+                  <a:srgbClr val="17324D"/>
+                </a:solidFill>
+                <a:latin typeface="Arial"/>
+              </a:defRPr>
+            </a:pPr>
+            <a:r>
+              <a:t>Alcance del método</a:t>
+            </a:r>
+          </a:p>
+        </p:txBody>
+      </p:sp>
+      <p:sp>
+        <p:nvSpPr>
+          <p:cNvPr id="13" name="TextBox 12"/>
+          <p:cNvSpPr txBox="1"/>
+          <p:nvPr/>
+        </p:nvSpPr>
+        <p:spPr>
+          <a:xfrm>
+            <a:off x="3017520" y="2231136"/>
+            <a:ext cx="3749039" cy="292608"/>
+          </a:xfrm>
+          <a:prstGeom prst="rect">
+            <a:avLst/>
+          </a:prstGeom>
+          <a:noFill/>
+        </p:spPr>
+        <p:txBody>
+          <a:bodyPr wrap="square" lIns="0" rIns="0" tIns="0" bIns="0" anchor="ctr">
             <a:normAutofit/>
           </a:bodyPr>
           <a:lstStyle/>
@@ -19442,9 +19653,93 @@
                 <a:spcPct val="100000"/>
               </a:lnSpc>
               <a:spcAft>
-                <a:spcPts val="276"/>
-              </a:spcAft>
-              <a:defRPr sz="2300" b="1">
+                <a:spcPts val="103"/>
+              </a:spcAft>
+              <a:defRPr sz="860" b="0">
+                <a:solidFill>
+                  <a:srgbClr val="71808E"/>
+                </a:solidFill>
+                <a:latin typeface="Arial"/>
+              </a:defRPr>
+            </a:pPr>
+            <a:r>
+              <a:t>Empezaba en el roadmap</a:t>
+            </a:r>
+          </a:p>
+        </p:txBody>
+      </p:sp>
+      <p:sp>
+        <p:nvSpPr>
+          <p:cNvPr id="14" name="TextBox 13"/>
+          <p:cNvSpPr txBox="1"/>
+          <p:nvPr/>
+        </p:nvSpPr>
+        <p:spPr>
+          <a:xfrm>
+            <a:off x="6858000" y="2231136"/>
+            <a:ext cx="4754880" cy="292608"/>
+          </a:xfrm>
+          <a:prstGeom prst="rect">
+            <a:avLst/>
+          </a:prstGeom>
+          <a:noFill/>
+        </p:spPr>
+        <p:txBody>
+          <a:bodyPr wrap="square" lIns="0" rIns="0" tIns="0" bIns="0" anchor="ctr">
+            <a:normAutofit/>
+          </a:bodyPr>
+          <a:lstStyle/>
+          <a:p>
+            <a:pPr algn="l">
+              <a:lnSpc>
+                <a:spcPct val="100000"/>
+              </a:lnSpc>
+              <a:spcAft>
+                <a:spcPts val="103"/>
+              </a:spcAft>
+              <a:defRPr sz="860" b="0">
+                <a:solidFill>
+                  <a:srgbClr val="3F556A"/>
+                </a:solidFill>
+                <a:latin typeface="Arial"/>
+              </a:defRPr>
+            </a:pPr>
+            <a:r>
+              <a:t>Del brief del cliente al KPI con el que se juzga</a:t>
+            </a:r>
+          </a:p>
+        </p:txBody>
+      </p:sp>
+      <p:sp>
+        <p:nvSpPr>
+          <p:cNvPr id="15" name="TextBox 14"/>
+          <p:cNvSpPr txBox="1"/>
+          <p:nvPr/>
+        </p:nvSpPr>
+        <p:spPr>
+          <a:xfrm>
+            <a:off x="603504" y="2670048"/>
+            <a:ext cx="2322576" cy="292608"/>
+          </a:xfrm>
+          <a:prstGeom prst="rect">
+            <a:avLst/>
+          </a:prstGeom>
+          <a:noFill/>
+        </p:spPr>
+        <p:txBody>
+          <a:bodyPr wrap="square" lIns="0" rIns="0" tIns="0" bIns="0" anchor="ctr">
+            <a:normAutofit/>
+          </a:bodyPr>
+          <a:lstStyle/>
+          <a:p>
+            <a:pPr algn="l">
+              <a:lnSpc>
+                <a:spcPct val="100000"/>
+              </a:lnSpc>
+              <a:spcAft>
+                <a:spcPts val="108"/>
+              </a:spcAft>
+              <a:defRPr sz="900" b="1">
                 <a:solidFill>
                   <a:srgbClr val="17324D"/>
                 </a:solidFill>
@@ -19452,29 +19747,29 @@
               </a:defRPr>
             </a:pPr>
             <a:r>
-              <a:t>Especificar antes de implementar</a:t>
-            </a:r>
-          </a:p>
-        </p:txBody>
-      </p:sp>
-      <p:sp>
-        <p:nvSpPr>
-          <p:cNvPr id="10" name="TextBox 9"/>
-          <p:cNvSpPr txBox="1"/>
-          <p:nvPr/>
-        </p:nvSpPr>
-        <p:spPr>
-          <a:xfrm>
-            <a:off x="822960" y="3749039"/>
-            <a:ext cx="2542032" cy="1143000"/>
-          </a:xfrm>
-          <a:prstGeom prst="rect">
-            <a:avLst/>
-          </a:prstGeom>
-          <a:noFill/>
-        </p:spPr>
-        <p:txBody>
-          <a:bodyPr wrap="square" lIns="0" rIns="0" tIns="0" bIns="0" anchor="t">
+              <a:t>Interfaz con el negocio</a:t>
+            </a:r>
+          </a:p>
+        </p:txBody>
+      </p:sp>
+      <p:sp>
+        <p:nvSpPr>
+          <p:cNvPr id="16" name="TextBox 15"/>
+          <p:cNvSpPr txBox="1"/>
+          <p:nvPr/>
+        </p:nvSpPr>
+        <p:spPr>
+          <a:xfrm>
+            <a:off x="3017520" y="2670048"/>
+            <a:ext cx="3749039" cy="292608"/>
+          </a:xfrm>
+          <a:prstGeom prst="rect">
+            <a:avLst/>
+          </a:prstGeom>
+          <a:noFill/>
+        </p:spPr>
+        <p:txBody>
+          <a:bodyPr wrap="square" lIns="0" rIns="0" tIns="0" bIns="0" anchor="ctr">
             <a:normAutofit/>
           </a:bodyPr>
           <a:lstStyle/>
@@ -19484,9 +19779,51 @@
                 <a:spcPct val="100000"/>
               </a:lnSpc>
               <a:spcAft>
-                <a:spcPts val="131"/>
-              </a:spcAft>
-              <a:defRPr sz="1100" b="0">
+                <a:spcPts val="103"/>
+              </a:spcAft>
+              <a:defRPr sz="860" b="0">
+                <a:solidFill>
+                  <a:srgbClr val="71808E"/>
+                </a:solidFill>
+                <a:latin typeface="Arial"/>
+              </a:defRPr>
+            </a:pPr>
+            <a:r>
+              <a:t>Fuera de su alcance</a:t>
+            </a:r>
+          </a:p>
+        </p:txBody>
+      </p:sp>
+      <p:sp>
+        <p:nvSpPr>
+          <p:cNvPr id="17" name="TextBox 16"/>
+          <p:cNvSpPr txBox="1"/>
+          <p:nvPr/>
+        </p:nvSpPr>
+        <p:spPr>
+          <a:xfrm>
+            <a:off x="6858000" y="2670048"/>
+            <a:ext cx="4754880" cy="292608"/>
+          </a:xfrm>
+          <a:prstGeom prst="rect">
+            <a:avLst/>
+          </a:prstGeom>
+          <a:noFill/>
+        </p:spPr>
+        <p:txBody>
+          <a:bodyPr wrap="square" lIns="0" rIns="0" tIns="0" bIns="0" anchor="ctr">
+            <a:normAutofit/>
+          </a:bodyPr>
+          <a:lstStyle/>
+          <a:p>
+            <a:pPr algn="l">
+              <a:lnSpc>
+                <a:spcPct val="100000"/>
+              </a:lnSpc>
+              <a:spcAft>
+                <a:spcPts val="103"/>
+              </a:spcAft>
+              <a:defRPr sz="860" b="0">
                 <a:solidFill>
                   <a:srgbClr val="3F556A"/>
                 </a:solidFill>
@@ -19494,30 +19831,32 @@
               </a:defRPr>
             </a:pPr>
             <a:r>
-              <a:t>OpenSpec, pre-flight humano, changes pequeños y auditoría: el método resolvía la deriva entre requisitos y código.</a:t>
-            </a:r>
-          </a:p>
-        </p:txBody>
-      </p:sp>
-      <p:sp>
-        <p:nvSpPr>
-          <p:cNvPr id="11" name="Right Arrow 10"/>
+              <a:t>Diseño funcional firmable, pruebas, sprints e informe</a:t>
+            </a:r>
+          </a:p>
+        </p:txBody>
+      </p:sp>
+      <p:sp>
+        <p:nvSpPr>
+          <p:cNvPr id="18" name="Rounded Rectangle 17"/>
           <p:cNvSpPr/>
           <p:nvPr/>
         </p:nvSpPr>
         <p:spPr>
           <a:xfrm>
-            <a:off x="3904487" y="3182112"/>
-            <a:ext cx="1078992" cy="475488"/>
-          </a:xfrm>
-          <a:prstGeom prst="rightArrow">
+            <a:off x="566928" y="3063240"/>
+            <a:ext cx="11064240" cy="402336"/>
+          </a:xfrm>
+          <a:prstGeom prst="roundRect">
             <a:avLst/>
           </a:prstGeom>
           <a:solidFill>
-            <a:srgbClr val="E8792E"/>
+            <a:srgbClr val="FFFFFF"/>
           </a:solidFill>
-          <a:ln>
-            <a:noFill/>
+          <a:ln w="12700">
+            <a:solidFill>
+              <a:srgbClr val="D7DEE3"/>
+            </a:solidFill>
           </a:ln>
         </p:spPr>
         <p:style>
@@ -19544,85 +19883,276 @@
       </p:sp>
       <p:sp>
         <p:nvSpPr>
-          <p:cNvPr id="12" name="TextBox 11"/>
-          <p:cNvSpPr txBox="1"/>
-          <p:nvPr/>
-        </p:nvSpPr>
-        <p:spPr>
-          <a:xfrm>
-            <a:off x="3822191" y="3794760"/>
-            <a:ext cx="1234440" cy="438912"/>
-          </a:xfrm>
-          <a:prstGeom prst="rect">
-            <a:avLst/>
-          </a:prstGeom>
-          <a:noFill/>
-        </p:spPr>
-        <p:txBody>
-          <a:bodyPr wrap="square" lIns="0" rIns="0" tIns="0" bIns="0" anchor="t">
-            <a:normAutofit/>
-          </a:bodyPr>
-          <a:lstStyle/>
-          <a:p>
-            <a:pPr algn="ctr">
-              <a:lnSpc>
-                <a:spcPct val="100000"/>
-              </a:lnSpc>
-              <a:spcAft>
-                <a:spcPts val="96"/>
-              </a:spcAft>
-              <a:defRPr sz="800" b="1">
-                <a:solidFill>
-                  <a:srgbClr val="E8792E"/>
-                </a:solidFill>
-                <a:latin typeface="Arial"/>
-              </a:defRPr>
-            </a:pPr>
-            <a:r>
-              <a:t>EXTENDER</a:t>
-            </a:r>
-          </a:p>
-          <a:p>
-            <a:pPr algn="ctr">
-              <a:lnSpc>
-                <a:spcPct val="100000"/>
-              </a:lnSpc>
-              <a:spcAft>
-                <a:spcPts val="96"/>
-              </a:spcAft>
-              <a:defRPr sz="800" b="1">
-                <a:solidFill>
-                  <a:srgbClr val="E8792E"/>
-                </a:solidFill>
-                <a:latin typeface="Arial"/>
-              </a:defRPr>
-            </a:pPr>
-            <a:r>
-              <a:t>SIN ROMPER</a:t>
-            </a:r>
-          </a:p>
-        </p:txBody>
-      </p:sp>
-      <p:sp>
-        <p:nvSpPr>
-          <p:cNvPr id="13" name="Rounded Rectangle 12"/>
+          <p:cNvPr id="19" name="TextBox 18"/>
+          <p:cNvSpPr txBox="1"/>
+          <p:nvPr/>
+        </p:nvSpPr>
+        <p:spPr>
+          <a:xfrm>
+            <a:off x="603504" y="3108960"/>
+            <a:ext cx="2322576" cy="292608"/>
+          </a:xfrm>
+          <a:prstGeom prst="rect">
+            <a:avLst/>
+          </a:prstGeom>
+          <a:noFill/>
+        </p:spPr>
+        <p:txBody>
+          <a:bodyPr wrap="square" lIns="0" rIns="0" tIns="0" bIns="0" anchor="ctr">
+            <a:normAutofit/>
+          </a:bodyPr>
+          <a:lstStyle/>
+          <a:p>
+            <a:pPr algn="l">
+              <a:lnSpc>
+                <a:spcPct val="100000"/>
+              </a:lnSpc>
+              <a:spcAft>
+                <a:spcPts val="108"/>
+              </a:spcAft>
+              <a:defRPr sz="900" b="1">
+                <a:solidFill>
+                  <a:srgbClr val="17324D"/>
+                </a:solidFill>
+                <a:latin typeface="Arial"/>
+              </a:defRPr>
+            </a:pPr>
+            <a:r>
+              <a:t>Diseño de producto</a:t>
+            </a:r>
+          </a:p>
+        </p:txBody>
+      </p:sp>
+      <p:sp>
+        <p:nvSpPr>
+          <p:cNvPr id="20" name="TextBox 19"/>
+          <p:cNvSpPr txBox="1"/>
+          <p:nvPr/>
+        </p:nvSpPr>
+        <p:spPr>
+          <a:xfrm>
+            <a:off x="3017520" y="3108960"/>
+            <a:ext cx="3749039" cy="292608"/>
+          </a:xfrm>
+          <a:prstGeom prst="rect">
+            <a:avLst/>
+          </a:prstGeom>
+          <a:noFill/>
+        </p:spPr>
+        <p:txBody>
+          <a:bodyPr wrap="square" lIns="0" rIns="0" tIns="0" bIns="0" anchor="ctr">
+            <a:normAutofit/>
+          </a:bodyPr>
+          <a:lstStyle/>
+          <a:p>
+            <a:pPr algn="l">
+              <a:lnSpc>
+                <a:spcPct val="100000"/>
+              </a:lnSpc>
+              <a:spcAft>
+                <a:spcPts val="103"/>
+              </a:spcAft>
+              <a:defRPr sz="860" b="0">
+                <a:solidFill>
+                  <a:srgbClr val="71808E"/>
+                </a:solidFill>
+                <a:latin typeface="Arial"/>
+              </a:defRPr>
+            </a:pPr>
+            <a:r>
+              <a:t>Solo la guía de estilos</a:t>
+            </a:r>
+          </a:p>
+        </p:txBody>
+      </p:sp>
+      <p:sp>
+        <p:nvSpPr>
+          <p:cNvPr id="21" name="TextBox 20"/>
+          <p:cNvSpPr txBox="1"/>
+          <p:nvPr/>
+        </p:nvSpPr>
+        <p:spPr>
+          <a:xfrm>
+            <a:off x="6858000" y="3108960"/>
+            <a:ext cx="4754880" cy="292608"/>
+          </a:xfrm>
+          <a:prstGeom prst="rect">
+            <a:avLst/>
+          </a:prstGeom>
+          <a:noFill/>
+        </p:spPr>
+        <p:txBody>
+          <a:bodyPr wrap="square" lIns="0" rIns="0" tIns="0" bIns="0" anchor="ctr">
+            <a:normAutofit/>
+          </a:bodyPr>
+          <a:lstStyle/>
+          <a:p>
+            <a:pPr algn="l">
+              <a:lnSpc>
+                <a:spcPct val="100000"/>
+              </a:lnSpc>
+              <a:spcAft>
+                <a:spcPts val="103"/>
+              </a:spcAft>
+              <a:defRPr sz="860" b="0">
+                <a:solidFill>
+                  <a:srgbClr val="3F556A"/>
+                </a:solidFill>
+                <a:latin typeface="Arial"/>
+              </a:defRPr>
+            </a:pPr>
+            <a:r>
+              <a:t>Figma normalizado hasta la historia que lo implementa</a:t>
+            </a:r>
+          </a:p>
+        </p:txBody>
+      </p:sp>
+      <p:sp>
+        <p:nvSpPr>
+          <p:cNvPr id="22" name="TextBox 21"/>
+          <p:cNvSpPr txBox="1"/>
+          <p:nvPr/>
+        </p:nvSpPr>
+        <p:spPr>
+          <a:xfrm>
+            <a:off x="603504" y="3547872"/>
+            <a:ext cx="2322576" cy="292608"/>
+          </a:xfrm>
+          <a:prstGeom prst="rect">
+            <a:avLst/>
+          </a:prstGeom>
+          <a:noFill/>
+        </p:spPr>
+        <p:txBody>
+          <a:bodyPr wrap="square" lIns="0" rIns="0" tIns="0" bIns="0" anchor="ctr">
+            <a:normAutofit/>
+          </a:bodyPr>
+          <a:lstStyle/>
+          <a:p>
+            <a:pPr algn="l">
+              <a:lnSpc>
+                <a:spcPct val="100000"/>
+              </a:lnSpc>
+              <a:spcAft>
+                <a:spcPts val="108"/>
+              </a:spcAft>
+              <a:defRPr sz="900" b="1">
+                <a:solidFill>
+                  <a:srgbClr val="17324D"/>
+                </a:solidFill>
+                <a:latin typeface="Arial"/>
+              </a:defRPr>
+            </a:pPr>
+            <a:r>
+              <a:t>Trabajo en paralelo</a:t>
+            </a:r>
+          </a:p>
+        </p:txBody>
+      </p:sp>
+      <p:sp>
+        <p:nvSpPr>
+          <p:cNvPr id="23" name="TextBox 22"/>
+          <p:cNvSpPr txBox="1"/>
+          <p:nvPr/>
+        </p:nvSpPr>
+        <p:spPr>
+          <a:xfrm>
+            <a:off x="3017520" y="3547872"/>
+            <a:ext cx="3749039" cy="292608"/>
+          </a:xfrm>
+          <a:prstGeom prst="rect">
+            <a:avLst/>
+          </a:prstGeom>
+          <a:noFill/>
+        </p:spPr>
+        <p:txBody>
+          <a:bodyPr wrap="square" lIns="0" rIns="0" tIns="0" bIns="0" anchor="ctr">
+            <a:normAutofit/>
+          </a:bodyPr>
+          <a:lstStyle/>
+          <a:p>
+            <a:pPr algn="l">
+              <a:lnSpc>
+                <a:spcPct val="100000"/>
+              </a:lnSpc>
+              <a:spcAft>
+                <a:spcPts val="103"/>
+              </a:spcAft>
+              <a:defRPr sz="860" b="0">
+                <a:solidFill>
+                  <a:srgbClr val="71808E"/>
+                </a:solidFill>
+                <a:latin typeface="Arial"/>
+              </a:defRPr>
+            </a:pPr>
+            <a:r>
+              <a:t>Oleadas, sin comprobar nada</a:t>
+            </a:r>
+          </a:p>
+        </p:txBody>
+      </p:sp>
+      <p:sp>
+        <p:nvSpPr>
+          <p:cNvPr id="24" name="TextBox 23"/>
+          <p:cNvSpPr txBox="1"/>
+          <p:nvPr/>
+        </p:nvSpPr>
+        <p:spPr>
+          <a:xfrm>
+            <a:off x="6858000" y="3547872"/>
+            <a:ext cx="4754880" cy="292608"/>
+          </a:xfrm>
+          <a:prstGeom prst="rect">
+            <a:avLst/>
+          </a:prstGeom>
+          <a:noFill/>
+        </p:spPr>
+        <p:txBody>
+          <a:bodyPr wrap="square" lIns="0" rIns="0" tIns="0" bIns="0" anchor="ctr">
+            <a:normAutofit/>
+          </a:bodyPr>
+          <a:lstStyle/>
+          <a:p>
+            <a:pPr algn="l">
+              <a:lnSpc>
+                <a:spcPct val="100000"/>
+              </a:lnSpc>
+              <a:spcAft>
+                <a:spcPts val="103"/>
+              </a:spcAft>
+              <a:defRPr sz="860" b="0">
+                <a:solidFill>
+                  <a:srgbClr val="3F556A"/>
+                </a:solidFill>
+                <a:latin typeface="Arial"/>
+              </a:defRPr>
+            </a:pPr>
+            <a:r>
+              <a:t>Tres modos, y dicho cuál garantiza aislamiento y cuál no</a:t>
+            </a:r>
+          </a:p>
+        </p:txBody>
+      </p:sp>
+      <p:sp>
+        <p:nvSpPr>
+          <p:cNvPr id="25" name="Rounded Rectangle 24"/>
           <p:cNvSpPr/>
           <p:nvPr/>
         </p:nvSpPr>
         <p:spPr>
           <a:xfrm>
-            <a:off x="5212080" y="1965960"/>
-            <a:ext cx="6382512" cy="3429000"/>
+            <a:off x="566928" y="3941063"/>
+            <a:ext cx="11064240" cy="402336"/>
           </a:xfrm>
           <a:prstGeom prst="roundRect">
             <a:avLst/>
           </a:prstGeom>
           <a:solidFill>
-            <a:srgbClr val="0D2942"/>
+            <a:srgbClr val="FFFFFF"/>
           </a:solidFill>
           <a:ln w="12700">
             <a:solidFill>
-              <a:srgbClr val="0D2942"/>
+              <a:srgbClr val="D7DEE3"/>
             </a:solidFill>
           </a:ln>
         </p:spPr>
@@ -19650,22 +20180,22 @@
       </p:sp>
       <p:sp>
         <p:nvSpPr>
-          <p:cNvPr id="14" name="TextBox 13"/>
-          <p:cNvSpPr txBox="1"/>
-          <p:nvPr/>
-        </p:nvSpPr>
-        <p:spPr>
-          <a:xfrm>
-            <a:off x="5532120" y="2240280"/>
-            <a:ext cx="2743200" cy="274320"/>
-          </a:xfrm>
-          <a:prstGeom prst="rect">
-            <a:avLst/>
-          </a:prstGeom>
-          <a:noFill/>
-        </p:spPr>
-        <p:txBody>
-          <a:bodyPr wrap="square" lIns="0" rIns="0" tIns="0" bIns="0" anchor="t">
+          <p:cNvPr id="26" name="TextBox 25"/>
+          <p:cNvSpPr txBox="1"/>
+          <p:nvPr/>
+        </p:nvSpPr>
+        <p:spPr>
+          <a:xfrm>
+            <a:off x="603504" y="3986783"/>
+            <a:ext cx="2322576" cy="292608"/>
+          </a:xfrm>
+          <a:prstGeom prst="rect">
+            <a:avLst/>
+          </a:prstGeom>
+          <a:noFill/>
+        </p:spPr>
+        <p:txBody>
+          <a:bodyPr wrap="square" lIns="0" rIns="0" tIns="0" bIns="0" anchor="ctr">
             <a:normAutofit/>
           </a:bodyPr>
           <a:lstStyle/>
@@ -19679,35 +20209,35 @@
               </a:spcAft>
               <a:defRPr sz="900" b="1">
                 <a:solidFill>
-                  <a:srgbClr val="16A9C7"/>
-                </a:solidFill>
-                <a:latin typeface="Arial"/>
-              </a:defRPr>
-            </a:pPr>
-            <a:r>
-              <a:t>RESULTADO</a:t>
-            </a:r>
-          </a:p>
-        </p:txBody>
-      </p:sp>
-      <p:sp>
-        <p:nvSpPr>
-          <p:cNvPr id="15" name="TextBox 14"/>
-          <p:cNvSpPr txBox="1"/>
-          <p:nvPr/>
-        </p:nvSpPr>
-        <p:spPr>
-          <a:xfrm>
-            <a:off x="5532120" y="2679192"/>
-            <a:ext cx="5440680" cy="841248"/>
-          </a:xfrm>
-          <a:prstGeom prst="rect">
-            <a:avLst/>
-          </a:prstGeom>
-          <a:noFill/>
-        </p:spPr>
-        <p:txBody>
-          <a:bodyPr wrap="square" lIns="0" rIns="0" tIns="0" bIns="0" anchor="t">
+                  <a:srgbClr val="17324D"/>
+                </a:solidFill>
+                <a:latin typeface="Arial"/>
+              </a:defRPr>
+            </a:pPr>
+            <a:r>
+              <a:t>Reparto del repositorio</a:t>
+            </a:r>
+          </a:p>
+        </p:txBody>
+      </p:sp>
+      <p:sp>
+        <p:nvSpPr>
+          <p:cNvPr id="27" name="TextBox 26"/>
+          <p:cNvSpPr txBox="1"/>
+          <p:nvPr/>
+        </p:nvSpPr>
+        <p:spPr>
+          <a:xfrm>
+            <a:off x="3017520" y="3986783"/>
+            <a:ext cx="3749039" cy="292608"/>
+          </a:xfrm>
+          <a:prstGeom prst="rect">
+            <a:avLst/>
+          </a:prstGeom>
+          <a:noFill/>
+        </p:spPr>
+        <p:txBody>
+          <a:bodyPr wrap="square" lIns="0" rIns="0" tIns="0" bIns="0" anchor="ctr">
             <a:normAutofit/>
           </a:bodyPr>
           <a:lstStyle/>
@@ -19717,41 +20247,209 @@
                 <a:spcPct val="100000"/>
               </a:lnSpc>
               <a:spcAft>
-                <a:spcPts val="300"/>
-              </a:spcAft>
-              <a:defRPr sz="2500" b="1">
-                <a:solidFill>
-                  <a:srgbClr val="FFFFFF"/>
-                </a:solidFill>
-                <a:latin typeface="Arial"/>
-              </a:defRPr>
-            </a:pPr>
-            <a:r>
-              <a:t>Una cadena completa de entrega</a:t>
-            </a:r>
-          </a:p>
-        </p:txBody>
-      </p:sp>
-      <p:sp>
-        <p:nvSpPr>
-          <p:cNvPr id="16" name="Rounded Rectangle 15"/>
+                <a:spcPts val="103"/>
+              </a:spcAft>
+              <a:defRPr sz="860" b="0">
+                <a:solidFill>
+                  <a:srgbClr val="71808E"/>
+                </a:solidFill>
+                <a:latin typeface="Arial"/>
+              </a:defRPr>
+            </a:pPr>
+            <a:r>
+              <a:t>Todo dentro de uno</a:t>
+            </a:r>
+          </a:p>
+        </p:txBody>
+      </p:sp>
+      <p:sp>
+        <p:nvSpPr>
+          <p:cNvPr id="28" name="TextBox 27"/>
+          <p:cNvSpPr txBox="1"/>
+          <p:nvPr/>
+        </p:nvSpPr>
+        <p:spPr>
+          <a:xfrm>
+            <a:off x="6858000" y="3986783"/>
+            <a:ext cx="4754880" cy="292608"/>
+          </a:xfrm>
+          <a:prstGeom prst="rect">
+            <a:avLst/>
+          </a:prstGeom>
+          <a:noFill/>
+        </p:spPr>
+        <p:txBody>
+          <a:bodyPr wrap="square" lIns="0" rIns="0" tIns="0" bIns="0" anchor="ctr">
+            <a:normAutofit/>
+          </a:bodyPr>
+          <a:lstStyle/>
+          <a:p>
+            <a:pPr algn="l">
+              <a:lnSpc>
+                <a:spcPct val="100000"/>
+              </a:lnSpc>
+              <a:spcAft>
+                <a:spcPts val="103"/>
+              </a:spcAft>
+              <a:defRPr sz="860" b="0">
+                <a:solidFill>
+                  <a:srgbClr val="3F556A"/>
+                </a:solidFill>
+                <a:latin typeface="Arial"/>
+              </a:defRPr>
+            </a:pPr>
+            <a:r>
+              <a:t>Tres repartos, incluido el caso real de cliente</a:t>
+            </a:r>
+          </a:p>
+        </p:txBody>
+      </p:sp>
+      <p:sp>
+        <p:nvSpPr>
+          <p:cNvPr id="29" name="TextBox 28"/>
+          <p:cNvSpPr txBox="1"/>
+          <p:nvPr/>
+        </p:nvSpPr>
+        <p:spPr>
+          <a:xfrm>
+            <a:off x="603504" y="4425696"/>
+            <a:ext cx="2322576" cy="292608"/>
+          </a:xfrm>
+          <a:prstGeom prst="rect">
+            <a:avLst/>
+          </a:prstGeom>
+          <a:noFill/>
+        </p:spPr>
+        <p:txBody>
+          <a:bodyPr wrap="square" lIns="0" rIns="0" tIns="0" bIns="0" anchor="ctr">
+            <a:normAutofit/>
+          </a:bodyPr>
+          <a:lstStyle/>
+          <a:p>
+            <a:pPr algn="l">
+              <a:lnSpc>
+                <a:spcPct val="100000"/>
+              </a:lnSpc>
+              <a:spcAft>
+                <a:spcPts val="108"/>
+              </a:spcAft>
+              <a:defRPr sz="900" b="1">
+                <a:solidFill>
+                  <a:srgbClr val="17324D"/>
+                </a:solidFill>
+                <a:latin typeface="Arial"/>
+              </a:defRPr>
+            </a:pPr>
+            <a:r>
+              <a:t>Evidencia del valor</a:t>
+            </a:r>
+          </a:p>
+        </p:txBody>
+      </p:sp>
+      <p:sp>
+        <p:nvSpPr>
+          <p:cNvPr id="30" name="TextBox 29"/>
+          <p:cNvSpPr txBox="1"/>
+          <p:nvPr/>
+        </p:nvSpPr>
+        <p:spPr>
+          <a:xfrm>
+            <a:off x="3017520" y="4425696"/>
+            <a:ext cx="3749039" cy="292608"/>
+          </a:xfrm>
+          <a:prstGeom prst="rect">
+            <a:avLst/>
+          </a:prstGeom>
+          <a:noFill/>
+        </p:spPr>
+        <p:txBody>
+          <a:bodyPr wrap="square" lIns="0" rIns="0" tIns="0" bIns="0" anchor="ctr">
+            <a:normAutofit/>
+          </a:bodyPr>
+          <a:lstStyle/>
+          <a:p>
+            <a:pPr algn="l">
+              <a:lnSpc>
+                <a:spcPct val="100000"/>
+              </a:lnSpc>
+              <a:spcAft>
+                <a:spcPts val="103"/>
+              </a:spcAft>
+              <a:defRPr sz="860" b="0">
+                <a:solidFill>
+                  <a:srgbClr val="71808E"/>
+                </a:solidFill>
+                <a:latin typeface="Arial"/>
+              </a:defRPr>
+            </a:pPr>
+            <a:r>
+              <a:t>Auditoría que nadie explotaba</a:t>
+            </a:r>
+          </a:p>
+        </p:txBody>
+      </p:sp>
+      <p:sp>
+        <p:nvSpPr>
+          <p:cNvPr id="31" name="TextBox 30"/>
+          <p:cNvSpPr txBox="1"/>
+          <p:nvPr/>
+        </p:nvSpPr>
+        <p:spPr>
+          <a:xfrm>
+            <a:off x="6858000" y="4425696"/>
+            <a:ext cx="4754880" cy="292608"/>
+          </a:xfrm>
+          <a:prstGeom prst="rect">
+            <a:avLst/>
+          </a:prstGeom>
+          <a:noFill/>
+        </p:spPr>
+        <p:txBody>
+          <a:bodyPr wrap="square" lIns="0" rIns="0" tIns="0" bIns="0" anchor="ctr">
+            <a:normAutofit/>
+          </a:bodyPr>
+          <a:lstStyle/>
+          <a:p>
+            <a:pPr algn="l">
+              <a:lnSpc>
+                <a:spcPct val="100000"/>
+              </a:lnSpc>
+              <a:spcAft>
+                <a:spcPts val="103"/>
+              </a:spcAft>
+              <a:defRPr sz="860" b="0">
+                <a:solidFill>
+                  <a:srgbClr val="3F556A"/>
+                </a:solidFill>
+                <a:latin typeface="Arial"/>
+              </a:defRPr>
+            </a:pPr>
+            <a:r>
+              <a:t>KPIs cruzados con el worklog real de Jira</a:t>
+            </a:r>
+          </a:p>
+        </p:txBody>
+      </p:sp>
+      <p:sp>
+        <p:nvSpPr>
+          <p:cNvPr id="32" name="Rounded Rectangle 31"/>
           <p:cNvSpPr/>
           <p:nvPr/>
         </p:nvSpPr>
         <p:spPr>
           <a:xfrm>
-            <a:off x="5532120" y="3858768"/>
-            <a:ext cx="1097280" cy="384048"/>
+            <a:off x="566928" y="4818888"/>
+            <a:ext cx="11064240" cy="402336"/>
           </a:xfrm>
           <a:prstGeom prst="roundRect">
             <a:avLst/>
           </a:prstGeom>
           <a:solidFill>
-            <a:srgbClr val="0072BC"/>
+            <a:srgbClr val="FFFFFF"/>
           </a:solidFill>
           <a:ln w="12700">
             <a:solidFill>
-              <a:srgbClr val="0072BC"/>
+              <a:srgbClr val="D7DEE3"/>
             </a:solidFill>
           </a:ln>
         </p:spPr>
@@ -19779,14 +20477,14 @@
       </p:sp>
       <p:sp>
         <p:nvSpPr>
-          <p:cNvPr id="17" name="TextBox 16"/>
-          <p:cNvSpPr txBox="1"/>
-          <p:nvPr/>
-        </p:nvSpPr>
-        <p:spPr>
-          <a:xfrm>
-            <a:off x="5605272" y="3877055"/>
-            <a:ext cx="950976" cy="347472"/>
+          <p:cNvPr id="33" name="TextBox 32"/>
+          <p:cNvSpPr txBox="1"/>
+          <p:nvPr/>
+        </p:nvSpPr>
+        <p:spPr>
+          <a:xfrm>
+            <a:off x="603504" y="4864608"/>
+            <a:ext cx="2322576" cy="292608"/>
           </a:xfrm>
           <a:prstGeom prst="rect">
             <a:avLst/>
@@ -19799,468 +20497,246 @@
           </a:bodyPr>
           <a:lstStyle/>
           <a:p>
-            <a:pPr algn="ctr">
-              <a:lnSpc>
-                <a:spcPct val="100000"/>
-              </a:lnSpc>
-              <a:spcAft>
-                <a:spcPts val="89"/>
-              </a:spcAft>
-              <a:defRPr sz="750" b="1">
-                <a:solidFill>
-                  <a:srgbClr val="FFFFFF"/>
-                </a:solidFill>
-                <a:latin typeface="Arial"/>
-              </a:defRPr>
-            </a:pPr>
-            <a:r>
-              <a:t>CLIENTE</a:t>
-            </a:r>
-          </a:p>
-        </p:txBody>
-      </p:sp>
-      <p:sp>
-        <p:nvSpPr>
-          <p:cNvPr id="18" name="Right Arrow 17"/>
+            <a:pPr algn="l">
+              <a:lnSpc>
+                <a:spcPct val="100000"/>
+              </a:lnSpc>
+              <a:spcAft>
+                <a:spcPts val="108"/>
+              </a:spcAft>
+              <a:defRPr sz="900" b="1">
+                <a:solidFill>
+                  <a:srgbClr val="17324D"/>
+                </a:solidFill>
+                <a:latin typeface="Arial"/>
+              </a:defRPr>
+            </a:pPr>
+            <a:r>
+              <a:t>Quién escribe el código</a:t>
+            </a:r>
+          </a:p>
+        </p:txBody>
+      </p:sp>
+      <p:sp>
+        <p:nvSpPr>
+          <p:cNvPr id="34" name="TextBox 33"/>
+          <p:cNvSpPr txBox="1"/>
+          <p:nvPr/>
+        </p:nvSpPr>
+        <p:spPr>
+          <a:xfrm>
+            <a:off x="3017520" y="4864608"/>
+            <a:ext cx="3749039" cy="292608"/>
+          </a:xfrm>
+          <a:prstGeom prst="rect">
+            <a:avLst/>
+          </a:prstGeom>
+          <a:noFill/>
+        </p:spPr>
+        <p:txBody>
+          <a:bodyPr wrap="square" lIns="0" rIns="0" tIns="0" bIns="0" anchor="ctr">
+            <a:normAutofit/>
+          </a:bodyPr>
+          <a:lstStyle/>
+          <a:p>
+            <a:pPr algn="l">
+              <a:lnSpc>
+                <a:spcPct val="100000"/>
+              </a:lnSpc>
+              <a:spcAft>
+                <a:spcPts val="103"/>
+              </a:spcAft>
+              <a:defRPr sz="860" b="0">
+                <a:solidFill>
+                  <a:srgbClr val="71808E"/>
+                </a:solidFill>
+                <a:latin typeface="Arial"/>
+              </a:defRPr>
+            </a:pPr>
+            <a:r>
+              <a:t>Siempre la IA</a:t>
+            </a:r>
+          </a:p>
+        </p:txBody>
+      </p:sp>
+      <p:sp>
+        <p:nvSpPr>
+          <p:cNvPr id="35" name="TextBox 34"/>
+          <p:cNvSpPr txBox="1"/>
+          <p:nvPr/>
+        </p:nvSpPr>
+        <p:spPr>
+          <a:xfrm>
+            <a:off x="6858000" y="4864608"/>
+            <a:ext cx="4754880" cy="292608"/>
+          </a:xfrm>
+          <a:prstGeom prst="rect">
+            <a:avLst/>
+          </a:prstGeom>
+          <a:noFill/>
+        </p:spPr>
+        <p:txBody>
+          <a:bodyPr wrap="square" lIns="0" rIns="0" tIns="0" bIns="0" anchor="ctr">
+            <a:normAutofit/>
+          </a:bodyPr>
+          <a:lstStyle/>
+          <a:p>
+            <a:pPr algn="l">
+              <a:lnSpc>
+                <a:spcPct val="100000"/>
+              </a:lnSpc>
+              <a:spcAft>
+                <a:spcPts val="103"/>
+              </a:spcAft>
+              <a:defRPr sz="860" b="0">
+                <a:solidFill>
+                  <a:srgbClr val="3F556A"/>
+                </a:solidFill>
+                <a:latin typeface="Arial"/>
+              </a:defRPr>
+            </a:pPr>
+            <a:r>
+              <a:t>Elegible historia a historia, y conmutable a mitad</a:t>
+            </a:r>
+          </a:p>
+        </p:txBody>
+      </p:sp>
+      <p:sp>
+        <p:nvSpPr>
+          <p:cNvPr id="36" name="TextBox 35"/>
+          <p:cNvSpPr txBox="1"/>
+          <p:nvPr/>
+        </p:nvSpPr>
+        <p:spPr>
+          <a:xfrm>
+            <a:off x="603504" y="5303520"/>
+            <a:ext cx="2322576" cy="292608"/>
+          </a:xfrm>
+          <a:prstGeom prst="rect">
+            <a:avLst/>
+          </a:prstGeom>
+          <a:noFill/>
+        </p:spPr>
+        <p:txBody>
+          <a:bodyPr wrap="square" lIns="0" rIns="0" tIns="0" bIns="0" anchor="ctr">
+            <a:normAutofit/>
+          </a:bodyPr>
+          <a:lstStyle/>
+          <a:p>
+            <a:pPr algn="l">
+              <a:lnSpc>
+                <a:spcPct val="100000"/>
+              </a:lnSpc>
+              <a:spcAft>
+                <a:spcPts val="108"/>
+              </a:spcAft>
+              <a:defRPr sz="900" b="1">
+                <a:solidFill>
+                  <a:srgbClr val="17324D"/>
+                </a:solidFill>
+                <a:latin typeface="Arial"/>
+              </a:defRPr>
+            </a:pPr>
+            <a:r>
+              <a:t>Calidad y distribución</a:t>
+            </a:r>
+          </a:p>
+        </p:txBody>
+      </p:sp>
+      <p:sp>
+        <p:nvSpPr>
+          <p:cNvPr id="37" name="TextBox 36"/>
+          <p:cNvSpPr txBox="1"/>
+          <p:nvPr/>
+        </p:nvSpPr>
+        <p:spPr>
+          <a:xfrm>
+            <a:off x="3017520" y="5303520"/>
+            <a:ext cx="3749039" cy="292608"/>
+          </a:xfrm>
+          <a:prstGeom prst="rect">
+            <a:avLst/>
+          </a:prstGeom>
+          <a:noFill/>
+        </p:spPr>
+        <p:txBody>
+          <a:bodyPr wrap="square" lIns="0" rIns="0" tIns="0" bIns="0" anchor="ctr">
+            <a:normAutofit/>
+          </a:bodyPr>
+          <a:lstStyle/>
+          <a:p>
+            <a:pPr algn="l">
+              <a:lnSpc>
+                <a:spcPct val="100000"/>
+              </a:lnSpc>
+              <a:spcAft>
+                <a:spcPts val="103"/>
+              </a:spcAft>
+              <a:defRPr sz="860" b="0">
+                <a:solidFill>
+                  <a:srgbClr val="71808E"/>
+                </a:solidFill>
+                <a:latin typeface="Arial"/>
+              </a:defRPr>
+            </a:pPr>
+            <a:r>
+              <a:t>Revisión humana y copia manual</a:t>
+            </a:r>
+          </a:p>
+        </p:txBody>
+      </p:sp>
+      <p:sp>
+        <p:nvSpPr>
+          <p:cNvPr id="38" name="TextBox 37"/>
+          <p:cNvSpPr txBox="1"/>
+          <p:nvPr/>
+        </p:nvSpPr>
+        <p:spPr>
+          <a:xfrm>
+            <a:off x="6858000" y="5303520"/>
+            <a:ext cx="4754880" cy="292608"/>
+          </a:xfrm>
+          <a:prstGeom prst="rect">
+            <a:avLst/>
+          </a:prstGeom>
+          <a:noFill/>
+        </p:spPr>
+        <p:txBody>
+          <a:bodyPr wrap="square" lIns="0" rIns="0" tIns="0" bIns="0" anchor="ctr">
+            <a:normAutofit/>
+          </a:bodyPr>
+          <a:lstStyle/>
+          <a:p>
+            <a:pPr algn="l">
+              <a:lnSpc>
+                <a:spcPct val="100000"/>
+              </a:lnSpc>
+              <a:spcAft>
+                <a:spcPts val="103"/>
+              </a:spcAft>
+              <a:defRPr sz="860" b="0">
+                <a:solidFill>
+                  <a:srgbClr val="3F556A"/>
+                </a:solidFill>
+                <a:latin typeface="Arial"/>
+              </a:defRPr>
+            </a:pPr>
+            <a:r>
+              <a:t>Doce comprobaciones en CI, y plugins con semver</a:t>
+            </a:r>
+          </a:p>
+        </p:txBody>
+      </p:sp>
+      <p:sp>
+        <p:nvSpPr>
+          <p:cNvPr id="39" name="Rounded Rectangle 38"/>
           <p:cNvSpPr/>
           <p:nvPr/>
         </p:nvSpPr>
         <p:spPr>
           <a:xfrm>
-            <a:off x="6656831" y="3968496"/>
-            <a:ext cx="219456" cy="146304"/>
-          </a:xfrm>
-          <a:prstGeom prst="rightArrow">
-            <a:avLst/>
-          </a:prstGeom>
-          <a:solidFill>
-            <a:srgbClr val="7292A9"/>
-          </a:solidFill>
-          <a:ln>
-            <a:noFill/>
-          </a:ln>
-        </p:spPr>
-        <p:style>
-          <a:lnRef idx="1">
-            <a:schemeClr val="accent1"/>
-          </a:lnRef>
-          <a:fillRef idx="3">
-            <a:schemeClr val="accent1"/>
-          </a:fillRef>
-          <a:effectRef idx="2">
-            <a:schemeClr val="accent1"/>
-          </a:effectRef>
-          <a:fontRef idx="minor">
-            <a:schemeClr val="lt1"/>
-          </a:fontRef>
-        </p:style>
-        <p:txBody>
-          <a:bodyPr rtlCol="0" anchor="ctr"/>
-          <a:lstStyle/>
-          <a:p>
-            <a:pPr algn="ctr"/>
-          </a:p>
-        </p:txBody>
-      </p:sp>
-      <p:sp>
-        <p:nvSpPr>
-          <p:cNvPr id="19" name="Rounded Rectangle 18"/>
-          <p:cNvSpPr/>
-          <p:nvPr/>
-        </p:nvSpPr>
-        <p:spPr>
-          <a:xfrm>
-            <a:off x="6922008" y="3858768"/>
-            <a:ext cx="1097280" cy="384048"/>
-          </a:xfrm>
-          <a:prstGeom prst="roundRect">
-            <a:avLst/>
-          </a:prstGeom>
-          <a:solidFill>
-            <a:srgbClr val="16A9C7"/>
-          </a:solidFill>
-          <a:ln w="12700">
-            <a:solidFill>
-              <a:srgbClr val="16A9C7"/>
-            </a:solidFill>
-          </a:ln>
-        </p:spPr>
-        <p:style>
-          <a:lnRef idx="1">
-            <a:schemeClr val="accent1"/>
-          </a:lnRef>
-          <a:fillRef idx="3">
-            <a:schemeClr val="accent1"/>
-          </a:fillRef>
-          <a:effectRef idx="2">
-            <a:schemeClr val="accent1"/>
-          </a:effectRef>
-          <a:fontRef idx="minor">
-            <a:schemeClr val="lt1"/>
-          </a:fontRef>
-        </p:style>
-        <p:txBody>
-          <a:bodyPr rtlCol="0" anchor="ctr"/>
-          <a:lstStyle/>
-          <a:p>
-            <a:pPr algn="ctr"/>
-          </a:p>
-        </p:txBody>
-      </p:sp>
-      <p:sp>
-        <p:nvSpPr>
-          <p:cNvPr id="20" name="TextBox 19"/>
-          <p:cNvSpPr txBox="1"/>
-          <p:nvPr/>
-        </p:nvSpPr>
-        <p:spPr>
-          <a:xfrm>
-            <a:off x="6995160" y="3877055"/>
-            <a:ext cx="950976" cy="347472"/>
-          </a:xfrm>
-          <a:prstGeom prst="rect">
-            <a:avLst/>
-          </a:prstGeom>
-          <a:noFill/>
-        </p:spPr>
-        <p:txBody>
-          <a:bodyPr wrap="square" lIns="0" rIns="0" tIns="0" bIns="0" anchor="ctr">
-            <a:normAutofit/>
-          </a:bodyPr>
-          <a:lstStyle/>
-          <a:p>
-            <a:pPr algn="ctr">
-              <a:lnSpc>
-                <a:spcPct val="100000"/>
-              </a:lnSpc>
-              <a:spcAft>
-                <a:spcPts val="89"/>
-              </a:spcAft>
-              <a:defRPr sz="750" b="1">
-                <a:solidFill>
-                  <a:srgbClr val="FFFFFF"/>
-                </a:solidFill>
-                <a:latin typeface="Arial"/>
-              </a:defRPr>
-            </a:pPr>
-            <a:r>
-              <a:t>DISEÑO</a:t>
-            </a:r>
-          </a:p>
-        </p:txBody>
-      </p:sp>
-      <p:sp>
-        <p:nvSpPr>
-          <p:cNvPr id="21" name="Right Arrow 20"/>
-          <p:cNvSpPr/>
-          <p:nvPr/>
-        </p:nvSpPr>
-        <p:spPr>
-          <a:xfrm>
-            <a:off x="8046720" y="3968496"/>
-            <a:ext cx="219456" cy="146304"/>
-          </a:xfrm>
-          <a:prstGeom prst="rightArrow">
-            <a:avLst/>
-          </a:prstGeom>
-          <a:solidFill>
-            <a:srgbClr val="7292A9"/>
-          </a:solidFill>
-          <a:ln>
-            <a:noFill/>
-          </a:ln>
-        </p:spPr>
-        <p:style>
-          <a:lnRef idx="1">
-            <a:schemeClr val="accent1"/>
-          </a:lnRef>
-          <a:fillRef idx="3">
-            <a:schemeClr val="accent1"/>
-          </a:fillRef>
-          <a:effectRef idx="2">
-            <a:schemeClr val="accent1"/>
-          </a:effectRef>
-          <a:fontRef idx="minor">
-            <a:schemeClr val="lt1"/>
-          </a:fontRef>
-        </p:style>
-        <p:txBody>
-          <a:bodyPr rtlCol="0" anchor="ctr"/>
-          <a:lstStyle/>
-          <a:p>
-            <a:pPr algn="ctr"/>
-          </a:p>
-        </p:txBody>
-      </p:sp>
-      <p:sp>
-        <p:nvSpPr>
-          <p:cNvPr id="22" name="Rounded Rectangle 21"/>
-          <p:cNvSpPr/>
-          <p:nvPr/>
-        </p:nvSpPr>
-        <p:spPr>
-          <a:xfrm>
-            <a:off x="8311896" y="3858768"/>
-            <a:ext cx="1097280" cy="384048"/>
-          </a:xfrm>
-          <a:prstGeom prst="roundRect">
-            <a:avLst/>
-          </a:prstGeom>
-          <a:solidFill>
-            <a:srgbClr val="008F83"/>
-          </a:solidFill>
-          <a:ln w="12700">
-            <a:solidFill>
-              <a:srgbClr val="008F83"/>
-            </a:solidFill>
-          </a:ln>
-        </p:spPr>
-        <p:style>
-          <a:lnRef idx="1">
-            <a:schemeClr val="accent1"/>
-          </a:lnRef>
-          <a:fillRef idx="3">
-            <a:schemeClr val="accent1"/>
-          </a:fillRef>
-          <a:effectRef idx="2">
-            <a:schemeClr val="accent1"/>
-          </a:effectRef>
-          <a:fontRef idx="minor">
-            <a:schemeClr val="lt1"/>
-          </a:fontRef>
-        </p:style>
-        <p:txBody>
-          <a:bodyPr rtlCol="0" anchor="ctr"/>
-          <a:lstStyle/>
-          <a:p>
-            <a:pPr algn="ctr"/>
-          </a:p>
-        </p:txBody>
-      </p:sp>
-      <p:sp>
-        <p:nvSpPr>
-          <p:cNvPr id="23" name="TextBox 22"/>
-          <p:cNvSpPr txBox="1"/>
-          <p:nvPr/>
-        </p:nvSpPr>
-        <p:spPr>
-          <a:xfrm>
-            <a:off x="8385048" y="3877055"/>
-            <a:ext cx="950976" cy="347472"/>
-          </a:xfrm>
-          <a:prstGeom prst="rect">
-            <a:avLst/>
-          </a:prstGeom>
-          <a:noFill/>
-        </p:spPr>
-        <p:txBody>
-          <a:bodyPr wrap="square" lIns="0" rIns="0" tIns="0" bIns="0" anchor="ctr">
-            <a:normAutofit/>
-          </a:bodyPr>
-          <a:lstStyle/>
-          <a:p>
-            <a:pPr algn="ctr">
-              <a:lnSpc>
-                <a:spcPct val="100000"/>
-              </a:lnSpc>
-              <a:spcAft>
-                <a:spcPts val="89"/>
-              </a:spcAft>
-              <a:defRPr sz="750" b="1">
-                <a:solidFill>
-                  <a:srgbClr val="FFFFFF"/>
-                </a:solidFill>
-                <a:latin typeface="Arial"/>
-              </a:defRPr>
-            </a:pPr>
-            <a:r>
-              <a:t>CÓDIGO</a:t>
-            </a:r>
-          </a:p>
-        </p:txBody>
-      </p:sp>
-      <p:sp>
-        <p:nvSpPr>
-          <p:cNvPr id="24" name="Right Arrow 23"/>
-          <p:cNvSpPr/>
-          <p:nvPr/>
-        </p:nvSpPr>
-        <p:spPr>
-          <a:xfrm>
-            <a:off x="9436608" y="3968496"/>
-            <a:ext cx="219456" cy="146304"/>
-          </a:xfrm>
-          <a:prstGeom prst="rightArrow">
-            <a:avLst/>
-          </a:prstGeom>
-          <a:solidFill>
-            <a:srgbClr val="7292A9"/>
-          </a:solidFill>
-          <a:ln>
-            <a:noFill/>
-          </a:ln>
-        </p:spPr>
-        <p:style>
-          <a:lnRef idx="1">
-            <a:schemeClr val="accent1"/>
-          </a:lnRef>
-          <a:fillRef idx="3">
-            <a:schemeClr val="accent1"/>
-          </a:fillRef>
-          <a:effectRef idx="2">
-            <a:schemeClr val="accent1"/>
-          </a:effectRef>
-          <a:fontRef idx="minor">
-            <a:schemeClr val="lt1"/>
-          </a:fontRef>
-        </p:style>
-        <p:txBody>
-          <a:bodyPr rtlCol="0" anchor="ctr"/>
-          <a:lstStyle/>
-          <a:p>
-            <a:pPr algn="ctr"/>
-          </a:p>
-        </p:txBody>
-      </p:sp>
-      <p:sp>
-        <p:nvSpPr>
-          <p:cNvPr id="25" name="Rounded Rectangle 24"/>
-          <p:cNvSpPr/>
-          <p:nvPr/>
-        </p:nvSpPr>
-        <p:spPr>
-          <a:xfrm>
-            <a:off x="9701784" y="3858768"/>
-            <a:ext cx="1097280" cy="384048"/>
-          </a:xfrm>
-          <a:prstGeom prst="roundRect">
-            <a:avLst/>
-          </a:prstGeom>
-          <a:solidFill>
-            <a:srgbClr val="E8792E"/>
-          </a:solidFill>
-          <a:ln w="12700">
-            <a:solidFill>
-              <a:srgbClr val="E8792E"/>
-            </a:solidFill>
-          </a:ln>
-        </p:spPr>
-        <p:style>
-          <a:lnRef idx="1">
-            <a:schemeClr val="accent1"/>
-          </a:lnRef>
-          <a:fillRef idx="3">
-            <a:schemeClr val="accent1"/>
-          </a:fillRef>
-          <a:effectRef idx="2">
-            <a:schemeClr val="accent1"/>
-          </a:effectRef>
-          <a:fontRef idx="minor">
-            <a:schemeClr val="lt1"/>
-          </a:fontRef>
-        </p:style>
-        <p:txBody>
-          <a:bodyPr rtlCol="0" anchor="ctr"/>
-          <a:lstStyle/>
-          <a:p>
-            <a:pPr algn="ctr"/>
-          </a:p>
-        </p:txBody>
-      </p:sp>
-      <p:sp>
-        <p:nvSpPr>
-          <p:cNvPr id="26" name="TextBox 25"/>
-          <p:cNvSpPr txBox="1"/>
-          <p:nvPr/>
-        </p:nvSpPr>
-        <p:spPr>
-          <a:xfrm>
-            <a:off x="9774936" y="3877055"/>
-            <a:ext cx="950976" cy="347472"/>
-          </a:xfrm>
-          <a:prstGeom prst="rect">
-            <a:avLst/>
-          </a:prstGeom>
-          <a:noFill/>
-        </p:spPr>
-        <p:txBody>
-          <a:bodyPr wrap="square" lIns="0" rIns="0" tIns="0" bIns="0" anchor="ctr">
-            <a:normAutofit/>
-          </a:bodyPr>
-          <a:lstStyle/>
-          <a:p>
-            <a:pPr algn="ctr">
-              <a:lnSpc>
-                <a:spcPct val="100000"/>
-              </a:lnSpc>
-              <a:spcAft>
-                <a:spcPts val="89"/>
-              </a:spcAft>
-              <a:defRPr sz="750" b="1">
-                <a:solidFill>
-                  <a:srgbClr val="FFFFFF"/>
-                </a:solidFill>
-                <a:latin typeface="Arial"/>
-              </a:defRPr>
-            </a:pPr>
-            <a:r>
-              <a:t>EVIDENCIA</a:t>
-            </a:r>
-          </a:p>
-        </p:txBody>
-      </p:sp>
-      <p:sp>
-        <p:nvSpPr>
-          <p:cNvPr id="27" name="TextBox 26"/>
-          <p:cNvSpPr txBox="1"/>
-          <p:nvPr/>
-        </p:nvSpPr>
-        <p:spPr>
-          <a:xfrm>
-            <a:off x="5532120" y="4498848"/>
-            <a:ext cx="5394960" cy="566928"/>
-          </a:xfrm>
-          <a:prstGeom prst="rect">
-            <a:avLst/>
-          </a:prstGeom>
-          <a:noFill/>
-        </p:spPr>
-        <p:txBody>
-          <a:bodyPr wrap="square" lIns="0" rIns="0" tIns="0" bIns="0" anchor="t">
-            <a:normAutofit/>
-          </a:bodyPr>
-          <a:lstStyle/>
-          <a:p>
-            <a:pPr algn="l">
-              <a:lnSpc>
-                <a:spcPct val="100000"/>
-              </a:lnSpc>
-              <a:spcAft>
-                <a:spcPts val="131"/>
-              </a:spcAft>
-              <a:defRPr sz="1100" b="0">
-                <a:solidFill>
-                  <a:srgbClr val="C6D6E3"/>
-                </a:solidFill>
-                <a:latin typeface="Arial"/>
-              </a:defRPr>
-            </a:pPr>
-            <a:r>
-              <a:t>La misma fuente de verdad llega hasta el entregable que se firma y el KPI que se defiende.</a:t>
-            </a:r>
-          </a:p>
-        </p:txBody>
-      </p:sp>
-      <p:sp>
-        <p:nvSpPr>
-          <p:cNvPr id="28" name="Rounded Rectangle 27"/>
-          <p:cNvSpPr/>
-          <p:nvPr/>
-        </p:nvSpPr>
-        <p:spPr>
-          <a:xfrm>
-            <a:off x="566928" y="5669280"/>
-            <a:ext cx="11027664" cy="512064"/>
+            <a:off x="566928" y="5779008"/>
+            <a:ext cx="11064240" cy="530352"/>
           </a:xfrm>
           <a:prstGeom prst="roundRect">
             <a:avLst/>
@@ -20298,22 +20774,22 @@
       </p:sp>
       <p:sp>
         <p:nvSpPr>
-          <p:cNvPr id="29" name="TextBox 28"/>
-          <p:cNvSpPr txBox="1"/>
-          <p:nvPr/>
-        </p:nvSpPr>
-        <p:spPr>
-          <a:xfrm>
-            <a:off x="822960" y="5769864"/>
-            <a:ext cx="10515600" cy="265176"/>
-          </a:xfrm>
-          <a:prstGeom prst="rect">
-            <a:avLst/>
-          </a:prstGeom>
-          <a:noFill/>
-        </p:spPr>
-        <p:txBody>
-          <a:bodyPr wrap="square" lIns="0" rIns="0" tIns="0" bIns="0" anchor="t">
+          <p:cNvPr id="40" name="TextBox 39"/>
+          <p:cNvSpPr txBox="1"/>
+          <p:nvPr/>
+        </p:nvSpPr>
+        <p:spPr>
+          <a:xfrm>
+            <a:off x="822960" y="5888736"/>
+            <a:ext cx="10552176" cy="292608"/>
+          </a:xfrm>
+          <a:prstGeom prst="rect">
+            <a:avLst/>
+          </a:prstGeom>
+          <a:noFill/>
+        </p:spPr>
+        <p:txBody>
+          <a:bodyPr wrap="square" lIns="0" rIns="0" tIns="0" bIns="0" anchor="ctr">
             <a:normAutofit/>
           </a:bodyPr>
           <a:lstStyle/>
@@ -20333,14 +20809,14 @@
               </a:defRPr>
             </a:pPr>
             <a:r>
-              <a:t>TESIS  ·  No es otro método con el mismo nombre: es el mismo principio llevado a los extremos donde un proyecto real lo necesita.</a:t>
-            </a:r>
-          </a:p>
-        </p:txBody>
-      </p:sp>
-      <p:sp>
-        <p:nvSpPr>
-          <p:cNvPr id="30" name="TextBox 29"/>
+              <a:t>TESIS  ·  El método sabía construir software sin desviarse de lo pedido; ahora llega hasta el cliente que firma y la cifra con la que nos juzgan.</a:t>
+            </a:r>
+          </a:p>
+        </p:txBody>
+      </p:sp>
+      <p:sp>
+        <p:nvSpPr>
+          <p:cNvPr id="41" name="TextBox 40"/>
           <p:cNvSpPr txBox="1"/>
           <p:nvPr/>
         </p:nvSpPr>
@@ -20382,7 +20858,7 @@
       </p:sp>
       <p:sp>
         <p:nvSpPr>
-          <p:cNvPr id="31" name="TextBox 30"/>
+          <p:cNvPr id="42" name="TextBox 41"/>
           <p:cNvSpPr txBox="1"/>
           <p:nvPr/>
         </p:nvSpPr>
@@ -20522,7 +20998,7 @@
               </a:defRPr>
             </a:pPr>
             <a:r>
-              <a:t>RESUMEN EJECUTIVO</a:t>
+              <a:t>RESUMEN EJECUTIVO · 2 DE 3</a:t>
             </a:r>
           </a:p>
         </p:txBody>
@@ -20606,7 +21082,7 @@
               </a:defRPr>
             </a:pPr>
             <a:r>
-              <a:t>Cinco indicadores de superficie, cobertura e industrialización. Ninguno es una estimación.</a:t>
+              <a:t>Lo cuantitativo: cinco indicadores contados sobre los ficheros de uno y otro procedimiento. Ninguno es una estimación.</a:t>
             </a:r>
           </a:p>
         </p:txBody>
@@ -21417,7 +21893,7 @@
               </a:defRPr>
             </a:pPr>
             <a:r>
-              <a:t>PARTIDA  →  HOY</a:t>
+              <a:t>DE BRIEF A MEDICIÓN</a:t>
             </a:r>
           </a:p>
         </p:txBody>
@@ -21504,7 +21980,7 @@
               </a:defRPr>
             </a:pPr>
             <a:r>
-              <a:t>TOPOLOGÍAS</a:t>
+              <a:t>REPARTOS DE REPOSITORIO</a:t>
             </a:r>
           </a:p>
         </p:txBody>
@@ -21673,7 +22149,7 @@
               </a:defRPr>
             </a:pPr>
             <a:r>
-              <a:t>PARTIDA  →  HOY</a:t>
+              <a:t>MONO · FRACCIONADO · EXTERNO</a:t>
             </a:r>
           </a:p>
         </p:txBody>
@@ -21929,7 +22405,7 @@
               </a:defRPr>
             </a:pPr>
             <a:r>
-              <a:t>PARTIDA  →  HOY</a:t>
+              <a:t>EN CADA PULL REQUEST</a:t>
             </a:r>
           </a:p>
         </p:txBody>
@@ -22626,7 +23102,94 @@
       </p:sp>
       <p:sp>
         <p:nvSpPr>
-          <p:cNvPr id="53" name="TextBox 52"/>
+          <p:cNvPr id="53" name="Rounded Rectangle 52"/>
+          <p:cNvSpPr/>
+          <p:nvPr/>
+        </p:nvSpPr>
+        <p:spPr>
+          <a:xfrm>
+            <a:off x="566928" y="5669280"/>
+            <a:ext cx="11064240" cy="530352"/>
+          </a:xfrm>
+          <a:prstGeom prst="roundRect">
+            <a:avLst/>
+          </a:prstGeom>
+          <a:solidFill>
+            <a:srgbClr val="DCEEF8"/>
+          </a:solidFill>
+          <a:ln w="12700">
+            <a:solidFill>
+              <a:srgbClr val="DCEEF8"/>
+            </a:solidFill>
+          </a:ln>
+        </p:spPr>
+        <p:style>
+          <a:lnRef idx="1">
+            <a:schemeClr val="accent1"/>
+          </a:lnRef>
+          <a:fillRef idx="3">
+            <a:schemeClr val="accent1"/>
+          </a:fillRef>
+          <a:effectRef idx="2">
+            <a:schemeClr val="accent1"/>
+          </a:effectRef>
+          <a:fontRef idx="minor">
+            <a:schemeClr val="lt1"/>
+          </a:fontRef>
+        </p:style>
+        <p:txBody>
+          <a:bodyPr rtlCol="0" anchor="ctr"/>
+          <a:lstStyle/>
+          <a:p>
+            <a:pPr algn="ctr"/>
+          </a:p>
+        </p:txBody>
+      </p:sp>
+      <p:sp>
+        <p:nvSpPr>
+          <p:cNvPr id="54" name="TextBox 53"/>
+          <p:cNvSpPr txBox="1"/>
+          <p:nvPr/>
+        </p:nvSpPr>
+        <p:spPr>
+          <a:xfrm>
+            <a:off x="822960" y="5779008"/>
+            <a:ext cx="10552176" cy="292608"/>
+          </a:xfrm>
+          <a:prstGeom prst="rect">
+            <a:avLst/>
+          </a:prstGeom>
+          <a:noFill/>
+        </p:spPr>
+        <p:txBody>
+          <a:bodyPr wrap="square" lIns="0" rIns="0" tIns="0" bIns="0" anchor="ctr">
+            <a:normAutofit/>
+          </a:bodyPr>
+          <a:lstStyle/>
+          <a:p>
+            <a:pPr algn="ctr">
+              <a:lnSpc>
+                <a:spcPct val="100000"/>
+              </a:lnSpc>
+              <a:spcAft>
+                <a:spcPts val="126"/>
+              </a:spcAft>
+              <a:defRPr sz="1050" b="1">
+                <a:solidFill>
+                  <a:srgbClr val="17324D"/>
+                </a:solidFill>
+                <a:latin typeface="Arial"/>
+              </a:defRPr>
+            </a:pPr>
+            <a:r>
+              <a:t>EN CIFRAS  ·  Once veces más piezas instalables, casi seis comandos por cada uno que había, y los ocho tramos del proyecto con herramienta en vez de tres.</a:t>
+            </a:r>
+          </a:p>
+        </p:txBody>
+      </p:sp>
+      <p:sp>
+        <p:nvSpPr>
+          <p:cNvPr id="55" name="TextBox 54"/>
           <p:cNvSpPr txBox="1"/>
           <p:nvPr/>
         </p:nvSpPr>
@@ -22668,7 +23231,7 @@
       </p:sp>
       <p:sp>
         <p:nvSpPr>
-          <p:cNvPr id="54" name="TextBox 53"/>
+          <p:cNvPr id="56" name="TextBox 55"/>
           <p:cNvSpPr txBox="1"/>
           <p:nvPr/>
         </p:nvSpPr>
@@ -22808,7 +23371,7 @@
               </a:defRPr>
             </a:pPr>
             <a:r>
-              <a:t>COBERTURA</a:t>
+              <a:t>RESUMEN EJECUTIVO · 3 DE 3</a:t>
             </a:r>
           </a:p>
         </p:txBody>
@@ -25372,8 +25935,8 @@
         </p:nvSpPr>
         <p:spPr>
           <a:xfrm>
-            <a:off x="594360" y="5047488"/>
-            <a:ext cx="10972800" cy="868680"/>
+            <a:off x="594360" y="4974336"/>
+            <a:ext cx="10972800" cy="804672"/>
           </a:xfrm>
           <a:prstGeom prst="roundRect">
             <a:avLst/>
@@ -25417,7 +25980,7 @@
         </p:nvSpPr>
         <p:spPr>
           <a:xfrm>
-            <a:off x="850392" y="5248656"/>
+            <a:off x="850392" y="5138928"/>
             <a:ext cx="2084831" cy="365760"/>
           </a:xfrm>
           <a:prstGeom prst="rect">
@@ -25459,7 +26022,7 @@
         </p:nvSpPr>
         <p:spPr>
           <a:xfrm>
-            <a:off x="2880360" y="5212080"/>
+            <a:off x="2880360" y="5102352"/>
             <a:ext cx="8275320" cy="457200"/>
           </a:xfrm>
           <a:prstGeom prst="rect">
@@ -25495,7 +26058,94 @@
       </p:sp>
       <p:sp>
         <p:nvSpPr>
-          <p:cNvPr id="66" name="TextBox 65"/>
+          <p:cNvPr id="66" name="Rounded Rectangle 65"/>
+          <p:cNvSpPr/>
+          <p:nvPr/>
+        </p:nvSpPr>
+        <p:spPr>
+          <a:xfrm>
+            <a:off x="594360" y="5888736"/>
+            <a:ext cx="10972800" cy="457200"/>
+          </a:xfrm>
+          <a:prstGeom prst="roundRect">
+            <a:avLst/>
+          </a:prstGeom>
+          <a:solidFill>
+            <a:srgbClr val="0D2942"/>
+          </a:solidFill>
+          <a:ln w="12700">
+            <a:solidFill>
+              <a:srgbClr val="0D2942"/>
+            </a:solidFill>
+          </a:ln>
+        </p:spPr>
+        <p:style>
+          <a:lnRef idx="1">
+            <a:schemeClr val="accent1"/>
+          </a:lnRef>
+          <a:fillRef idx="3">
+            <a:schemeClr val="accent1"/>
+          </a:fillRef>
+          <a:effectRef idx="2">
+            <a:schemeClr val="accent1"/>
+          </a:effectRef>
+          <a:fontRef idx="minor">
+            <a:schemeClr val="lt1"/>
+          </a:fontRef>
+        </p:style>
+        <p:txBody>
+          <a:bodyPr rtlCol="0" anchor="ctr"/>
+          <a:lstStyle/>
+          <a:p>
+            <a:pPr algn="ctr"/>
+          </a:p>
+        </p:txBody>
+      </p:sp>
+      <p:sp>
+        <p:nvSpPr>
+          <p:cNvPr id="67" name="TextBox 66"/>
+          <p:cNvSpPr txBox="1"/>
+          <p:nvPr/>
+        </p:nvSpPr>
+        <p:spPr>
+          <a:xfrm>
+            <a:off x="850392" y="5971032"/>
+            <a:ext cx="10460736" cy="292608"/>
+          </a:xfrm>
+          <a:prstGeom prst="rect">
+            <a:avLst/>
+          </a:prstGeom>
+          <a:noFill/>
+        </p:spPr>
+        <p:txBody>
+          <a:bodyPr wrap="square" lIns="0" rIns="0" tIns="0" bIns="0" anchor="ctr">
+            <a:normAutofit/>
+          </a:bodyPr>
+          <a:lstStyle/>
+          <a:p>
+            <a:pPr algn="ctr">
+              <a:lnSpc>
+                <a:spcPct val="100000"/>
+              </a:lnSpc>
+              <a:spcAft>
+                <a:spcPts val="113"/>
+              </a:spcAft>
+              <a:defRPr sz="950" b="1">
+                <a:solidFill>
+                  <a:srgbClr val="FFFFFF"/>
+                </a:solidFill>
+                <a:latin typeface="Arial"/>
+              </a:defRPr>
+            </a:pPr>
+            <a:r>
+              <a:t>FIN DEL RESUMEN EJECUTIVO  ·  Lo que sigue es el detalle. El informe completo, mejora a mejora, está en evolucion-native-ai.html</a:t>
+            </a:r>
+          </a:p>
+        </p:txBody>
+      </p:sp>
+      <p:sp>
+        <p:nvSpPr>
+          <p:cNvPr id="68" name="TextBox 67"/>
           <p:cNvSpPr txBox="1"/>
           <p:nvPr/>
         </p:nvSpPr>
@@ -25537,7 +26187,7 @@
       </p:sp>
       <p:sp>
         <p:nvSpPr>
-          <p:cNvPr id="67" name="TextBox 66"/>
+          <p:cNvPr id="69" name="TextBox 68"/>
           <p:cNvSpPr txBox="1"/>
           <p:nvPr/>
         </p:nvSpPr>

--- a/docs/presentaciones/evolucion-native-ai/evolucion-native-ai-v2.pptx
+++ b/docs/presentaciones/evolucion-native-ai/evolucion-native-ai-v2.pptx
@@ -10,6 +10,7 @@
     <p:sldId id="258" r:id="rId9"/>
     <p:sldId id="259" r:id="rId10"/>
     <p:sldId id="260" r:id="rId11"/>
+    <p:sldId id="261" r:id="rId12"/>
   </p:sldIdLst>
   <p:sldSz cx="12191695" cy="6858000" type="screen4x3"/>
   <p:notesSz cx="6858000" cy="9144000"/>
@@ -3961,7 +3962,7 @@
               </a:defRPr>
             </a:pPr>
             <a:r>
-              <a:t>01 / 05</a:t>
+              <a:t>01 / 06</a:t>
             </a:r>
           </a:p>
         </p:txBody>
@@ -6179,7 +6180,7 @@
               </a:defRPr>
             </a:pPr>
             <a:r>
-              <a:t>02 / 05</a:t>
+              <a:t>02 / 06</a:t>
             </a:r>
           </a:p>
         </p:txBody>
@@ -8220,7 +8221,7 @@
               </a:defRPr>
             </a:pPr>
             <a:r>
-              <a:t>03 / 05</a:t>
+              <a:t>03 / 06</a:t>
             </a:r>
           </a:p>
         </p:txBody>
@@ -8325,7 +8326,7 @@
               </a:defRPr>
             </a:pPr>
             <a:r>
-              <a:t>LO QUE CAMBIA</a:t>
+              <a:t>EL SALTO, POR DENTRO</a:t>
             </a:r>
           </a:p>
         </p:txBody>
@@ -8367,7 +8368,7 @@
               </a:defRPr>
             </a:pPr>
             <a:r>
-              <a:t>Cuatro cosas que antes no podíamos hacer delante de un cliente</a:t>
+              <a:t>Seis cosas que hoy el método hace mejor</a:t>
             </a:r>
           </a:p>
         </p:txBody>
@@ -8409,7 +8410,7 @@
               </a:defRPr>
             </a:pPr>
             <a:r>
-              <a:t>El método terminaba en el código validado. Ahora llega hasta lo que el cliente firma y la cifra con la que nos juzga.</a:t>
+              <a:t>En azul, lo que el método ya daba. En ámbar, lo que hemos sumado encima.</a:t>
             </a:r>
           </a:p>
         </p:txBody>
@@ -8465,8 +8466,1406 @@
         </p:nvSpPr>
         <p:spPr>
           <a:xfrm>
-            <a:off x="566928" y="1975104"/>
-            <a:ext cx="5358384" cy="1664208"/>
+            <a:off x="7589520" y="1828800"/>
+            <a:ext cx="201168" cy="146304"/>
+          </a:xfrm>
+          <a:prstGeom prst="roundRect">
+            <a:avLst/>
+          </a:prstGeom>
+          <a:solidFill>
+            <a:srgbClr val="0072BC"/>
+          </a:solidFill>
+          <a:ln w="12700">
+            <a:solidFill>
+              <a:srgbClr val="0072BC"/>
+            </a:solidFill>
+          </a:ln>
+        </p:spPr>
+        <p:style>
+          <a:lnRef idx="1">
+            <a:schemeClr val="accent1"/>
+          </a:lnRef>
+          <a:fillRef idx="3">
+            <a:schemeClr val="accent1"/>
+          </a:fillRef>
+          <a:effectRef idx="2">
+            <a:schemeClr val="accent1"/>
+          </a:effectRef>
+          <a:fontRef idx="minor">
+            <a:schemeClr val="lt1"/>
+          </a:fontRef>
+        </p:style>
+        <p:txBody>
+          <a:bodyPr rtlCol="0" anchor="ctr"/>
+          <a:lstStyle/>
+          <a:p>
+            <a:pPr algn="ctr"/>
+          </a:p>
+        </p:txBody>
+      </p:sp>
+      <p:sp>
+        <p:nvSpPr>
+          <p:cNvPr id="8" name="TextBox 7"/>
+          <p:cNvSpPr txBox="1"/>
+          <p:nvPr/>
+        </p:nvSpPr>
+        <p:spPr>
+          <a:xfrm>
+            <a:off x="7882128" y="1792224"/>
+            <a:ext cx="1783080" cy="219456"/>
+          </a:xfrm>
+          <a:prstGeom prst="rect">
+            <a:avLst/>
+          </a:prstGeom>
+          <a:noFill/>
+        </p:spPr>
+        <p:txBody>
+          <a:bodyPr wrap="square" lIns="0" rIns="0" tIns="0" bIns="0" anchor="t">
+            <a:normAutofit/>
+          </a:bodyPr>
+          <a:lstStyle/>
+          <a:p>
+            <a:pPr algn="l">
+              <a:lnSpc>
+                <a:spcPct val="100000"/>
+              </a:lnSpc>
+              <a:spcAft>
+                <a:spcPts val="102"/>
+              </a:spcAft>
+              <a:defRPr sz="850" b="0">
+                <a:solidFill>
+                  <a:srgbClr val="3F556A"/>
+                </a:solidFill>
+                <a:latin typeface="Arial"/>
+              </a:defRPr>
+            </a:pPr>
+            <a:r>
+              <a:t>Lo que ya daba el método</a:t>
+            </a:r>
+          </a:p>
+        </p:txBody>
+      </p:sp>
+      <p:sp>
+        <p:nvSpPr>
+          <p:cNvPr id="9" name="Rounded Rectangle 8"/>
+          <p:cNvSpPr/>
+          <p:nvPr/>
+        </p:nvSpPr>
+        <p:spPr>
+          <a:xfrm>
+            <a:off x="9710928" y="1828800"/>
+            <a:ext cx="201168" cy="146304"/>
+          </a:xfrm>
+          <a:prstGeom prst="roundRect">
+            <a:avLst/>
+          </a:prstGeom>
+          <a:solidFill>
+            <a:srgbClr val="E8792E"/>
+          </a:solidFill>
+          <a:ln w="12700">
+            <a:solidFill>
+              <a:srgbClr val="E8792E"/>
+            </a:solidFill>
+          </a:ln>
+        </p:spPr>
+        <p:style>
+          <a:lnRef idx="1">
+            <a:schemeClr val="accent1"/>
+          </a:lnRef>
+          <a:fillRef idx="3">
+            <a:schemeClr val="accent1"/>
+          </a:fillRef>
+          <a:effectRef idx="2">
+            <a:schemeClr val="accent1"/>
+          </a:effectRef>
+          <a:fontRef idx="minor">
+            <a:schemeClr val="lt1"/>
+          </a:fontRef>
+        </p:style>
+        <p:txBody>
+          <a:bodyPr rtlCol="0" anchor="ctr"/>
+          <a:lstStyle/>
+          <a:p>
+            <a:pPr algn="ctr"/>
+          </a:p>
+        </p:txBody>
+      </p:sp>
+      <p:sp>
+        <p:nvSpPr>
+          <p:cNvPr id="10" name="TextBox 9"/>
+          <p:cNvSpPr txBox="1"/>
+          <p:nvPr/>
+        </p:nvSpPr>
+        <p:spPr>
+          <a:xfrm>
+            <a:off x="10003536" y="1792224"/>
+            <a:ext cx="1783080" cy="219456"/>
+          </a:xfrm>
+          <a:prstGeom prst="rect">
+            <a:avLst/>
+          </a:prstGeom>
+          <a:noFill/>
+        </p:spPr>
+        <p:txBody>
+          <a:bodyPr wrap="square" lIns="0" rIns="0" tIns="0" bIns="0" anchor="t">
+            <a:normAutofit/>
+          </a:bodyPr>
+          <a:lstStyle/>
+          <a:p>
+            <a:pPr algn="l">
+              <a:lnSpc>
+                <a:spcPct val="100000"/>
+              </a:lnSpc>
+              <a:spcAft>
+                <a:spcPts val="102"/>
+              </a:spcAft>
+              <a:defRPr sz="850" b="0">
+                <a:solidFill>
+                  <a:srgbClr val="3F556A"/>
+                </a:solidFill>
+                <a:latin typeface="Arial"/>
+              </a:defRPr>
+            </a:pPr>
+            <a:r>
+              <a:t>Lo que hemos sumado</a:t>
+            </a:r>
+          </a:p>
+        </p:txBody>
+      </p:sp>
+      <p:sp>
+        <p:nvSpPr>
+          <p:cNvPr id="11" name="TextBox 10"/>
+          <p:cNvSpPr txBox="1"/>
+          <p:nvPr/>
+        </p:nvSpPr>
+        <p:spPr>
+          <a:xfrm>
+            <a:off x="566928" y="2176272"/>
+            <a:ext cx="2285999" cy="274320"/>
+          </a:xfrm>
+          <a:prstGeom prst="rect">
+            <a:avLst/>
+          </a:prstGeom>
+          <a:noFill/>
+        </p:spPr>
+        <p:txBody>
+          <a:bodyPr wrap="square" lIns="0" rIns="0" tIns="0" bIns="0" anchor="ctr">
+            <a:normAutofit/>
+          </a:bodyPr>
+          <a:lstStyle/>
+          <a:p>
+            <a:pPr algn="r">
+              <a:lnSpc>
+                <a:spcPct val="100000"/>
+              </a:lnSpc>
+              <a:spcAft>
+                <a:spcPts val="126"/>
+              </a:spcAft>
+              <a:defRPr sz="1050" b="1">
+                <a:solidFill>
+                  <a:srgbClr val="17324D"/>
+                </a:solidFill>
+                <a:latin typeface="Arial"/>
+              </a:defRPr>
+            </a:pPr>
+            <a:r>
+              <a:t>Que cada paso tenga herramienta</a:t>
+            </a:r>
+          </a:p>
+        </p:txBody>
+      </p:sp>
+      <p:sp>
+        <p:nvSpPr>
+          <p:cNvPr id="12" name="Rounded Rectangle 11"/>
+          <p:cNvSpPr/>
+          <p:nvPr/>
+        </p:nvSpPr>
+        <p:spPr>
+          <a:xfrm>
+            <a:off x="3017520" y="2194560"/>
+            <a:ext cx="8549640" cy="219456"/>
+          </a:xfrm>
+          <a:prstGeom prst="roundRect">
+            <a:avLst/>
+          </a:prstGeom>
+          <a:solidFill>
+            <a:srgbClr val="E9ECEF"/>
+          </a:solidFill>
+          <a:ln w="12700">
+            <a:solidFill>
+              <a:srgbClr val="E9ECEF"/>
+            </a:solidFill>
+          </a:ln>
+        </p:spPr>
+        <p:style>
+          <a:lnRef idx="1">
+            <a:schemeClr val="accent1"/>
+          </a:lnRef>
+          <a:fillRef idx="3">
+            <a:schemeClr val="accent1"/>
+          </a:fillRef>
+          <a:effectRef idx="2">
+            <a:schemeClr val="accent1"/>
+          </a:effectRef>
+          <a:fontRef idx="minor">
+            <a:schemeClr val="lt1"/>
+          </a:fontRef>
+        </p:style>
+        <p:txBody>
+          <a:bodyPr rtlCol="0" anchor="ctr"/>
+          <a:lstStyle/>
+          <a:p>
+            <a:pPr algn="ctr"/>
+          </a:p>
+        </p:txBody>
+      </p:sp>
+      <p:sp>
+        <p:nvSpPr>
+          <p:cNvPr id="13" name="Rounded Rectangle 12"/>
+          <p:cNvSpPr/>
+          <p:nvPr/>
+        </p:nvSpPr>
+        <p:spPr>
+          <a:xfrm>
+            <a:off x="3017520" y="2194560"/>
+            <a:ext cx="3419856" cy="219456"/>
+          </a:xfrm>
+          <a:prstGeom prst="roundRect">
+            <a:avLst/>
+          </a:prstGeom>
+          <a:solidFill>
+            <a:srgbClr val="0072BC"/>
+          </a:solidFill>
+          <a:ln w="12700">
+            <a:solidFill>
+              <a:srgbClr val="0072BC"/>
+            </a:solidFill>
+          </a:ln>
+        </p:spPr>
+        <p:style>
+          <a:lnRef idx="1">
+            <a:schemeClr val="accent1"/>
+          </a:lnRef>
+          <a:fillRef idx="3">
+            <a:schemeClr val="accent1"/>
+          </a:fillRef>
+          <a:effectRef idx="2">
+            <a:schemeClr val="accent1"/>
+          </a:effectRef>
+          <a:fontRef idx="minor">
+            <a:schemeClr val="lt1"/>
+          </a:fontRef>
+        </p:style>
+        <p:txBody>
+          <a:bodyPr rtlCol="0" anchor="ctr"/>
+          <a:lstStyle/>
+          <a:p>
+            <a:pPr algn="ctr"/>
+          </a:p>
+        </p:txBody>
+      </p:sp>
+      <p:sp>
+        <p:nvSpPr>
+          <p:cNvPr id="14" name="Rounded Rectangle 13"/>
+          <p:cNvSpPr/>
+          <p:nvPr/>
+        </p:nvSpPr>
+        <p:spPr>
+          <a:xfrm>
+            <a:off x="6464808" y="2194560"/>
+            <a:ext cx="5129784" cy="219456"/>
+          </a:xfrm>
+          <a:prstGeom prst="roundRect">
+            <a:avLst/>
+          </a:prstGeom>
+          <a:solidFill>
+            <a:srgbClr val="E8792E"/>
+          </a:solidFill>
+          <a:ln w="12700">
+            <a:solidFill>
+              <a:srgbClr val="E8792E"/>
+            </a:solidFill>
+          </a:ln>
+        </p:spPr>
+        <p:style>
+          <a:lnRef idx="1">
+            <a:schemeClr val="accent1"/>
+          </a:lnRef>
+          <a:fillRef idx="3">
+            <a:schemeClr val="accent1"/>
+          </a:fillRef>
+          <a:effectRef idx="2">
+            <a:schemeClr val="accent1"/>
+          </a:effectRef>
+          <a:fontRef idx="minor">
+            <a:schemeClr val="lt1"/>
+          </a:fontRef>
+        </p:style>
+        <p:txBody>
+          <a:bodyPr rtlCol="0" anchor="ctr"/>
+          <a:lstStyle/>
+          <a:p>
+            <a:pPr algn="ctr"/>
+          </a:p>
+        </p:txBody>
+      </p:sp>
+      <p:sp>
+        <p:nvSpPr>
+          <p:cNvPr id="15" name="TextBox 14"/>
+          <p:cNvSpPr txBox="1"/>
+          <p:nvPr/>
+        </p:nvSpPr>
+        <p:spPr>
+          <a:xfrm>
+            <a:off x="3017520" y="2468879"/>
+            <a:ext cx="8549640" cy="219456"/>
+          </a:xfrm>
+          <a:prstGeom prst="rect">
+            <a:avLst/>
+          </a:prstGeom>
+          <a:noFill/>
+        </p:spPr>
+        <p:txBody>
+          <a:bodyPr wrap="square" lIns="0" rIns="0" tIns="0" bIns="0" anchor="t">
+            <a:normAutofit/>
+          </a:bodyPr>
+          <a:lstStyle/>
+          <a:p>
+            <a:pPr algn="l">
+              <a:lnSpc>
+                <a:spcPct val="100000"/>
+              </a:lnSpc>
+              <a:spcAft>
+                <a:spcPts val="103"/>
+              </a:spcAft>
+              <a:defRPr sz="860" b="0">
+                <a:solidFill>
+                  <a:srgbClr val="71808E"/>
+                </a:solidFill>
+                <a:latin typeface="Arial"/>
+              </a:defRPr>
+            </a:pPr>
+            <a:r>
+              <a:t>El método ya describía todos los pasos. Nosotros hemos hecho las herramientas que faltaban.</a:t>
+            </a:r>
+          </a:p>
+        </p:txBody>
+      </p:sp>
+      <p:sp>
+        <p:nvSpPr>
+          <p:cNvPr id="16" name="TextBox 15"/>
+          <p:cNvSpPr txBox="1"/>
+          <p:nvPr/>
+        </p:nvSpPr>
+        <p:spPr>
+          <a:xfrm>
+            <a:off x="566928" y="2798064"/>
+            <a:ext cx="2285999" cy="274320"/>
+          </a:xfrm>
+          <a:prstGeom prst="rect">
+            <a:avLst/>
+          </a:prstGeom>
+          <a:noFill/>
+        </p:spPr>
+        <p:txBody>
+          <a:bodyPr wrap="square" lIns="0" rIns="0" tIns="0" bIns="0" anchor="ctr">
+            <a:normAutofit/>
+          </a:bodyPr>
+          <a:lstStyle/>
+          <a:p>
+            <a:pPr algn="r">
+              <a:lnSpc>
+                <a:spcPct val="100000"/>
+              </a:lnSpc>
+              <a:spcAft>
+                <a:spcPts val="126"/>
+              </a:spcAft>
+              <a:defRPr sz="1050" b="1">
+                <a:solidFill>
+                  <a:srgbClr val="17324D"/>
+                </a:solidFill>
+                <a:latin typeface="Arial"/>
+              </a:defRPr>
+            </a:pPr>
+            <a:r>
+              <a:t>Enseñar resultados al cliente</a:t>
+            </a:r>
+          </a:p>
+        </p:txBody>
+      </p:sp>
+      <p:sp>
+        <p:nvSpPr>
+          <p:cNvPr id="17" name="Rounded Rectangle 16"/>
+          <p:cNvSpPr/>
+          <p:nvPr/>
+        </p:nvSpPr>
+        <p:spPr>
+          <a:xfrm>
+            <a:off x="3017520" y="2816352"/>
+            <a:ext cx="8549640" cy="219456"/>
+          </a:xfrm>
+          <a:prstGeom prst="roundRect">
+            <a:avLst/>
+          </a:prstGeom>
+          <a:solidFill>
+            <a:srgbClr val="E9ECEF"/>
+          </a:solidFill>
+          <a:ln w="12700">
+            <a:solidFill>
+              <a:srgbClr val="E9ECEF"/>
+            </a:solidFill>
+          </a:ln>
+        </p:spPr>
+        <p:style>
+          <a:lnRef idx="1">
+            <a:schemeClr val="accent1"/>
+          </a:lnRef>
+          <a:fillRef idx="3">
+            <a:schemeClr val="accent1"/>
+          </a:fillRef>
+          <a:effectRef idx="2">
+            <a:schemeClr val="accent1"/>
+          </a:effectRef>
+          <a:fontRef idx="minor">
+            <a:schemeClr val="lt1"/>
+          </a:fontRef>
+        </p:style>
+        <p:txBody>
+          <a:bodyPr rtlCol="0" anchor="ctr"/>
+          <a:lstStyle/>
+          <a:p>
+            <a:pPr algn="ctr"/>
+          </a:p>
+        </p:txBody>
+      </p:sp>
+      <p:sp>
+        <p:nvSpPr>
+          <p:cNvPr id="18" name="Rounded Rectangle 17"/>
+          <p:cNvSpPr/>
+          <p:nvPr/>
+        </p:nvSpPr>
+        <p:spPr>
+          <a:xfrm>
+            <a:off x="3017520" y="2816352"/>
+            <a:ext cx="7523683" cy="219456"/>
+          </a:xfrm>
+          <a:prstGeom prst="roundRect">
+            <a:avLst/>
+          </a:prstGeom>
+          <a:solidFill>
+            <a:srgbClr val="E8792E"/>
+          </a:solidFill>
+          <a:ln w="12700">
+            <a:solidFill>
+              <a:srgbClr val="E8792E"/>
+            </a:solidFill>
+          </a:ln>
+        </p:spPr>
+        <p:style>
+          <a:lnRef idx="1">
+            <a:schemeClr val="accent1"/>
+          </a:lnRef>
+          <a:fillRef idx="3">
+            <a:schemeClr val="accent1"/>
+          </a:fillRef>
+          <a:effectRef idx="2">
+            <a:schemeClr val="accent1"/>
+          </a:effectRef>
+          <a:fontRef idx="minor">
+            <a:schemeClr val="lt1"/>
+          </a:fontRef>
+        </p:style>
+        <p:txBody>
+          <a:bodyPr rtlCol="0" anchor="ctr"/>
+          <a:lstStyle/>
+          <a:p>
+            <a:pPr algn="ctr"/>
+          </a:p>
+        </p:txBody>
+      </p:sp>
+      <p:sp>
+        <p:nvSpPr>
+          <p:cNvPr id="19" name="TextBox 18"/>
+          <p:cNvSpPr txBox="1"/>
+          <p:nvPr/>
+        </p:nvSpPr>
+        <p:spPr>
+          <a:xfrm>
+            <a:off x="3017520" y="3090672"/>
+            <a:ext cx="8549640" cy="219456"/>
+          </a:xfrm>
+          <a:prstGeom prst="rect">
+            <a:avLst/>
+          </a:prstGeom>
+          <a:noFill/>
+        </p:spPr>
+        <p:txBody>
+          <a:bodyPr wrap="square" lIns="0" rIns="0" tIns="0" bIns="0" anchor="t">
+            <a:normAutofit/>
+          </a:bodyPr>
+          <a:lstStyle/>
+          <a:p>
+            <a:pPr algn="l">
+              <a:lnSpc>
+                <a:spcPct val="100000"/>
+              </a:lnSpc>
+              <a:spcAft>
+                <a:spcPts val="103"/>
+              </a:spcAft>
+              <a:defRPr sz="860" b="0">
+                <a:solidFill>
+                  <a:srgbClr val="71808E"/>
+                </a:solidFill>
+                <a:latin typeface="Arial"/>
+              </a:defRPr>
+            </a:pPr>
+            <a:r>
+              <a:t>No era su cometido. Ahora se genera el documento que el cliente firma y el informe de avance.</a:t>
+            </a:r>
+          </a:p>
+        </p:txBody>
+      </p:sp>
+      <p:sp>
+        <p:nvSpPr>
+          <p:cNvPr id="20" name="TextBox 19"/>
+          <p:cNvSpPr txBox="1"/>
+          <p:nvPr/>
+        </p:nvSpPr>
+        <p:spPr>
+          <a:xfrm>
+            <a:off x="566928" y="3419856"/>
+            <a:ext cx="2285999" cy="274320"/>
+          </a:xfrm>
+          <a:prstGeom prst="rect">
+            <a:avLst/>
+          </a:prstGeom>
+          <a:noFill/>
+        </p:spPr>
+        <p:txBody>
+          <a:bodyPr wrap="square" lIns="0" rIns="0" tIns="0" bIns="0" anchor="ctr">
+            <a:normAutofit/>
+          </a:bodyPr>
+          <a:lstStyle/>
+          <a:p>
+            <a:pPr algn="r">
+              <a:lnSpc>
+                <a:spcPct val="100000"/>
+              </a:lnSpc>
+              <a:spcAft>
+                <a:spcPts val="126"/>
+              </a:spcAft>
+              <a:defRPr sz="1050" b="1">
+                <a:solidFill>
+                  <a:srgbClr val="17324D"/>
+                </a:solidFill>
+                <a:latin typeface="Arial"/>
+              </a:defRPr>
+            </a:pPr>
+            <a:r>
+              <a:t>Varias personas a la vez</a:t>
+            </a:r>
+          </a:p>
+        </p:txBody>
+      </p:sp>
+      <p:sp>
+        <p:nvSpPr>
+          <p:cNvPr id="21" name="Rounded Rectangle 20"/>
+          <p:cNvSpPr/>
+          <p:nvPr/>
+        </p:nvSpPr>
+        <p:spPr>
+          <a:xfrm>
+            <a:off x="3017520" y="3438144"/>
+            <a:ext cx="8549640" cy="219456"/>
+          </a:xfrm>
+          <a:prstGeom prst="roundRect">
+            <a:avLst/>
+          </a:prstGeom>
+          <a:solidFill>
+            <a:srgbClr val="E9ECEF"/>
+          </a:solidFill>
+          <a:ln w="12700">
+            <a:solidFill>
+              <a:srgbClr val="E9ECEF"/>
+            </a:solidFill>
+          </a:ln>
+        </p:spPr>
+        <p:style>
+          <a:lnRef idx="1">
+            <a:schemeClr val="accent1"/>
+          </a:lnRef>
+          <a:fillRef idx="3">
+            <a:schemeClr val="accent1"/>
+          </a:fillRef>
+          <a:effectRef idx="2">
+            <a:schemeClr val="accent1"/>
+          </a:effectRef>
+          <a:fontRef idx="minor">
+            <a:schemeClr val="lt1"/>
+          </a:fontRef>
+        </p:style>
+        <p:txBody>
+          <a:bodyPr rtlCol="0" anchor="ctr"/>
+          <a:lstStyle/>
+          <a:p>
+            <a:pPr algn="ctr"/>
+          </a:p>
+        </p:txBody>
+      </p:sp>
+      <p:sp>
+        <p:nvSpPr>
+          <p:cNvPr id="22" name="Rounded Rectangle 21"/>
+          <p:cNvSpPr/>
+          <p:nvPr/>
+        </p:nvSpPr>
+        <p:spPr>
+          <a:xfrm>
+            <a:off x="3017520" y="3438144"/>
+            <a:ext cx="3419856" cy="219456"/>
+          </a:xfrm>
+          <a:prstGeom prst="roundRect">
+            <a:avLst/>
+          </a:prstGeom>
+          <a:solidFill>
+            <a:srgbClr val="0072BC"/>
+          </a:solidFill>
+          <a:ln w="12700">
+            <a:solidFill>
+              <a:srgbClr val="0072BC"/>
+            </a:solidFill>
+          </a:ln>
+        </p:spPr>
+        <p:style>
+          <a:lnRef idx="1">
+            <a:schemeClr val="accent1"/>
+          </a:lnRef>
+          <a:fillRef idx="3">
+            <a:schemeClr val="accent1"/>
+          </a:fillRef>
+          <a:effectRef idx="2">
+            <a:schemeClr val="accent1"/>
+          </a:effectRef>
+          <a:fontRef idx="minor">
+            <a:schemeClr val="lt1"/>
+          </a:fontRef>
+        </p:style>
+        <p:txBody>
+          <a:bodyPr rtlCol="0" anchor="ctr"/>
+          <a:lstStyle/>
+          <a:p>
+            <a:pPr algn="ctr"/>
+          </a:p>
+        </p:txBody>
+      </p:sp>
+      <p:sp>
+        <p:nvSpPr>
+          <p:cNvPr id="23" name="Rounded Rectangle 22"/>
+          <p:cNvSpPr/>
+          <p:nvPr/>
+        </p:nvSpPr>
+        <p:spPr>
+          <a:xfrm>
+            <a:off x="6464808" y="3438144"/>
+            <a:ext cx="3419856" cy="219456"/>
+          </a:xfrm>
+          <a:prstGeom prst="roundRect">
+            <a:avLst/>
+          </a:prstGeom>
+          <a:solidFill>
+            <a:srgbClr val="E8792E"/>
+          </a:solidFill>
+          <a:ln w="12700">
+            <a:solidFill>
+              <a:srgbClr val="E8792E"/>
+            </a:solidFill>
+          </a:ln>
+        </p:spPr>
+        <p:style>
+          <a:lnRef idx="1">
+            <a:schemeClr val="accent1"/>
+          </a:lnRef>
+          <a:fillRef idx="3">
+            <a:schemeClr val="accent1"/>
+          </a:fillRef>
+          <a:effectRef idx="2">
+            <a:schemeClr val="accent1"/>
+          </a:effectRef>
+          <a:fontRef idx="minor">
+            <a:schemeClr val="lt1"/>
+          </a:fontRef>
+        </p:style>
+        <p:txBody>
+          <a:bodyPr rtlCol="0" anchor="ctr"/>
+          <a:lstStyle/>
+          <a:p>
+            <a:pPr algn="ctr"/>
+          </a:p>
+        </p:txBody>
+      </p:sp>
+      <p:sp>
+        <p:nvSpPr>
+          <p:cNvPr id="24" name="TextBox 23"/>
+          <p:cNvSpPr txBox="1"/>
+          <p:nvPr/>
+        </p:nvSpPr>
+        <p:spPr>
+          <a:xfrm>
+            <a:off x="3017520" y="3712463"/>
+            <a:ext cx="8549640" cy="219456"/>
+          </a:xfrm>
+          <a:prstGeom prst="rect">
+            <a:avLst/>
+          </a:prstGeom>
+          <a:noFill/>
+        </p:spPr>
+        <p:txBody>
+          <a:bodyPr wrap="square" lIns="0" rIns="0" tIns="0" bIns="0" anchor="t">
+            <a:normAutofit/>
+          </a:bodyPr>
+          <a:lstStyle/>
+          <a:p>
+            <a:pPr algn="l">
+              <a:lnSpc>
+                <a:spcPct val="100000"/>
+              </a:lnSpc>
+              <a:spcAft>
+                <a:spcPts val="103"/>
+              </a:spcAft>
+              <a:defRPr sz="860" b="0">
+                <a:solidFill>
+                  <a:srgbClr val="71808E"/>
+                </a:solidFill>
+                <a:latin typeface="Arial"/>
+              </a:defRPr>
+            </a:pPr>
+            <a:r>
+              <a:t>Ya repartía el trabajo entre varios. Ahora, además, comprueba que nadie se pise.</a:t>
+            </a:r>
+          </a:p>
+        </p:txBody>
+      </p:sp>
+      <p:sp>
+        <p:nvSpPr>
+          <p:cNvPr id="25" name="TextBox 24"/>
+          <p:cNvSpPr txBox="1"/>
+          <p:nvPr/>
+        </p:nvSpPr>
+        <p:spPr>
+          <a:xfrm>
+            <a:off x="566928" y="4041648"/>
+            <a:ext cx="2285999" cy="274320"/>
+          </a:xfrm>
+          <a:prstGeom prst="rect">
+            <a:avLst/>
+          </a:prstGeom>
+          <a:noFill/>
+        </p:spPr>
+        <p:txBody>
+          <a:bodyPr wrap="square" lIns="0" rIns="0" tIns="0" bIns="0" anchor="ctr">
+            <a:normAutofit/>
+          </a:bodyPr>
+          <a:lstStyle/>
+          <a:p>
+            <a:pPr algn="r">
+              <a:lnSpc>
+                <a:spcPct val="100000"/>
+              </a:lnSpc>
+              <a:spcAft>
+                <a:spcPts val="126"/>
+              </a:spcAft>
+              <a:defRPr sz="1050" b="1">
+                <a:solidFill>
+                  <a:srgbClr val="17324D"/>
+                </a:solidFill>
+                <a:latin typeface="Arial"/>
+              </a:defRPr>
+            </a:pPr>
+            <a:r>
+              <a:t>Saber lo que ha costado</a:t>
+            </a:r>
+          </a:p>
+        </p:txBody>
+      </p:sp>
+      <p:sp>
+        <p:nvSpPr>
+          <p:cNvPr id="26" name="Rounded Rectangle 25"/>
+          <p:cNvSpPr/>
+          <p:nvPr/>
+        </p:nvSpPr>
+        <p:spPr>
+          <a:xfrm>
+            <a:off x="3017520" y="4059936"/>
+            <a:ext cx="8549640" cy="219456"/>
+          </a:xfrm>
+          <a:prstGeom prst="roundRect">
+            <a:avLst/>
+          </a:prstGeom>
+          <a:solidFill>
+            <a:srgbClr val="E9ECEF"/>
+          </a:solidFill>
+          <a:ln w="12700">
+            <a:solidFill>
+              <a:srgbClr val="E9ECEF"/>
+            </a:solidFill>
+          </a:ln>
+        </p:spPr>
+        <p:style>
+          <a:lnRef idx="1">
+            <a:schemeClr val="accent1"/>
+          </a:lnRef>
+          <a:fillRef idx="3">
+            <a:schemeClr val="accent1"/>
+          </a:fillRef>
+          <a:effectRef idx="2">
+            <a:schemeClr val="accent1"/>
+          </a:effectRef>
+          <a:fontRef idx="minor">
+            <a:schemeClr val="lt1"/>
+          </a:fontRef>
+        </p:style>
+        <p:txBody>
+          <a:bodyPr rtlCol="0" anchor="ctr"/>
+          <a:lstStyle/>
+          <a:p>
+            <a:pPr algn="ctr"/>
+          </a:p>
+        </p:txBody>
+      </p:sp>
+      <p:sp>
+        <p:nvSpPr>
+          <p:cNvPr id="27" name="Rounded Rectangle 26"/>
+          <p:cNvSpPr/>
+          <p:nvPr/>
+        </p:nvSpPr>
+        <p:spPr>
+          <a:xfrm>
+            <a:off x="3017520" y="4059936"/>
+            <a:ext cx="4274820" cy="219456"/>
+          </a:xfrm>
+          <a:prstGeom prst="roundRect">
+            <a:avLst/>
+          </a:prstGeom>
+          <a:solidFill>
+            <a:srgbClr val="0072BC"/>
+          </a:solidFill>
+          <a:ln w="12700">
+            <a:solidFill>
+              <a:srgbClr val="0072BC"/>
+            </a:solidFill>
+          </a:ln>
+        </p:spPr>
+        <p:style>
+          <a:lnRef idx="1">
+            <a:schemeClr val="accent1"/>
+          </a:lnRef>
+          <a:fillRef idx="3">
+            <a:schemeClr val="accent1"/>
+          </a:fillRef>
+          <a:effectRef idx="2">
+            <a:schemeClr val="accent1"/>
+          </a:effectRef>
+          <a:fontRef idx="minor">
+            <a:schemeClr val="lt1"/>
+          </a:fontRef>
+        </p:style>
+        <p:txBody>
+          <a:bodyPr rtlCol="0" anchor="ctr"/>
+          <a:lstStyle/>
+          <a:p>
+            <a:pPr algn="ctr"/>
+          </a:p>
+        </p:txBody>
+      </p:sp>
+      <p:sp>
+        <p:nvSpPr>
+          <p:cNvPr id="28" name="Rounded Rectangle 27"/>
+          <p:cNvSpPr/>
+          <p:nvPr/>
+        </p:nvSpPr>
+        <p:spPr>
+          <a:xfrm>
+            <a:off x="7319771" y="4059936"/>
+            <a:ext cx="3419856" cy="219456"/>
+          </a:xfrm>
+          <a:prstGeom prst="roundRect">
+            <a:avLst/>
+          </a:prstGeom>
+          <a:solidFill>
+            <a:srgbClr val="E8792E"/>
+          </a:solidFill>
+          <a:ln w="12700">
+            <a:solidFill>
+              <a:srgbClr val="E8792E"/>
+            </a:solidFill>
+          </a:ln>
+        </p:spPr>
+        <p:style>
+          <a:lnRef idx="1">
+            <a:schemeClr val="accent1"/>
+          </a:lnRef>
+          <a:fillRef idx="3">
+            <a:schemeClr val="accent1"/>
+          </a:fillRef>
+          <a:effectRef idx="2">
+            <a:schemeClr val="accent1"/>
+          </a:effectRef>
+          <a:fontRef idx="minor">
+            <a:schemeClr val="lt1"/>
+          </a:fontRef>
+        </p:style>
+        <p:txBody>
+          <a:bodyPr rtlCol="0" anchor="ctr"/>
+          <a:lstStyle/>
+          <a:p>
+            <a:pPr algn="ctr"/>
+          </a:p>
+        </p:txBody>
+      </p:sp>
+      <p:sp>
+        <p:nvSpPr>
+          <p:cNvPr id="29" name="TextBox 28"/>
+          <p:cNvSpPr txBox="1"/>
+          <p:nvPr/>
+        </p:nvSpPr>
+        <p:spPr>
+          <a:xfrm>
+            <a:off x="3017520" y="4334256"/>
+            <a:ext cx="8549640" cy="219456"/>
+          </a:xfrm>
+          <a:prstGeom prst="rect">
+            <a:avLst/>
+          </a:prstGeom>
+          <a:noFill/>
+        </p:spPr>
+        <p:txBody>
+          <a:bodyPr wrap="square" lIns="0" rIns="0" tIns="0" bIns="0" anchor="t">
+            <a:normAutofit/>
+          </a:bodyPr>
+          <a:lstStyle/>
+          <a:p>
+            <a:pPr algn="l">
+              <a:lnSpc>
+                <a:spcPct val="100000"/>
+              </a:lnSpc>
+              <a:spcAft>
+                <a:spcPts val="103"/>
+              </a:spcAft>
+              <a:defRPr sz="860" b="0">
+                <a:solidFill>
+                  <a:srgbClr val="71808E"/>
+                </a:solidFill>
+                <a:latin typeface="Arial"/>
+              </a:defRPr>
+            </a:pPr>
+            <a:r>
+              <a:t>Él ya lo registraba todo, que es la parte difícil. Nosotros lo hemos convertido en cifras.</a:t>
+            </a:r>
+          </a:p>
+        </p:txBody>
+      </p:sp>
+      <p:sp>
+        <p:nvSpPr>
+          <p:cNvPr id="30" name="TextBox 29"/>
+          <p:cNvSpPr txBox="1"/>
+          <p:nvPr/>
+        </p:nvSpPr>
+        <p:spPr>
+          <a:xfrm>
+            <a:off x="566928" y="4663440"/>
+            <a:ext cx="2285999" cy="274320"/>
+          </a:xfrm>
+          <a:prstGeom prst="rect">
+            <a:avLst/>
+          </a:prstGeom>
+          <a:noFill/>
+        </p:spPr>
+        <p:txBody>
+          <a:bodyPr wrap="square" lIns="0" rIns="0" tIns="0" bIns="0" anchor="ctr">
+            <a:normAutofit/>
+          </a:bodyPr>
+          <a:lstStyle/>
+          <a:p>
+            <a:pPr algn="r">
+              <a:lnSpc>
+                <a:spcPct val="100000"/>
+              </a:lnSpc>
+              <a:spcAft>
+                <a:spcPts val="126"/>
+              </a:spcAft>
+              <a:defRPr sz="1050" b="1">
+                <a:solidFill>
+                  <a:srgbClr val="17324D"/>
+                </a:solidFill>
+                <a:latin typeface="Arial"/>
+              </a:defRPr>
+            </a:pPr>
+            <a:r>
+              <a:t>Encajar en el proyecto del cliente</a:t>
+            </a:r>
+          </a:p>
+        </p:txBody>
+      </p:sp>
+      <p:sp>
+        <p:nvSpPr>
+          <p:cNvPr id="31" name="Rounded Rectangle 30"/>
+          <p:cNvSpPr/>
+          <p:nvPr/>
+        </p:nvSpPr>
+        <p:spPr>
+          <a:xfrm>
+            <a:off x="3017520" y="4681728"/>
+            <a:ext cx="8549640" cy="219456"/>
+          </a:xfrm>
+          <a:prstGeom prst="roundRect">
+            <a:avLst/>
+          </a:prstGeom>
+          <a:solidFill>
+            <a:srgbClr val="E9ECEF"/>
+          </a:solidFill>
+          <a:ln w="12700">
+            <a:solidFill>
+              <a:srgbClr val="E9ECEF"/>
+            </a:solidFill>
+          </a:ln>
+        </p:spPr>
+        <p:style>
+          <a:lnRef idx="1">
+            <a:schemeClr val="accent1"/>
+          </a:lnRef>
+          <a:fillRef idx="3">
+            <a:schemeClr val="accent1"/>
+          </a:fillRef>
+          <a:effectRef idx="2">
+            <a:schemeClr val="accent1"/>
+          </a:effectRef>
+          <a:fontRef idx="minor">
+            <a:schemeClr val="lt1"/>
+          </a:fontRef>
+        </p:style>
+        <p:txBody>
+          <a:bodyPr rtlCol="0" anchor="ctr"/>
+          <a:lstStyle/>
+          <a:p>
+            <a:pPr algn="ctr"/>
+          </a:p>
+        </p:txBody>
+      </p:sp>
+      <p:sp>
+        <p:nvSpPr>
+          <p:cNvPr id="32" name="Rounded Rectangle 31"/>
+          <p:cNvSpPr/>
+          <p:nvPr/>
+        </p:nvSpPr>
+        <p:spPr>
+          <a:xfrm>
+            <a:off x="3017520" y="4681728"/>
+            <a:ext cx="2564892" cy="219456"/>
+          </a:xfrm>
+          <a:prstGeom prst="roundRect">
+            <a:avLst/>
+          </a:prstGeom>
+          <a:solidFill>
+            <a:srgbClr val="0072BC"/>
+          </a:solidFill>
+          <a:ln w="12700">
+            <a:solidFill>
+              <a:srgbClr val="0072BC"/>
+            </a:solidFill>
+          </a:ln>
+        </p:spPr>
+        <p:style>
+          <a:lnRef idx="1">
+            <a:schemeClr val="accent1"/>
+          </a:lnRef>
+          <a:fillRef idx="3">
+            <a:schemeClr val="accent1"/>
+          </a:fillRef>
+          <a:effectRef idx="2">
+            <a:schemeClr val="accent1"/>
+          </a:effectRef>
+          <a:fontRef idx="minor">
+            <a:schemeClr val="lt1"/>
+          </a:fontRef>
+        </p:style>
+        <p:txBody>
+          <a:bodyPr rtlCol="0" anchor="ctr"/>
+          <a:lstStyle/>
+          <a:p>
+            <a:pPr algn="ctr"/>
+          </a:p>
+        </p:txBody>
+      </p:sp>
+      <p:sp>
+        <p:nvSpPr>
+          <p:cNvPr id="33" name="Rounded Rectangle 32"/>
+          <p:cNvSpPr/>
+          <p:nvPr/>
+        </p:nvSpPr>
+        <p:spPr>
+          <a:xfrm>
+            <a:off x="5609844" y="4681728"/>
+            <a:ext cx="4274820" cy="219456"/>
+          </a:xfrm>
+          <a:prstGeom prst="roundRect">
+            <a:avLst/>
+          </a:prstGeom>
+          <a:solidFill>
+            <a:srgbClr val="E8792E"/>
+          </a:solidFill>
+          <a:ln w="12700">
+            <a:solidFill>
+              <a:srgbClr val="E8792E"/>
+            </a:solidFill>
+          </a:ln>
+        </p:spPr>
+        <p:style>
+          <a:lnRef idx="1">
+            <a:schemeClr val="accent1"/>
+          </a:lnRef>
+          <a:fillRef idx="3">
+            <a:schemeClr val="accent1"/>
+          </a:fillRef>
+          <a:effectRef idx="2">
+            <a:schemeClr val="accent1"/>
+          </a:effectRef>
+          <a:fontRef idx="minor">
+            <a:schemeClr val="lt1"/>
+          </a:fontRef>
+        </p:style>
+        <p:txBody>
+          <a:bodyPr rtlCol="0" anchor="ctr"/>
+          <a:lstStyle/>
+          <a:p>
+            <a:pPr algn="ctr"/>
+          </a:p>
+        </p:txBody>
+      </p:sp>
+      <p:sp>
+        <p:nvSpPr>
+          <p:cNvPr id="34" name="TextBox 33"/>
+          <p:cNvSpPr txBox="1"/>
+          <p:nvPr/>
+        </p:nvSpPr>
+        <p:spPr>
+          <a:xfrm>
+            <a:off x="3017520" y="4956048"/>
+            <a:ext cx="8549640" cy="219456"/>
+          </a:xfrm>
+          <a:prstGeom prst="rect">
+            <a:avLst/>
+          </a:prstGeom>
+          <a:noFill/>
+        </p:spPr>
+        <p:txBody>
+          <a:bodyPr wrap="square" lIns="0" rIns="0" tIns="0" bIns="0" anchor="t">
+            <a:normAutofit/>
+          </a:bodyPr>
+          <a:lstStyle/>
+          <a:p>
+            <a:pPr algn="l">
+              <a:lnSpc>
+                <a:spcPct val="100000"/>
+              </a:lnSpc>
+              <a:spcAft>
+                <a:spcPts val="103"/>
+              </a:spcAft>
+              <a:defRPr sz="860" b="0">
+                <a:solidFill>
+                  <a:srgbClr val="71808E"/>
+                </a:solidFill>
+                <a:latin typeface="Arial"/>
+              </a:defRPr>
+            </a:pPr>
+            <a:r>
+              <a:t>Pensado para un proyecto en un sitio. Ahora admite los repositorios que el cliente tenga.</a:t>
+            </a:r>
+          </a:p>
+        </p:txBody>
+      </p:sp>
+      <p:sp>
+        <p:nvSpPr>
+          <p:cNvPr id="35" name="TextBox 34"/>
+          <p:cNvSpPr txBox="1"/>
+          <p:nvPr/>
+        </p:nvSpPr>
+        <p:spPr>
+          <a:xfrm>
+            <a:off x="566928" y="5285231"/>
+            <a:ext cx="2285999" cy="274320"/>
+          </a:xfrm>
+          <a:prstGeom prst="rect">
+            <a:avLst/>
+          </a:prstGeom>
+          <a:noFill/>
+        </p:spPr>
+        <p:txBody>
+          <a:bodyPr wrap="square" lIns="0" rIns="0" tIns="0" bIns="0" anchor="ctr">
+            <a:normAutofit/>
+          </a:bodyPr>
+          <a:lstStyle/>
+          <a:p>
+            <a:pPr algn="r">
+              <a:lnSpc>
+                <a:spcPct val="100000"/>
+              </a:lnSpc>
+              <a:spcAft>
+                <a:spcPts val="126"/>
+              </a:spcAft>
+              <a:defRPr sz="1050" b="1">
+                <a:solidFill>
+                  <a:srgbClr val="17324D"/>
+                </a:solidFill>
+                <a:latin typeface="Arial"/>
+              </a:defRPr>
+            </a:pPr>
+            <a:r>
+              <a:t>Que escriba la persona</a:t>
+            </a:r>
+          </a:p>
+        </p:txBody>
+      </p:sp>
+      <p:sp>
+        <p:nvSpPr>
+          <p:cNvPr id="36" name="Rounded Rectangle 35"/>
+          <p:cNvSpPr/>
+          <p:nvPr/>
+        </p:nvSpPr>
+        <p:spPr>
+          <a:xfrm>
+            <a:off x="3017520" y="5303520"/>
+            <a:ext cx="8549640" cy="219456"/>
+          </a:xfrm>
+          <a:prstGeom prst="roundRect">
+            <a:avLst/>
+          </a:prstGeom>
+          <a:solidFill>
+            <a:srgbClr val="E9ECEF"/>
+          </a:solidFill>
+          <a:ln w="12700">
+            <a:solidFill>
+              <a:srgbClr val="E9ECEF"/>
+            </a:solidFill>
+          </a:ln>
+        </p:spPr>
+        <p:style>
+          <a:lnRef idx="1">
+            <a:schemeClr val="accent1"/>
+          </a:lnRef>
+          <a:fillRef idx="3">
+            <a:schemeClr val="accent1"/>
+          </a:fillRef>
+          <a:effectRef idx="2">
+            <a:schemeClr val="accent1"/>
+          </a:effectRef>
+          <a:fontRef idx="minor">
+            <a:schemeClr val="lt1"/>
+          </a:fontRef>
+        </p:style>
+        <p:txBody>
+          <a:bodyPr rtlCol="0" anchor="ctr"/>
+          <a:lstStyle/>
+          <a:p>
+            <a:pPr algn="ctr"/>
+          </a:p>
+        </p:txBody>
+      </p:sp>
+      <p:sp>
+        <p:nvSpPr>
+          <p:cNvPr id="37" name="Rounded Rectangle 36"/>
+          <p:cNvSpPr/>
+          <p:nvPr/>
+        </p:nvSpPr>
+        <p:spPr>
+          <a:xfrm>
+            <a:off x="3017520" y="5303520"/>
+            <a:ext cx="7523683" cy="219456"/>
+          </a:xfrm>
+          <a:prstGeom prst="roundRect">
+            <a:avLst/>
+          </a:prstGeom>
+          <a:solidFill>
+            <a:srgbClr val="E8792E"/>
+          </a:solidFill>
+          <a:ln w="12700">
+            <a:solidFill>
+              <a:srgbClr val="E8792E"/>
+            </a:solidFill>
+          </a:ln>
+        </p:spPr>
+        <p:style>
+          <a:lnRef idx="1">
+            <a:schemeClr val="accent1"/>
+          </a:lnRef>
+          <a:fillRef idx="3">
+            <a:schemeClr val="accent1"/>
+          </a:fillRef>
+          <a:effectRef idx="2">
+            <a:schemeClr val="accent1"/>
+          </a:effectRef>
+          <a:fontRef idx="minor">
+            <a:schemeClr val="lt1"/>
+          </a:fontRef>
+        </p:style>
+        <p:txBody>
+          <a:bodyPr rtlCol="0" anchor="ctr"/>
+          <a:lstStyle/>
+          <a:p>
+            <a:pPr algn="ctr"/>
+          </a:p>
+        </p:txBody>
+      </p:sp>
+      <p:sp>
+        <p:nvSpPr>
+          <p:cNvPr id="38" name="TextBox 37"/>
+          <p:cNvSpPr txBox="1"/>
+          <p:nvPr/>
+        </p:nvSpPr>
+        <p:spPr>
+          <a:xfrm>
+            <a:off x="3017520" y="5577840"/>
+            <a:ext cx="8549640" cy="219456"/>
+          </a:xfrm>
+          <a:prstGeom prst="rect">
+            <a:avLst/>
+          </a:prstGeom>
+          <a:noFill/>
+        </p:spPr>
+        <p:txBody>
+          <a:bodyPr wrap="square" lIns="0" rIns="0" tIns="0" bIns="0" anchor="t">
+            <a:normAutofit/>
+          </a:bodyPr>
+          <a:lstStyle/>
+          <a:p>
+            <a:pPr algn="l">
+              <a:lnSpc>
+                <a:spcPct val="100000"/>
+              </a:lnSpc>
+              <a:spcAft>
+                <a:spcPts val="103"/>
+              </a:spcAft>
+              <a:defRPr sz="860" b="0">
+                <a:solidFill>
+                  <a:srgbClr val="71808E"/>
+                </a:solidFill>
+                <a:latin typeface="Arial"/>
+              </a:defRPr>
+            </a:pPr>
+            <a:r>
+              <a:t>No era su planteamiento. Hoy es una opción que se elige tarea a tarea.</a:t>
+            </a:r>
+          </a:p>
+        </p:txBody>
+      </p:sp>
+      <p:sp>
+        <p:nvSpPr>
+          <p:cNvPr id="39" name="Rounded Rectangle 38"/>
+          <p:cNvSpPr/>
+          <p:nvPr/>
+        </p:nvSpPr>
+        <p:spPr>
+          <a:xfrm>
+            <a:off x="566928" y="5888736"/>
+            <a:ext cx="11064240" cy="530352"/>
           </a:xfrm>
           <a:prstGeom prst="roundRect">
             <a:avLst/>
@@ -8504,104 +9903,14 @@
       </p:sp>
       <p:sp>
         <p:nvSpPr>
-          <p:cNvPr id="8" name="Rectangle 7"/>
-          <p:cNvSpPr/>
-          <p:nvPr/>
-        </p:nvSpPr>
-        <p:spPr>
-          <a:xfrm>
-            <a:off x="566928" y="1975104"/>
-            <a:ext cx="73152" cy="1664208"/>
-          </a:xfrm>
-          <a:prstGeom prst="rect">
-            <a:avLst/>
-          </a:prstGeom>
-          <a:solidFill>
-            <a:srgbClr val="0072BC"/>
-          </a:solidFill>
-          <a:ln w="12700">
-            <a:solidFill>
-              <a:srgbClr val="0072BC"/>
-            </a:solidFill>
-          </a:ln>
-        </p:spPr>
-        <p:style>
-          <a:lnRef idx="1">
-            <a:schemeClr val="accent1"/>
-          </a:lnRef>
-          <a:fillRef idx="3">
-            <a:schemeClr val="accent1"/>
-          </a:fillRef>
-          <a:effectRef idx="2">
-            <a:schemeClr val="accent1"/>
-          </a:effectRef>
-          <a:fontRef idx="minor">
-            <a:schemeClr val="lt1"/>
-          </a:fontRef>
-        </p:style>
-        <p:txBody>
-          <a:bodyPr rtlCol="0" anchor="ctr"/>
-          <a:lstStyle/>
-          <a:p>
-            <a:pPr algn="ctr"/>
-          </a:p>
-        </p:txBody>
-      </p:sp>
-      <p:sp>
-        <p:nvSpPr>
-          <p:cNvPr id="9" name="Oval 8"/>
-          <p:cNvSpPr/>
-          <p:nvPr/>
-        </p:nvSpPr>
-        <p:spPr>
-          <a:xfrm>
-            <a:off x="877824" y="2231136"/>
-            <a:ext cx="402336" cy="402336"/>
-          </a:xfrm>
-          <a:prstGeom prst="ellipse">
-            <a:avLst/>
-          </a:prstGeom>
-          <a:solidFill>
-            <a:srgbClr val="0072BC"/>
-          </a:solidFill>
-          <a:ln>
-            <a:solidFill>
-              <a:srgbClr val="0072BC"/>
-            </a:solidFill>
-          </a:ln>
-        </p:spPr>
-        <p:style>
-          <a:lnRef idx="1">
-            <a:schemeClr val="accent1"/>
-          </a:lnRef>
-          <a:fillRef idx="3">
-            <a:schemeClr val="accent1"/>
-          </a:fillRef>
-          <a:effectRef idx="2">
-            <a:schemeClr val="accent1"/>
-          </a:effectRef>
-          <a:fontRef idx="minor">
-            <a:schemeClr val="lt1"/>
-          </a:fontRef>
-        </p:style>
-        <p:txBody>
-          <a:bodyPr rtlCol="0" anchor="ctr"/>
-          <a:lstStyle/>
-          <a:p>
-            <a:pPr algn="ctr"/>
-          </a:p>
-        </p:txBody>
-      </p:sp>
-      <p:sp>
-        <p:nvSpPr>
-          <p:cNvPr id="10" name="TextBox 9"/>
+          <p:cNvPr id="40" name="TextBox 39"/>
           <p:cNvSpPr txBox="1"/>
           <p:nvPr/>
         </p:nvSpPr>
         <p:spPr>
           <a:xfrm>
-            <a:off x="877824" y="2249424"/>
-            <a:ext cx="402336" cy="365760"/>
+            <a:off x="841248" y="5980176"/>
+            <a:ext cx="10515600" cy="347472"/>
           </a:xfrm>
           <a:prstGeom prst="rect">
             <a:avLst/>
@@ -8610,48 +9919,6 @@
         </p:spPr>
         <p:txBody>
           <a:bodyPr wrap="square" lIns="0" rIns="0" tIns="0" bIns="0" anchor="ctr">
-            <a:normAutofit/>
-          </a:bodyPr>
-          <a:lstStyle/>
-          <a:p>
-            <a:pPr algn="ctr">
-              <a:lnSpc>
-                <a:spcPct val="100000"/>
-              </a:lnSpc>
-              <a:spcAft>
-                <a:spcPts val="144"/>
-              </a:spcAft>
-              <a:defRPr sz="1200" b="1">
-                <a:solidFill>
-                  <a:srgbClr val="FFFFFF"/>
-                </a:solidFill>
-                <a:latin typeface="Arial"/>
-              </a:defRPr>
-            </a:pPr>
-            <a:r>
-              <a:t>1</a:t>
-            </a:r>
-          </a:p>
-        </p:txBody>
-      </p:sp>
-      <p:sp>
-        <p:nvSpPr>
-          <p:cNvPr id="11" name="TextBox 10"/>
-          <p:cNvSpPr txBox="1"/>
-          <p:nvPr/>
-        </p:nvSpPr>
-        <p:spPr>
-          <a:xfrm>
-            <a:off x="1499616" y="2231136"/>
-            <a:ext cx="4206240" cy="365760"/>
-          </a:xfrm>
-          <a:prstGeom prst="rect">
-            <a:avLst/>
-          </a:prstGeom>
-          <a:noFill/>
-        </p:spPr>
-        <p:txBody>
-          <a:bodyPr wrap="square" lIns="0" rIns="0" tIns="0" bIns="0" anchor="t">
             <a:normAutofit/>
           </a:bodyPr>
           <a:lstStyle/>
@@ -8661,936 +9928,24 @@
                 <a:spcPct val="100000"/>
               </a:lnSpc>
               <a:spcAft>
-                <a:spcPts val="192"/>
+                <a:spcPts val="113"/>
               </a:spcAft>
-              <a:defRPr sz="1600" b="1">
-                <a:solidFill>
-                  <a:srgbClr val="17324D"/>
+              <a:defRPr sz="950" b="0">
+                <a:solidFill>
+                  <a:srgbClr val="3F556A"/>
                 </a:solidFill>
                 <a:latin typeface="Arial"/>
               </a:defRPr>
             </a:pPr>
             <a:r>
-              <a:t>El cliente firma</a:t>
-            </a:r>
-          </a:p>
-        </p:txBody>
-      </p:sp>
-      <p:sp>
-        <p:nvSpPr>
-          <p:cNvPr id="12" name="TextBox 11"/>
-          <p:cNvSpPr txBox="1"/>
-          <p:nvPr/>
-        </p:nvSpPr>
-        <p:spPr>
-          <a:xfrm>
-            <a:off x="1499616" y="2761488"/>
-            <a:ext cx="4206240" cy="731520"/>
-          </a:xfrm>
-          <a:prstGeom prst="rect">
-            <a:avLst/>
-          </a:prstGeom>
-          <a:noFill/>
-        </p:spPr>
-        <p:txBody>
-          <a:bodyPr wrap="square" lIns="0" rIns="0" tIns="0" bIns="0" anchor="t">
-            <a:normAutofit/>
-          </a:bodyPr>
-          <a:lstStyle/>
-          <a:p>
-            <a:pPr algn="l">
-              <a:lnSpc>
-                <a:spcPct val="100000"/>
-              </a:lnSpc>
-              <a:spcAft>
-                <a:spcPts val="126"/>
-              </a:spcAft>
-              <a:defRPr sz="1050" b="0">
-                <a:solidFill>
-                  <a:srgbClr val="3F556A"/>
-                </a:solidFill>
-                <a:latin typeface="Arial"/>
-              </a:defRPr>
-            </a:pPr>
-            <a:r>
-              <a:t>El diseño funcional, el plan de pruebas y el de sprints se generan desde la misma fuente que el código. Antes se hacían a mano en Word y Excel.</a:t>
-            </a:r>
-          </a:p>
-        </p:txBody>
-      </p:sp>
-      <p:sp>
-        <p:nvSpPr>
-          <p:cNvPr id="13" name="Rounded Rectangle 12"/>
-          <p:cNvSpPr/>
-          <p:nvPr/>
-        </p:nvSpPr>
-        <p:spPr>
-          <a:xfrm>
-            <a:off x="6272784" y="1975104"/>
-            <a:ext cx="5358384" cy="1664208"/>
-          </a:xfrm>
-          <a:prstGeom prst="roundRect">
-            <a:avLst/>
-          </a:prstGeom>
-          <a:solidFill>
-            <a:srgbClr val="FFFFFF"/>
-          </a:solidFill>
-          <a:ln w="12700">
-            <a:solidFill>
-              <a:srgbClr val="D7DEE3"/>
-            </a:solidFill>
-          </a:ln>
-        </p:spPr>
-        <p:style>
-          <a:lnRef idx="1">
-            <a:schemeClr val="accent1"/>
-          </a:lnRef>
-          <a:fillRef idx="3">
-            <a:schemeClr val="accent1"/>
-          </a:fillRef>
-          <a:effectRef idx="2">
-            <a:schemeClr val="accent1"/>
-          </a:effectRef>
-          <a:fontRef idx="minor">
-            <a:schemeClr val="lt1"/>
-          </a:fontRef>
-        </p:style>
-        <p:txBody>
-          <a:bodyPr rtlCol="0" anchor="ctr"/>
-          <a:lstStyle/>
-          <a:p>
-            <a:pPr algn="ctr"/>
-          </a:p>
-        </p:txBody>
-      </p:sp>
-      <p:sp>
-        <p:nvSpPr>
-          <p:cNvPr id="14" name="Rectangle 13"/>
-          <p:cNvSpPr/>
-          <p:nvPr/>
-        </p:nvSpPr>
-        <p:spPr>
-          <a:xfrm>
-            <a:off x="6272784" y="1975104"/>
-            <a:ext cx="73152" cy="1664208"/>
-          </a:xfrm>
-          <a:prstGeom prst="rect">
-            <a:avLst/>
-          </a:prstGeom>
-          <a:solidFill>
-            <a:srgbClr val="E8792E"/>
-          </a:solidFill>
-          <a:ln w="12700">
-            <a:solidFill>
-              <a:srgbClr val="E8792E"/>
-            </a:solidFill>
-          </a:ln>
-        </p:spPr>
-        <p:style>
-          <a:lnRef idx="1">
-            <a:schemeClr val="accent1"/>
-          </a:lnRef>
-          <a:fillRef idx="3">
-            <a:schemeClr val="accent1"/>
-          </a:fillRef>
-          <a:effectRef idx="2">
-            <a:schemeClr val="accent1"/>
-          </a:effectRef>
-          <a:fontRef idx="minor">
-            <a:schemeClr val="lt1"/>
-          </a:fontRef>
-        </p:style>
-        <p:txBody>
-          <a:bodyPr rtlCol="0" anchor="ctr"/>
-          <a:lstStyle/>
-          <a:p>
-            <a:pPr algn="ctr"/>
-          </a:p>
-        </p:txBody>
-      </p:sp>
-      <p:sp>
-        <p:nvSpPr>
-          <p:cNvPr id="15" name="Oval 14"/>
-          <p:cNvSpPr/>
-          <p:nvPr/>
-        </p:nvSpPr>
-        <p:spPr>
-          <a:xfrm>
-            <a:off x="6583680" y="2231136"/>
-            <a:ext cx="402336" cy="402336"/>
-          </a:xfrm>
-          <a:prstGeom prst="ellipse">
-            <a:avLst/>
-          </a:prstGeom>
-          <a:solidFill>
-            <a:srgbClr val="E8792E"/>
-          </a:solidFill>
-          <a:ln>
-            <a:solidFill>
-              <a:srgbClr val="E8792E"/>
-            </a:solidFill>
-          </a:ln>
-        </p:spPr>
-        <p:style>
-          <a:lnRef idx="1">
-            <a:schemeClr val="accent1"/>
-          </a:lnRef>
-          <a:fillRef idx="3">
-            <a:schemeClr val="accent1"/>
-          </a:fillRef>
-          <a:effectRef idx="2">
-            <a:schemeClr val="accent1"/>
-          </a:effectRef>
-          <a:fontRef idx="minor">
-            <a:schemeClr val="lt1"/>
-          </a:fontRef>
-        </p:style>
-        <p:txBody>
-          <a:bodyPr rtlCol="0" anchor="ctr"/>
-          <a:lstStyle/>
-          <a:p>
-            <a:pPr algn="ctr"/>
-          </a:p>
-        </p:txBody>
-      </p:sp>
-      <p:sp>
-        <p:nvSpPr>
-          <p:cNvPr id="16" name="TextBox 15"/>
-          <p:cNvSpPr txBox="1"/>
-          <p:nvPr/>
-        </p:nvSpPr>
-        <p:spPr>
-          <a:xfrm>
-            <a:off x="6583680" y="2249424"/>
-            <a:ext cx="402336" cy="365760"/>
-          </a:xfrm>
-          <a:prstGeom prst="rect">
-            <a:avLst/>
-          </a:prstGeom>
-          <a:noFill/>
-        </p:spPr>
-        <p:txBody>
-          <a:bodyPr wrap="square" lIns="0" rIns="0" tIns="0" bIns="0" anchor="ctr">
-            <a:normAutofit/>
-          </a:bodyPr>
-          <a:lstStyle/>
-          <a:p>
-            <a:pPr algn="ctr">
-              <a:lnSpc>
-                <a:spcPct val="100000"/>
-              </a:lnSpc>
-              <a:spcAft>
-                <a:spcPts val="144"/>
-              </a:spcAft>
-              <a:defRPr sz="1200" b="1">
-                <a:solidFill>
-                  <a:srgbClr val="FFFFFF"/>
-                </a:solidFill>
-                <a:latin typeface="Arial"/>
-              </a:defRPr>
-            </a:pPr>
-            <a:r>
-              <a:t>2</a:t>
-            </a:r>
-          </a:p>
-        </p:txBody>
-      </p:sp>
-      <p:sp>
-        <p:nvSpPr>
-          <p:cNvPr id="17" name="TextBox 16"/>
-          <p:cNvSpPr txBox="1"/>
-          <p:nvPr/>
-        </p:nvSpPr>
-        <p:spPr>
-          <a:xfrm>
-            <a:off x="7205472" y="2231136"/>
-            <a:ext cx="4206240" cy="365760"/>
-          </a:xfrm>
-          <a:prstGeom prst="rect">
-            <a:avLst/>
-          </a:prstGeom>
-          <a:noFill/>
-        </p:spPr>
-        <p:txBody>
-          <a:bodyPr wrap="square" lIns="0" rIns="0" tIns="0" bIns="0" anchor="t">
-            <a:normAutofit/>
-          </a:bodyPr>
-          <a:lstStyle/>
-          <a:p>
-            <a:pPr algn="l">
-              <a:lnSpc>
-                <a:spcPct val="100000"/>
-              </a:lnSpc>
-              <a:spcAft>
-                <a:spcPts val="192"/>
-              </a:spcAft>
-              <a:defRPr sz="1600" b="1">
-                <a:solidFill>
-                  <a:srgbClr val="17324D"/>
-                </a:solidFill>
-                <a:latin typeface="Arial"/>
-              </a:defRPr>
-            </a:pPr>
-            <a:r>
-              <a:t>Las cifras se sostienen</a:t>
-            </a:r>
-          </a:p>
-        </p:txBody>
-      </p:sp>
-      <p:sp>
-        <p:nvSpPr>
-          <p:cNvPr id="18" name="TextBox 17"/>
-          <p:cNvSpPr txBox="1"/>
-          <p:nvPr/>
-        </p:nvSpPr>
-        <p:spPr>
-          <a:xfrm>
-            <a:off x="7205472" y="2761488"/>
-            <a:ext cx="4206240" cy="731520"/>
-          </a:xfrm>
-          <a:prstGeom prst="rect">
-            <a:avLst/>
-          </a:prstGeom>
-          <a:noFill/>
-        </p:spPr>
-        <p:txBody>
-          <a:bodyPr wrap="square" lIns="0" rIns="0" tIns="0" bIns="0" anchor="t">
-            <a:normAutofit/>
-          </a:bodyPr>
-          <a:lstStyle/>
-          <a:p>
-            <a:pPr algn="l">
-              <a:lnSpc>
-                <a:spcPct val="100000"/>
-              </a:lnSpc>
-              <a:spcAft>
-                <a:spcPts val="126"/>
-              </a:spcAft>
-              <a:defRPr sz="1050" b="0">
-                <a:solidFill>
-                  <a:srgbClr val="3F556A"/>
-                </a:solidFill>
-                <a:latin typeface="Arial"/>
-              </a:defRPr>
-            </a:pPr>
-            <a:r>
-              <a:t>Los KPIs se cruzan con el worklog real de Jira. Lo medido se distingue de lo estimado, y lo que no se sostiene no se publica.</a:t>
-            </a:r>
-          </a:p>
-        </p:txBody>
-      </p:sp>
-      <p:sp>
-        <p:nvSpPr>
-          <p:cNvPr id="19" name="Rounded Rectangle 18"/>
-          <p:cNvSpPr/>
-          <p:nvPr/>
-        </p:nvSpPr>
-        <p:spPr>
-          <a:xfrm>
-            <a:off x="566928" y="3858768"/>
-            <a:ext cx="5358384" cy="1664208"/>
-          </a:xfrm>
-          <a:prstGeom prst="roundRect">
-            <a:avLst/>
-          </a:prstGeom>
-          <a:solidFill>
-            <a:srgbClr val="FFFFFF"/>
-          </a:solidFill>
-          <a:ln w="12700">
-            <a:solidFill>
-              <a:srgbClr val="D7DEE3"/>
-            </a:solidFill>
-          </a:ln>
-        </p:spPr>
-        <p:style>
-          <a:lnRef idx="1">
-            <a:schemeClr val="accent1"/>
-          </a:lnRef>
-          <a:fillRef idx="3">
-            <a:schemeClr val="accent1"/>
-          </a:fillRef>
-          <a:effectRef idx="2">
-            <a:schemeClr val="accent1"/>
-          </a:effectRef>
-          <a:fontRef idx="minor">
-            <a:schemeClr val="lt1"/>
-          </a:fontRef>
-        </p:style>
-        <p:txBody>
-          <a:bodyPr rtlCol="0" anchor="ctr"/>
-          <a:lstStyle/>
-          <a:p>
-            <a:pPr algn="ctr"/>
-          </a:p>
-        </p:txBody>
-      </p:sp>
-      <p:sp>
-        <p:nvSpPr>
-          <p:cNvPr id="20" name="Rectangle 19"/>
-          <p:cNvSpPr/>
-          <p:nvPr/>
-        </p:nvSpPr>
-        <p:spPr>
-          <a:xfrm>
-            <a:off x="566928" y="3858768"/>
-            <a:ext cx="73152" cy="1664208"/>
-          </a:xfrm>
-          <a:prstGeom prst="rect">
-            <a:avLst/>
-          </a:prstGeom>
-          <a:solidFill>
-            <a:srgbClr val="008F83"/>
-          </a:solidFill>
-          <a:ln w="12700">
-            <a:solidFill>
-              <a:srgbClr val="008F83"/>
-            </a:solidFill>
-          </a:ln>
-        </p:spPr>
-        <p:style>
-          <a:lnRef idx="1">
-            <a:schemeClr val="accent1"/>
-          </a:lnRef>
-          <a:fillRef idx="3">
-            <a:schemeClr val="accent1"/>
-          </a:fillRef>
-          <a:effectRef idx="2">
-            <a:schemeClr val="accent1"/>
-          </a:effectRef>
-          <a:fontRef idx="minor">
-            <a:schemeClr val="lt1"/>
-          </a:fontRef>
-        </p:style>
-        <p:txBody>
-          <a:bodyPr rtlCol="0" anchor="ctr"/>
-          <a:lstStyle/>
-          <a:p>
-            <a:pPr algn="ctr"/>
-          </a:p>
-        </p:txBody>
-      </p:sp>
-      <p:sp>
-        <p:nvSpPr>
-          <p:cNvPr id="21" name="Oval 20"/>
-          <p:cNvSpPr/>
-          <p:nvPr/>
-        </p:nvSpPr>
-        <p:spPr>
-          <a:xfrm>
-            <a:off x="877824" y="4114800"/>
-            <a:ext cx="402336" cy="402336"/>
-          </a:xfrm>
-          <a:prstGeom prst="ellipse">
-            <a:avLst/>
-          </a:prstGeom>
-          <a:solidFill>
-            <a:srgbClr val="008F83"/>
-          </a:solidFill>
-          <a:ln>
-            <a:solidFill>
-              <a:srgbClr val="008F83"/>
-            </a:solidFill>
-          </a:ln>
-        </p:spPr>
-        <p:style>
-          <a:lnRef idx="1">
-            <a:schemeClr val="accent1"/>
-          </a:lnRef>
-          <a:fillRef idx="3">
-            <a:schemeClr val="accent1"/>
-          </a:fillRef>
-          <a:effectRef idx="2">
-            <a:schemeClr val="accent1"/>
-          </a:effectRef>
-          <a:fontRef idx="minor">
-            <a:schemeClr val="lt1"/>
-          </a:fontRef>
-        </p:style>
-        <p:txBody>
-          <a:bodyPr rtlCol="0" anchor="ctr"/>
-          <a:lstStyle/>
-          <a:p>
-            <a:pPr algn="ctr"/>
-          </a:p>
-        </p:txBody>
-      </p:sp>
-      <p:sp>
-        <p:nvSpPr>
-          <p:cNvPr id="22" name="TextBox 21"/>
-          <p:cNvSpPr txBox="1"/>
-          <p:nvPr/>
-        </p:nvSpPr>
-        <p:spPr>
-          <a:xfrm>
-            <a:off x="877824" y="4133088"/>
-            <a:ext cx="402336" cy="365760"/>
-          </a:xfrm>
-          <a:prstGeom prst="rect">
-            <a:avLst/>
-          </a:prstGeom>
-          <a:noFill/>
-        </p:spPr>
-        <p:txBody>
-          <a:bodyPr wrap="square" lIns="0" rIns="0" tIns="0" bIns="0" anchor="ctr">
-            <a:normAutofit/>
-          </a:bodyPr>
-          <a:lstStyle/>
-          <a:p>
-            <a:pPr algn="ctr">
-              <a:lnSpc>
-                <a:spcPct val="100000"/>
-              </a:lnSpc>
-              <a:spcAft>
-                <a:spcPts val="144"/>
-              </a:spcAft>
-              <a:defRPr sz="1200" b="1">
-                <a:solidFill>
-                  <a:srgbClr val="FFFFFF"/>
-                </a:solidFill>
-                <a:latin typeface="Arial"/>
-              </a:defRPr>
-            </a:pPr>
-            <a:r>
-              <a:t>3</a:t>
-            </a:r>
-          </a:p>
-        </p:txBody>
-      </p:sp>
-      <p:sp>
-        <p:nvSpPr>
-          <p:cNvPr id="23" name="TextBox 22"/>
-          <p:cNvSpPr txBox="1"/>
-          <p:nvPr/>
-        </p:nvSpPr>
-        <p:spPr>
-          <a:xfrm>
-            <a:off x="1499616" y="4114800"/>
-            <a:ext cx="4206240" cy="365760"/>
-          </a:xfrm>
-          <a:prstGeom prst="rect">
-            <a:avLst/>
-          </a:prstGeom>
-          <a:noFill/>
-        </p:spPr>
-        <p:txBody>
-          <a:bodyPr wrap="square" lIns="0" rIns="0" tIns="0" bIns="0" anchor="t">
-            <a:normAutofit/>
-          </a:bodyPr>
-          <a:lstStyle/>
-          <a:p>
-            <a:pPr algn="l">
-              <a:lnSpc>
-                <a:spcPct val="100000"/>
-              </a:lnSpc>
-              <a:spcAft>
-                <a:spcPts val="192"/>
-              </a:spcAft>
-              <a:defRPr sz="1600" b="1">
-                <a:solidFill>
-                  <a:srgbClr val="17324D"/>
-                </a:solidFill>
-                <a:latin typeface="Arial"/>
-              </a:defRPr>
-            </a:pPr>
-            <a:r>
-              <a:t>El método se vigila solo</a:t>
-            </a:r>
-          </a:p>
-        </p:txBody>
-      </p:sp>
-      <p:sp>
-        <p:nvSpPr>
-          <p:cNvPr id="24" name="TextBox 23"/>
-          <p:cNvSpPr txBox="1"/>
-          <p:nvPr/>
-        </p:nvSpPr>
-        <p:spPr>
-          <a:xfrm>
-            <a:off x="1499616" y="4645152"/>
-            <a:ext cx="4206240" cy="731520"/>
-          </a:xfrm>
-          <a:prstGeom prst="rect">
-            <a:avLst/>
-          </a:prstGeom>
-          <a:noFill/>
-        </p:spPr>
-        <p:txBody>
-          <a:bodyPr wrap="square" lIns="0" rIns="0" tIns="0" bIns="0" anchor="t">
-            <a:normAutofit/>
-          </a:bodyPr>
-          <a:lstStyle/>
-          <a:p>
-            <a:pPr algn="l">
-              <a:lnSpc>
-                <a:spcPct val="100000"/>
-              </a:lnSpc>
-              <a:spcAft>
-                <a:spcPts val="126"/>
-              </a:spcAft>
-              <a:defRPr sz="1050" b="0">
-                <a:solidFill>
-                  <a:srgbClr val="3F556A"/>
-                </a:solidFill>
-                <a:latin typeface="Arial"/>
-              </a:defRPr>
-            </a:pPr>
-            <a:r>
-              <a:t>Doce controles en cada cambio impiden que se degrade en silencio. Antes dependía de que alguien se acordara de revisarlo.</a:t>
-            </a:r>
-          </a:p>
-        </p:txBody>
-      </p:sp>
-      <p:sp>
-        <p:nvSpPr>
-          <p:cNvPr id="25" name="Rounded Rectangle 24"/>
-          <p:cNvSpPr/>
-          <p:nvPr/>
-        </p:nvSpPr>
-        <p:spPr>
-          <a:xfrm>
-            <a:off x="6272784" y="3858768"/>
-            <a:ext cx="5358384" cy="1664208"/>
-          </a:xfrm>
-          <a:prstGeom prst="roundRect">
-            <a:avLst/>
-          </a:prstGeom>
-          <a:solidFill>
-            <a:srgbClr val="FFFFFF"/>
-          </a:solidFill>
-          <a:ln w="12700">
-            <a:solidFill>
-              <a:srgbClr val="D7DEE3"/>
-            </a:solidFill>
-          </a:ln>
-        </p:spPr>
-        <p:style>
-          <a:lnRef idx="1">
-            <a:schemeClr val="accent1"/>
-          </a:lnRef>
-          <a:fillRef idx="3">
-            <a:schemeClr val="accent1"/>
-          </a:fillRef>
-          <a:effectRef idx="2">
-            <a:schemeClr val="accent1"/>
-          </a:effectRef>
-          <a:fontRef idx="minor">
-            <a:schemeClr val="lt1"/>
-          </a:fontRef>
-        </p:style>
-        <p:txBody>
-          <a:bodyPr rtlCol="0" anchor="ctr"/>
-          <a:lstStyle/>
-          <a:p>
-            <a:pPr algn="ctr"/>
-          </a:p>
-        </p:txBody>
-      </p:sp>
-      <p:sp>
-        <p:nvSpPr>
-          <p:cNvPr id="26" name="Rectangle 25"/>
-          <p:cNvSpPr/>
-          <p:nvPr/>
-        </p:nvSpPr>
-        <p:spPr>
-          <a:xfrm>
-            <a:off x="6272784" y="3858768"/>
-            <a:ext cx="73152" cy="1664208"/>
-          </a:xfrm>
-          <a:prstGeom prst="rect">
-            <a:avLst/>
-          </a:prstGeom>
-          <a:solidFill>
-            <a:srgbClr val="16A9C7"/>
-          </a:solidFill>
-          <a:ln w="12700">
-            <a:solidFill>
-              <a:srgbClr val="16A9C7"/>
-            </a:solidFill>
-          </a:ln>
-        </p:spPr>
-        <p:style>
-          <a:lnRef idx="1">
-            <a:schemeClr val="accent1"/>
-          </a:lnRef>
-          <a:fillRef idx="3">
-            <a:schemeClr val="accent1"/>
-          </a:fillRef>
-          <a:effectRef idx="2">
-            <a:schemeClr val="accent1"/>
-          </a:effectRef>
-          <a:fontRef idx="minor">
-            <a:schemeClr val="lt1"/>
-          </a:fontRef>
-        </p:style>
-        <p:txBody>
-          <a:bodyPr rtlCol="0" anchor="ctr"/>
-          <a:lstStyle/>
-          <a:p>
-            <a:pPr algn="ctr"/>
-          </a:p>
-        </p:txBody>
-      </p:sp>
-      <p:sp>
-        <p:nvSpPr>
-          <p:cNvPr id="27" name="Oval 26"/>
-          <p:cNvSpPr/>
-          <p:nvPr/>
-        </p:nvSpPr>
-        <p:spPr>
-          <a:xfrm>
-            <a:off x="6583680" y="4114800"/>
-            <a:ext cx="402336" cy="402336"/>
-          </a:xfrm>
-          <a:prstGeom prst="ellipse">
-            <a:avLst/>
-          </a:prstGeom>
-          <a:solidFill>
-            <a:srgbClr val="16A9C7"/>
-          </a:solidFill>
-          <a:ln>
-            <a:solidFill>
-              <a:srgbClr val="16A9C7"/>
-            </a:solidFill>
-          </a:ln>
-        </p:spPr>
-        <p:style>
-          <a:lnRef idx="1">
-            <a:schemeClr val="accent1"/>
-          </a:lnRef>
-          <a:fillRef idx="3">
-            <a:schemeClr val="accent1"/>
-          </a:fillRef>
-          <a:effectRef idx="2">
-            <a:schemeClr val="accent1"/>
-          </a:effectRef>
-          <a:fontRef idx="minor">
-            <a:schemeClr val="lt1"/>
-          </a:fontRef>
-        </p:style>
-        <p:txBody>
-          <a:bodyPr rtlCol="0" anchor="ctr"/>
-          <a:lstStyle/>
-          <a:p>
-            <a:pPr algn="ctr"/>
-          </a:p>
-        </p:txBody>
-      </p:sp>
-      <p:sp>
-        <p:nvSpPr>
-          <p:cNvPr id="28" name="TextBox 27"/>
-          <p:cNvSpPr txBox="1"/>
-          <p:nvPr/>
-        </p:nvSpPr>
-        <p:spPr>
-          <a:xfrm>
-            <a:off x="6583680" y="4133088"/>
-            <a:ext cx="402336" cy="365760"/>
-          </a:xfrm>
-          <a:prstGeom prst="rect">
-            <a:avLst/>
-          </a:prstGeom>
-          <a:noFill/>
-        </p:spPr>
-        <p:txBody>
-          <a:bodyPr wrap="square" lIns="0" rIns="0" tIns="0" bIns="0" anchor="ctr">
-            <a:normAutofit/>
-          </a:bodyPr>
-          <a:lstStyle/>
-          <a:p>
-            <a:pPr algn="ctr">
-              <a:lnSpc>
-                <a:spcPct val="100000"/>
-              </a:lnSpc>
-              <a:spcAft>
-                <a:spcPts val="144"/>
-              </a:spcAft>
-              <a:defRPr sz="1200" b="1">
-                <a:solidFill>
-                  <a:srgbClr val="FFFFFF"/>
-                </a:solidFill>
-                <a:latin typeface="Arial"/>
-              </a:defRPr>
-            </a:pPr>
-            <a:r>
-              <a:t>4</a:t>
-            </a:r>
-          </a:p>
-        </p:txBody>
-      </p:sp>
-      <p:sp>
-        <p:nvSpPr>
-          <p:cNvPr id="29" name="TextBox 28"/>
-          <p:cNvSpPr txBox="1"/>
-          <p:nvPr/>
-        </p:nvSpPr>
-        <p:spPr>
-          <a:xfrm>
-            <a:off x="7205472" y="4114800"/>
-            <a:ext cx="4206240" cy="365760"/>
-          </a:xfrm>
-          <a:prstGeom prst="rect">
-            <a:avLst/>
-          </a:prstGeom>
-          <a:noFill/>
-        </p:spPr>
-        <p:txBody>
-          <a:bodyPr wrap="square" lIns="0" rIns="0" tIns="0" bIns="0" anchor="t">
-            <a:normAutofit/>
-          </a:bodyPr>
-          <a:lstStyle/>
-          <a:p>
-            <a:pPr algn="l">
-              <a:lnSpc>
-                <a:spcPct val="100000"/>
-              </a:lnSpc>
-              <a:spcAft>
-                <a:spcPts val="192"/>
-              </a:spcAft>
-              <a:defRPr sz="1600" b="1">
-                <a:solidFill>
-                  <a:srgbClr val="17324D"/>
-                </a:solidFill>
-                <a:latin typeface="Arial"/>
-              </a:defRPr>
-            </a:pPr>
-            <a:r>
-              <a:t>Escala sin reescribirse</a:t>
-            </a:r>
-          </a:p>
-        </p:txBody>
-      </p:sp>
-      <p:sp>
-        <p:nvSpPr>
-          <p:cNvPr id="30" name="TextBox 29"/>
-          <p:cNvSpPr txBox="1"/>
-          <p:nvPr/>
-        </p:nvSpPr>
-        <p:spPr>
-          <a:xfrm>
-            <a:off x="7205472" y="4645152"/>
-            <a:ext cx="4206240" cy="731520"/>
-          </a:xfrm>
-          <a:prstGeom prst="rect">
-            <a:avLst/>
-          </a:prstGeom>
-          <a:noFill/>
-        </p:spPr>
-        <p:txBody>
-          <a:bodyPr wrap="square" lIns="0" rIns="0" tIns="0" bIns="0" anchor="t">
-            <a:normAutofit/>
-          </a:bodyPr>
-          <a:lstStyle/>
-          <a:p>
-            <a:pPr algn="l">
-              <a:lnSpc>
-                <a:spcPct val="100000"/>
-              </a:lnSpc>
-              <a:spcAft>
-                <a:spcPts val="126"/>
-              </a:spcAft>
-              <a:defRPr sz="1050" b="0">
-                <a:solidFill>
-                  <a:srgbClr val="3F556A"/>
-                </a:solidFill>
-                <a:latin typeface="Arial"/>
-              </a:defRPr>
-            </a:pPr>
-            <a:r>
-              <a:t>Funciona con uno o con varios repositorios, con varias personas a la vez y en tres herramientas distintas de IA.</a:t>
-            </a:r>
-          </a:p>
-        </p:txBody>
-      </p:sp>
-      <p:sp>
-        <p:nvSpPr>
-          <p:cNvPr id="31" name="Rounded Rectangle 30"/>
-          <p:cNvSpPr/>
-          <p:nvPr/>
-        </p:nvSpPr>
-        <p:spPr>
-          <a:xfrm>
-            <a:off x="566928" y="5797296"/>
-            <a:ext cx="11064240" cy="548640"/>
-          </a:xfrm>
-          <a:prstGeom prst="roundRect">
-            <a:avLst/>
-          </a:prstGeom>
-          <a:solidFill>
-            <a:srgbClr val="FCE9DC"/>
-          </a:solidFill>
-          <a:ln w="12700">
-            <a:solidFill>
-              <a:srgbClr val="FCE9DC"/>
-            </a:solidFill>
-          </a:ln>
-        </p:spPr>
-        <p:style>
-          <a:lnRef idx="1">
-            <a:schemeClr val="accent1"/>
-          </a:lnRef>
-          <a:fillRef idx="3">
-            <a:schemeClr val="accent1"/>
-          </a:fillRef>
-          <a:effectRef idx="2">
-            <a:schemeClr val="accent1"/>
-          </a:effectRef>
-          <a:fontRef idx="minor">
-            <a:schemeClr val="lt1"/>
-          </a:fontRef>
-        </p:style>
-        <p:txBody>
-          <a:bodyPr rtlCol="0" anchor="ctr"/>
-          <a:lstStyle/>
-          <a:p>
-            <a:pPr algn="ctr"/>
-          </a:p>
-        </p:txBody>
-      </p:sp>
-      <p:sp>
-        <p:nvSpPr>
-          <p:cNvPr id="32" name="TextBox 31"/>
-          <p:cNvSpPr txBox="1"/>
-          <p:nvPr/>
-        </p:nvSpPr>
-        <p:spPr>
-          <a:xfrm>
-            <a:off x="841248" y="5907024"/>
-            <a:ext cx="10515600" cy="310896"/>
-          </a:xfrm>
-          <a:prstGeom prst="rect">
-            <a:avLst/>
-          </a:prstGeom>
-          <a:noFill/>
-        </p:spPr>
-        <p:txBody>
-          <a:bodyPr wrap="square" lIns="0" rIns="0" tIns="0" bIns="0" anchor="ctr">
-            <a:normAutofit/>
-          </a:bodyPr>
-          <a:lstStyle/>
-          <a:p>
-            <a:pPr algn="ctr">
-              <a:lnSpc>
-                <a:spcPct val="100000"/>
-              </a:lnSpc>
-              <a:spcAft>
-                <a:spcPts val="144"/>
-              </a:spcAft>
-              <a:defRPr sz="1200" b="1">
-                <a:solidFill>
-                  <a:srgbClr val="17324D"/>
-                </a:solidFill>
-                <a:latin typeface="Arial"/>
-              </a:defRPr>
-            </a:pPr>
-            <a:r>
-              <a:t>En una línea  ·  El método sabía construir software sin desviarse de lo pedido. Ahora también sabe demostrarlo.</a:t>
-            </a:r>
-          </a:p>
-        </p:txBody>
-      </p:sp>
-      <p:sp>
-        <p:nvSpPr>
-          <p:cNvPr id="33" name="TextBox 32"/>
+              <a:t>Valoración del equipo, no una medición: lo que cuenta es el tramo ámbar. Donde no hay tramo azul no es que el método fallara, es que eso no entraba en lo que se propuso resolver.</a:t>
+            </a:r>
+          </a:p>
+        </p:txBody>
+      </p:sp>
+      <p:sp>
+        <p:nvSpPr>
+          <p:cNvPr id="41" name="TextBox 40"/>
           <p:cNvSpPr txBox="1"/>
           <p:nvPr/>
         </p:nvSpPr>
@@ -9632,7 +9987,7 @@
       </p:sp>
       <p:sp>
         <p:nvSpPr>
-          <p:cNvPr id="34" name="TextBox 33"/>
+          <p:cNvPr id="42" name="TextBox 41"/>
           <p:cNvSpPr txBox="1"/>
           <p:nvPr/>
         </p:nvSpPr>
@@ -9667,7 +10022,7 @@
               </a:defRPr>
             </a:pPr>
             <a:r>
-              <a:t>04 / 05</a:t>
+              <a:t>04 / 06</a:t>
             </a:r>
           </a:p>
         </p:txBody>
@@ -9772,7 +10127,7 @@
               </a:defRPr>
             </a:pPr>
             <a:r>
-              <a:t>DÓNDE ESTAMOS</a:t>
+              <a:t>LO QUE CAMBIA</a:t>
             </a:r>
           </a:p>
         </p:txBody>
@@ -9814,7 +10169,7 @@
               </a:defRPr>
             </a:pPr>
             <a:r>
-              <a:t>Está en uso, se instala en un comando y sigue creciendo</a:t>
+              <a:t>Cuatro cosas que antes no podíamos hacer delante de un cliente</a:t>
             </a:r>
           </a:p>
         </p:txBody>
@@ -9856,7 +10211,7 @@
               </a:defRPr>
             </a:pPr>
             <a:r>
-              <a:t>No es un piloto ni una prueba de concepto: está publicado, versionado y funcionando en proyecto.</a:t>
+              <a:t>El método terminaba en el código validado. Ahora llega hasta lo que el cliente firma y la cifra con la que nos juzga.</a:t>
             </a:r>
           </a:p>
         </p:txBody>
@@ -9912,8 +10267,8 @@
         </p:nvSpPr>
         <p:spPr>
           <a:xfrm>
-            <a:off x="566928" y="1956816"/>
-            <a:ext cx="3529584" cy="2048256"/>
+            <a:off x="566928" y="1975104"/>
+            <a:ext cx="5358384" cy="1664208"/>
           </a:xfrm>
           <a:prstGeom prst="roundRect">
             <a:avLst/>
@@ -9957,8 +10312,530 @@
         </p:nvSpPr>
         <p:spPr>
           <a:xfrm>
-            <a:off x="566928" y="1956816"/>
-            <a:ext cx="3529584" cy="73152"/>
+            <a:off x="566928" y="1975104"/>
+            <a:ext cx="73152" cy="1664208"/>
+          </a:xfrm>
+          <a:prstGeom prst="rect">
+            <a:avLst/>
+          </a:prstGeom>
+          <a:solidFill>
+            <a:srgbClr val="0072BC"/>
+          </a:solidFill>
+          <a:ln w="12700">
+            <a:solidFill>
+              <a:srgbClr val="0072BC"/>
+            </a:solidFill>
+          </a:ln>
+        </p:spPr>
+        <p:style>
+          <a:lnRef idx="1">
+            <a:schemeClr val="accent1"/>
+          </a:lnRef>
+          <a:fillRef idx="3">
+            <a:schemeClr val="accent1"/>
+          </a:fillRef>
+          <a:effectRef idx="2">
+            <a:schemeClr val="accent1"/>
+          </a:effectRef>
+          <a:fontRef idx="minor">
+            <a:schemeClr val="lt1"/>
+          </a:fontRef>
+        </p:style>
+        <p:txBody>
+          <a:bodyPr rtlCol="0" anchor="ctr"/>
+          <a:lstStyle/>
+          <a:p>
+            <a:pPr algn="ctr"/>
+          </a:p>
+        </p:txBody>
+      </p:sp>
+      <p:sp>
+        <p:nvSpPr>
+          <p:cNvPr id="9" name="Oval 8"/>
+          <p:cNvSpPr/>
+          <p:nvPr/>
+        </p:nvSpPr>
+        <p:spPr>
+          <a:xfrm>
+            <a:off x="877824" y="2231136"/>
+            <a:ext cx="402336" cy="402336"/>
+          </a:xfrm>
+          <a:prstGeom prst="ellipse">
+            <a:avLst/>
+          </a:prstGeom>
+          <a:solidFill>
+            <a:srgbClr val="0072BC"/>
+          </a:solidFill>
+          <a:ln>
+            <a:solidFill>
+              <a:srgbClr val="0072BC"/>
+            </a:solidFill>
+          </a:ln>
+        </p:spPr>
+        <p:style>
+          <a:lnRef idx="1">
+            <a:schemeClr val="accent1"/>
+          </a:lnRef>
+          <a:fillRef idx="3">
+            <a:schemeClr val="accent1"/>
+          </a:fillRef>
+          <a:effectRef idx="2">
+            <a:schemeClr val="accent1"/>
+          </a:effectRef>
+          <a:fontRef idx="minor">
+            <a:schemeClr val="lt1"/>
+          </a:fontRef>
+        </p:style>
+        <p:txBody>
+          <a:bodyPr rtlCol="0" anchor="ctr"/>
+          <a:lstStyle/>
+          <a:p>
+            <a:pPr algn="ctr"/>
+          </a:p>
+        </p:txBody>
+      </p:sp>
+      <p:sp>
+        <p:nvSpPr>
+          <p:cNvPr id="10" name="TextBox 9"/>
+          <p:cNvSpPr txBox="1"/>
+          <p:nvPr/>
+        </p:nvSpPr>
+        <p:spPr>
+          <a:xfrm>
+            <a:off x="877824" y="2249424"/>
+            <a:ext cx="402336" cy="365760"/>
+          </a:xfrm>
+          <a:prstGeom prst="rect">
+            <a:avLst/>
+          </a:prstGeom>
+          <a:noFill/>
+        </p:spPr>
+        <p:txBody>
+          <a:bodyPr wrap="square" lIns="0" rIns="0" tIns="0" bIns="0" anchor="ctr">
+            <a:normAutofit/>
+          </a:bodyPr>
+          <a:lstStyle/>
+          <a:p>
+            <a:pPr algn="ctr">
+              <a:lnSpc>
+                <a:spcPct val="100000"/>
+              </a:lnSpc>
+              <a:spcAft>
+                <a:spcPts val="144"/>
+              </a:spcAft>
+              <a:defRPr sz="1200" b="1">
+                <a:solidFill>
+                  <a:srgbClr val="FFFFFF"/>
+                </a:solidFill>
+                <a:latin typeface="Arial"/>
+              </a:defRPr>
+            </a:pPr>
+            <a:r>
+              <a:t>1</a:t>
+            </a:r>
+          </a:p>
+        </p:txBody>
+      </p:sp>
+      <p:sp>
+        <p:nvSpPr>
+          <p:cNvPr id="11" name="TextBox 10"/>
+          <p:cNvSpPr txBox="1"/>
+          <p:nvPr/>
+        </p:nvSpPr>
+        <p:spPr>
+          <a:xfrm>
+            <a:off x="1499616" y="2231136"/>
+            <a:ext cx="4206240" cy="365760"/>
+          </a:xfrm>
+          <a:prstGeom prst="rect">
+            <a:avLst/>
+          </a:prstGeom>
+          <a:noFill/>
+        </p:spPr>
+        <p:txBody>
+          <a:bodyPr wrap="square" lIns="0" rIns="0" tIns="0" bIns="0" anchor="t">
+            <a:normAutofit/>
+          </a:bodyPr>
+          <a:lstStyle/>
+          <a:p>
+            <a:pPr algn="l">
+              <a:lnSpc>
+                <a:spcPct val="100000"/>
+              </a:lnSpc>
+              <a:spcAft>
+                <a:spcPts val="192"/>
+              </a:spcAft>
+              <a:defRPr sz="1600" b="1">
+                <a:solidFill>
+                  <a:srgbClr val="17324D"/>
+                </a:solidFill>
+                <a:latin typeface="Arial"/>
+              </a:defRPr>
+            </a:pPr>
+            <a:r>
+              <a:t>El cliente firma</a:t>
+            </a:r>
+          </a:p>
+        </p:txBody>
+      </p:sp>
+      <p:sp>
+        <p:nvSpPr>
+          <p:cNvPr id="12" name="TextBox 11"/>
+          <p:cNvSpPr txBox="1"/>
+          <p:nvPr/>
+        </p:nvSpPr>
+        <p:spPr>
+          <a:xfrm>
+            <a:off x="1499616" y="2761488"/>
+            <a:ext cx="4206240" cy="731520"/>
+          </a:xfrm>
+          <a:prstGeom prst="rect">
+            <a:avLst/>
+          </a:prstGeom>
+          <a:noFill/>
+        </p:spPr>
+        <p:txBody>
+          <a:bodyPr wrap="square" lIns="0" rIns="0" tIns="0" bIns="0" anchor="t">
+            <a:normAutofit/>
+          </a:bodyPr>
+          <a:lstStyle/>
+          <a:p>
+            <a:pPr algn="l">
+              <a:lnSpc>
+                <a:spcPct val="100000"/>
+              </a:lnSpc>
+              <a:spcAft>
+                <a:spcPts val="126"/>
+              </a:spcAft>
+              <a:defRPr sz="1050" b="0">
+                <a:solidFill>
+                  <a:srgbClr val="3F556A"/>
+                </a:solidFill>
+                <a:latin typeface="Arial"/>
+              </a:defRPr>
+            </a:pPr>
+            <a:r>
+              <a:t>El diseño funcional, el plan de pruebas y el de sprints se generan desde la misma fuente que el código. Antes se hacían a mano en Word y Excel.</a:t>
+            </a:r>
+          </a:p>
+        </p:txBody>
+      </p:sp>
+      <p:sp>
+        <p:nvSpPr>
+          <p:cNvPr id="13" name="Rounded Rectangle 12"/>
+          <p:cNvSpPr/>
+          <p:nvPr/>
+        </p:nvSpPr>
+        <p:spPr>
+          <a:xfrm>
+            <a:off x="6272784" y="1975104"/>
+            <a:ext cx="5358384" cy="1664208"/>
+          </a:xfrm>
+          <a:prstGeom prst="roundRect">
+            <a:avLst/>
+          </a:prstGeom>
+          <a:solidFill>
+            <a:srgbClr val="FFFFFF"/>
+          </a:solidFill>
+          <a:ln w="12700">
+            <a:solidFill>
+              <a:srgbClr val="D7DEE3"/>
+            </a:solidFill>
+          </a:ln>
+        </p:spPr>
+        <p:style>
+          <a:lnRef idx="1">
+            <a:schemeClr val="accent1"/>
+          </a:lnRef>
+          <a:fillRef idx="3">
+            <a:schemeClr val="accent1"/>
+          </a:fillRef>
+          <a:effectRef idx="2">
+            <a:schemeClr val="accent1"/>
+          </a:effectRef>
+          <a:fontRef idx="minor">
+            <a:schemeClr val="lt1"/>
+          </a:fontRef>
+        </p:style>
+        <p:txBody>
+          <a:bodyPr rtlCol="0" anchor="ctr"/>
+          <a:lstStyle/>
+          <a:p>
+            <a:pPr algn="ctr"/>
+          </a:p>
+        </p:txBody>
+      </p:sp>
+      <p:sp>
+        <p:nvSpPr>
+          <p:cNvPr id="14" name="Rectangle 13"/>
+          <p:cNvSpPr/>
+          <p:nvPr/>
+        </p:nvSpPr>
+        <p:spPr>
+          <a:xfrm>
+            <a:off x="6272784" y="1975104"/>
+            <a:ext cx="73152" cy="1664208"/>
+          </a:xfrm>
+          <a:prstGeom prst="rect">
+            <a:avLst/>
+          </a:prstGeom>
+          <a:solidFill>
+            <a:srgbClr val="E8792E"/>
+          </a:solidFill>
+          <a:ln w="12700">
+            <a:solidFill>
+              <a:srgbClr val="E8792E"/>
+            </a:solidFill>
+          </a:ln>
+        </p:spPr>
+        <p:style>
+          <a:lnRef idx="1">
+            <a:schemeClr val="accent1"/>
+          </a:lnRef>
+          <a:fillRef idx="3">
+            <a:schemeClr val="accent1"/>
+          </a:fillRef>
+          <a:effectRef idx="2">
+            <a:schemeClr val="accent1"/>
+          </a:effectRef>
+          <a:fontRef idx="minor">
+            <a:schemeClr val="lt1"/>
+          </a:fontRef>
+        </p:style>
+        <p:txBody>
+          <a:bodyPr rtlCol="0" anchor="ctr"/>
+          <a:lstStyle/>
+          <a:p>
+            <a:pPr algn="ctr"/>
+          </a:p>
+        </p:txBody>
+      </p:sp>
+      <p:sp>
+        <p:nvSpPr>
+          <p:cNvPr id="15" name="Oval 14"/>
+          <p:cNvSpPr/>
+          <p:nvPr/>
+        </p:nvSpPr>
+        <p:spPr>
+          <a:xfrm>
+            <a:off x="6583680" y="2231136"/>
+            <a:ext cx="402336" cy="402336"/>
+          </a:xfrm>
+          <a:prstGeom prst="ellipse">
+            <a:avLst/>
+          </a:prstGeom>
+          <a:solidFill>
+            <a:srgbClr val="E8792E"/>
+          </a:solidFill>
+          <a:ln>
+            <a:solidFill>
+              <a:srgbClr val="E8792E"/>
+            </a:solidFill>
+          </a:ln>
+        </p:spPr>
+        <p:style>
+          <a:lnRef idx="1">
+            <a:schemeClr val="accent1"/>
+          </a:lnRef>
+          <a:fillRef idx="3">
+            <a:schemeClr val="accent1"/>
+          </a:fillRef>
+          <a:effectRef idx="2">
+            <a:schemeClr val="accent1"/>
+          </a:effectRef>
+          <a:fontRef idx="minor">
+            <a:schemeClr val="lt1"/>
+          </a:fontRef>
+        </p:style>
+        <p:txBody>
+          <a:bodyPr rtlCol="0" anchor="ctr"/>
+          <a:lstStyle/>
+          <a:p>
+            <a:pPr algn="ctr"/>
+          </a:p>
+        </p:txBody>
+      </p:sp>
+      <p:sp>
+        <p:nvSpPr>
+          <p:cNvPr id="16" name="TextBox 15"/>
+          <p:cNvSpPr txBox="1"/>
+          <p:nvPr/>
+        </p:nvSpPr>
+        <p:spPr>
+          <a:xfrm>
+            <a:off x="6583680" y="2249424"/>
+            <a:ext cx="402336" cy="365760"/>
+          </a:xfrm>
+          <a:prstGeom prst="rect">
+            <a:avLst/>
+          </a:prstGeom>
+          <a:noFill/>
+        </p:spPr>
+        <p:txBody>
+          <a:bodyPr wrap="square" lIns="0" rIns="0" tIns="0" bIns="0" anchor="ctr">
+            <a:normAutofit/>
+          </a:bodyPr>
+          <a:lstStyle/>
+          <a:p>
+            <a:pPr algn="ctr">
+              <a:lnSpc>
+                <a:spcPct val="100000"/>
+              </a:lnSpc>
+              <a:spcAft>
+                <a:spcPts val="144"/>
+              </a:spcAft>
+              <a:defRPr sz="1200" b="1">
+                <a:solidFill>
+                  <a:srgbClr val="FFFFFF"/>
+                </a:solidFill>
+                <a:latin typeface="Arial"/>
+              </a:defRPr>
+            </a:pPr>
+            <a:r>
+              <a:t>2</a:t>
+            </a:r>
+          </a:p>
+        </p:txBody>
+      </p:sp>
+      <p:sp>
+        <p:nvSpPr>
+          <p:cNvPr id="17" name="TextBox 16"/>
+          <p:cNvSpPr txBox="1"/>
+          <p:nvPr/>
+        </p:nvSpPr>
+        <p:spPr>
+          <a:xfrm>
+            <a:off x="7205472" y="2231136"/>
+            <a:ext cx="4206240" cy="365760"/>
+          </a:xfrm>
+          <a:prstGeom prst="rect">
+            <a:avLst/>
+          </a:prstGeom>
+          <a:noFill/>
+        </p:spPr>
+        <p:txBody>
+          <a:bodyPr wrap="square" lIns="0" rIns="0" tIns="0" bIns="0" anchor="t">
+            <a:normAutofit/>
+          </a:bodyPr>
+          <a:lstStyle/>
+          <a:p>
+            <a:pPr algn="l">
+              <a:lnSpc>
+                <a:spcPct val="100000"/>
+              </a:lnSpc>
+              <a:spcAft>
+                <a:spcPts val="192"/>
+              </a:spcAft>
+              <a:defRPr sz="1600" b="1">
+                <a:solidFill>
+                  <a:srgbClr val="17324D"/>
+                </a:solidFill>
+                <a:latin typeface="Arial"/>
+              </a:defRPr>
+            </a:pPr>
+            <a:r>
+              <a:t>Las cifras se sostienen</a:t>
+            </a:r>
+          </a:p>
+        </p:txBody>
+      </p:sp>
+      <p:sp>
+        <p:nvSpPr>
+          <p:cNvPr id="18" name="TextBox 17"/>
+          <p:cNvSpPr txBox="1"/>
+          <p:nvPr/>
+        </p:nvSpPr>
+        <p:spPr>
+          <a:xfrm>
+            <a:off x="7205472" y="2761488"/>
+            <a:ext cx="4206240" cy="731520"/>
+          </a:xfrm>
+          <a:prstGeom prst="rect">
+            <a:avLst/>
+          </a:prstGeom>
+          <a:noFill/>
+        </p:spPr>
+        <p:txBody>
+          <a:bodyPr wrap="square" lIns="0" rIns="0" tIns="0" bIns="0" anchor="t">
+            <a:normAutofit/>
+          </a:bodyPr>
+          <a:lstStyle/>
+          <a:p>
+            <a:pPr algn="l">
+              <a:lnSpc>
+                <a:spcPct val="100000"/>
+              </a:lnSpc>
+              <a:spcAft>
+                <a:spcPts val="126"/>
+              </a:spcAft>
+              <a:defRPr sz="1050" b="0">
+                <a:solidFill>
+                  <a:srgbClr val="3F556A"/>
+                </a:solidFill>
+                <a:latin typeface="Arial"/>
+              </a:defRPr>
+            </a:pPr>
+            <a:r>
+              <a:t>Los KPIs se cruzan con el worklog real de Jira. Lo medido se distingue de lo estimado, y lo que no se sostiene no se publica.</a:t>
+            </a:r>
+          </a:p>
+        </p:txBody>
+      </p:sp>
+      <p:sp>
+        <p:nvSpPr>
+          <p:cNvPr id="19" name="Rounded Rectangle 18"/>
+          <p:cNvSpPr/>
+          <p:nvPr/>
+        </p:nvSpPr>
+        <p:spPr>
+          <a:xfrm>
+            <a:off x="566928" y="3858768"/>
+            <a:ext cx="5358384" cy="1664208"/>
+          </a:xfrm>
+          <a:prstGeom prst="roundRect">
+            <a:avLst/>
+          </a:prstGeom>
+          <a:solidFill>
+            <a:srgbClr val="FFFFFF"/>
+          </a:solidFill>
+          <a:ln w="12700">
+            <a:solidFill>
+              <a:srgbClr val="D7DEE3"/>
+            </a:solidFill>
+          </a:ln>
+        </p:spPr>
+        <p:style>
+          <a:lnRef idx="1">
+            <a:schemeClr val="accent1"/>
+          </a:lnRef>
+          <a:fillRef idx="3">
+            <a:schemeClr val="accent1"/>
+          </a:fillRef>
+          <a:effectRef idx="2">
+            <a:schemeClr val="accent1"/>
+          </a:effectRef>
+          <a:fontRef idx="minor">
+            <a:schemeClr val="lt1"/>
+          </a:fontRef>
+        </p:style>
+        <p:txBody>
+          <a:bodyPr rtlCol="0" anchor="ctr"/>
+          <a:lstStyle/>
+          <a:p>
+            <a:pPr algn="ctr"/>
+          </a:p>
+        </p:txBody>
+      </p:sp>
+      <p:sp>
+        <p:nvSpPr>
+          <p:cNvPr id="20" name="Rectangle 19"/>
+          <p:cNvSpPr/>
+          <p:nvPr/>
+        </p:nvSpPr>
+        <p:spPr>
+          <a:xfrm>
+            <a:off x="566928" y="3858768"/>
+            <a:ext cx="73152" cy="1664208"/>
           </a:xfrm>
           <a:prstGeom prst="rect">
             <a:avLst/>
@@ -9996,14 +10873,680 @@
       </p:sp>
       <p:sp>
         <p:nvSpPr>
-          <p:cNvPr id="9" name="TextBox 8"/>
+          <p:cNvPr id="21" name="Oval 20"/>
+          <p:cNvSpPr/>
+          <p:nvPr/>
+        </p:nvSpPr>
+        <p:spPr>
+          <a:xfrm>
+            <a:off x="877824" y="4114800"/>
+            <a:ext cx="402336" cy="402336"/>
+          </a:xfrm>
+          <a:prstGeom prst="ellipse">
+            <a:avLst/>
+          </a:prstGeom>
+          <a:solidFill>
+            <a:srgbClr val="008F83"/>
+          </a:solidFill>
+          <a:ln>
+            <a:solidFill>
+              <a:srgbClr val="008F83"/>
+            </a:solidFill>
+          </a:ln>
+        </p:spPr>
+        <p:style>
+          <a:lnRef idx="1">
+            <a:schemeClr val="accent1"/>
+          </a:lnRef>
+          <a:fillRef idx="3">
+            <a:schemeClr val="accent1"/>
+          </a:fillRef>
+          <a:effectRef idx="2">
+            <a:schemeClr val="accent1"/>
+          </a:effectRef>
+          <a:fontRef idx="minor">
+            <a:schemeClr val="lt1"/>
+          </a:fontRef>
+        </p:style>
+        <p:txBody>
+          <a:bodyPr rtlCol="0" anchor="ctr"/>
+          <a:lstStyle/>
+          <a:p>
+            <a:pPr algn="ctr"/>
+          </a:p>
+        </p:txBody>
+      </p:sp>
+      <p:sp>
+        <p:nvSpPr>
+          <p:cNvPr id="22" name="TextBox 21"/>
           <p:cNvSpPr txBox="1"/>
           <p:nvPr/>
         </p:nvSpPr>
         <p:spPr>
           <a:xfrm>
-            <a:off x="822960" y="2212848"/>
-            <a:ext cx="3017520" cy="219456"/>
+            <a:off x="877824" y="4133088"/>
+            <a:ext cx="402336" cy="365760"/>
+          </a:xfrm>
+          <a:prstGeom prst="rect">
+            <a:avLst/>
+          </a:prstGeom>
+          <a:noFill/>
+        </p:spPr>
+        <p:txBody>
+          <a:bodyPr wrap="square" lIns="0" rIns="0" tIns="0" bIns="0" anchor="ctr">
+            <a:normAutofit/>
+          </a:bodyPr>
+          <a:lstStyle/>
+          <a:p>
+            <a:pPr algn="ctr">
+              <a:lnSpc>
+                <a:spcPct val="100000"/>
+              </a:lnSpc>
+              <a:spcAft>
+                <a:spcPts val="144"/>
+              </a:spcAft>
+              <a:defRPr sz="1200" b="1">
+                <a:solidFill>
+                  <a:srgbClr val="FFFFFF"/>
+                </a:solidFill>
+                <a:latin typeface="Arial"/>
+              </a:defRPr>
+            </a:pPr>
+            <a:r>
+              <a:t>3</a:t>
+            </a:r>
+          </a:p>
+        </p:txBody>
+      </p:sp>
+      <p:sp>
+        <p:nvSpPr>
+          <p:cNvPr id="23" name="TextBox 22"/>
+          <p:cNvSpPr txBox="1"/>
+          <p:nvPr/>
+        </p:nvSpPr>
+        <p:spPr>
+          <a:xfrm>
+            <a:off x="1499616" y="4114800"/>
+            <a:ext cx="4206240" cy="365760"/>
+          </a:xfrm>
+          <a:prstGeom prst="rect">
+            <a:avLst/>
+          </a:prstGeom>
+          <a:noFill/>
+        </p:spPr>
+        <p:txBody>
+          <a:bodyPr wrap="square" lIns="0" rIns="0" tIns="0" bIns="0" anchor="t">
+            <a:normAutofit/>
+          </a:bodyPr>
+          <a:lstStyle/>
+          <a:p>
+            <a:pPr algn="l">
+              <a:lnSpc>
+                <a:spcPct val="100000"/>
+              </a:lnSpc>
+              <a:spcAft>
+                <a:spcPts val="192"/>
+              </a:spcAft>
+              <a:defRPr sz="1600" b="1">
+                <a:solidFill>
+                  <a:srgbClr val="17324D"/>
+                </a:solidFill>
+                <a:latin typeface="Arial"/>
+              </a:defRPr>
+            </a:pPr>
+            <a:r>
+              <a:t>El método se vigila solo</a:t>
+            </a:r>
+          </a:p>
+        </p:txBody>
+      </p:sp>
+      <p:sp>
+        <p:nvSpPr>
+          <p:cNvPr id="24" name="TextBox 23"/>
+          <p:cNvSpPr txBox="1"/>
+          <p:nvPr/>
+        </p:nvSpPr>
+        <p:spPr>
+          <a:xfrm>
+            <a:off x="1499616" y="4645152"/>
+            <a:ext cx="4206240" cy="731520"/>
+          </a:xfrm>
+          <a:prstGeom prst="rect">
+            <a:avLst/>
+          </a:prstGeom>
+          <a:noFill/>
+        </p:spPr>
+        <p:txBody>
+          <a:bodyPr wrap="square" lIns="0" rIns="0" tIns="0" bIns="0" anchor="t">
+            <a:normAutofit/>
+          </a:bodyPr>
+          <a:lstStyle/>
+          <a:p>
+            <a:pPr algn="l">
+              <a:lnSpc>
+                <a:spcPct val="100000"/>
+              </a:lnSpc>
+              <a:spcAft>
+                <a:spcPts val="126"/>
+              </a:spcAft>
+              <a:defRPr sz="1050" b="0">
+                <a:solidFill>
+                  <a:srgbClr val="3F556A"/>
+                </a:solidFill>
+                <a:latin typeface="Arial"/>
+              </a:defRPr>
+            </a:pPr>
+            <a:r>
+              <a:t>Doce controles en cada cambio impiden que se degrade en silencio. Antes dependía de que alguien se acordara de revisarlo.</a:t>
+            </a:r>
+          </a:p>
+        </p:txBody>
+      </p:sp>
+      <p:sp>
+        <p:nvSpPr>
+          <p:cNvPr id="25" name="Rounded Rectangle 24"/>
+          <p:cNvSpPr/>
+          <p:nvPr/>
+        </p:nvSpPr>
+        <p:spPr>
+          <a:xfrm>
+            <a:off x="6272784" y="3858768"/>
+            <a:ext cx="5358384" cy="1664208"/>
+          </a:xfrm>
+          <a:prstGeom prst="roundRect">
+            <a:avLst/>
+          </a:prstGeom>
+          <a:solidFill>
+            <a:srgbClr val="FFFFFF"/>
+          </a:solidFill>
+          <a:ln w="12700">
+            <a:solidFill>
+              <a:srgbClr val="D7DEE3"/>
+            </a:solidFill>
+          </a:ln>
+        </p:spPr>
+        <p:style>
+          <a:lnRef idx="1">
+            <a:schemeClr val="accent1"/>
+          </a:lnRef>
+          <a:fillRef idx="3">
+            <a:schemeClr val="accent1"/>
+          </a:fillRef>
+          <a:effectRef idx="2">
+            <a:schemeClr val="accent1"/>
+          </a:effectRef>
+          <a:fontRef idx="minor">
+            <a:schemeClr val="lt1"/>
+          </a:fontRef>
+        </p:style>
+        <p:txBody>
+          <a:bodyPr rtlCol="0" anchor="ctr"/>
+          <a:lstStyle/>
+          <a:p>
+            <a:pPr algn="ctr"/>
+          </a:p>
+        </p:txBody>
+      </p:sp>
+      <p:sp>
+        <p:nvSpPr>
+          <p:cNvPr id="26" name="Rectangle 25"/>
+          <p:cNvSpPr/>
+          <p:nvPr/>
+        </p:nvSpPr>
+        <p:spPr>
+          <a:xfrm>
+            <a:off x="6272784" y="3858768"/>
+            <a:ext cx="73152" cy="1664208"/>
+          </a:xfrm>
+          <a:prstGeom prst="rect">
+            <a:avLst/>
+          </a:prstGeom>
+          <a:solidFill>
+            <a:srgbClr val="16A9C7"/>
+          </a:solidFill>
+          <a:ln w="12700">
+            <a:solidFill>
+              <a:srgbClr val="16A9C7"/>
+            </a:solidFill>
+          </a:ln>
+        </p:spPr>
+        <p:style>
+          <a:lnRef idx="1">
+            <a:schemeClr val="accent1"/>
+          </a:lnRef>
+          <a:fillRef idx="3">
+            <a:schemeClr val="accent1"/>
+          </a:fillRef>
+          <a:effectRef idx="2">
+            <a:schemeClr val="accent1"/>
+          </a:effectRef>
+          <a:fontRef idx="minor">
+            <a:schemeClr val="lt1"/>
+          </a:fontRef>
+        </p:style>
+        <p:txBody>
+          <a:bodyPr rtlCol="0" anchor="ctr"/>
+          <a:lstStyle/>
+          <a:p>
+            <a:pPr algn="ctr"/>
+          </a:p>
+        </p:txBody>
+      </p:sp>
+      <p:sp>
+        <p:nvSpPr>
+          <p:cNvPr id="27" name="Oval 26"/>
+          <p:cNvSpPr/>
+          <p:nvPr/>
+        </p:nvSpPr>
+        <p:spPr>
+          <a:xfrm>
+            <a:off x="6583680" y="4114800"/>
+            <a:ext cx="402336" cy="402336"/>
+          </a:xfrm>
+          <a:prstGeom prst="ellipse">
+            <a:avLst/>
+          </a:prstGeom>
+          <a:solidFill>
+            <a:srgbClr val="16A9C7"/>
+          </a:solidFill>
+          <a:ln>
+            <a:solidFill>
+              <a:srgbClr val="16A9C7"/>
+            </a:solidFill>
+          </a:ln>
+        </p:spPr>
+        <p:style>
+          <a:lnRef idx="1">
+            <a:schemeClr val="accent1"/>
+          </a:lnRef>
+          <a:fillRef idx="3">
+            <a:schemeClr val="accent1"/>
+          </a:fillRef>
+          <a:effectRef idx="2">
+            <a:schemeClr val="accent1"/>
+          </a:effectRef>
+          <a:fontRef idx="minor">
+            <a:schemeClr val="lt1"/>
+          </a:fontRef>
+        </p:style>
+        <p:txBody>
+          <a:bodyPr rtlCol="0" anchor="ctr"/>
+          <a:lstStyle/>
+          <a:p>
+            <a:pPr algn="ctr"/>
+          </a:p>
+        </p:txBody>
+      </p:sp>
+      <p:sp>
+        <p:nvSpPr>
+          <p:cNvPr id="28" name="TextBox 27"/>
+          <p:cNvSpPr txBox="1"/>
+          <p:nvPr/>
+        </p:nvSpPr>
+        <p:spPr>
+          <a:xfrm>
+            <a:off x="6583680" y="4133088"/>
+            <a:ext cx="402336" cy="365760"/>
+          </a:xfrm>
+          <a:prstGeom prst="rect">
+            <a:avLst/>
+          </a:prstGeom>
+          <a:noFill/>
+        </p:spPr>
+        <p:txBody>
+          <a:bodyPr wrap="square" lIns="0" rIns="0" tIns="0" bIns="0" anchor="ctr">
+            <a:normAutofit/>
+          </a:bodyPr>
+          <a:lstStyle/>
+          <a:p>
+            <a:pPr algn="ctr">
+              <a:lnSpc>
+                <a:spcPct val="100000"/>
+              </a:lnSpc>
+              <a:spcAft>
+                <a:spcPts val="144"/>
+              </a:spcAft>
+              <a:defRPr sz="1200" b="1">
+                <a:solidFill>
+                  <a:srgbClr val="FFFFFF"/>
+                </a:solidFill>
+                <a:latin typeface="Arial"/>
+              </a:defRPr>
+            </a:pPr>
+            <a:r>
+              <a:t>4</a:t>
+            </a:r>
+          </a:p>
+        </p:txBody>
+      </p:sp>
+      <p:sp>
+        <p:nvSpPr>
+          <p:cNvPr id="29" name="TextBox 28"/>
+          <p:cNvSpPr txBox="1"/>
+          <p:nvPr/>
+        </p:nvSpPr>
+        <p:spPr>
+          <a:xfrm>
+            <a:off x="7205472" y="4114800"/>
+            <a:ext cx="4206240" cy="365760"/>
+          </a:xfrm>
+          <a:prstGeom prst="rect">
+            <a:avLst/>
+          </a:prstGeom>
+          <a:noFill/>
+        </p:spPr>
+        <p:txBody>
+          <a:bodyPr wrap="square" lIns="0" rIns="0" tIns="0" bIns="0" anchor="t">
+            <a:normAutofit/>
+          </a:bodyPr>
+          <a:lstStyle/>
+          <a:p>
+            <a:pPr algn="l">
+              <a:lnSpc>
+                <a:spcPct val="100000"/>
+              </a:lnSpc>
+              <a:spcAft>
+                <a:spcPts val="192"/>
+              </a:spcAft>
+              <a:defRPr sz="1600" b="1">
+                <a:solidFill>
+                  <a:srgbClr val="17324D"/>
+                </a:solidFill>
+                <a:latin typeface="Arial"/>
+              </a:defRPr>
+            </a:pPr>
+            <a:r>
+              <a:t>Escala sin reescribirse</a:t>
+            </a:r>
+          </a:p>
+        </p:txBody>
+      </p:sp>
+      <p:sp>
+        <p:nvSpPr>
+          <p:cNvPr id="30" name="TextBox 29"/>
+          <p:cNvSpPr txBox="1"/>
+          <p:nvPr/>
+        </p:nvSpPr>
+        <p:spPr>
+          <a:xfrm>
+            <a:off x="7205472" y="4645152"/>
+            <a:ext cx="4206240" cy="731520"/>
+          </a:xfrm>
+          <a:prstGeom prst="rect">
+            <a:avLst/>
+          </a:prstGeom>
+          <a:noFill/>
+        </p:spPr>
+        <p:txBody>
+          <a:bodyPr wrap="square" lIns="0" rIns="0" tIns="0" bIns="0" anchor="t">
+            <a:normAutofit/>
+          </a:bodyPr>
+          <a:lstStyle/>
+          <a:p>
+            <a:pPr algn="l">
+              <a:lnSpc>
+                <a:spcPct val="100000"/>
+              </a:lnSpc>
+              <a:spcAft>
+                <a:spcPts val="126"/>
+              </a:spcAft>
+              <a:defRPr sz="1050" b="0">
+                <a:solidFill>
+                  <a:srgbClr val="3F556A"/>
+                </a:solidFill>
+                <a:latin typeface="Arial"/>
+              </a:defRPr>
+            </a:pPr>
+            <a:r>
+              <a:t>Funciona con uno o con varios repositorios, con varias personas a la vez y en tres herramientas distintas de IA.</a:t>
+            </a:r>
+          </a:p>
+        </p:txBody>
+      </p:sp>
+      <p:sp>
+        <p:nvSpPr>
+          <p:cNvPr id="31" name="Rounded Rectangle 30"/>
+          <p:cNvSpPr/>
+          <p:nvPr/>
+        </p:nvSpPr>
+        <p:spPr>
+          <a:xfrm>
+            <a:off x="566928" y="5797296"/>
+            <a:ext cx="11064240" cy="548640"/>
+          </a:xfrm>
+          <a:prstGeom prst="roundRect">
+            <a:avLst/>
+          </a:prstGeom>
+          <a:solidFill>
+            <a:srgbClr val="FCE9DC"/>
+          </a:solidFill>
+          <a:ln w="12700">
+            <a:solidFill>
+              <a:srgbClr val="FCE9DC"/>
+            </a:solidFill>
+          </a:ln>
+        </p:spPr>
+        <p:style>
+          <a:lnRef idx="1">
+            <a:schemeClr val="accent1"/>
+          </a:lnRef>
+          <a:fillRef idx="3">
+            <a:schemeClr val="accent1"/>
+          </a:fillRef>
+          <a:effectRef idx="2">
+            <a:schemeClr val="accent1"/>
+          </a:effectRef>
+          <a:fontRef idx="minor">
+            <a:schemeClr val="lt1"/>
+          </a:fontRef>
+        </p:style>
+        <p:txBody>
+          <a:bodyPr rtlCol="0" anchor="ctr"/>
+          <a:lstStyle/>
+          <a:p>
+            <a:pPr algn="ctr"/>
+          </a:p>
+        </p:txBody>
+      </p:sp>
+      <p:sp>
+        <p:nvSpPr>
+          <p:cNvPr id="32" name="TextBox 31"/>
+          <p:cNvSpPr txBox="1"/>
+          <p:nvPr/>
+        </p:nvSpPr>
+        <p:spPr>
+          <a:xfrm>
+            <a:off x="841248" y="5907024"/>
+            <a:ext cx="10515600" cy="310896"/>
+          </a:xfrm>
+          <a:prstGeom prst="rect">
+            <a:avLst/>
+          </a:prstGeom>
+          <a:noFill/>
+        </p:spPr>
+        <p:txBody>
+          <a:bodyPr wrap="square" lIns="0" rIns="0" tIns="0" bIns="0" anchor="ctr">
+            <a:normAutofit/>
+          </a:bodyPr>
+          <a:lstStyle/>
+          <a:p>
+            <a:pPr algn="ctr">
+              <a:lnSpc>
+                <a:spcPct val="100000"/>
+              </a:lnSpc>
+              <a:spcAft>
+                <a:spcPts val="144"/>
+              </a:spcAft>
+              <a:defRPr sz="1200" b="1">
+                <a:solidFill>
+                  <a:srgbClr val="17324D"/>
+                </a:solidFill>
+                <a:latin typeface="Arial"/>
+              </a:defRPr>
+            </a:pPr>
+            <a:r>
+              <a:t>En una línea  ·  El método sabía construir software sin desviarse de lo pedido. Ahora también sabe demostrarlo.</a:t>
+            </a:r>
+          </a:p>
+        </p:txBody>
+      </p:sp>
+      <p:sp>
+        <p:nvSpPr>
+          <p:cNvPr id="33" name="TextBox 32"/>
+          <p:cNvSpPr txBox="1"/>
+          <p:nvPr/>
+        </p:nvSpPr>
+        <p:spPr>
+          <a:xfrm>
+            <a:off x="502920" y="6528816"/>
+            <a:ext cx="8961120" cy="164592"/>
+          </a:xfrm>
+          <a:prstGeom prst="rect">
+            <a:avLst/>
+          </a:prstGeom>
+          <a:noFill/>
+        </p:spPr>
+        <p:txBody>
+          <a:bodyPr wrap="square" lIns="0" rIns="0" tIns="0" bIns="0" anchor="t">
+            <a:normAutofit/>
+          </a:bodyPr>
+          <a:lstStyle/>
+          <a:p>
+            <a:pPr algn="l">
+              <a:lnSpc>
+                <a:spcPct val="100000"/>
+              </a:lnSpc>
+              <a:spcAft>
+                <a:spcPts val="81"/>
+              </a:spcAft>
+              <a:defRPr sz="680" b="0">
+                <a:solidFill>
+                  <a:srgbClr val="71808E"/>
+                </a:solidFill>
+                <a:latin typeface="Arial"/>
+              </a:defRPr>
+            </a:pPr>
+            <a:r>
+              <a:t>El detalle, mejora a mejora, está en el informe: evolucion-native-ai.html</a:t>
+            </a:r>
+          </a:p>
+        </p:txBody>
+      </p:sp>
+      <p:sp>
+        <p:nvSpPr>
+          <p:cNvPr id="34" name="TextBox 33"/>
+          <p:cNvSpPr txBox="1"/>
+          <p:nvPr/>
+        </p:nvSpPr>
+        <p:spPr>
+          <a:xfrm>
+            <a:off x="10744200" y="6492240"/>
+            <a:ext cx="914400" cy="201168"/>
+          </a:xfrm>
+          <a:prstGeom prst="rect">
+            <a:avLst/>
+          </a:prstGeom>
+          <a:noFill/>
+        </p:spPr>
+        <p:txBody>
+          <a:bodyPr wrap="square" lIns="0" rIns="0" tIns="0" bIns="0" anchor="t">
+            <a:normAutofit/>
+          </a:bodyPr>
+          <a:lstStyle/>
+          <a:p>
+            <a:pPr algn="r">
+              <a:lnSpc>
+                <a:spcPct val="100000"/>
+              </a:lnSpc>
+              <a:spcAft>
+                <a:spcPts val="86"/>
+              </a:spcAft>
+              <a:defRPr sz="720" b="1">
+                <a:solidFill>
+                  <a:srgbClr val="71808E"/>
+                </a:solidFill>
+                <a:latin typeface="Arial"/>
+              </a:defRPr>
+            </a:pPr>
+            <a:r>
+              <a:t>05 / 06</a:t>
+            </a:r>
+          </a:p>
+        </p:txBody>
+      </p:sp>
+    </p:spTree>
+  </p:cSld>
+  <p:clrMapOvr>
+    <a:masterClrMapping/>
+  </p:clrMapOvr>
+</p:sld>
+</file>
+
+<file path=ppt/slides/slide6.xml><?xml version="1.0" encoding="utf-8"?>
+<p:sld xmlns:a="http://schemas.openxmlformats.org/drawingml/2006/main" xmlns:p="http://schemas.openxmlformats.org/presentationml/2006/main" xmlns:r="http://schemas.openxmlformats.org/officeDocument/2006/relationships">
+  <p:cSld>
+    <p:spTree>
+      <p:nvGrpSpPr>
+        <p:cNvPr id="1" name=""/>
+        <p:cNvGrpSpPr/>
+        <p:nvPr/>
+      </p:nvGrpSpPr>
+      <p:grpSpPr/>
+      <p:sp>
+        <p:nvSpPr>
+          <p:cNvPr id="2" name="Rectangle 1"/>
+          <p:cNvSpPr/>
+          <p:nvPr/>
+        </p:nvSpPr>
+        <p:spPr>
+          <a:xfrm>
+            <a:off x="0" y="0"/>
+            <a:ext cx="12191695" cy="6858000"/>
+          </a:xfrm>
+          <a:prstGeom prst="rect">
+            <a:avLst/>
+          </a:prstGeom>
+          <a:solidFill>
+            <a:srgbClr val="F6F4EF"/>
+          </a:solidFill>
+          <a:ln w="12700">
+            <a:solidFill>
+              <a:srgbClr val="F6F4EF"/>
+            </a:solidFill>
+          </a:ln>
+        </p:spPr>
+        <p:style>
+          <a:lnRef idx="1">
+            <a:schemeClr val="accent1"/>
+          </a:lnRef>
+          <a:fillRef idx="3">
+            <a:schemeClr val="accent1"/>
+          </a:fillRef>
+          <a:effectRef idx="2">
+            <a:schemeClr val="accent1"/>
+          </a:effectRef>
+          <a:fontRef idx="minor">
+            <a:schemeClr val="lt1"/>
+          </a:fontRef>
+        </p:style>
+        <p:txBody>
+          <a:bodyPr rtlCol="0" anchor="ctr"/>
+          <a:lstStyle/>
+          <a:p>
+            <a:pPr algn="ctr"/>
+          </a:p>
+        </p:txBody>
+      </p:sp>
+      <p:sp>
+        <p:nvSpPr>
+          <p:cNvPr id="3" name="TextBox 2"/>
+          <p:cNvSpPr txBox="1"/>
+          <p:nvPr/>
+        </p:nvSpPr>
+        <p:spPr>
+          <a:xfrm>
+            <a:off x="502920" y="274320"/>
+            <a:ext cx="2926080" cy="228600"/>
           </a:xfrm>
           <a:prstGeom prst="rect">
             <a:avLst/>
@@ -10025,6 +11568,265 @@
               </a:spcAft>
               <a:defRPr sz="900" b="1">
                 <a:solidFill>
+                  <a:srgbClr val="0072BC"/>
+                </a:solidFill>
+                <a:latin typeface="Arial"/>
+              </a:defRPr>
+            </a:pPr>
+            <a:r>
+              <a:t>DÓNDE ESTAMOS</a:t>
+            </a:r>
+          </a:p>
+        </p:txBody>
+      </p:sp>
+      <p:sp>
+        <p:nvSpPr>
+          <p:cNvPr id="4" name="TextBox 3"/>
+          <p:cNvSpPr txBox="1"/>
+          <p:nvPr/>
+        </p:nvSpPr>
+        <p:spPr>
+          <a:xfrm>
+            <a:off x="502920" y="658368"/>
+            <a:ext cx="11064240" cy="530352"/>
+          </a:xfrm>
+          <a:prstGeom prst="rect">
+            <a:avLst/>
+          </a:prstGeom>
+          <a:noFill/>
+        </p:spPr>
+        <p:txBody>
+          <a:bodyPr wrap="square" lIns="0" rIns="0" tIns="0" bIns="0" anchor="t">
+            <a:normAutofit/>
+          </a:bodyPr>
+          <a:lstStyle/>
+          <a:p>
+            <a:pPr algn="l">
+              <a:lnSpc>
+                <a:spcPct val="100000"/>
+              </a:lnSpc>
+              <a:spcAft>
+                <a:spcPts val="300"/>
+              </a:spcAft>
+              <a:defRPr sz="2500" b="1">
+                <a:solidFill>
+                  <a:srgbClr val="17324D"/>
+                </a:solidFill>
+                <a:latin typeface="Arial"/>
+              </a:defRPr>
+            </a:pPr>
+            <a:r>
+              <a:t>Está en uso, se instala en un comando y sigue creciendo</a:t>
+            </a:r>
+          </a:p>
+        </p:txBody>
+      </p:sp>
+      <p:sp>
+        <p:nvSpPr>
+          <p:cNvPr id="5" name="TextBox 4"/>
+          <p:cNvSpPr txBox="1"/>
+          <p:nvPr/>
+        </p:nvSpPr>
+        <p:spPr>
+          <a:xfrm>
+            <a:off x="502920" y="1170432"/>
+            <a:ext cx="10972800" cy="411480"/>
+          </a:xfrm>
+          <a:prstGeom prst="rect">
+            <a:avLst/>
+          </a:prstGeom>
+          <a:noFill/>
+        </p:spPr>
+        <p:txBody>
+          <a:bodyPr wrap="square" lIns="0" rIns="0" tIns="0" bIns="0" anchor="t">
+            <a:normAutofit/>
+          </a:bodyPr>
+          <a:lstStyle/>
+          <a:p>
+            <a:pPr algn="l">
+              <a:lnSpc>
+                <a:spcPct val="100000"/>
+              </a:lnSpc>
+              <a:spcAft>
+                <a:spcPts val="126"/>
+              </a:spcAft>
+              <a:defRPr sz="1050" b="0">
+                <a:solidFill>
+                  <a:srgbClr val="3F556A"/>
+                </a:solidFill>
+                <a:latin typeface="Arial"/>
+              </a:defRPr>
+            </a:pPr>
+            <a:r>
+              <a:t>No es un piloto ni una prueba de concepto: está publicado, versionado y funcionando en proyecto.</a:t>
+            </a:r>
+          </a:p>
+        </p:txBody>
+      </p:sp>
+      <p:sp>
+        <p:nvSpPr>
+          <p:cNvPr id="6" name="Rectangle 5"/>
+          <p:cNvSpPr/>
+          <p:nvPr/>
+        </p:nvSpPr>
+        <p:spPr>
+          <a:xfrm>
+            <a:off x="502920" y="1627632"/>
+            <a:ext cx="11183111" cy="1828"/>
+          </a:xfrm>
+          <a:prstGeom prst="rect">
+            <a:avLst/>
+          </a:prstGeom>
+          <a:solidFill>
+            <a:srgbClr val="D7DEE3"/>
+          </a:solidFill>
+          <a:ln>
+            <a:noFill/>
+          </a:ln>
+        </p:spPr>
+        <p:style>
+          <a:lnRef idx="1">
+            <a:schemeClr val="accent1"/>
+          </a:lnRef>
+          <a:fillRef idx="3">
+            <a:schemeClr val="accent1"/>
+          </a:fillRef>
+          <a:effectRef idx="2">
+            <a:schemeClr val="accent1"/>
+          </a:effectRef>
+          <a:fontRef idx="minor">
+            <a:schemeClr val="lt1"/>
+          </a:fontRef>
+        </p:style>
+        <p:txBody>
+          <a:bodyPr rtlCol="0" anchor="ctr"/>
+          <a:lstStyle/>
+          <a:p>
+            <a:pPr algn="ctr"/>
+          </a:p>
+        </p:txBody>
+      </p:sp>
+      <p:sp>
+        <p:nvSpPr>
+          <p:cNvPr id="7" name="Rounded Rectangle 6"/>
+          <p:cNvSpPr/>
+          <p:nvPr/>
+        </p:nvSpPr>
+        <p:spPr>
+          <a:xfrm>
+            <a:off x="566928" y="1956816"/>
+            <a:ext cx="3529584" cy="2048256"/>
+          </a:xfrm>
+          <a:prstGeom prst="roundRect">
+            <a:avLst/>
+          </a:prstGeom>
+          <a:solidFill>
+            <a:srgbClr val="FFFFFF"/>
+          </a:solidFill>
+          <a:ln w="12700">
+            <a:solidFill>
+              <a:srgbClr val="D7DEE3"/>
+            </a:solidFill>
+          </a:ln>
+        </p:spPr>
+        <p:style>
+          <a:lnRef idx="1">
+            <a:schemeClr val="accent1"/>
+          </a:lnRef>
+          <a:fillRef idx="3">
+            <a:schemeClr val="accent1"/>
+          </a:fillRef>
+          <a:effectRef idx="2">
+            <a:schemeClr val="accent1"/>
+          </a:effectRef>
+          <a:fontRef idx="minor">
+            <a:schemeClr val="lt1"/>
+          </a:fontRef>
+        </p:style>
+        <p:txBody>
+          <a:bodyPr rtlCol="0" anchor="ctr"/>
+          <a:lstStyle/>
+          <a:p>
+            <a:pPr algn="ctr"/>
+          </a:p>
+        </p:txBody>
+      </p:sp>
+      <p:sp>
+        <p:nvSpPr>
+          <p:cNvPr id="8" name="Rectangle 7"/>
+          <p:cNvSpPr/>
+          <p:nvPr/>
+        </p:nvSpPr>
+        <p:spPr>
+          <a:xfrm>
+            <a:off x="566928" y="1956816"/>
+            <a:ext cx="3529584" cy="73152"/>
+          </a:xfrm>
+          <a:prstGeom prst="rect">
+            <a:avLst/>
+          </a:prstGeom>
+          <a:solidFill>
+            <a:srgbClr val="008F83"/>
+          </a:solidFill>
+          <a:ln w="12700">
+            <a:solidFill>
+              <a:srgbClr val="008F83"/>
+            </a:solidFill>
+          </a:ln>
+        </p:spPr>
+        <p:style>
+          <a:lnRef idx="1">
+            <a:schemeClr val="accent1"/>
+          </a:lnRef>
+          <a:fillRef idx="3">
+            <a:schemeClr val="accent1"/>
+          </a:fillRef>
+          <a:effectRef idx="2">
+            <a:schemeClr val="accent1"/>
+          </a:effectRef>
+          <a:fontRef idx="minor">
+            <a:schemeClr val="lt1"/>
+          </a:fontRef>
+        </p:style>
+        <p:txBody>
+          <a:bodyPr rtlCol="0" anchor="ctr"/>
+          <a:lstStyle/>
+          <a:p>
+            <a:pPr algn="ctr"/>
+          </a:p>
+        </p:txBody>
+      </p:sp>
+      <p:sp>
+        <p:nvSpPr>
+          <p:cNvPr id="9" name="TextBox 8"/>
+          <p:cNvSpPr txBox="1"/>
+          <p:nvPr/>
+        </p:nvSpPr>
+        <p:spPr>
+          <a:xfrm>
+            <a:off x="822960" y="2212848"/>
+            <a:ext cx="3017520" cy="219456"/>
+          </a:xfrm>
+          <a:prstGeom prst="rect">
+            <a:avLst/>
+          </a:prstGeom>
+          <a:noFill/>
+        </p:spPr>
+        <p:txBody>
+          <a:bodyPr wrap="square" lIns="0" rIns="0" tIns="0" bIns="0" anchor="t">
+            <a:normAutofit/>
+          </a:bodyPr>
+          <a:lstStyle/>
+          <a:p>
+            <a:pPr algn="l">
+              <a:lnSpc>
+                <a:spcPct val="100000"/>
+              </a:lnSpc>
+              <a:spcAft>
+                <a:spcPts val="108"/>
+              </a:spcAft>
+              <a:defRPr sz="900" b="1">
+                <a:solidFill>
                   <a:srgbClr val="008F83"/>
                 </a:solidFill>
                 <a:latin typeface="Arial"/>
@@ -10934,7 +12736,7 @@
               </a:defRPr>
             </a:pPr>
             <a:r>
-              <a:t>05 / 05</a:t>
+              <a:t>06 / 06</a:t>
             </a:r>
           </a:p>
         </p:txBody>
